--- a/Beacon Superday-Submission/presentation/Beacon_FDE_Casestudy.pptx
+++ b/Beacon Superday-Submission/presentation/Beacon_FDE_Casestudy.pptx
@@ -23,9 +23,10 @@
     <p:sldId id="271" r:id="rId17"/>
     <p:sldId id="272" r:id="rId18"/>
     <p:sldId id="273" r:id="rId19"/>
+    <p:sldId id="274" r:id="rId20"/>
   </p:sldIdLst>
   <p:notesMasterIdLst>
-    <p:notesMasterId r:id="rId20"/>
+    <p:notesMasterId r:id="rId21"/>
   </p:notesMasterIdLst>
   <p:sldSz cx="12192000" cy="6858000"/>
   <p:notesSz cx="6858000" cy="12192000"/>
@@ -1686,7 +1687,7 @@
           <a:p>
             <a:r>
               <a:rPr lang="en-US" dirty="0"/>
-              <a:t/>
+              <a:t>Each trap was verified independently. The date format one is sneaky: a SQL-only analysis silently returns nothing by month. Received value = net receipt qty times PO unit price. Receipts carry no price, so this is value at PO price, not invoiced cost; I say that on the readout.</a:t>
             </a:r>
             <a:endParaRPr lang="en-US" dirty="0"/>
           </a:p>
@@ -1774,7 +1775,7 @@
           <a:p>
             <a:r>
               <a:rPr lang="en-US" dirty="0"/>
-              <a:t>I deliberately did not build a 0-100 vendor score. Any weighting of lateness vs price vs shortage would be my opinion dressed up as math. Instead, the table shows absolute and relative numbers side by side, with the denominators.</a:t>
+              <a:t/>
             </a:r>
             <a:endParaRPr lang="en-US" dirty="0"/>
           </a:p>
@@ -1862,7 +1863,7 @@
           <a:p>
             <a:r>
               <a:rPr lang="en-US" dirty="0"/>
-              <a:t>Questions for the call: can you commit to a standard lead time we can load into MRP? When you confirm a date you meet it 58% of the time; what drives the misses: furnace capacity, batching, or late incoming parts from us? 51% of lines arrive split; can partial lots be avoided or flagged? Language is deliberate: highest observed delivery exposure, not 'caused production delays'. The ERP has no production-impact data.</a:t>
+              <a:t>I deliberately did not build a 0-100 vendor score. Any weighting of lateness vs price vs shortage would be my opinion dressed up as math. Instead, the table shows absolute and relative numbers side by side, with the denominators.</a:t>
             </a:r>
             <a:endParaRPr lang="en-US" dirty="0"/>
           </a:p>
@@ -1950,7 +1951,7 @@
           <a:p>
             <a:r>
               <a:rPr lang="en-US" dirty="0"/>
-              <a:t>Why Apex isn't first: its delivery is fine. The issue is commercial and cumulative, and the right person is probably Lisa plus whoever owns the supply agreement. The price creep may be a legitimate alloy surcharge that never made it into the PO price; that's a question, not an accusation.</a:t>
+              <a:t>Questions for the call: can you commit to a standard lead time we can load into MRP? When you confirm a date you meet it 58% of the time; what drives the misses: furnace capacity, batching, or late incoming parts from us? 51% of lines arrive split; can partial lots be avoided or flagged? Language is deliberate: highest observed delivery exposure, not 'caused production delays'. The ERP has no production-impact data.</a:t>
             </a:r>
             <a:endParaRPr lang="en-US" dirty="0"/>
           </a:p>
@@ -2038,7 +2039,7 @@
           <a:p>
             <a:r>
               <a:rPr lang="en-US" dirty="0"/>
-              <a:t/>
+              <a:t>Why Apex isn't first: its delivery is fine. The issue is commercial and cumulative, and the right person is probably Lisa plus whoever owns the supply agreement. The price creep may be a legitimate alloy surcharge that never made it into the PO price; that's a question, not an accusation.</a:t>
             </a:r>
             <a:endParaRPr lang="en-US" dirty="0"/>
           </a:p>
@@ -2390,7 +2391,7 @@
           <a:p>
             <a:r>
               <a:rPr lang="en-US" dirty="0"/>
-              <a:t>Success metric for week 1: Lisa's reconciliation time drops from about 90 minutes, and the tool misses nothing she catches by hand. False alarms are acceptable at first; misses are not.</a:t>
+              <a:t/>
             </a:r>
             <a:endParaRPr lang="en-US" dirty="0"/>
           </a:p>
@@ -2414,6 +2415,94 @@
             <a:fld id="{F7021451-1387-4CA6-816F-3879F97B5CBC}" type="slidenum">
               <a:rPr lang="en-US"/>
               <a:t>18</a:t>
+            </a:fld>
+            <a:endParaRPr lang="en-US"/>
+          </a:p>
+        </p:txBody>
+      </p:sp>
+    </p:spTree>
+    <p:extLst>
+      <p:ext uri="{BB962C8B-B14F-4D97-AF65-F5344CB8AC3E}">
+        <p14:creationId xmlns:p14="http://schemas.microsoft.com/office/powerpoint/2010/main" val="1024086991"/>
+      </p:ext>
+    </p:extLst>
+  </p:cSld>
+  <p:clrMapOvr>
+    <a:masterClrMapping/>
+  </p:clrMapOvr>
+</p:notes>
+</file>
+
+<file path=ppt/notesSlides/notesSlide19.xml><?xml version="1.0" encoding="utf-8"?>
+<p:notes xmlns:a="http://schemas.openxmlformats.org/drawingml/2006/main" xmlns:r="http://schemas.openxmlformats.org/officeDocument/2006/relationships" xmlns:p="http://schemas.openxmlformats.org/presentationml/2006/main">
+  <p:cSld>
+    <p:spTree>
+      <p:nvGrpSpPr>
+        <p:cNvPr id="1" name=""/>
+        <p:cNvGrpSpPr/>
+        <p:nvPr/>
+      </p:nvGrpSpPr>
+      <p:grpSpPr>
+        <a:xfrm>
+          <a:off x="0" y="0"/>
+          <a:ext cx="0" cy="0"/>
+          <a:chOff x="0" y="0"/>
+          <a:chExt cx="0" cy="0"/>
+        </a:xfrm>
+      </p:grpSpPr>
+      <p:sp>
+        <p:nvSpPr>
+          <p:cNvPr id="2" name="Slide Image Placeholder 1"/>
+          <p:cNvSpPr>
+            <a:spLocks noGrp="1" noRot="1" noChangeAspect="1"/>
+          </p:cNvSpPr>
+          <p:nvPr>
+            <p:ph type="sldImg"/>
+          </p:nvPr>
+        </p:nvSpPr>
+        <p:spPr/>
+      </p:sp>
+      <p:sp>
+        <p:nvSpPr>
+          <p:cNvPr id="3" name="Notes Placeholder 2"/>
+          <p:cNvSpPr>
+            <a:spLocks noGrp="1"/>
+          </p:cNvSpPr>
+          <p:nvPr>
+            <p:ph type="body" idx="1"/>
+          </p:nvPr>
+        </p:nvSpPr>
+        <p:spPr/>
+        <p:txBody>
+          <a:bodyPr/>
+          <a:lstStyle/>
+          <a:p>
+            <a:r>
+              <a:rPr lang="en-US" dirty="0"/>
+              <a:t>Success metric for week 1: Lisa's reconciliation time drops from about 90 minutes, and the tool misses nothing she catches by hand. False alarms are acceptable at first; misses are not.</a:t>
+            </a:r>
+            <a:endParaRPr lang="en-US" dirty="0"/>
+          </a:p>
+        </p:txBody>
+      </p:sp>
+      <p:sp>
+        <p:nvSpPr>
+          <p:cNvPr id="4" name="Slide Number Placeholder 3"/>
+          <p:cNvSpPr>
+            <a:spLocks noGrp="1"/>
+          </p:cNvSpPr>
+          <p:nvPr>
+            <p:ph type="sldNum" sz="quarter" idx="10"/>
+          </p:nvPr>
+        </p:nvSpPr>
+        <p:spPr/>
+        <p:txBody>
+          <a:bodyPr/>
+          <a:lstStyle/>
+          <a:p>
+            <a:fld id="{F7021451-1387-4CA6-816F-3879F97B5CBC}" type="slidenum">
+              <a:rPr lang="en-US"/>
+              <a:t>19</a:t>
             </a:fld>
             <a:endParaRPr lang="en-US"/>
           </a:p>
@@ -3094,7 +3183,7 @@
           <a:p>
             <a:r>
               <a:rPr lang="en-US" dirty="0"/>
-              <a:t>Each trap was verified independently. The date format one is sneaky: a SQL-only analysis silently returns nothing by month. Received value = net receipt qty times PO unit price. Receipts carry no price, so this is value at PO price, not invoiced cost; I say that on the readout.</a:t>
+              <a:t>This is the answer to past vs future. The past: the ERP tells us every part each vendor supplies, what we paid, and the real lead times; it pre-fills both forms and gives Lisa a list of $128k of old open balances to chase or short-close. The future: the vendor answers in our format, so the three hardest problems (dropped lines, week-range dates, vendor part numbers) are prevented rather than detected. Roll out to the three vendors that cost the most reading time first: Continental's scans, Ostmark's German week ranges, Heritage's part numbers.</a:t>
             </a:r>
             <a:endParaRPr lang="en-US" dirty="0"/>
           </a:p>
@@ -3748,6 +3837,84 @@
         </p:nvSpPr>
         <p:spPr>
           <a:xfrm>
+            <a:off x="548640" y="4937760"/>
+            <a:ext cx="1097280" cy="365760"/>
+          </a:xfrm>
+          <a:prstGeom prst="rect">
+            <a:avLst/>
+          </a:prstGeom>
+          <a:noFill/>
+          <a:ln/>
+        </p:spPr>
+        <p:txBody>
+          <a:bodyPr wrap="square" lIns="0" tIns="0" rIns="0" bIns="0" rtlCol="0" anchor="ctr"/>
+          <a:lstStyle/>
+          <a:p>
+            <a:pPr indent="0" marL="0">
+              <a:buNone/>
+            </a:pPr>
+            <a:r>
+              <a:rPr lang="en-US" sz="1500" b="1" dirty="0">
+                <a:solidFill>
+                  <a:srgbClr val="D9622B"/>
+                </a:solidFill>
+                <a:latin typeface="Calibri" pitchFamily="34" charset="0"/>
+                <a:ea typeface="Calibri" pitchFamily="34" charset="-122"/>
+                <a:cs typeface="Calibri" pitchFamily="34" charset="-120"/>
+              </a:rPr>
+              <a:t>Next</a:t>
+            </a:r>
+            <a:endParaRPr lang="en-US" sz="1500" dirty="0"/>
+          </a:p>
+        </p:txBody>
+      </p:sp>
+      <p:sp>
+        <p:nvSpPr>
+          <p:cNvPr id="10" name="Text 8"/>
+          <p:cNvSpPr txBox="1"/>
+          <p:nvPr/>
+        </p:nvSpPr>
+        <p:spPr>
+          <a:xfrm>
+            <a:off x="1645920" y="4937760"/>
+            <a:ext cx="9601200" cy="365760"/>
+          </a:xfrm>
+          <a:prstGeom prst="rect">
+            <a:avLst/>
+          </a:prstGeom>
+          <a:noFill/>
+          <a:ln/>
+        </p:spPr>
+        <p:txBody>
+          <a:bodyPr wrap="square" lIns="0" tIns="0" rIns="0" bIns="0" rtlCol="0" anchor="ctr"/>
+          <a:lstStyle/>
+          <a:p>
+            <a:pPr indent="0" marL="0">
+              <a:buNone/>
+            </a:pPr>
+            <a:r>
+              <a:rPr lang="en-US" sz="1500" dirty="0">
+                <a:solidFill>
+                  <a:srgbClr val="FFFFFF"/>
+                </a:solidFill>
+                <a:latin typeface="Calibri" pitchFamily="34" charset="0"/>
+                <a:ea typeface="Calibri" pitchFamily="34" charset="-122"/>
+                <a:cs typeface="Calibri" pitchFamily="34" charset="-120"/>
+              </a:rPr>
+              <a:t>Vendor forms: Beacon's own acknowledgment form and supplier pack, pre-filled from the ERP</a:t>
+            </a:r>
+            <a:endParaRPr lang="en-US" sz="1500" dirty="0"/>
+          </a:p>
+        </p:txBody>
+      </p:sp>
+      <p:sp>
+        <p:nvSpPr>
+          <p:cNvPr id="11" name="Text 9"/>
+          <p:cNvSpPr txBox="1"/>
+          <p:nvPr/>
+        </p:nvSpPr>
+        <p:spPr>
+          <a:xfrm>
             <a:off x="548640" y="5760720"/>
             <a:ext cx="8229600" cy="365760"/>
           </a:xfrm>
@@ -3844,7 +4011,7 @@
                 <a:ea typeface="Calibri" pitchFamily="34" charset="-122"/>
                 <a:cs typeface="Calibri" pitchFamily="34" charset="-120"/>
               </a:rPr>
-              <a:t>TASK 2 · RECEIVED VALUE BY MONTH</a:t>
+              <a:t>TASK 2 · DATA BEFORE METRICS</a:t>
             </a:r>
             <a:endParaRPr lang="en-US" sz="1200" dirty="0"/>
           </a:p>
@@ -3883,7 +4050,7 @@
                 <a:ea typeface="Cambria" pitchFamily="34" charset="-122"/>
                 <a:cs typeface="Cambria" pitchFamily="34" charset="-120"/>
               </a:rPr>
-              <a:t>$28.2M received in 8 months, 85% of it from Apex</a:t>
+              <a:t>The ERP extract looks clean but isn't: 8 traps found first</a:t>
             </a:r>
             <a:endParaRPr lang="en-US" sz="2400" dirty="0"/>
           </a:p>
@@ -3928,15 +4095,341 @@
           </a:p>
         </p:txBody>
       </p:sp>
+      <p:sp>
+        <p:nvSpPr>
+          <p:cNvPr id="5" name="Text 3"/>
+          <p:cNvSpPr txBox="1"/>
+          <p:nvPr/>
+        </p:nvSpPr>
+        <p:spPr>
+          <a:xfrm>
+            <a:off x="548640" y="1508760"/>
+            <a:ext cx="6035040" cy="4663440"/>
+          </a:xfrm>
+          <a:prstGeom prst="rect">
+            <a:avLst/>
+          </a:prstGeom>
+          <a:noFill/>
+          <a:ln/>
+        </p:spPr>
+        <p:txBody>
+          <a:bodyPr wrap="square" lIns="635" tIns="635" rIns="635" bIns="635" rtlCol="0" anchor="t"/>
+          <a:lstStyle/>
+          <a:p>
+            <a:pPr marL="342900" indent="-342900">
+              <a:spcAft>
+                <a:spcPts val="600"/>
+              </a:spcAft>
+              <a:buSzPct val="100000"/>
+              <a:buChar char="•"/>
+            </a:pPr>
+            <a:r>
+              <a:rPr lang="en-US" sz="1400" b="1" dirty="0">
+                <a:solidFill>
+                  <a:srgbClr val="1F2A33"/>
+                </a:solidFill>
+                <a:latin typeface="Calibri" pitchFamily="34" charset="0"/>
+                <a:ea typeface="Calibri" pitchFamily="34" charset="-122"/>
+                <a:cs typeface="Calibri" pitchFamily="34" charset="-120"/>
+              </a:rPr>
+              <a:t>Receipt dates are MM/DD/YYYY text: </a:t>
+            </a:r>
+            <a:pPr indent="0" marL="0">
+              <a:spcAft>
+                <a:spcPts val="600"/>
+              </a:spcAft>
+              <a:buNone/>
+            </a:pPr>
+            <a:r>
+              <a:rPr lang="en-US" sz="1400" dirty="0">
+                <a:solidFill>
+                  <a:srgbClr val="1F2A33"/>
+                </a:solidFill>
+                <a:latin typeface="Calibri" pitchFamily="34" charset="0"/>
+                <a:ea typeface="Calibri" pitchFamily="34" charset="-122"/>
+                <a:cs typeface="Calibri" pitchFamily="34" charset="-120"/>
+              </a:rPr>
+              <a:t>SQLite date() returns NULL on every row.</a:t>
+            </a:r>
+            <a:endParaRPr lang="en-US" sz="1400" dirty="0"/>
+          </a:p>
+          <a:p>
+            <a:pPr marL="342900" indent="-342900">
+              <a:spcAft>
+                <a:spcPts val="600"/>
+              </a:spcAft>
+              <a:buSzPct val="100000"/>
+              <a:buChar char="•"/>
+            </a:pPr>
+            <a:r>
+              <a:rPr lang="en-US" sz="1400" b="1" dirty="0">
+                <a:solidFill>
+                  <a:srgbClr val="1F2A33"/>
+                </a:solidFill>
+                <a:latin typeface="Calibri" pitchFamily="34" charset="0"/>
+                <a:ea typeface="Calibri" pitchFamily="34" charset="-122"/>
+                <a:cs typeface="Calibri" pitchFamily="34" charset="-120"/>
+              </a:rPr>
+              <a:t>50 reversal pairs </a:t>
+            </a:r>
+            <a:pPr indent="0" marL="0">
+              <a:spcAft>
+                <a:spcPts val="600"/>
+              </a:spcAft>
+              <a:buNone/>
+            </a:pPr>
+            <a:r>
+              <a:rPr lang="en-US" sz="1400" dirty="0">
+                <a:solidFill>
+                  <a:srgbClr val="1F2A33"/>
+                </a:solidFill>
+                <a:latin typeface="Calibri" pitchFamily="34" charset="0"/>
+                <a:ea typeface="Calibri" pitchFamily="34" charset="-122"/>
+                <a:cs typeface="Calibri" pitchFamily="34" charset="-120"/>
+              </a:rPr>
+              <a:t>(keyed in error, then reversed) plus 1 unreversed duplicate (txn 701546).</a:t>
+            </a:r>
+            <a:endParaRPr lang="en-US" sz="1400" dirty="0"/>
+          </a:p>
+          <a:p>
+            <a:pPr marL="342900" indent="-342900">
+              <a:spcAft>
+                <a:spcPts val="600"/>
+              </a:spcAft>
+              <a:buSzPct val="100000"/>
+              <a:buChar char="•"/>
+            </a:pPr>
+            <a:r>
+              <a:rPr lang="en-US" sz="1400" b="1" dirty="0">
+                <a:solidFill>
+                  <a:srgbClr val="1F2A33"/>
+                </a:solidFill>
+                <a:latin typeface="Calibri" pitchFamily="34" charset="0"/>
+                <a:ea typeface="Calibri" pitchFamily="34" charset="-122"/>
+                <a:cs typeface="Calibri" pitchFamily="34" charset="-120"/>
+              </a:rPr>
+              <a:t>po_line.qty_received is wrong </a:t>
+            </a:r>
+            <a:pPr indent="0" marL="0">
+              <a:spcAft>
+                <a:spcPts val="600"/>
+              </a:spcAft>
+              <a:buNone/>
+            </a:pPr>
+            <a:r>
+              <a:rPr lang="en-US" sz="1400" dirty="0">
+                <a:solidFill>
+                  <a:srgbClr val="1F2A33"/>
+                </a:solidFill>
+                <a:latin typeface="Calibri" pitchFamily="34" charset="0"/>
+                <a:ea typeface="Calibri" pitchFamily="34" charset="-122"/>
+                <a:cs typeface="Calibri" pitchFamily="34" charset="-120"/>
+              </a:rPr>
+              <a:t>on 169 lines; receipts are used instead.</a:t>
+            </a:r>
+            <a:endParaRPr lang="en-US" sz="1400" dirty="0"/>
+          </a:p>
+          <a:p>
+            <a:pPr marL="342900" indent="-342900">
+              <a:spcAft>
+                <a:spcPts val="600"/>
+              </a:spcAft>
+              <a:buSzPct val="100000"/>
+              <a:buChar char="•"/>
+            </a:pPr>
+            <a:r>
+              <a:rPr lang="en-US" sz="1400" b="1" dirty="0">
+                <a:solidFill>
+                  <a:srgbClr val="1F2A33"/>
+                </a:solidFill>
+                <a:latin typeface="Calibri" pitchFamily="34" charset="0"/>
+                <a:ea typeface="Calibri" pitchFamily="34" charset="-122"/>
+                <a:cs typeface="Calibri" pitchFamily="34" charset="-120"/>
+              </a:rPr>
+              <a:t>30 superseded confirmations: </a:t>
+            </a:r>
+            <a:pPr indent="0" marL="0">
+              <a:spcAft>
+                <a:spcPts val="600"/>
+              </a:spcAft>
+              <a:buNone/>
+            </a:pPr>
+            <a:r>
+              <a:rPr lang="en-US" sz="1400" dirty="0">
+                <a:solidFill>
+                  <a:srgbClr val="1F2A33"/>
+                </a:solidFill>
+                <a:latin typeface="Calibri" pitchFamily="34" charset="0"/>
+                <a:ea typeface="Calibri" pitchFamily="34" charset="-122"/>
+                <a:cs typeface="Calibri" pitchFamily="34" charset="-120"/>
+              </a:rPr>
+              <a:t>only the latest is used.</a:t>
+            </a:r>
+            <a:endParaRPr lang="en-US" sz="1400" dirty="0"/>
+          </a:p>
+          <a:p>
+            <a:pPr marL="342900" indent="-342900">
+              <a:spcAft>
+                <a:spcPts val="600"/>
+              </a:spcAft>
+              <a:buSzPct val="100000"/>
+              <a:buChar char="•"/>
+            </a:pPr>
+            <a:r>
+              <a:rPr lang="en-US" sz="1400" b="1" dirty="0">
+                <a:solidFill>
+                  <a:srgbClr val="1F2A33"/>
+                </a:solidFill>
+                <a:latin typeface="Calibri" pitchFamily="34" charset="0"/>
+                <a:ea typeface="Calibri" pitchFamily="34" charset="-122"/>
+                <a:cs typeface="Calibri" pitchFamily="34" charset="-120"/>
+              </a:rPr>
+              <a:t>Confirmation feed stops 2026-04-03: </a:t>
+            </a:r>
+            <a:pPr indent="0" marL="0">
+              <a:spcAft>
+                <a:spcPts val="600"/>
+              </a:spcAft>
+              <a:buNone/>
+            </a:pPr>
+            <a:r>
+              <a:rPr lang="en-US" sz="1400" dirty="0">
+                <a:solidFill>
+                  <a:srgbClr val="1F2A33"/>
+                </a:solidFill>
+                <a:latin typeface="Calibri" pitchFamily="34" charset="0"/>
+                <a:ea typeface="Calibri" pitchFamily="34" charset="-122"/>
+                <a:cs typeface="Calibri" pitchFamily="34" charset="-120"/>
+              </a:rPr>
+              <a:t>promise metrics use POs to 03/30 only.</a:t>
+            </a:r>
+            <a:endParaRPr lang="en-US" sz="1400" dirty="0"/>
+          </a:p>
+          <a:p>
+            <a:pPr marL="342900" indent="-342900">
+              <a:spcAft>
+                <a:spcPts val="600"/>
+              </a:spcAft>
+              <a:buSzPct val="100000"/>
+              <a:buChar char="•"/>
+            </a:pPr>
+            <a:r>
+              <a:rPr lang="en-US" sz="1400" b="1" dirty="0">
+                <a:solidFill>
+                  <a:srgbClr val="1F2A33"/>
+                </a:solidFill>
+                <a:latin typeface="Calibri" pitchFamily="34" charset="0"/>
+                <a:ea typeface="Calibri" pitchFamily="34" charset="-122"/>
+                <a:cs typeface="Calibri" pitchFamily="34" charset="-120"/>
+              </a:rPr>
+              <a:t>Ostmark PO prices are already USD: </a:t>
+            </a:r>
+            <a:pPr indent="0" marL="0">
+              <a:spcAft>
+                <a:spcPts val="600"/>
+              </a:spcAft>
+              <a:buNone/>
+            </a:pPr>
+            <a:r>
+              <a:rPr lang="en-US" sz="1400" dirty="0">
+                <a:solidFill>
+                  <a:srgbClr val="1F2A33"/>
+                </a:solidFill>
+                <a:latin typeface="Calibri" pitchFamily="34" charset="0"/>
+                <a:ea typeface="Calibri" pitchFamily="34" charset="-122"/>
+                <a:cs typeface="Calibri" pitchFamily="34" charset="-120"/>
+              </a:rPr>
+              <a:t>converting again adds about $76k.</a:t>
+            </a:r>
+            <a:endParaRPr lang="en-US" sz="1400" dirty="0"/>
+          </a:p>
+          <a:p>
+            <a:pPr marL="342900" indent="-342900">
+              <a:spcAft>
+                <a:spcPts val="600"/>
+              </a:spcAft>
+              <a:buSzPct val="100000"/>
+              <a:buChar char="•"/>
+            </a:pPr>
+            <a:r>
+              <a:rPr lang="en-US" sz="1400" b="1" dirty="0">
+                <a:solidFill>
+                  <a:srgbClr val="1F2A33"/>
+                </a:solidFill>
+                <a:latin typeface="Calibri" pitchFamily="34" charset="0"/>
+                <a:ea typeface="Calibri" pitchFamily="34" charset="-122"/>
+                <a:cs typeface="Calibri" pitchFamily="34" charset="-120"/>
+              </a:rPr>
+              <a:t>qc_hold dates are unreliable </a:t>
+            </a:r>
+            <a:pPr indent="0" marL="0">
+              <a:spcAft>
+                <a:spcPts val="600"/>
+              </a:spcAft>
+              <a:buNone/>
+            </a:pPr>
+            <a:r>
+              <a:rPr lang="en-US" sz="1400" dirty="0">
+                <a:solidFill>
+                  <a:srgbClr val="1F2A33"/>
+                </a:solidFill>
+                <a:latin typeface="Calibri" pitchFamily="34" charset="0"/>
+                <a:ea typeface="Calibri" pitchFamily="34" charset="-122"/>
+                <a:cs typeface="Calibri" pitchFamily="34" charset="-120"/>
+              </a:rPr>
+              <a:t>(16 before the PO existed): shown as counts only.</a:t>
+            </a:r>
+            <a:endParaRPr lang="en-US" sz="1400" dirty="0"/>
+          </a:p>
+          <a:p>
+            <a:pPr marL="342900" indent="-342900">
+              <a:spcAft>
+                <a:spcPts val="600"/>
+              </a:spcAft>
+              <a:buSzPct val="100000"/>
+              <a:buChar char="•"/>
+            </a:pPr>
+            <a:r>
+              <a:rPr lang="en-US" sz="1400" b="1" dirty="0">
+                <a:solidFill>
+                  <a:srgbClr val="1F2A33"/>
+                </a:solidFill>
+                <a:latin typeface="Calibri" pitchFamily="34" charset="0"/>
+                <a:ea typeface="Calibri" pitchFamily="34" charset="-122"/>
+                <a:cs typeface="Calibri" pitchFamily="34" charset="-120"/>
+              </a:rPr>
+              <a:t>5 decoy tables </a:t>
+            </a:r>
+            <a:pPr indent="0" marL="0">
+              <a:spcAft>
+                <a:spcPts val="600"/>
+              </a:spcAft>
+              <a:buNone/>
+            </a:pPr>
+            <a:r>
+              <a:rPr lang="en-US" sz="1400" dirty="0">
+                <a:solidFill>
+                  <a:srgbClr val="1F2A33"/>
+                </a:solidFill>
+                <a:latin typeface="Calibri" pitchFamily="34" charset="0"/>
+                <a:ea typeface="Calibri" pitchFamily="34" charset="-122"/>
+                <a:cs typeface="Calibri" pitchFamily="34" charset="-120"/>
+              </a:rPr>
+              <a:t>with no link to vendor performance (GL, MRP, users, …).</a:t>
+            </a:r>
+            <a:endParaRPr lang="en-US" sz="1400" dirty="0"/>
+          </a:p>
+        </p:txBody>
+      </p:sp>
       <p:graphicFrame>
         <p:nvGraphicFramePr>
-          <p:cNvPr id="5" name="Chart 0" descr=""/>
+          <p:cNvPr id="6" name="Chart 0" descr=""/>
           <p:cNvGraphicFramePr/>
           <p:nvPr/>
         </p:nvGraphicFramePr>
         <p:xfrm>
-          <a:off x="548640" y="1463040"/>
-          <a:ext cx="7863840" cy="4663440"/>
+          <a:off x="6858000" y="1463040"/>
+          <a:ext cx="4785055" cy="3931920"/>
         </p:xfrm>
         <a:graphic xmlns:a="http://schemas.openxmlformats.org/drawingml/2006/main">
           <a:graphicData uri="http://schemas.openxmlformats.org/drawingml/2006/chart">
@@ -3946,14 +4439,14 @@
       </p:graphicFrame>
       <p:sp>
         <p:nvSpPr>
-          <p:cNvPr id="6" name="Text 3"/>
+          <p:cNvPr id="7" name="Text 4"/>
           <p:cNvSpPr txBox="1"/>
           <p:nvPr/>
         </p:nvSpPr>
         <p:spPr>
           <a:xfrm>
-            <a:off x="8778240" y="1645920"/>
-            <a:ext cx="2864815" cy="594360"/>
+            <a:off x="6858000" y="5486400"/>
+            <a:ext cx="4785055" cy="731520"/>
           </a:xfrm>
           <a:prstGeom prst="rect">
             <a:avLst/>
@@ -3969,46 +4462,7 @@
               <a:buNone/>
             </a:pPr>
             <a:r>
-              <a:rPr lang="en-US" sz="3600" b="1" dirty="0">
-                <a:solidFill>
-                  <a:srgbClr val="1F2A33"/>
-                </a:solidFill>
-                <a:latin typeface="Cambria" pitchFamily="34" charset="0"/>
-                <a:ea typeface="Cambria" pitchFamily="34" charset="-122"/>
-                <a:cs typeface="Cambria" pitchFamily="34" charset="-120"/>
-              </a:rPr>
-              <a:t>$28.19M</a:t>
-            </a:r>
-            <a:endParaRPr lang="en-US" sz="3600" dirty="0"/>
-          </a:p>
-        </p:txBody>
-      </p:sp>
-      <p:sp>
-        <p:nvSpPr>
-          <p:cNvPr id="7" name="Text 4"/>
-          <p:cNvSpPr txBox="1"/>
-          <p:nvPr/>
-        </p:nvSpPr>
-        <p:spPr>
-          <a:xfrm>
-            <a:off x="8778240" y="2249424"/>
-            <a:ext cx="2681935" cy="502920"/>
-          </a:xfrm>
-          <a:prstGeom prst="rect">
-            <a:avLst/>
-          </a:prstGeom>
-          <a:noFill/>
-          <a:ln/>
-        </p:spPr>
-        <p:txBody>
-          <a:bodyPr wrap="square" lIns="0" tIns="0" rIns="0" bIns="0" rtlCol="0" anchor="t"/>
-          <a:lstStyle/>
-          <a:p>
-            <a:pPr indent="0" marL="0">
-              <a:buNone/>
-            </a:pPr>
-            <a:r>
-              <a:rPr lang="en-US" sz="1200" dirty="0">
+              <a:rPr lang="en-US" sz="1300" i="1" dirty="0">
                 <a:solidFill>
                   <a:srgbClr val="4E5D6A"/>
                 </a:solidFill>
@@ -4016,204 +4470,9 @@
                 <a:ea typeface="Calibri" pitchFamily="34" charset="-122"/>
                 <a:cs typeface="Calibri" pitchFamily="34" charset="-120"/>
               </a:rPr>
-              <a:t>received value, 09/06/2025 to 05/17/2026</a:t>
-            </a:r>
-            <a:endParaRPr lang="en-US" sz="1200" dirty="0"/>
-          </a:p>
-        </p:txBody>
-      </p:sp>
-      <p:sp>
-        <p:nvSpPr>
-          <p:cNvPr id="8" name="Text 5"/>
-          <p:cNvSpPr txBox="1"/>
-          <p:nvPr/>
-        </p:nvSpPr>
-        <p:spPr>
-          <a:xfrm>
-            <a:off x="8778240" y="2743200"/>
-            <a:ext cx="2864815" cy="594360"/>
-          </a:xfrm>
-          <a:prstGeom prst="rect">
-            <a:avLst/>
-          </a:prstGeom>
-          <a:noFill/>
-          <a:ln/>
-        </p:spPr>
-        <p:txBody>
-          <a:bodyPr wrap="square" lIns="0" tIns="0" rIns="0" bIns="0" rtlCol="0" anchor="ctr"/>
-          <a:lstStyle/>
-          <a:p>
-            <a:pPr indent="0" marL="0">
-              <a:buNone/>
-            </a:pPr>
-            <a:r>
-              <a:rPr lang="en-US" sz="3600" b="1" dirty="0">
-                <a:solidFill>
-                  <a:srgbClr val="1F2A33"/>
-                </a:solidFill>
-                <a:latin typeface="Cambria" pitchFamily="34" charset="0"/>
-                <a:ea typeface="Cambria" pitchFamily="34" charset="-122"/>
-                <a:cs typeface="Cambria" pitchFamily="34" charset="-120"/>
-              </a:rPr>
-              <a:t>85%</a:t>
-            </a:r>
-            <a:endParaRPr lang="en-US" sz="3600" dirty="0"/>
-          </a:p>
-        </p:txBody>
-      </p:sp>
-      <p:sp>
-        <p:nvSpPr>
-          <p:cNvPr id="9" name="Text 6"/>
-          <p:cNvSpPr txBox="1"/>
-          <p:nvPr/>
-        </p:nvSpPr>
-        <p:spPr>
-          <a:xfrm>
-            <a:off x="8778240" y="3346704"/>
-            <a:ext cx="2681935" cy="502920"/>
-          </a:xfrm>
-          <a:prstGeom prst="rect">
-            <a:avLst/>
-          </a:prstGeom>
-          <a:noFill/>
-          <a:ln/>
-        </p:spPr>
-        <p:txBody>
-          <a:bodyPr wrap="square" lIns="0" tIns="0" rIns="0" bIns="0" rtlCol="0" anchor="t"/>
-          <a:lstStyle/>
-          <a:p>
-            <a:pPr indent="0" marL="0">
-              <a:buNone/>
-            </a:pPr>
-            <a:r>
-              <a:rPr lang="en-US" sz="1200" dirty="0">
-                <a:solidFill>
-                  <a:srgbClr val="4E5D6A"/>
-                </a:solidFill>
-                <a:latin typeface="Calibri" pitchFamily="34" charset="0"/>
-                <a:ea typeface="Calibri" pitchFamily="34" charset="-122"/>
-                <a:cs typeface="Calibri" pitchFamily="34" charset="-120"/>
-              </a:rPr>
-              <a:t>Apex Bar &amp; Tube ($23.98M): a concentration question, not only a performance one</a:t>
-            </a:r>
-            <a:endParaRPr lang="en-US" sz="1200" dirty="0"/>
-          </a:p>
-        </p:txBody>
-      </p:sp>
-      <p:sp>
-        <p:nvSpPr>
-          <p:cNvPr id="10" name="Text 7"/>
-          <p:cNvSpPr txBox="1"/>
-          <p:nvPr/>
-        </p:nvSpPr>
-        <p:spPr>
-          <a:xfrm>
-            <a:off x="8778240" y="3977640"/>
-            <a:ext cx="2864815" cy="594360"/>
-          </a:xfrm>
-          <a:prstGeom prst="rect">
-            <a:avLst/>
-          </a:prstGeom>
-          <a:noFill/>
-          <a:ln/>
-        </p:spPr>
-        <p:txBody>
-          <a:bodyPr wrap="square" lIns="0" tIns="0" rIns="0" bIns="0" rtlCol="0" anchor="ctr"/>
-          <a:lstStyle/>
-          <a:p>
-            <a:pPr indent="0" marL="0">
-              <a:buNone/>
-            </a:pPr>
-            <a:r>
-              <a:rPr lang="en-US" sz="3600" b="1" dirty="0">
-                <a:solidFill>
-                  <a:srgbClr val="1F2A33"/>
-                </a:solidFill>
-                <a:latin typeface="Cambria" pitchFamily="34" charset="0"/>
-                <a:ea typeface="Cambria" pitchFamily="34" charset="-122"/>
-                <a:cs typeface="Cambria" pitchFamily="34" charset="-120"/>
-              </a:rPr>
-              <a:t>$3.1-5.1M</a:t>
-            </a:r>
-            <a:endParaRPr lang="en-US" sz="3600" dirty="0"/>
-          </a:p>
-        </p:txBody>
-      </p:sp>
-      <p:sp>
-        <p:nvSpPr>
-          <p:cNvPr id="11" name="Text 8"/>
-          <p:cNvSpPr txBox="1"/>
-          <p:nvPr/>
-        </p:nvSpPr>
-        <p:spPr>
-          <a:xfrm>
-            <a:off x="8778240" y="4581144"/>
-            <a:ext cx="2681935" cy="502920"/>
-          </a:xfrm>
-          <a:prstGeom prst="rect">
-            <a:avLst/>
-          </a:prstGeom>
-          <a:noFill/>
-          <a:ln/>
-        </p:spPr>
-        <p:txBody>
-          <a:bodyPr wrap="square" lIns="0" tIns="0" rIns="0" bIns="0" rtlCol="0" anchor="t"/>
-          <a:lstStyle/>
-          <a:p>
-            <a:pPr indent="0" marL="0">
-              <a:buNone/>
-            </a:pPr>
-            <a:r>
-              <a:rPr lang="en-US" sz="1200" dirty="0">
-                <a:solidFill>
-                  <a:srgbClr val="4E5D6A"/>
-                </a:solidFill>
-                <a:latin typeface="Calibri" pitchFamily="34" charset="0"/>
-                <a:ea typeface="Calibri" pitchFamily="34" charset="-122"/>
-                <a:cs typeface="Calibri" pitchFamily="34" charset="-120"/>
-              </a:rPr>
-              <a:t>range across full months (Oct to Apr); no clear trend</a:t>
-            </a:r>
-            <a:endParaRPr lang="en-US" sz="1200" dirty="0"/>
-          </a:p>
-        </p:txBody>
-      </p:sp>
-      <p:sp>
-        <p:nvSpPr>
-          <p:cNvPr id="12" name="Text 9"/>
-          <p:cNvSpPr txBox="1"/>
-          <p:nvPr/>
-        </p:nvSpPr>
-        <p:spPr>
-          <a:xfrm>
-            <a:off x="8778240" y="5394960"/>
-            <a:ext cx="2864815" cy="548640"/>
-          </a:xfrm>
-          <a:prstGeom prst="rect">
-            <a:avLst/>
-          </a:prstGeom>
-          <a:noFill/>
-          <a:ln/>
-        </p:spPr>
-        <p:txBody>
-          <a:bodyPr wrap="square" lIns="0" tIns="0" rIns="0" bIns="0" rtlCol="0" anchor="ctr"/>
-          <a:lstStyle/>
-          <a:p>
-            <a:pPr indent="0" marL="0">
-              <a:buNone/>
-            </a:pPr>
-            <a:r>
-              <a:rPr lang="en-US" sz="1100" dirty="0">
-                <a:solidFill>
-                  <a:srgbClr val="7D8B97"/>
-                </a:solidFill>
-                <a:latin typeface="Calibri" pitchFamily="34" charset="0"/>
-                <a:ea typeface="Calibri" pitchFamily="34" charset="-122"/>
-                <a:cs typeface="Calibri" pitchFamily="34" charset="-120"/>
-              </a:rPr>
-              <a:t>* Sep and May are partial months. Reversals netted, 1 duplicate excluded.</a:t>
-            </a:r>
-            <a:endParaRPr lang="en-US" sz="1100" dirty="0"/>
+              <a:t>The naive answers are wrong by +$1.3M and -$2.9M. Every number in the readout says which records it counts (Definitions tab).</a:t>
+            </a:r>
+            <a:endParaRPr lang="en-US" sz="1300" dirty="0"/>
           </a:p>
         </p:txBody>
       </p:sp>
@@ -4282,7 +4541,7 @@
                 <a:ea typeface="Calibri" pitchFamily="34" charset="-122"/>
                 <a:cs typeface="Calibri" pitchFamily="34" charset="-120"/>
               </a:rPr>
-              <a:t>TASK 2 · VENDOR-BY-VENDOR</a:t>
+              <a:t>TASK 2 · RECEIVED VALUE BY MONTH</a:t>
             </a:r>
             <a:endParaRPr lang="en-US" sz="1200" dirty="0"/>
           </a:p>
@@ -4321,7 +4580,7 @@
                 <a:ea typeface="Cambria" pitchFamily="34" charset="-122"/>
                 <a:cs typeface="Cambria" pitchFamily="34" charset="-120"/>
               </a:rPr>
-              <a:t>Continental stands out on delivery; Apex on dollars</a:t>
+              <a:t>$28.2M received in 8 months, 85% of it from Apex</a:t>
             </a:r>
             <a:endParaRPr lang="en-US" sz="2400" dirty="0"/>
           </a:p>
@@ -4368,7 +4627,445 @@
       </p:sp>
       <p:graphicFrame>
         <p:nvGraphicFramePr>
-          <p:cNvPr id="12" name="Table 0"/>
+          <p:cNvPr id="5" name="Chart 0" descr=""/>
+          <p:cNvGraphicFramePr/>
+          <p:nvPr/>
+        </p:nvGraphicFramePr>
+        <p:xfrm>
+          <a:off x="548640" y="1463040"/>
+          <a:ext cx="7863840" cy="4663440"/>
+        </p:xfrm>
+        <a:graphic xmlns:a="http://schemas.openxmlformats.org/drawingml/2006/main">
+          <a:graphicData uri="http://schemas.openxmlformats.org/drawingml/2006/chart">
+            <c:chart xmlns:c="http://schemas.openxmlformats.org/drawingml/2006/chart" r:id="rId1"/>
+          </a:graphicData>
+        </a:graphic>
+      </p:graphicFrame>
+      <p:sp>
+        <p:nvSpPr>
+          <p:cNvPr id="6" name="Text 3"/>
+          <p:cNvSpPr txBox="1"/>
+          <p:nvPr/>
+        </p:nvSpPr>
+        <p:spPr>
+          <a:xfrm>
+            <a:off x="8778240" y="1645920"/>
+            <a:ext cx="2864815" cy="594360"/>
+          </a:xfrm>
+          <a:prstGeom prst="rect">
+            <a:avLst/>
+          </a:prstGeom>
+          <a:noFill/>
+          <a:ln/>
+        </p:spPr>
+        <p:txBody>
+          <a:bodyPr wrap="square" lIns="0" tIns="0" rIns="0" bIns="0" rtlCol="0" anchor="ctr"/>
+          <a:lstStyle/>
+          <a:p>
+            <a:pPr indent="0" marL="0">
+              <a:buNone/>
+            </a:pPr>
+            <a:r>
+              <a:rPr lang="en-US" sz="3600" b="1" dirty="0">
+                <a:solidFill>
+                  <a:srgbClr val="1F2A33"/>
+                </a:solidFill>
+                <a:latin typeface="Cambria" pitchFamily="34" charset="0"/>
+                <a:ea typeface="Cambria" pitchFamily="34" charset="-122"/>
+                <a:cs typeface="Cambria" pitchFamily="34" charset="-120"/>
+              </a:rPr>
+              <a:t>$28.19M</a:t>
+            </a:r>
+            <a:endParaRPr lang="en-US" sz="3600" dirty="0"/>
+          </a:p>
+        </p:txBody>
+      </p:sp>
+      <p:sp>
+        <p:nvSpPr>
+          <p:cNvPr id="7" name="Text 4"/>
+          <p:cNvSpPr txBox="1"/>
+          <p:nvPr/>
+        </p:nvSpPr>
+        <p:spPr>
+          <a:xfrm>
+            <a:off x="8778240" y="2249424"/>
+            <a:ext cx="2681935" cy="502920"/>
+          </a:xfrm>
+          <a:prstGeom prst="rect">
+            <a:avLst/>
+          </a:prstGeom>
+          <a:noFill/>
+          <a:ln/>
+        </p:spPr>
+        <p:txBody>
+          <a:bodyPr wrap="square" lIns="0" tIns="0" rIns="0" bIns="0" rtlCol="0" anchor="t"/>
+          <a:lstStyle/>
+          <a:p>
+            <a:pPr indent="0" marL="0">
+              <a:buNone/>
+            </a:pPr>
+            <a:r>
+              <a:rPr lang="en-US" sz="1200" dirty="0">
+                <a:solidFill>
+                  <a:srgbClr val="4E5D6A"/>
+                </a:solidFill>
+                <a:latin typeface="Calibri" pitchFamily="34" charset="0"/>
+                <a:ea typeface="Calibri" pitchFamily="34" charset="-122"/>
+                <a:cs typeface="Calibri" pitchFamily="34" charset="-120"/>
+              </a:rPr>
+              <a:t>received value, 09/06/2025 to 05/17/2026</a:t>
+            </a:r>
+            <a:endParaRPr lang="en-US" sz="1200" dirty="0"/>
+          </a:p>
+        </p:txBody>
+      </p:sp>
+      <p:sp>
+        <p:nvSpPr>
+          <p:cNvPr id="8" name="Text 5"/>
+          <p:cNvSpPr txBox="1"/>
+          <p:nvPr/>
+        </p:nvSpPr>
+        <p:spPr>
+          <a:xfrm>
+            <a:off x="8778240" y="2743200"/>
+            <a:ext cx="2864815" cy="594360"/>
+          </a:xfrm>
+          <a:prstGeom prst="rect">
+            <a:avLst/>
+          </a:prstGeom>
+          <a:noFill/>
+          <a:ln/>
+        </p:spPr>
+        <p:txBody>
+          <a:bodyPr wrap="square" lIns="0" tIns="0" rIns="0" bIns="0" rtlCol="0" anchor="ctr"/>
+          <a:lstStyle/>
+          <a:p>
+            <a:pPr indent="0" marL="0">
+              <a:buNone/>
+            </a:pPr>
+            <a:r>
+              <a:rPr lang="en-US" sz="3600" b="1" dirty="0">
+                <a:solidFill>
+                  <a:srgbClr val="1F2A33"/>
+                </a:solidFill>
+                <a:latin typeface="Cambria" pitchFamily="34" charset="0"/>
+                <a:ea typeface="Cambria" pitchFamily="34" charset="-122"/>
+                <a:cs typeface="Cambria" pitchFamily="34" charset="-120"/>
+              </a:rPr>
+              <a:t>85%</a:t>
+            </a:r>
+            <a:endParaRPr lang="en-US" sz="3600" dirty="0"/>
+          </a:p>
+        </p:txBody>
+      </p:sp>
+      <p:sp>
+        <p:nvSpPr>
+          <p:cNvPr id="9" name="Text 6"/>
+          <p:cNvSpPr txBox="1"/>
+          <p:nvPr/>
+        </p:nvSpPr>
+        <p:spPr>
+          <a:xfrm>
+            <a:off x="8778240" y="3346704"/>
+            <a:ext cx="2681935" cy="502920"/>
+          </a:xfrm>
+          <a:prstGeom prst="rect">
+            <a:avLst/>
+          </a:prstGeom>
+          <a:noFill/>
+          <a:ln/>
+        </p:spPr>
+        <p:txBody>
+          <a:bodyPr wrap="square" lIns="0" tIns="0" rIns="0" bIns="0" rtlCol="0" anchor="t"/>
+          <a:lstStyle/>
+          <a:p>
+            <a:pPr indent="0" marL="0">
+              <a:buNone/>
+            </a:pPr>
+            <a:r>
+              <a:rPr lang="en-US" sz="1200" dirty="0">
+                <a:solidFill>
+                  <a:srgbClr val="4E5D6A"/>
+                </a:solidFill>
+                <a:latin typeface="Calibri" pitchFamily="34" charset="0"/>
+                <a:ea typeface="Calibri" pitchFamily="34" charset="-122"/>
+                <a:cs typeface="Calibri" pitchFamily="34" charset="-120"/>
+              </a:rPr>
+              <a:t>Apex Bar &amp; Tube ($23.98M): a concentration question, not only a performance one</a:t>
+            </a:r>
+            <a:endParaRPr lang="en-US" sz="1200" dirty="0"/>
+          </a:p>
+        </p:txBody>
+      </p:sp>
+      <p:sp>
+        <p:nvSpPr>
+          <p:cNvPr id="10" name="Text 7"/>
+          <p:cNvSpPr txBox="1"/>
+          <p:nvPr/>
+        </p:nvSpPr>
+        <p:spPr>
+          <a:xfrm>
+            <a:off x="8778240" y="3977640"/>
+            <a:ext cx="2864815" cy="594360"/>
+          </a:xfrm>
+          <a:prstGeom prst="rect">
+            <a:avLst/>
+          </a:prstGeom>
+          <a:noFill/>
+          <a:ln/>
+        </p:spPr>
+        <p:txBody>
+          <a:bodyPr wrap="square" lIns="0" tIns="0" rIns="0" bIns="0" rtlCol="0" anchor="ctr"/>
+          <a:lstStyle/>
+          <a:p>
+            <a:pPr indent="0" marL="0">
+              <a:buNone/>
+            </a:pPr>
+            <a:r>
+              <a:rPr lang="en-US" sz="3600" b="1" dirty="0">
+                <a:solidFill>
+                  <a:srgbClr val="1F2A33"/>
+                </a:solidFill>
+                <a:latin typeface="Cambria" pitchFamily="34" charset="0"/>
+                <a:ea typeface="Cambria" pitchFamily="34" charset="-122"/>
+                <a:cs typeface="Cambria" pitchFamily="34" charset="-120"/>
+              </a:rPr>
+              <a:t>$3.1-5.1M</a:t>
+            </a:r>
+            <a:endParaRPr lang="en-US" sz="3600" dirty="0"/>
+          </a:p>
+        </p:txBody>
+      </p:sp>
+      <p:sp>
+        <p:nvSpPr>
+          <p:cNvPr id="11" name="Text 8"/>
+          <p:cNvSpPr txBox="1"/>
+          <p:nvPr/>
+        </p:nvSpPr>
+        <p:spPr>
+          <a:xfrm>
+            <a:off x="8778240" y="4581144"/>
+            <a:ext cx="2681935" cy="502920"/>
+          </a:xfrm>
+          <a:prstGeom prst="rect">
+            <a:avLst/>
+          </a:prstGeom>
+          <a:noFill/>
+          <a:ln/>
+        </p:spPr>
+        <p:txBody>
+          <a:bodyPr wrap="square" lIns="0" tIns="0" rIns="0" bIns="0" rtlCol="0" anchor="t"/>
+          <a:lstStyle/>
+          <a:p>
+            <a:pPr indent="0" marL="0">
+              <a:buNone/>
+            </a:pPr>
+            <a:r>
+              <a:rPr lang="en-US" sz="1200" dirty="0">
+                <a:solidFill>
+                  <a:srgbClr val="4E5D6A"/>
+                </a:solidFill>
+                <a:latin typeface="Calibri" pitchFamily="34" charset="0"/>
+                <a:ea typeface="Calibri" pitchFamily="34" charset="-122"/>
+                <a:cs typeface="Calibri" pitchFamily="34" charset="-120"/>
+              </a:rPr>
+              <a:t>range across full months (Oct to Apr); no clear trend</a:t>
+            </a:r>
+            <a:endParaRPr lang="en-US" sz="1200" dirty="0"/>
+          </a:p>
+        </p:txBody>
+      </p:sp>
+      <p:sp>
+        <p:nvSpPr>
+          <p:cNvPr id="12" name="Text 9"/>
+          <p:cNvSpPr txBox="1"/>
+          <p:nvPr/>
+        </p:nvSpPr>
+        <p:spPr>
+          <a:xfrm>
+            <a:off x="8778240" y="5394960"/>
+            <a:ext cx="2864815" cy="548640"/>
+          </a:xfrm>
+          <a:prstGeom prst="rect">
+            <a:avLst/>
+          </a:prstGeom>
+          <a:noFill/>
+          <a:ln/>
+        </p:spPr>
+        <p:txBody>
+          <a:bodyPr wrap="square" lIns="0" tIns="0" rIns="0" bIns="0" rtlCol="0" anchor="ctr"/>
+          <a:lstStyle/>
+          <a:p>
+            <a:pPr indent="0" marL="0">
+              <a:buNone/>
+            </a:pPr>
+            <a:r>
+              <a:rPr lang="en-US" sz="1100" dirty="0">
+                <a:solidFill>
+                  <a:srgbClr val="7D8B97"/>
+                </a:solidFill>
+                <a:latin typeface="Calibri" pitchFamily="34" charset="0"/>
+                <a:ea typeface="Calibri" pitchFamily="34" charset="-122"/>
+                <a:cs typeface="Calibri" pitchFamily="34" charset="-120"/>
+              </a:rPr>
+              <a:t>* Sep and May are partial months. Reversals netted, 1 duplicate excluded.</a:t>
+            </a:r>
+            <a:endParaRPr lang="en-US" sz="1100" dirty="0"/>
+          </a:p>
+        </p:txBody>
+      </p:sp>
+    </p:spTree>
+  </p:cSld>
+  <p:clrMapOvr>
+    <a:masterClrMapping/>
+  </p:clrMapOvr>
+</p:sld>
+</file>
+
+<file path=ppt/slides/slide12.xml><?xml version="1.0" encoding="utf-8"?>
+<p:sld xmlns:a="http://schemas.openxmlformats.org/drawingml/2006/main" xmlns:r="http://schemas.openxmlformats.org/officeDocument/2006/relationships" xmlns:p="http://schemas.openxmlformats.org/presentationml/2006/main">
+  <p:cSld name="Slide 12">
+    <p:bg>
+      <p:bgPr>
+        <a:solidFill>
+          <a:srgbClr val="FFFFFF"/>
+        </a:solidFill>
+      </p:bgPr>
+    </p:bg>
+    <p:spTree>
+      <p:nvGrpSpPr>
+        <p:cNvPr id="1" name=""/>
+        <p:cNvGrpSpPr/>
+        <p:nvPr/>
+      </p:nvGrpSpPr>
+      <p:grpSpPr>
+        <a:xfrm>
+          <a:off x="0" y="0"/>
+          <a:ext cx="0" cy="0"/>
+          <a:chOff x="0" y="0"/>
+          <a:chExt cx="0" cy="0"/>
+        </a:xfrm>
+      </p:grpSpPr>
+      <p:sp>
+        <p:nvSpPr>
+          <p:cNvPr id="2" name="Text 0"/>
+          <p:cNvSpPr txBox="1"/>
+          <p:nvPr/>
+        </p:nvSpPr>
+        <p:spPr>
+          <a:xfrm>
+            <a:off x="548640" y="320040"/>
+            <a:ext cx="8229600" cy="274320"/>
+          </a:xfrm>
+          <a:prstGeom prst="rect">
+            <a:avLst/>
+          </a:prstGeom>
+          <a:noFill/>
+          <a:ln/>
+        </p:spPr>
+        <p:txBody>
+          <a:bodyPr wrap="square" lIns="0" tIns="0" rIns="0" bIns="0" rtlCol="0" anchor="ctr"/>
+          <a:lstStyle/>
+          <a:p>
+            <a:pPr indent="0" marL="0">
+              <a:buNone/>
+            </a:pPr>
+            <a:r>
+              <a:rPr lang="en-US" sz="1200" b="1" spc="200" kern="0" dirty="0">
+                <a:solidFill>
+                  <a:srgbClr val="D9622B"/>
+                </a:solidFill>
+                <a:latin typeface="Calibri" pitchFamily="34" charset="0"/>
+                <a:ea typeface="Calibri" pitchFamily="34" charset="-122"/>
+                <a:cs typeface="Calibri" pitchFamily="34" charset="-120"/>
+              </a:rPr>
+              <a:t>TASK 2 · VENDOR-BY-VENDOR</a:t>
+            </a:r>
+            <a:endParaRPr lang="en-US" sz="1200" dirty="0"/>
+          </a:p>
+        </p:txBody>
+      </p:sp>
+      <p:sp>
+        <p:nvSpPr>
+          <p:cNvPr id="3" name="Text 1"/>
+          <p:cNvSpPr txBox="1"/>
+          <p:nvPr/>
+        </p:nvSpPr>
+        <p:spPr>
+          <a:xfrm>
+            <a:off x="548640" y="594360"/>
+            <a:ext cx="11094415" cy="685800"/>
+          </a:xfrm>
+          <a:prstGeom prst="rect">
+            <a:avLst/>
+          </a:prstGeom>
+          <a:noFill/>
+          <a:ln/>
+        </p:spPr>
+        <p:txBody>
+          <a:bodyPr wrap="square" lIns="0" tIns="0" rIns="0" bIns="0" rtlCol="0" anchor="t"/>
+          <a:lstStyle/>
+          <a:p>
+            <a:pPr indent="0" marL="0">
+              <a:buNone/>
+            </a:pPr>
+            <a:r>
+              <a:rPr lang="en-US" sz="2400" b="1" dirty="0">
+                <a:solidFill>
+                  <a:srgbClr val="1F2A33"/>
+                </a:solidFill>
+                <a:latin typeface="Cambria" pitchFamily="34" charset="0"/>
+                <a:ea typeface="Cambria" pitchFamily="34" charset="-122"/>
+                <a:cs typeface="Cambria" pitchFamily="34" charset="-120"/>
+              </a:rPr>
+              <a:t>Continental stands out on delivery; Apex on dollars</a:t>
+            </a:r>
+            <a:endParaRPr lang="en-US" sz="2400" dirty="0"/>
+          </a:p>
+        </p:txBody>
+      </p:sp>
+      <p:sp>
+        <p:nvSpPr>
+          <p:cNvPr id="4" name="Text 2"/>
+          <p:cNvSpPr txBox="1"/>
+          <p:nvPr/>
+        </p:nvSpPr>
+        <p:spPr>
+          <a:xfrm>
+            <a:off x="7985455" y="6473952"/>
+            <a:ext cx="3657600" cy="228600"/>
+          </a:xfrm>
+          <a:prstGeom prst="rect">
+            <a:avLst/>
+          </a:prstGeom>
+          <a:noFill/>
+          <a:ln/>
+        </p:spPr>
+        <p:txBody>
+          <a:bodyPr wrap="square" lIns="0" tIns="0" rIns="0" bIns="0" rtlCol="0" anchor="ctr"/>
+          <a:lstStyle/>
+          <a:p>
+            <a:pPr algn="r" indent="0" marL="0">
+              <a:buNone/>
+            </a:pPr>
+            <a:r>
+              <a:rPr lang="en-US" sz="900" dirty="0">
+                <a:solidFill>
+                  <a:srgbClr val="7D8B97"/>
+                </a:solidFill>
+                <a:latin typeface="Calibri" pitchFamily="34" charset="0"/>
+                <a:ea typeface="Calibri" pitchFamily="34" charset="-122"/>
+                <a:cs typeface="Calibri" pitchFamily="34" charset="-120"/>
+              </a:rPr>
+              <a:t>Beacon Fasteners · FDE case   12</a:t>
+            </a:r>
+            <a:endParaRPr lang="en-US" sz="900" dirty="0"/>
+          </a:p>
+        </p:txBody>
+      </p:sp>
+      <p:graphicFrame>
+        <p:nvGraphicFramePr>
+          <p:cNvPr id="13" name="Table 0"/>
           <p:cNvGraphicFramePr>
             <a:graphicFrameLocks noGrp="1"/>
           </p:cNvGraphicFramePr>
@@ -8818,9 +9515,9 @@
 </p:sld>
 </file>
 
-<file path=ppt/slides/slide12.xml><?xml version="1.0" encoding="utf-8"?>
+<file path=ppt/slides/slide13.xml><?xml version="1.0" encoding="utf-8"?>
 <p:sld xmlns:a="http://schemas.openxmlformats.org/drawingml/2006/main" xmlns:r="http://schemas.openxmlformats.org/officeDocument/2006/relationships" xmlns:p="http://schemas.openxmlformats.org/presentationml/2006/main">
-  <p:cSld name="Slide 12">
+  <p:cSld name="Slide 13">
     <p:bg>
       <p:bgPr>
         <a:solidFill>
@@ -8953,7 +9650,7 @@
                 <a:ea typeface="Calibri" pitchFamily="34" charset="-122"/>
                 <a:cs typeface="Calibri" pitchFamily="34" charset="-120"/>
               </a:rPr>
-              <a:t>Beacon Fasteners · FDE case   12</a:t>
+              <a:t>Beacon Fasteners · FDE case   13</a:t>
             </a:r>
             <a:endParaRPr lang="en-US" sz="900" dirty="0"/>
           </a:p>
@@ -9471,9 +10168,9 @@
 </p:sld>
 </file>
 
-<file path=ppt/slides/slide13.xml><?xml version="1.0" encoding="utf-8"?>
+<file path=ppt/slides/slide14.xml><?xml version="1.0" encoding="utf-8"?>
 <p:sld xmlns:a="http://schemas.openxmlformats.org/drawingml/2006/main" xmlns:r="http://schemas.openxmlformats.org/officeDocument/2006/relationships" xmlns:p="http://schemas.openxmlformats.org/presentationml/2006/main">
-  <p:cSld name="Slide 13">
+  <p:cSld name="Slide 14">
     <p:bg>
       <p:bgPr>
         <a:solidFill>
@@ -9606,7 +10303,7 @@
                 <a:ea typeface="Calibri" pitchFamily="34" charset="-122"/>
                 <a:cs typeface="Calibri" pitchFamily="34" charset="-120"/>
               </a:rPr>
-              <a:t>Beacon Fasteners · FDE case   13</a:t>
+              <a:t>Beacon Fasteners · FDE case   14</a:t>
             </a:r>
             <a:endParaRPr lang="en-US" sz="900" dirty="0"/>
           </a:p>
@@ -10381,9 +11078,9 @@
 </p:sld>
 </file>
 
-<file path=ppt/slides/slide14.xml><?xml version="1.0" encoding="utf-8"?>
+<file path=ppt/slides/slide15.xml><?xml version="1.0" encoding="utf-8"?>
 <p:sld xmlns:a="http://schemas.openxmlformats.org/drawingml/2006/main" xmlns:r="http://schemas.openxmlformats.org/officeDocument/2006/relationships" xmlns:p="http://schemas.openxmlformats.org/presentationml/2006/main">
-  <p:cSld name="Slide 14">
+  <p:cSld name="Slide 15">
     <p:bg>
       <p:bgPr>
         <a:solidFill>
@@ -10516,7 +11213,7 @@
                 <a:ea typeface="Calibri" pitchFamily="34" charset="-122"/>
                 <a:cs typeface="Calibri" pitchFamily="34" charset="-120"/>
               </a:rPr>
-              <a:t>Beacon Fasteners · FDE case   14</a:t>
+              <a:t>Beacon Fasteners · FDE case   15</a:t>
             </a:r>
             <a:endParaRPr lang="en-US" sz="900" dirty="0"/>
           </a:p>
@@ -10524,7 +11221,7 @@
       </p:sp>
       <p:graphicFrame>
         <p:nvGraphicFramePr>
-          <p:cNvPr id="15" name="Table 0"/>
+          <p:cNvPr id="16" name="Table 0"/>
           <p:cNvGraphicFramePr>
             <a:graphicFrameLocks noGrp="1"/>
           </p:cNvGraphicFramePr>
@@ -13236,9 +13933,9 @@
 </p:sld>
 </file>
 
-<file path=ppt/slides/slide15.xml><?xml version="1.0" encoding="utf-8"?>
+<file path=ppt/slides/slide16.xml><?xml version="1.0" encoding="utf-8"?>
 <p:sld xmlns:a="http://schemas.openxmlformats.org/drawingml/2006/main" xmlns:r="http://schemas.openxmlformats.org/officeDocument/2006/relationships" xmlns:p="http://schemas.openxmlformats.org/presentationml/2006/main">
-  <p:cSld name="Slide 15">
+  <p:cSld name="Slide 16">
     <p:bg>
       <p:bgPr>
         <a:solidFill>
@@ -13371,7 +14068,7 @@
                 <a:ea typeface="Calibri" pitchFamily="34" charset="-122"/>
                 <a:cs typeface="Calibri" pitchFamily="34" charset="-120"/>
               </a:rPr>
-              <a:t>Beacon Fasteners · FDE case   15</a:t>
+              <a:t>Beacon Fasteners · FDE case   16</a:t>
             </a:r>
             <a:endParaRPr lang="en-US" sz="900" dirty="0"/>
           </a:p>
@@ -14346,7 +15043,7 @@
                 <a:ea typeface="Calibri" pitchFamily="34" charset="-122"/>
                 <a:cs typeface="Calibri" pitchFamily="34" charset="-120"/>
               </a:rPr>
-              <a:t>Cloud, logins, microservices</a:t>
+              <a:t>A vendor portal or EDI (yet)</a:t>
             </a:r>
             <a:endParaRPr lang="en-US" sz="1500" dirty="0"/>
           </a:p>
@@ -14385,2046 +15082,12 @@
                 <a:ea typeface="Calibri" pitchFamily="34" charset="-122"/>
                 <a:cs typeface="Calibri" pitchFamily="34" charset="-120"/>
               </a:rPr>
-              <a:t>One buyer, one plant. A local file and a double-click launcher are enough to prove the value.</a:t>
+              <a:t>Vendors live in email and Excel. The form fields map 1:1 to a portal or EDI 855 later; no hosting or logins now.</a:t>
             </a:r>
             <a:endParaRPr lang="en-US" sz="1300" dirty="0"/>
           </a:p>
         </p:txBody>
       </p:sp>
-    </p:spTree>
-  </p:cSld>
-  <p:clrMapOvr>
-    <a:masterClrMapping/>
-  </p:clrMapOvr>
-</p:sld>
-</file>
-
-<file path=ppt/slides/slide16.xml><?xml version="1.0" encoding="utf-8"?>
-<p:sld xmlns:a="http://schemas.openxmlformats.org/drawingml/2006/main" xmlns:r="http://schemas.openxmlformats.org/officeDocument/2006/relationships" xmlns:p="http://schemas.openxmlformats.org/presentationml/2006/main">
-  <p:cSld name="Slide 16">
-    <p:bg>
-      <p:bgPr>
-        <a:solidFill>
-          <a:srgbClr val="FFFFFF"/>
-        </a:solidFill>
-      </p:bgPr>
-    </p:bg>
-    <p:spTree>
-      <p:nvGrpSpPr>
-        <p:cNvPr id="1" name=""/>
-        <p:cNvGrpSpPr/>
-        <p:nvPr/>
-      </p:nvGrpSpPr>
-      <p:grpSpPr>
-        <a:xfrm>
-          <a:off x="0" y="0"/>
-          <a:ext cx="0" cy="0"/>
-          <a:chOff x="0" y="0"/>
-          <a:chExt cx="0" cy="0"/>
-        </a:xfrm>
-      </p:grpSpPr>
-      <p:sp>
-        <p:nvSpPr>
-          <p:cNvPr id="2" name="Text 0"/>
-          <p:cNvSpPr txBox="1"/>
-          <p:nvPr/>
-        </p:nvSpPr>
-        <p:spPr>
-          <a:xfrm>
-            <a:off x="548640" y="320040"/>
-            <a:ext cx="8229600" cy="274320"/>
-          </a:xfrm>
-          <a:prstGeom prst="rect">
-            <a:avLst/>
-          </a:prstGeom>
-          <a:noFill/>
-          <a:ln/>
-        </p:spPr>
-        <p:txBody>
-          <a:bodyPr wrap="square" lIns="0" tIns="0" rIns="0" bIns="0" rtlCol="0" anchor="ctr"/>
-          <a:lstStyle/>
-          <a:p>
-            <a:pPr indent="0" marL="0">
-              <a:buNone/>
-            </a:pPr>
-            <a:r>
-              <a:rPr lang="en-US" sz="1200" b="1" spc="200" kern="0" dirty="0">
-                <a:solidFill>
-                  <a:srgbClr val="D9622B"/>
-                </a:solidFill>
-                <a:latin typeface="Calibri" pitchFamily="34" charset="0"/>
-                <a:ea typeface="Calibri" pitchFamily="34" charset="-122"/>
-                <a:cs typeface="Calibri" pitchFamily="34" charset="-120"/>
-              </a:rPr>
-              <a:t>LIMITS</a:t>
-            </a:r>
-            <a:endParaRPr lang="en-US" sz="1200" dirty="0"/>
-          </a:p>
-        </p:txBody>
-      </p:sp>
-      <p:sp>
-        <p:nvSpPr>
-          <p:cNvPr id="3" name="Text 1"/>
-          <p:cNvSpPr txBox="1"/>
-          <p:nvPr/>
-        </p:nvSpPr>
-        <p:spPr>
-          <a:xfrm>
-            <a:off x="548640" y="594360"/>
-            <a:ext cx="11094415" cy="685800"/>
-          </a:xfrm>
-          <a:prstGeom prst="rect">
-            <a:avLst/>
-          </a:prstGeom>
-          <a:noFill/>
-          <a:ln/>
-        </p:spPr>
-        <p:txBody>
-          <a:bodyPr wrap="square" lIns="0" tIns="0" rIns="0" bIns="0" rtlCol="0" anchor="t"/>
-          <a:lstStyle/>
-          <a:p>
-            <a:pPr indent="0" marL="0">
-              <a:buNone/>
-            </a:pPr>
-            <a:r>
-              <a:rPr lang="en-US" sz="2400" b="1" dirty="0">
-                <a:solidFill>
-                  <a:srgbClr val="1F2A33"/>
-                </a:solidFill>
-                <a:latin typeface="Cambria" pitchFamily="34" charset="0"/>
-                <a:ea typeface="Cambria" pitchFamily="34" charset="-122"/>
-                <a:cs typeface="Cambria" pitchFamily="34" charset="-120"/>
-              </a:rPr>
-              <a:t>Where this falls over, and what catches it when it does</a:t>
-            </a:r>
-            <a:endParaRPr lang="en-US" sz="2400" dirty="0"/>
-          </a:p>
-        </p:txBody>
-      </p:sp>
-      <p:sp>
-        <p:nvSpPr>
-          <p:cNvPr id="4" name="Text 2"/>
-          <p:cNvSpPr txBox="1"/>
-          <p:nvPr/>
-        </p:nvSpPr>
-        <p:spPr>
-          <a:xfrm>
-            <a:off x="7985455" y="6473952"/>
-            <a:ext cx="3657600" cy="228600"/>
-          </a:xfrm>
-          <a:prstGeom prst="rect">
-            <a:avLst/>
-          </a:prstGeom>
-          <a:noFill/>
-          <a:ln/>
-        </p:spPr>
-        <p:txBody>
-          <a:bodyPr wrap="square" lIns="0" tIns="0" rIns="0" bIns="0" rtlCol="0" anchor="ctr"/>
-          <a:lstStyle/>
-          <a:p>
-            <a:pPr algn="r" indent="0" marL="0">
-              <a:buNone/>
-            </a:pPr>
-            <a:r>
-              <a:rPr lang="en-US" sz="900" dirty="0">
-                <a:solidFill>
-                  <a:srgbClr val="7D8B97"/>
-                </a:solidFill>
-                <a:latin typeface="Calibri" pitchFamily="34" charset="0"/>
-                <a:ea typeface="Calibri" pitchFamily="34" charset="-122"/>
-                <a:cs typeface="Calibri" pitchFamily="34" charset="-120"/>
-              </a:rPr>
-              <a:t>Beacon Fasteners · FDE case   16</a:t>
-            </a:r>
-            <a:endParaRPr lang="en-US" sz="900" dirty="0"/>
-          </a:p>
-        </p:txBody>
-      </p:sp>
-      <p:graphicFrame>
-        <p:nvGraphicFramePr>
-          <p:cNvPr id="17" name="Table 0"/>
-          <p:cNvGraphicFramePr>
-            <a:graphicFrameLocks noGrp="1"/>
-          </p:cNvGraphicFramePr>
-          <p:nvPr>
-            <p:extLst>
-              <p:ext uri="{D42A27DB-BD31-4B8C-83A1-F6EECF244321}">
-                <p14:modId xmlns:p14="http://schemas.microsoft.com/office/powerpoint/2010/main" val="1579011935"/>
-              </p:ext>
-            </p:extLst>
-          </p:nvPr>
-        </p:nvGraphicFramePr>
-        <p:xfrm>
-          <a:off x="548640" y="1463040"/>
-          <a:ext cx="11094415" cy="914400"/>
-        </p:xfrm>
-        <a:graphic>
-          <a:graphicData uri="http://schemas.openxmlformats.org/drawingml/2006/table">
-            <a:tbl>
-              <a:tblPr/>
-              <a:tblGrid>
-                <a:gridCol w="3108960"/>
-                <a:gridCol w="3749040"/>
-                <a:gridCol w="4233672"/>
-              </a:tblGrid>
-              <a:tr h="548640">
-                <a:tc>
-                  <a:txBody>
-                    <a:bodyPr/>
-                    <a:lstStyle/>
-                    <a:p>
-                      <a:pPr indent="0" marL="0">
-                        <a:buNone/>
-                      </a:pPr>
-                      <a:r>
-                        <a:rPr lang="en-US" sz="1300" b="1" dirty="0">
-                          <a:solidFill>
-                            <a:srgbClr val="FFFFFF"/>
-                          </a:solidFill>
-                          <a:latin typeface="Calibri" pitchFamily="34" charset="0"/>
-                          <a:ea typeface="Calibri" pitchFamily="34" charset="-122"/>
-                          <a:cs typeface="Calibri" pitchFamily="34" charset="-120"/>
-                        </a:rPr>
-                        <a:t>Failure mode</a:t>
-                      </a:r>
-                      <a:endParaRPr lang="en-US" sz="1300" dirty="0">
-                        <a:latin typeface="Calibri" charset="0"/>
-                        <a:ea typeface="Calibri" charset="0"/>
-                        <a:cs typeface="Calibri" charset="0"/>
-                      </a:endParaRPr>
-                    </a:p>
-                  </a:txBody>
-                  <a:tcPr marL="45720" marR="45720" marT="45720" marB="45720" anchor="ctr">
-                    <a:lnL w="6350" cap="flat" cmpd="sng" algn="ctr">
-                      <a:solidFill>
-                        <a:srgbClr val="D5DCE2"/>
-                      </a:solidFill>
-                      <a:prstDash val="solid"/>
-                      <a:round/>
-                      <a:headEnd type="none" w="med" len="med"/>
-                      <a:tailEnd type="none" w="med" len="med"/>
-                    </a:lnL>
-                    <a:lnR w="6350" cap="flat" cmpd="sng" algn="ctr">
-                      <a:solidFill>
-                        <a:srgbClr val="D5DCE2"/>
-                      </a:solidFill>
-                      <a:prstDash val="solid"/>
-                      <a:round/>
-                      <a:headEnd type="none" w="med" len="med"/>
-                      <a:tailEnd type="none" w="med" len="med"/>
-                    </a:lnR>
-                    <a:lnT w="6350" cap="flat" cmpd="sng" algn="ctr">
-                      <a:solidFill>
-                        <a:srgbClr val="D5DCE2"/>
-                      </a:solidFill>
-                      <a:prstDash val="solid"/>
-                      <a:round/>
-                      <a:headEnd type="none" w="med" len="med"/>
-                      <a:tailEnd type="none" w="med" len="med"/>
-                    </a:lnT>
-                    <a:lnB w="6350" cap="flat" cmpd="sng" algn="ctr">
-                      <a:solidFill>
-                        <a:srgbClr val="D5DCE2"/>
-                      </a:solidFill>
-                      <a:prstDash val="solid"/>
-                      <a:round/>
-                      <a:headEnd type="none" w="med" len="med"/>
-                      <a:tailEnd type="none" w="med" len="med"/>
-                    </a:lnB>
-                    <a:solidFill>
-                      <a:srgbClr val="1F2A33"/>
-                    </a:solidFill>
-                  </a:tcPr>
-                </a:tc>
-                <a:tc>
-                  <a:txBody>
-                    <a:bodyPr/>
-                    <a:lstStyle/>
-                    <a:p>
-                      <a:pPr indent="0" marL="0">
-                        <a:buNone/>
-                      </a:pPr>
-                      <a:r>
-                        <a:rPr lang="en-US" sz="1300" b="1" dirty="0">
-                          <a:solidFill>
-                            <a:srgbClr val="FFFFFF"/>
-                          </a:solidFill>
-                          <a:latin typeface="Calibri" pitchFamily="34" charset="0"/>
-                          <a:ea typeface="Calibri" pitchFamily="34" charset="-122"/>
-                          <a:cs typeface="Calibri" pitchFamily="34" charset="-120"/>
-                        </a:rPr>
-                        <a:t>What happens today</a:t>
-                      </a:r>
-                      <a:endParaRPr lang="en-US" sz="1300" dirty="0">
-                        <a:latin typeface="Calibri" charset="0"/>
-                        <a:ea typeface="Calibri" charset="0"/>
-                        <a:cs typeface="Calibri" charset="0"/>
-                      </a:endParaRPr>
-                    </a:p>
-                  </a:txBody>
-                  <a:tcPr marL="45720" marR="45720" marT="45720" marB="45720" anchor="ctr">
-                    <a:lnL w="6350" cap="flat" cmpd="sng" algn="ctr">
-                      <a:solidFill>
-                        <a:srgbClr val="D5DCE2"/>
-                      </a:solidFill>
-                      <a:prstDash val="solid"/>
-                      <a:round/>
-                      <a:headEnd type="none" w="med" len="med"/>
-                      <a:tailEnd type="none" w="med" len="med"/>
-                    </a:lnL>
-                    <a:lnR w="6350" cap="flat" cmpd="sng" algn="ctr">
-                      <a:solidFill>
-                        <a:srgbClr val="D5DCE2"/>
-                      </a:solidFill>
-                      <a:prstDash val="solid"/>
-                      <a:round/>
-                      <a:headEnd type="none" w="med" len="med"/>
-                      <a:tailEnd type="none" w="med" len="med"/>
-                    </a:lnR>
-                    <a:lnT w="6350" cap="flat" cmpd="sng" algn="ctr">
-                      <a:solidFill>
-                        <a:srgbClr val="D5DCE2"/>
-                      </a:solidFill>
-                      <a:prstDash val="solid"/>
-                      <a:round/>
-                      <a:headEnd type="none" w="med" len="med"/>
-                      <a:tailEnd type="none" w="med" len="med"/>
-                    </a:lnT>
-                    <a:lnB w="6350" cap="flat" cmpd="sng" algn="ctr">
-                      <a:solidFill>
-                        <a:srgbClr val="D5DCE2"/>
-                      </a:solidFill>
-                      <a:prstDash val="solid"/>
-                      <a:round/>
-                      <a:headEnd type="none" w="med" len="med"/>
-                      <a:tailEnd type="none" w="med" len="med"/>
-                    </a:lnB>
-                    <a:solidFill>
-                      <a:srgbClr val="1F2A33"/>
-                    </a:solidFill>
-                  </a:tcPr>
-                </a:tc>
-                <a:tc>
-                  <a:txBody>
-                    <a:bodyPr/>
-                    <a:lstStyle/>
-                    <a:p>
-                      <a:pPr indent="0" marL="0">
-                        <a:buNone/>
-                      </a:pPr>
-                      <a:r>
-                        <a:rPr lang="en-US" sz="1300" b="1" dirty="0">
-                          <a:solidFill>
-                            <a:srgbClr val="FFFFFF"/>
-                          </a:solidFill>
-                          <a:latin typeface="Calibri" pitchFamily="34" charset="0"/>
-                          <a:ea typeface="Calibri" pitchFamily="34" charset="-122"/>
-                          <a:cs typeface="Calibri" pitchFamily="34" charset="-120"/>
-                        </a:rPr>
-                        <a:t>Mitigation / next step</a:t>
-                      </a:r>
-                      <a:endParaRPr lang="en-US" sz="1300" dirty="0">
-                        <a:latin typeface="Calibri" charset="0"/>
-                        <a:ea typeface="Calibri" charset="0"/>
-                        <a:cs typeface="Calibri" charset="0"/>
-                      </a:endParaRPr>
-                    </a:p>
-                  </a:txBody>
-                  <a:tcPr marL="45720" marR="45720" marT="45720" marB="45720" anchor="ctr">
-                    <a:lnL w="6350" cap="flat" cmpd="sng" algn="ctr">
-                      <a:solidFill>
-                        <a:srgbClr val="D5DCE2"/>
-                      </a:solidFill>
-                      <a:prstDash val="solid"/>
-                      <a:round/>
-                      <a:headEnd type="none" w="med" len="med"/>
-                      <a:tailEnd type="none" w="med" len="med"/>
-                    </a:lnL>
-                    <a:lnR w="6350" cap="flat" cmpd="sng" algn="ctr">
-                      <a:solidFill>
-                        <a:srgbClr val="D5DCE2"/>
-                      </a:solidFill>
-                      <a:prstDash val="solid"/>
-                      <a:round/>
-                      <a:headEnd type="none" w="med" len="med"/>
-                      <a:tailEnd type="none" w="med" len="med"/>
-                    </a:lnR>
-                    <a:lnT w="6350" cap="flat" cmpd="sng" algn="ctr">
-                      <a:solidFill>
-                        <a:srgbClr val="D5DCE2"/>
-                      </a:solidFill>
-                      <a:prstDash val="solid"/>
-                      <a:round/>
-                      <a:headEnd type="none" w="med" len="med"/>
-                      <a:tailEnd type="none" w="med" len="med"/>
-                    </a:lnT>
-                    <a:lnB w="6350" cap="flat" cmpd="sng" algn="ctr">
-                      <a:solidFill>
-                        <a:srgbClr val="D5DCE2"/>
-                      </a:solidFill>
-                      <a:prstDash val="solid"/>
-                      <a:round/>
-                      <a:headEnd type="none" w="med" len="med"/>
-                      <a:tailEnd type="none" w="med" len="med"/>
-                    </a:lnB>
-                    <a:solidFill>
-                      <a:srgbClr val="1F2A33"/>
-                    </a:solidFill>
-                  </a:tcPr>
-                </a:tc>
-              </a:tr>
-              <a:tr h="548640">
-                <a:tc>
-                  <a:txBody>
-                    <a:bodyPr/>
-                    <a:lstStyle/>
-                    <a:p>
-                      <a:pPr indent="0" marL="0">
-                        <a:buNone/>
-                      </a:pPr>
-                      <a:r>
-                        <a:rPr lang="en-US" sz="1200" b="1" dirty="0">
-                          <a:solidFill>
-                            <a:srgbClr val="1F2A33"/>
-                          </a:solidFill>
-                          <a:latin typeface="Calibri" pitchFamily="34" charset="0"/>
-                          <a:ea typeface="Calibri" pitchFamily="34" charset="-122"/>
-                          <a:cs typeface="Calibri" pitchFamily="34" charset="-120"/>
-                        </a:rPr>
-                        <a:t>A new vendor or a changed layout</a:t>
-                      </a:r>
-                      <a:endParaRPr lang="en-US" sz="1200" dirty="0">
-                        <a:latin typeface="Calibri" charset="0"/>
-                        <a:ea typeface="Calibri" charset="0"/>
-                        <a:cs typeface="Calibri" charset="0"/>
-                      </a:endParaRPr>
-                    </a:p>
-                  </a:txBody>
-                  <a:tcPr marL="45720" marR="45720" marT="45720" marB="45720" anchor="ctr">
-                    <a:lnL w="6350" cap="flat" cmpd="sng" algn="ctr">
-                      <a:solidFill>
-                        <a:srgbClr val="D5DCE2"/>
-                      </a:solidFill>
-                      <a:prstDash val="solid"/>
-                      <a:round/>
-                      <a:headEnd type="none" w="med" len="med"/>
-                      <a:tailEnd type="none" w="med" len="med"/>
-                    </a:lnL>
-                    <a:lnR w="6350" cap="flat" cmpd="sng" algn="ctr">
-                      <a:solidFill>
-                        <a:srgbClr val="D5DCE2"/>
-                      </a:solidFill>
-                      <a:prstDash val="solid"/>
-                      <a:round/>
-                      <a:headEnd type="none" w="med" len="med"/>
-                      <a:tailEnd type="none" w="med" len="med"/>
-                    </a:lnR>
-                    <a:lnT w="6350" cap="flat" cmpd="sng" algn="ctr">
-                      <a:solidFill>
-                        <a:srgbClr val="D5DCE2"/>
-                      </a:solidFill>
-                      <a:prstDash val="solid"/>
-                      <a:round/>
-                      <a:headEnd type="none" w="med" len="med"/>
-                      <a:tailEnd type="none" w="med" len="med"/>
-                    </a:lnT>
-                    <a:lnB w="6350" cap="flat" cmpd="sng" algn="ctr">
-                      <a:solidFill>
-                        <a:srgbClr val="D5DCE2"/>
-                      </a:solidFill>
-                      <a:prstDash val="solid"/>
-                      <a:round/>
-                      <a:headEnd type="none" w="med" len="med"/>
-                      <a:tailEnd type="none" w="med" len="med"/>
-                    </a:lnB>
-                    <a:solidFill>
-                      <a:srgbClr val="F6F8FA"/>
-                    </a:solidFill>
-                  </a:tcPr>
-                </a:tc>
-                <a:tc>
-                  <a:txBody>
-                    <a:bodyPr/>
-                    <a:lstStyle/>
-                    <a:p>
-                      <a:pPr indent="0" marL="0">
-                        <a:buNone/>
-                      </a:pPr>
-                      <a:r>
-                        <a:rPr lang="en-US" sz="1200" dirty="0">
-                          <a:solidFill>
-                            <a:srgbClr val="1F2A33"/>
-                          </a:solidFill>
-                          <a:latin typeface="Calibri" pitchFamily="34" charset="0"/>
-                          <a:ea typeface="Calibri" pitchFamily="34" charset="-122"/>
-                          <a:cs typeface="Calibri" pitchFamily="34" charset="-120"/>
-                        </a:rPr>
-                        <a:t>No parser matches; the PDF shows as unreadable</a:t>
-                      </a:r>
-                      <a:endParaRPr lang="en-US" sz="1200" dirty="0">
-                        <a:latin typeface="Calibri" charset="0"/>
-                        <a:ea typeface="Calibri" charset="0"/>
-                        <a:cs typeface="Calibri" charset="0"/>
-                      </a:endParaRPr>
-                    </a:p>
-                  </a:txBody>
-                  <a:tcPr marL="45720" marR="45720" marT="45720" marB="45720" anchor="ctr">
-                    <a:lnL w="6350" cap="flat" cmpd="sng" algn="ctr">
-                      <a:solidFill>
-                        <a:srgbClr val="D5DCE2"/>
-                      </a:solidFill>
-                      <a:prstDash val="solid"/>
-                      <a:round/>
-                      <a:headEnd type="none" w="med" len="med"/>
-                      <a:tailEnd type="none" w="med" len="med"/>
-                    </a:lnL>
-                    <a:lnR w="6350" cap="flat" cmpd="sng" algn="ctr">
-                      <a:solidFill>
-                        <a:srgbClr val="D5DCE2"/>
-                      </a:solidFill>
-                      <a:prstDash val="solid"/>
-                      <a:round/>
-                      <a:headEnd type="none" w="med" len="med"/>
-                      <a:tailEnd type="none" w="med" len="med"/>
-                    </a:lnR>
-                    <a:lnT w="6350" cap="flat" cmpd="sng" algn="ctr">
-                      <a:solidFill>
-                        <a:srgbClr val="D5DCE2"/>
-                      </a:solidFill>
-                      <a:prstDash val="solid"/>
-                      <a:round/>
-                      <a:headEnd type="none" w="med" len="med"/>
-                      <a:tailEnd type="none" w="med" len="med"/>
-                    </a:lnT>
-                    <a:lnB w="6350" cap="flat" cmpd="sng" algn="ctr">
-                      <a:solidFill>
-                        <a:srgbClr val="D5DCE2"/>
-                      </a:solidFill>
-                      <a:prstDash val="solid"/>
-                      <a:round/>
-                      <a:headEnd type="none" w="med" len="med"/>
-                      <a:tailEnd type="none" w="med" len="med"/>
-                    </a:lnB>
-                    <a:solidFill>
-                      <a:srgbClr val="F6F8FA"/>
-                    </a:solidFill>
-                  </a:tcPr>
-                </a:tc>
-                <a:tc>
-                  <a:txBody>
-                    <a:bodyPr/>
-                    <a:lstStyle/>
-                    <a:p>
-                      <a:pPr indent="0" marL="0">
-                        <a:buNone/>
-                      </a:pPr>
-                      <a:r>
-                        <a:rPr lang="en-US" sz="1200" dirty="0">
-                          <a:solidFill>
-                            <a:srgbClr val="1F2A33"/>
-                          </a:solidFill>
-                          <a:latin typeface="Calibri" pitchFamily="34" charset="0"/>
-                          <a:ea typeface="Calibri" pitchFamily="34" charset="-122"/>
-                          <a:cs typeface="Calibri" pitchFamily="34" charset="-120"/>
-                        </a:rPr>
-                        <a:t>Pre-filled manual form; AI reader (BEACON_AI_FALLBACK=1); add a parser in about an hour</a:t>
-                      </a:r>
-                      <a:endParaRPr lang="en-US" sz="1200" dirty="0">
-                        <a:latin typeface="Calibri" charset="0"/>
-                        <a:ea typeface="Calibri" charset="0"/>
-                        <a:cs typeface="Calibri" charset="0"/>
-                      </a:endParaRPr>
-                    </a:p>
-                  </a:txBody>
-                  <a:tcPr marL="45720" marR="45720" marT="45720" marB="45720" anchor="ctr">
-                    <a:lnL w="6350" cap="flat" cmpd="sng" algn="ctr">
-                      <a:solidFill>
-                        <a:srgbClr val="D5DCE2"/>
-                      </a:solidFill>
-                      <a:prstDash val="solid"/>
-                      <a:round/>
-                      <a:headEnd type="none" w="med" len="med"/>
-                      <a:tailEnd type="none" w="med" len="med"/>
-                    </a:lnL>
-                    <a:lnR w="6350" cap="flat" cmpd="sng" algn="ctr">
-                      <a:solidFill>
-                        <a:srgbClr val="D5DCE2"/>
-                      </a:solidFill>
-                      <a:prstDash val="solid"/>
-                      <a:round/>
-                      <a:headEnd type="none" w="med" len="med"/>
-                      <a:tailEnd type="none" w="med" len="med"/>
-                    </a:lnR>
-                    <a:lnT w="6350" cap="flat" cmpd="sng" algn="ctr">
-                      <a:solidFill>
-                        <a:srgbClr val="D5DCE2"/>
-                      </a:solidFill>
-                      <a:prstDash val="solid"/>
-                      <a:round/>
-                      <a:headEnd type="none" w="med" len="med"/>
-                      <a:tailEnd type="none" w="med" len="med"/>
-                    </a:lnT>
-                    <a:lnB w="6350" cap="flat" cmpd="sng" algn="ctr">
-                      <a:solidFill>
-                        <a:srgbClr val="D5DCE2"/>
-                      </a:solidFill>
-                      <a:prstDash val="solid"/>
-                      <a:round/>
-                      <a:headEnd type="none" w="med" len="med"/>
-                      <a:tailEnd type="none" w="med" len="med"/>
-                    </a:lnB>
-                    <a:solidFill>
-                      <a:srgbClr val="F6F8FA"/>
-                    </a:solidFill>
-                  </a:tcPr>
-                </a:tc>
-              </a:tr>
-              <a:tr h="548640">
-                <a:tc>
-                  <a:txBody>
-                    <a:bodyPr/>
-                    <a:lstStyle/>
-                    <a:p>
-                      <a:pPr indent="0" marL="0">
-                        <a:buNone/>
-                      </a:pPr>
-                      <a:r>
-                        <a:rPr lang="en-US" sz="1200" b="1" dirty="0">
-                          <a:solidFill>
-                            <a:srgbClr val="1F2A33"/>
-                          </a:solidFill>
-                          <a:latin typeface="Calibri" pitchFamily="34" charset="0"/>
-                          <a:ea typeface="Calibri" pitchFamily="34" charset="-122"/>
-                          <a:cs typeface="Calibri" pitchFamily="34" charset="-120"/>
-                        </a:rPr>
-                        <a:t>A poor scan</a:t>
-                      </a:r>
-                      <a:endParaRPr lang="en-US" sz="1200" dirty="0">
-                        <a:latin typeface="Calibri" charset="0"/>
-                        <a:ea typeface="Calibri" charset="0"/>
-                        <a:cs typeface="Calibri" charset="0"/>
-                      </a:endParaRPr>
-                    </a:p>
-                  </a:txBody>
-                  <a:tcPr marL="45720" marR="45720" marT="45720" marB="45720" anchor="ctr">
-                    <a:lnL w="6350" cap="flat" cmpd="sng" algn="ctr">
-                      <a:solidFill>
-                        <a:srgbClr val="D5DCE2"/>
-                      </a:solidFill>
-                      <a:prstDash val="solid"/>
-                      <a:round/>
-                      <a:headEnd type="none" w="med" len="med"/>
-                      <a:tailEnd type="none" w="med" len="med"/>
-                    </a:lnL>
-                    <a:lnR w="6350" cap="flat" cmpd="sng" algn="ctr">
-                      <a:solidFill>
-                        <a:srgbClr val="D5DCE2"/>
-                      </a:solidFill>
-                      <a:prstDash val="solid"/>
-                      <a:round/>
-                      <a:headEnd type="none" w="med" len="med"/>
-                      <a:tailEnd type="none" w="med" len="med"/>
-                    </a:lnR>
-                    <a:lnT w="6350" cap="flat" cmpd="sng" algn="ctr">
-                      <a:solidFill>
-                        <a:srgbClr val="D5DCE2"/>
-                      </a:solidFill>
-                      <a:prstDash val="solid"/>
-                      <a:round/>
-                      <a:headEnd type="none" w="med" len="med"/>
-                      <a:tailEnd type="none" w="med" len="med"/>
-                    </a:lnT>
-                    <a:lnB w="6350" cap="flat" cmpd="sng" algn="ctr">
-                      <a:solidFill>
-                        <a:srgbClr val="D5DCE2"/>
-                      </a:solidFill>
-                      <a:prstDash val="solid"/>
-                      <a:round/>
-                      <a:headEnd type="none" w="med" len="med"/>
-                      <a:tailEnd type="none" w="med" len="med"/>
-                    </a:lnB>
-                    <a:solidFill>
-                      <a:srgbClr val="FFFFFF"/>
-                    </a:solidFill>
-                  </a:tcPr>
-                </a:tc>
-                <a:tc>
-                  <a:txBody>
-                    <a:bodyPr/>
-                    <a:lstStyle/>
-                    <a:p>
-                      <a:pPr indent="0" marL="0">
-                        <a:buNone/>
-                      </a:pPr>
-                      <a:r>
-                        <a:rPr lang="en-US" sz="1200" dirty="0">
-                          <a:solidFill>
-                            <a:srgbClr val="1F2A33"/>
-                          </a:solidFill>
-                          <a:latin typeface="Calibri" pitchFamily="34" charset="0"/>
-                          <a:ea typeface="Calibri" pitchFamily="34" charset="-122"/>
-                          <a:cs typeface="Calibri" pitchFamily="34" charset="-120"/>
-                        </a:rPr>
-                        <a:t>OCR can misread a digit</a:t>
-                      </a:r>
-                      <a:endParaRPr lang="en-US" sz="1200" dirty="0">
-                        <a:latin typeface="Calibri" charset="0"/>
-                        <a:ea typeface="Calibri" charset="0"/>
-                        <a:cs typeface="Calibri" charset="0"/>
-                      </a:endParaRPr>
-                    </a:p>
-                  </a:txBody>
-                  <a:tcPr marL="45720" marR="45720" marT="45720" marB="45720" anchor="ctr">
-                    <a:lnL w="6350" cap="flat" cmpd="sng" algn="ctr">
-                      <a:solidFill>
-                        <a:srgbClr val="D5DCE2"/>
-                      </a:solidFill>
-                      <a:prstDash val="solid"/>
-                      <a:round/>
-                      <a:headEnd type="none" w="med" len="med"/>
-                      <a:tailEnd type="none" w="med" len="med"/>
-                    </a:lnL>
-                    <a:lnR w="6350" cap="flat" cmpd="sng" algn="ctr">
-                      <a:solidFill>
-                        <a:srgbClr val="D5DCE2"/>
-                      </a:solidFill>
-                      <a:prstDash val="solid"/>
-                      <a:round/>
-                      <a:headEnd type="none" w="med" len="med"/>
-                      <a:tailEnd type="none" w="med" len="med"/>
-                    </a:lnR>
-                    <a:lnT w="6350" cap="flat" cmpd="sng" algn="ctr">
-                      <a:solidFill>
-                        <a:srgbClr val="D5DCE2"/>
-                      </a:solidFill>
-                      <a:prstDash val="solid"/>
-                      <a:round/>
-                      <a:headEnd type="none" w="med" len="med"/>
-                      <a:tailEnd type="none" w="med" len="med"/>
-                    </a:lnT>
-                    <a:lnB w="6350" cap="flat" cmpd="sng" algn="ctr">
-                      <a:solidFill>
-                        <a:srgbClr val="D5DCE2"/>
-                      </a:solidFill>
-                      <a:prstDash val="solid"/>
-                      <a:round/>
-                      <a:headEnd type="none" w="med" len="med"/>
-                      <a:tailEnd type="none" w="med" len="med"/>
-                    </a:lnB>
-                    <a:solidFill>
-                      <a:srgbClr val="FFFFFF"/>
-                    </a:solidFill>
-                  </a:tcPr>
-                </a:tc>
-                <a:tc>
-                  <a:txBody>
-                    <a:bodyPr/>
-                    <a:lstStyle/>
-                    <a:p>
-                      <a:pPr indent="0" marL="0">
-                        <a:buNone/>
-                      </a:pPr>
-                      <a:r>
-                        <a:rPr lang="en-US" sz="1200" dirty="0">
-                          <a:solidFill>
-                            <a:srgbClr val="1F2A33"/>
-                          </a:solidFill>
-                          <a:latin typeface="Calibri" pitchFamily="34" charset="0"/>
-                          <a:ea typeface="Calibri" pitchFamily="34" charset="-122"/>
-                          <a:cs typeface="Calibri" pitchFamily="34" charset="-120"/>
-                        </a:rPr>
-                        <a:t>Every OCR'd doc goes to Needs your OK, shown next to the image</a:t>
-                      </a:r>
-                      <a:endParaRPr lang="en-US" sz="1200" dirty="0">
-                        <a:latin typeface="Calibri" charset="0"/>
-                        <a:ea typeface="Calibri" charset="0"/>
-                        <a:cs typeface="Calibri" charset="0"/>
-                      </a:endParaRPr>
-                    </a:p>
-                  </a:txBody>
-                  <a:tcPr marL="45720" marR="45720" marT="45720" marB="45720" anchor="ctr">
-                    <a:lnL w="6350" cap="flat" cmpd="sng" algn="ctr">
-                      <a:solidFill>
-                        <a:srgbClr val="D5DCE2"/>
-                      </a:solidFill>
-                      <a:prstDash val="solid"/>
-                      <a:round/>
-                      <a:headEnd type="none" w="med" len="med"/>
-                      <a:tailEnd type="none" w="med" len="med"/>
-                    </a:lnL>
-                    <a:lnR w="6350" cap="flat" cmpd="sng" algn="ctr">
-                      <a:solidFill>
-                        <a:srgbClr val="D5DCE2"/>
-                      </a:solidFill>
-                      <a:prstDash val="solid"/>
-                      <a:round/>
-                      <a:headEnd type="none" w="med" len="med"/>
-                      <a:tailEnd type="none" w="med" len="med"/>
-                    </a:lnR>
-                    <a:lnT w="6350" cap="flat" cmpd="sng" algn="ctr">
-                      <a:solidFill>
-                        <a:srgbClr val="D5DCE2"/>
-                      </a:solidFill>
-                      <a:prstDash val="solid"/>
-                      <a:round/>
-                      <a:headEnd type="none" w="med" len="med"/>
-                      <a:tailEnd type="none" w="med" len="med"/>
-                    </a:lnT>
-                    <a:lnB w="6350" cap="flat" cmpd="sng" algn="ctr">
-                      <a:solidFill>
-                        <a:srgbClr val="D5DCE2"/>
-                      </a:solidFill>
-                      <a:prstDash val="solid"/>
-                      <a:round/>
-                      <a:headEnd type="none" w="med" len="med"/>
-                      <a:tailEnd type="none" w="med" len="med"/>
-                    </a:lnB>
-                    <a:solidFill>
-                      <a:srgbClr val="FFFFFF"/>
-                    </a:solidFill>
-                  </a:tcPr>
-                </a:tc>
-              </a:tr>
-              <a:tr h="548640">
-                <a:tc>
-                  <a:txBody>
-                    <a:bodyPr/>
-                    <a:lstStyle/>
-                    <a:p>
-                      <a:pPr indent="0" marL="0">
-                        <a:buNone/>
-                      </a:pPr>
-                      <a:r>
-                        <a:rPr lang="en-US" sz="1200" b="1" dirty="0">
-                          <a:solidFill>
-                            <a:srgbClr val="1F2A33"/>
-                          </a:solidFill>
-                          <a:latin typeface="Calibri" pitchFamily="34" charset="0"/>
-                          <a:ea typeface="Calibri" pitchFamily="34" charset="-122"/>
-                          <a:cs typeface="Calibri" pitchFamily="34" charset="-120"/>
-                        </a:rPr>
-                        <a:t>Two PO lines with the same qty and price</a:t>
-                      </a:r>
-                      <a:endParaRPr lang="en-US" sz="1200" dirty="0">
-                        <a:latin typeface="Calibri" charset="0"/>
-                        <a:ea typeface="Calibri" charset="0"/>
-                        <a:cs typeface="Calibri" charset="0"/>
-                      </a:endParaRPr>
-                    </a:p>
-                  </a:txBody>
-                  <a:tcPr marL="45720" marR="45720" marT="45720" marB="45720" anchor="ctr">
-                    <a:lnL w="6350" cap="flat" cmpd="sng" algn="ctr">
-                      <a:solidFill>
-                        <a:srgbClr val="D5DCE2"/>
-                      </a:solidFill>
-                      <a:prstDash val="solid"/>
-                      <a:round/>
-                      <a:headEnd type="none" w="med" len="med"/>
-                      <a:tailEnd type="none" w="med" len="med"/>
-                    </a:lnL>
-                    <a:lnR w="6350" cap="flat" cmpd="sng" algn="ctr">
-                      <a:solidFill>
-                        <a:srgbClr val="D5DCE2"/>
-                      </a:solidFill>
-                      <a:prstDash val="solid"/>
-                      <a:round/>
-                      <a:headEnd type="none" w="med" len="med"/>
-                      <a:tailEnd type="none" w="med" len="med"/>
-                    </a:lnR>
-                    <a:lnT w="6350" cap="flat" cmpd="sng" algn="ctr">
-                      <a:solidFill>
-                        <a:srgbClr val="D5DCE2"/>
-                      </a:solidFill>
-                      <a:prstDash val="solid"/>
-                      <a:round/>
-                      <a:headEnd type="none" w="med" len="med"/>
-                      <a:tailEnd type="none" w="med" len="med"/>
-                    </a:lnT>
-                    <a:lnB w="6350" cap="flat" cmpd="sng" algn="ctr">
-                      <a:solidFill>
-                        <a:srgbClr val="D5DCE2"/>
-                      </a:solidFill>
-                      <a:prstDash val="solid"/>
-                      <a:round/>
-                      <a:headEnd type="none" w="med" len="med"/>
-                      <a:tailEnd type="none" w="med" len="med"/>
-                    </a:lnB>
-                    <a:solidFill>
-                      <a:srgbClr val="F6F8FA"/>
-                    </a:solidFill>
-                  </a:tcPr>
-                </a:tc>
-                <a:tc>
-                  <a:txBody>
-                    <a:bodyPr/>
-                    <a:lstStyle/>
-                    <a:p>
-                      <a:pPr indent="0" marL="0">
-                        <a:buNone/>
-                      </a:pPr>
-                      <a:r>
-                        <a:rPr lang="en-US" sz="1200" dirty="0">
-                          <a:solidFill>
-                            <a:srgbClr val="1F2A33"/>
-                          </a:solidFill>
-                          <a:latin typeface="Calibri" pitchFamily="34" charset="0"/>
-                          <a:ea typeface="Calibri" pitchFamily="34" charset="-122"/>
-                          <a:cs typeface="Calibri" pitchFamily="34" charset="-120"/>
-                        </a:rPr>
-                        <a:t>An L4 inference could pair the wrong lines</a:t>
-                      </a:r>
-                      <a:endParaRPr lang="en-US" sz="1200" dirty="0">
-                        <a:latin typeface="Calibri" charset="0"/>
-                        <a:ea typeface="Calibri" charset="0"/>
-                        <a:cs typeface="Calibri" charset="0"/>
-                      </a:endParaRPr>
-                    </a:p>
-                  </a:txBody>
-                  <a:tcPr marL="45720" marR="45720" marT="45720" marB="45720" anchor="ctr">
-                    <a:lnL w="6350" cap="flat" cmpd="sng" algn="ctr">
-                      <a:solidFill>
-                        <a:srgbClr val="D5DCE2"/>
-                      </a:solidFill>
-                      <a:prstDash val="solid"/>
-                      <a:round/>
-                      <a:headEnd type="none" w="med" len="med"/>
-                      <a:tailEnd type="none" w="med" len="med"/>
-                    </a:lnL>
-                    <a:lnR w="6350" cap="flat" cmpd="sng" algn="ctr">
-                      <a:solidFill>
-                        <a:srgbClr val="D5DCE2"/>
-                      </a:solidFill>
-                      <a:prstDash val="solid"/>
-                      <a:round/>
-                      <a:headEnd type="none" w="med" len="med"/>
-                      <a:tailEnd type="none" w="med" len="med"/>
-                    </a:lnR>
-                    <a:lnT w="6350" cap="flat" cmpd="sng" algn="ctr">
-                      <a:solidFill>
-                        <a:srgbClr val="D5DCE2"/>
-                      </a:solidFill>
-                      <a:prstDash val="solid"/>
-                      <a:round/>
-                      <a:headEnd type="none" w="med" len="med"/>
-                      <a:tailEnd type="none" w="med" len="med"/>
-                    </a:lnT>
-                    <a:lnB w="6350" cap="flat" cmpd="sng" algn="ctr">
-                      <a:solidFill>
-                        <a:srgbClr val="D5DCE2"/>
-                      </a:solidFill>
-                      <a:prstDash val="solid"/>
-                      <a:round/>
-                      <a:headEnd type="none" w="med" len="med"/>
-                      <a:tailEnd type="none" w="med" len="med"/>
-                    </a:lnB>
-                    <a:solidFill>
-                      <a:srgbClr val="F6F8FA"/>
-                    </a:solidFill>
-                  </a:tcPr>
-                </a:tc>
-                <a:tc>
-                  <a:txBody>
-                    <a:bodyPr/>
-                    <a:lstStyle/>
-                    <a:p>
-                      <a:pPr indent="0" marL="0">
-                        <a:buNone/>
-                      </a:pPr>
-                      <a:r>
-                        <a:rPr lang="en-US" sz="1200" dirty="0">
-                          <a:solidFill>
-                            <a:srgbClr val="1F2A33"/>
-                          </a:solidFill>
-                          <a:latin typeface="Calibri" pitchFamily="34" charset="0"/>
-                          <a:ea typeface="Calibri" pitchFamily="34" charset="-122"/>
-                          <a:cs typeface="Calibri" pitchFamily="34" charset="-120"/>
-                        </a:rPr>
-                        <a:t>L4 is never HIGH; always goes to review</a:t>
-                      </a:r>
-                      <a:endParaRPr lang="en-US" sz="1200" dirty="0">
-                        <a:latin typeface="Calibri" charset="0"/>
-                        <a:ea typeface="Calibri" charset="0"/>
-                        <a:cs typeface="Calibri" charset="0"/>
-                      </a:endParaRPr>
-                    </a:p>
-                  </a:txBody>
-                  <a:tcPr marL="45720" marR="45720" marT="45720" marB="45720" anchor="ctr">
-                    <a:lnL w="6350" cap="flat" cmpd="sng" algn="ctr">
-                      <a:solidFill>
-                        <a:srgbClr val="D5DCE2"/>
-                      </a:solidFill>
-                      <a:prstDash val="solid"/>
-                      <a:round/>
-                      <a:headEnd type="none" w="med" len="med"/>
-                      <a:tailEnd type="none" w="med" len="med"/>
-                    </a:lnL>
-                    <a:lnR w="6350" cap="flat" cmpd="sng" algn="ctr">
-                      <a:solidFill>
-                        <a:srgbClr val="D5DCE2"/>
-                      </a:solidFill>
-                      <a:prstDash val="solid"/>
-                      <a:round/>
-                      <a:headEnd type="none" w="med" len="med"/>
-                      <a:tailEnd type="none" w="med" len="med"/>
-                    </a:lnR>
-                    <a:lnT w="6350" cap="flat" cmpd="sng" algn="ctr">
-                      <a:solidFill>
-                        <a:srgbClr val="D5DCE2"/>
-                      </a:solidFill>
-                      <a:prstDash val="solid"/>
-                      <a:round/>
-                      <a:headEnd type="none" w="med" len="med"/>
-                      <a:tailEnd type="none" w="med" len="med"/>
-                    </a:lnT>
-                    <a:lnB w="6350" cap="flat" cmpd="sng" algn="ctr">
-                      <a:solidFill>
-                        <a:srgbClr val="D5DCE2"/>
-                      </a:solidFill>
-                      <a:prstDash val="solid"/>
-                      <a:round/>
-                      <a:headEnd type="none" w="med" len="med"/>
-                      <a:tailEnd type="none" w="med" len="med"/>
-                    </a:lnB>
-                    <a:solidFill>
-                      <a:srgbClr val="F6F8FA"/>
-                    </a:solidFill>
-                  </a:tcPr>
-                </a:tc>
-              </a:tr>
-              <a:tr h="548640">
-                <a:tc>
-                  <a:txBody>
-                    <a:bodyPr/>
-                    <a:lstStyle/>
-                    <a:p>
-                      <a:pPr indent="0" marL="0">
-                        <a:buNone/>
-                      </a:pPr>
-                      <a:r>
-                        <a:rPr lang="en-US" sz="1200" b="1" dirty="0">
-                          <a:solidFill>
-                            <a:srgbClr val="1F2A33"/>
-                          </a:solidFill>
-                          <a:latin typeface="Calibri" pitchFamily="34" charset="0"/>
-                          <a:ea typeface="Calibri" pitchFamily="34" charset="-122"/>
-                          <a:cs typeface="Calibri" pitchFamily="34" charset="-120"/>
-                        </a:rPr>
-                        <a:t>A stale open-PO CSV</a:t>
-                      </a:r>
-                      <a:endParaRPr lang="en-US" sz="1200" dirty="0">
-                        <a:latin typeface="Calibri" charset="0"/>
-                        <a:ea typeface="Calibri" charset="0"/>
-                        <a:cs typeface="Calibri" charset="0"/>
-                      </a:endParaRPr>
-                    </a:p>
-                  </a:txBody>
-                  <a:tcPr marL="45720" marR="45720" marT="45720" marB="45720" anchor="ctr">
-                    <a:lnL w="6350" cap="flat" cmpd="sng" algn="ctr">
-                      <a:solidFill>
-                        <a:srgbClr val="D5DCE2"/>
-                      </a:solidFill>
-                      <a:prstDash val="solid"/>
-                      <a:round/>
-                      <a:headEnd type="none" w="med" len="med"/>
-                      <a:tailEnd type="none" w="med" len="med"/>
-                    </a:lnL>
-                    <a:lnR w="6350" cap="flat" cmpd="sng" algn="ctr">
-                      <a:solidFill>
-                        <a:srgbClr val="D5DCE2"/>
-                      </a:solidFill>
-                      <a:prstDash val="solid"/>
-                      <a:round/>
-                      <a:headEnd type="none" w="med" len="med"/>
-                      <a:tailEnd type="none" w="med" len="med"/>
-                    </a:lnR>
-                    <a:lnT w="6350" cap="flat" cmpd="sng" algn="ctr">
-                      <a:solidFill>
-                        <a:srgbClr val="D5DCE2"/>
-                      </a:solidFill>
-                      <a:prstDash val="solid"/>
-                      <a:round/>
-                      <a:headEnd type="none" w="med" len="med"/>
-                      <a:tailEnd type="none" w="med" len="med"/>
-                    </a:lnT>
-                    <a:lnB w="6350" cap="flat" cmpd="sng" algn="ctr">
-                      <a:solidFill>
-                        <a:srgbClr val="D5DCE2"/>
-                      </a:solidFill>
-                      <a:prstDash val="solid"/>
-                      <a:round/>
-                      <a:headEnd type="none" w="med" len="med"/>
-                      <a:tailEnd type="none" w="med" len="med"/>
-                    </a:lnB>
-                    <a:solidFill>
-                      <a:srgbClr val="FFFFFF"/>
-                    </a:solidFill>
-                  </a:tcPr>
-                </a:tc>
-                <a:tc>
-                  <a:txBody>
-                    <a:bodyPr/>
-                    <a:lstStyle/>
-                    <a:p>
-                      <a:pPr indent="0" marL="0">
-                        <a:buNone/>
-                      </a:pPr>
-                      <a:r>
-                        <a:rPr lang="en-US" sz="1200" dirty="0">
-                          <a:solidFill>
-                            <a:srgbClr val="1F2A33"/>
-                          </a:solidFill>
-                          <a:latin typeface="Calibri" pitchFamily="34" charset="0"/>
-                          <a:ea typeface="Calibri" pitchFamily="34" charset="-122"/>
-                          <a:cs typeface="Calibri" pitchFamily="34" charset="-120"/>
-                        </a:rPr>
-                        <a:t>False "PO not open" or "possible dropped line"</a:t>
-                      </a:r>
-                      <a:endParaRPr lang="en-US" sz="1200" dirty="0">
-                        <a:latin typeface="Calibri" charset="0"/>
-                        <a:ea typeface="Calibri" charset="0"/>
-                        <a:cs typeface="Calibri" charset="0"/>
-                      </a:endParaRPr>
-                    </a:p>
-                  </a:txBody>
-                  <a:tcPr marL="45720" marR="45720" marT="45720" marB="45720" anchor="ctr">
-                    <a:lnL w="6350" cap="flat" cmpd="sng" algn="ctr">
-                      <a:solidFill>
-                        <a:srgbClr val="D5DCE2"/>
-                      </a:solidFill>
-                      <a:prstDash val="solid"/>
-                      <a:round/>
-                      <a:headEnd type="none" w="med" len="med"/>
-                      <a:tailEnd type="none" w="med" len="med"/>
-                    </a:lnL>
-                    <a:lnR w="6350" cap="flat" cmpd="sng" algn="ctr">
-                      <a:solidFill>
-                        <a:srgbClr val="D5DCE2"/>
-                      </a:solidFill>
-                      <a:prstDash val="solid"/>
-                      <a:round/>
-                      <a:headEnd type="none" w="med" len="med"/>
-                      <a:tailEnd type="none" w="med" len="med"/>
-                    </a:lnR>
-                    <a:lnT w="6350" cap="flat" cmpd="sng" algn="ctr">
-                      <a:solidFill>
-                        <a:srgbClr val="D5DCE2"/>
-                      </a:solidFill>
-                      <a:prstDash val="solid"/>
-                      <a:round/>
-                      <a:headEnd type="none" w="med" len="med"/>
-                      <a:tailEnd type="none" w="med" len="med"/>
-                    </a:lnT>
-                    <a:lnB w="6350" cap="flat" cmpd="sng" algn="ctr">
-                      <a:solidFill>
-                        <a:srgbClr val="D5DCE2"/>
-                      </a:solidFill>
-                      <a:prstDash val="solid"/>
-                      <a:round/>
-                      <a:headEnd type="none" w="med" len="med"/>
-                      <a:tailEnd type="none" w="med" len="med"/>
-                    </a:lnB>
-                    <a:solidFill>
-                      <a:srgbClr val="FFFFFF"/>
-                    </a:solidFill>
-                  </a:tcPr>
-                </a:tc>
-                <a:tc>
-                  <a:txBody>
-                    <a:bodyPr/>
-                    <a:lstStyle/>
-                    <a:p>
-                      <a:pPr indent="0" marL="0">
-                        <a:buNone/>
-                      </a:pPr>
-                      <a:r>
-                        <a:rPr lang="en-US" sz="1200" dirty="0">
-                          <a:solidFill>
-                            <a:srgbClr val="1F2A33"/>
-                          </a:solidFill>
-                          <a:latin typeface="Calibri" pitchFamily="34" charset="0"/>
-                          <a:ea typeface="Calibri" pitchFamily="34" charset="-122"/>
-                          <a:cs typeface="Calibri" pitchFamily="34" charset="-120"/>
-                        </a:rPr>
-                        <a:t>Pull the export each morning; show its as-of date</a:t>
-                      </a:r>
-                      <a:endParaRPr lang="en-US" sz="1200" dirty="0">
-                        <a:latin typeface="Calibri" charset="0"/>
-                        <a:ea typeface="Calibri" charset="0"/>
-                        <a:cs typeface="Calibri" charset="0"/>
-                      </a:endParaRPr>
-                    </a:p>
-                  </a:txBody>
-                  <a:tcPr marL="45720" marR="45720" marT="45720" marB="45720" anchor="ctr">
-                    <a:lnL w="6350" cap="flat" cmpd="sng" algn="ctr">
-                      <a:solidFill>
-                        <a:srgbClr val="D5DCE2"/>
-                      </a:solidFill>
-                      <a:prstDash val="solid"/>
-                      <a:round/>
-                      <a:headEnd type="none" w="med" len="med"/>
-                      <a:tailEnd type="none" w="med" len="med"/>
-                    </a:lnL>
-                    <a:lnR w="6350" cap="flat" cmpd="sng" algn="ctr">
-                      <a:solidFill>
-                        <a:srgbClr val="D5DCE2"/>
-                      </a:solidFill>
-                      <a:prstDash val="solid"/>
-                      <a:round/>
-                      <a:headEnd type="none" w="med" len="med"/>
-                      <a:tailEnd type="none" w="med" len="med"/>
-                    </a:lnR>
-                    <a:lnT w="6350" cap="flat" cmpd="sng" algn="ctr">
-                      <a:solidFill>
-                        <a:srgbClr val="D5DCE2"/>
-                      </a:solidFill>
-                      <a:prstDash val="solid"/>
-                      <a:round/>
-                      <a:headEnd type="none" w="med" len="med"/>
-                      <a:tailEnd type="none" w="med" len="med"/>
-                    </a:lnT>
-                    <a:lnB w="6350" cap="flat" cmpd="sng" algn="ctr">
-                      <a:solidFill>
-                        <a:srgbClr val="D5DCE2"/>
-                      </a:solidFill>
-                      <a:prstDash val="solid"/>
-                      <a:round/>
-                      <a:headEnd type="none" w="med" len="med"/>
-                      <a:tailEnd type="none" w="med" len="med"/>
-                    </a:lnB>
-                    <a:solidFill>
-                      <a:srgbClr val="FFFFFF"/>
-                    </a:solidFill>
-                  </a:tcPr>
-                </a:tc>
-              </a:tr>
-              <a:tr h="548640">
-                <a:tc>
-                  <a:txBody>
-                    <a:bodyPr/>
-                    <a:lstStyle/>
-                    <a:p>
-                      <a:pPr indent="0" marL="0">
-                        <a:buNone/>
-                      </a:pPr>
-                      <a:r>
-                        <a:rPr lang="en-US" sz="1200" b="1" dirty="0">
-                          <a:solidFill>
-                            <a:srgbClr val="1F2A33"/>
-                          </a:solidFill>
-                          <a:latin typeface="Calibri" pitchFamily="34" charset="0"/>
-                          <a:ea typeface="Calibri" pitchFamily="34" charset="-122"/>
-                          <a:cs typeface="Calibri" pitchFamily="34" charset="-120"/>
-                        </a:rPr>
-                        <a:t>FX and price tolerance</a:t>
-                      </a:r>
-                      <a:endParaRPr lang="en-US" sz="1200" dirty="0">
-                        <a:latin typeface="Calibri" charset="0"/>
-                        <a:ea typeface="Calibri" charset="0"/>
-                        <a:cs typeface="Calibri" charset="0"/>
-                      </a:endParaRPr>
-                    </a:p>
-                  </a:txBody>
-                  <a:tcPr marL="45720" marR="45720" marT="45720" marB="45720" anchor="ctr">
-                    <a:lnL w="6350" cap="flat" cmpd="sng" algn="ctr">
-                      <a:solidFill>
-                        <a:srgbClr val="D5DCE2"/>
-                      </a:solidFill>
-                      <a:prstDash val="solid"/>
-                      <a:round/>
-                      <a:headEnd type="none" w="med" len="med"/>
-                      <a:tailEnd type="none" w="med" len="med"/>
-                    </a:lnL>
-                    <a:lnR w="6350" cap="flat" cmpd="sng" algn="ctr">
-                      <a:solidFill>
-                        <a:srgbClr val="D5DCE2"/>
-                      </a:solidFill>
-                      <a:prstDash val="solid"/>
-                      <a:round/>
-                      <a:headEnd type="none" w="med" len="med"/>
-                      <a:tailEnd type="none" w="med" len="med"/>
-                    </a:lnR>
-                    <a:lnT w="6350" cap="flat" cmpd="sng" algn="ctr">
-                      <a:solidFill>
-                        <a:srgbClr val="D5DCE2"/>
-                      </a:solidFill>
-                      <a:prstDash val="solid"/>
-                      <a:round/>
-                      <a:headEnd type="none" w="med" len="med"/>
-                      <a:tailEnd type="none" w="med" len="med"/>
-                    </a:lnT>
-                    <a:lnB w="6350" cap="flat" cmpd="sng" algn="ctr">
-                      <a:solidFill>
-                        <a:srgbClr val="D5DCE2"/>
-                      </a:solidFill>
-                      <a:prstDash val="solid"/>
-                      <a:round/>
-                      <a:headEnd type="none" w="med" len="med"/>
-                      <a:tailEnd type="none" w="med" len="med"/>
-                    </a:lnB>
-                    <a:solidFill>
-                      <a:srgbClr val="F6F8FA"/>
-                    </a:solidFill>
-                  </a:tcPr>
-                </a:tc>
-                <a:tc>
-                  <a:txBody>
-                    <a:bodyPr/>
-                    <a:lstStyle/>
-                    <a:p>
-                      <a:pPr indent="0" marL="0">
-                        <a:buNone/>
-                      </a:pPr>
-                      <a:r>
-                        <a:rPr lang="en-US" sz="1200" dirty="0">
-                          <a:solidFill>
-                            <a:srgbClr val="1F2A33"/>
-                          </a:solidFill>
-                          <a:latin typeface="Calibri" pitchFamily="34" charset="0"/>
-                          <a:ea typeface="Calibri" pitchFamily="34" charset="-122"/>
-                          <a:cs typeface="Calibri" pitchFamily="34" charset="-120"/>
-                        </a:rPr>
-                        <a:t>EUR checked at the ERP monthly rate, 1% band</a:t>
-                      </a:r>
-                      <a:endParaRPr lang="en-US" sz="1200" dirty="0">
-                        <a:latin typeface="Calibri" charset="0"/>
-                        <a:ea typeface="Calibri" charset="0"/>
-                        <a:cs typeface="Calibri" charset="0"/>
-                      </a:endParaRPr>
-                    </a:p>
-                  </a:txBody>
-                  <a:tcPr marL="45720" marR="45720" marT="45720" marB="45720" anchor="ctr">
-                    <a:lnL w="6350" cap="flat" cmpd="sng" algn="ctr">
-                      <a:solidFill>
-                        <a:srgbClr val="D5DCE2"/>
-                      </a:solidFill>
-                      <a:prstDash val="solid"/>
-                      <a:round/>
-                      <a:headEnd type="none" w="med" len="med"/>
-                      <a:tailEnd type="none" w="med" len="med"/>
-                    </a:lnL>
-                    <a:lnR w="6350" cap="flat" cmpd="sng" algn="ctr">
-                      <a:solidFill>
-                        <a:srgbClr val="D5DCE2"/>
-                      </a:solidFill>
-                      <a:prstDash val="solid"/>
-                      <a:round/>
-                      <a:headEnd type="none" w="med" len="med"/>
-                      <a:tailEnd type="none" w="med" len="med"/>
-                    </a:lnR>
-                    <a:lnT w="6350" cap="flat" cmpd="sng" algn="ctr">
-                      <a:solidFill>
-                        <a:srgbClr val="D5DCE2"/>
-                      </a:solidFill>
-                      <a:prstDash val="solid"/>
-                      <a:round/>
-                      <a:headEnd type="none" w="med" len="med"/>
-                      <a:tailEnd type="none" w="med" len="med"/>
-                    </a:lnT>
-                    <a:lnB w="6350" cap="flat" cmpd="sng" algn="ctr">
-                      <a:solidFill>
-                        <a:srgbClr val="D5DCE2"/>
-                      </a:solidFill>
-                      <a:prstDash val="solid"/>
-                      <a:round/>
-                      <a:headEnd type="none" w="med" len="med"/>
-                      <a:tailEnd type="none" w="med" len="med"/>
-                    </a:lnB>
-                    <a:solidFill>
-                      <a:srgbClr val="F6F8FA"/>
-                    </a:solidFill>
-                  </a:tcPr>
-                </a:tc>
-                <a:tc>
-                  <a:txBody>
-                    <a:bodyPr/>
-                    <a:lstStyle/>
-                    <a:p>
-                      <a:pPr indent="0" marL="0">
-                        <a:buNone/>
-                      </a:pPr>
-                      <a:r>
-                        <a:rPr lang="en-US" sz="1200" dirty="0">
-                          <a:solidFill>
-                            <a:srgbClr val="1F2A33"/>
-                          </a:solidFill>
-                          <a:latin typeface="Calibri" pitchFamily="34" charset="0"/>
-                          <a:ea typeface="Calibri" pitchFamily="34" charset="-122"/>
-                          <a:cs typeface="Calibri" pitchFamily="34" charset="-120"/>
-                        </a:rPr>
-                        <a:t>Confirm with Lisa and AP what counts as a real difference</a:t>
-                      </a:r>
-                      <a:endParaRPr lang="en-US" sz="1200" dirty="0">
-                        <a:latin typeface="Calibri" charset="0"/>
-                        <a:ea typeface="Calibri" charset="0"/>
-                        <a:cs typeface="Calibri" charset="0"/>
-                      </a:endParaRPr>
-                    </a:p>
-                  </a:txBody>
-                  <a:tcPr marL="45720" marR="45720" marT="45720" marB="45720" anchor="ctr">
-                    <a:lnL w="6350" cap="flat" cmpd="sng" algn="ctr">
-                      <a:solidFill>
-                        <a:srgbClr val="D5DCE2"/>
-                      </a:solidFill>
-                      <a:prstDash val="solid"/>
-                      <a:round/>
-                      <a:headEnd type="none" w="med" len="med"/>
-                      <a:tailEnd type="none" w="med" len="med"/>
-                    </a:lnL>
-                    <a:lnR w="6350" cap="flat" cmpd="sng" algn="ctr">
-                      <a:solidFill>
-                        <a:srgbClr val="D5DCE2"/>
-                      </a:solidFill>
-                      <a:prstDash val="solid"/>
-                      <a:round/>
-                      <a:headEnd type="none" w="med" len="med"/>
-                      <a:tailEnd type="none" w="med" len="med"/>
-                    </a:lnR>
-                    <a:lnT w="6350" cap="flat" cmpd="sng" algn="ctr">
-                      <a:solidFill>
-                        <a:srgbClr val="D5DCE2"/>
-                      </a:solidFill>
-                      <a:prstDash val="solid"/>
-                      <a:round/>
-                      <a:headEnd type="none" w="med" len="med"/>
-                      <a:tailEnd type="none" w="med" len="med"/>
-                    </a:lnT>
-                    <a:lnB w="6350" cap="flat" cmpd="sng" algn="ctr">
-                      <a:solidFill>
-                        <a:srgbClr val="D5DCE2"/>
-                      </a:solidFill>
-                      <a:prstDash val="solid"/>
-                      <a:round/>
-                      <a:headEnd type="none" w="med" len="med"/>
-                      <a:tailEnd type="none" w="med" len="med"/>
-                    </a:lnB>
-                    <a:solidFill>
-                      <a:srgbClr val="F6F8FA"/>
-                    </a:solidFill>
-                  </a:tcPr>
-                </a:tc>
-              </a:tr>
-              <a:tr h="548640">
-                <a:tc>
-                  <a:txBody>
-                    <a:bodyPr/>
-                    <a:lstStyle/>
-                    <a:p>
-                      <a:pPr indent="0" marL="0">
-                        <a:buNone/>
-                      </a:pPr>
-                      <a:r>
-                        <a:rPr lang="en-US" sz="1200" b="1" dirty="0">
-                          <a:solidFill>
-                            <a:srgbClr val="1F2A33"/>
-                          </a:solidFill>
-                          <a:latin typeface="Calibri" pitchFamily="34" charset="0"/>
-                          <a:ea typeface="Calibri" pitchFamily="34" charset="-122"/>
-                          <a:cs typeface="Calibri" pitchFamily="34" charset="-120"/>
-                        </a:rPr>
-                        <a:t>Task 2: value at PO price</a:t>
-                      </a:r>
-                      <a:endParaRPr lang="en-US" sz="1200" dirty="0">
-                        <a:latin typeface="Calibri" charset="0"/>
-                        <a:ea typeface="Calibri" charset="0"/>
-                        <a:cs typeface="Calibri" charset="0"/>
-                      </a:endParaRPr>
-                    </a:p>
-                  </a:txBody>
-                  <a:tcPr marL="45720" marR="45720" marT="45720" marB="45720" anchor="ctr">
-                    <a:lnL w="6350" cap="flat" cmpd="sng" algn="ctr">
-                      <a:solidFill>
-                        <a:srgbClr val="D5DCE2"/>
-                      </a:solidFill>
-                      <a:prstDash val="solid"/>
-                      <a:round/>
-                      <a:headEnd type="none" w="med" len="med"/>
-                      <a:tailEnd type="none" w="med" len="med"/>
-                    </a:lnL>
-                    <a:lnR w="6350" cap="flat" cmpd="sng" algn="ctr">
-                      <a:solidFill>
-                        <a:srgbClr val="D5DCE2"/>
-                      </a:solidFill>
-                      <a:prstDash val="solid"/>
-                      <a:round/>
-                      <a:headEnd type="none" w="med" len="med"/>
-                      <a:tailEnd type="none" w="med" len="med"/>
-                    </a:lnR>
-                    <a:lnT w="6350" cap="flat" cmpd="sng" algn="ctr">
-                      <a:solidFill>
-                        <a:srgbClr val="D5DCE2"/>
-                      </a:solidFill>
-                      <a:prstDash val="solid"/>
-                      <a:round/>
-                      <a:headEnd type="none" w="med" len="med"/>
-                      <a:tailEnd type="none" w="med" len="med"/>
-                    </a:lnT>
-                    <a:lnB w="6350" cap="flat" cmpd="sng" algn="ctr">
-                      <a:solidFill>
-                        <a:srgbClr val="D5DCE2"/>
-                      </a:solidFill>
-                      <a:prstDash val="solid"/>
-                      <a:round/>
-                      <a:headEnd type="none" w="med" len="med"/>
-                      <a:tailEnd type="none" w="med" len="med"/>
-                    </a:lnB>
-                    <a:solidFill>
-                      <a:srgbClr val="FFFFFF"/>
-                    </a:solidFill>
-                  </a:tcPr>
-                </a:tc>
-                <a:tc>
-                  <a:txBody>
-                    <a:bodyPr/>
-                    <a:lstStyle/>
-                    <a:p>
-                      <a:pPr indent="0" marL="0">
-                        <a:buNone/>
-                      </a:pPr>
-                      <a:r>
-                        <a:rPr lang="en-US" sz="1200" dirty="0">
-                          <a:solidFill>
-                            <a:srgbClr val="1F2A33"/>
-                          </a:solidFill>
-                          <a:latin typeface="Calibri" pitchFamily="34" charset="0"/>
-                          <a:ea typeface="Calibri" pitchFamily="34" charset="-122"/>
-                          <a:cs typeface="Calibri" pitchFamily="34" charset="-120"/>
-                        </a:rPr>
-                        <a:t>Not invoiced cost; no AP data in the extract</a:t>
-                      </a:r>
-                      <a:endParaRPr lang="en-US" sz="1200" dirty="0">
-                        <a:latin typeface="Calibri" charset="0"/>
-                        <a:ea typeface="Calibri" charset="0"/>
-                        <a:cs typeface="Calibri" charset="0"/>
-                      </a:endParaRPr>
-                    </a:p>
-                  </a:txBody>
-                  <a:tcPr marL="45720" marR="45720" marT="45720" marB="45720" anchor="ctr">
-                    <a:lnL w="6350" cap="flat" cmpd="sng" algn="ctr">
-                      <a:solidFill>
-                        <a:srgbClr val="D5DCE2"/>
-                      </a:solidFill>
-                      <a:prstDash val="solid"/>
-                      <a:round/>
-                      <a:headEnd type="none" w="med" len="med"/>
-                      <a:tailEnd type="none" w="med" len="med"/>
-                    </a:lnL>
-                    <a:lnR w="6350" cap="flat" cmpd="sng" algn="ctr">
-                      <a:solidFill>
-                        <a:srgbClr val="D5DCE2"/>
-                      </a:solidFill>
-                      <a:prstDash val="solid"/>
-                      <a:round/>
-                      <a:headEnd type="none" w="med" len="med"/>
-                      <a:tailEnd type="none" w="med" len="med"/>
-                    </a:lnR>
-                    <a:lnT w="6350" cap="flat" cmpd="sng" algn="ctr">
-                      <a:solidFill>
-                        <a:srgbClr val="D5DCE2"/>
-                      </a:solidFill>
-                      <a:prstDash val="solid"/>
-                      <a:round/>
-                      <a:headEnd type="none" w="med" len="med"/>
-                      <a:tailEnd type="none" w="med" len="med"/>
-                    </a:lnT>
-                    <a:lnB w="6350" cap="flat" cmpd="sng" algn="ctr">
-                      <a:solidFill>
-                        <a:srgbClr val="D5DCE2"/>
-                      </a:solidFill>
-                      <a:prstDash val="solid"/>
-                      <a:round/>
-                      <a:headEnd type="none" w="med" len="med"/>
-                      <a:tailEnd type="none" w="med" len="med"/>
-                    </a:lnB>
-                    <a:solidFill>
-                      <a:srgbClr val="FFFFFF"/>
-                    </a:solidFill>
-                  </a:tcPr>
-                </a:tc>
-                <a:tc>
-                  <a:txBody>
-                    <a:bodyPr/>
-                    <a:lstStyle/>
-                    <a:p>
-                      <a:pPr indent="0" marL="0">
-                        <a:buNone/>
-                      </a:pPr>
-                      <a:r>
-                        <a:rPr lang="en-US" sz="1200" dirty="0">
-                          <a:solidFill>
-                            <a:srgbClr val="1F2A33"/>
-                          </a:solidFill>
-                          <a:latin typeface="Calibri" pitchFamily="34" charset="0"/>
-                          <a:ea typeface="Calibri" pitchFamily="34" charset="-122"/>
-                          <a:cs typeface="Calibri" pitchFamily="34" charset="-120"/>
-                        </a:rPr>
-                        <a:t>Add invoice lines, then true price variance</a:t>
-                      </a:r>
-                      <a:endParaRPr lang="en-US" sz="1200" dirty="0">
-                        <a:latin typeface="Calibri" charset="0"/>
-                        <a:ea typeface="Calibri" charset="0"/>
-                        <a:cs typeface="Calibri" charset="0"/>
-                      </a:endParaRPr>
-                    </a:p>
-                  </a:txBody>
-                  <a:tcPr marL="45720" marR="45720" marT="45720" marB="45720" anchor="ctr">
-                    <a:lnL w="6350" cap="flat" cmpd="sng" algn="ctr">
-                      <a:solidFill>
-                        <a:srgbClr val="D5DCE2"/>
-                      </a:solidFill>
-                      <a:prstDash val="solid"/>
-                      <a:round/>
-                      <a:headEnd type="none" w="med" len="med"/>
-                      <a:tailEnd type="none" w="med" len="med"/>
-                    </a:lnL>
-                    <a:lnR w="6350" cap="flat" cmpd="sng" algn="ctr">
-                      <a:solidFill>
-                        <a:srgbClr val="D5DCE2"/>
-                      </a:solidFill>
-                      <a:prstDash val="solid"/>
-                      <a:round/>
-                      <a:headEnd type="none" w="med" len="med"/>
-                      <a:tailEnd type="none" w="med" len="med"/>
-                    </a:lnR>
-                    <a:lnT w="6350" cap="flat" cmpd="sng" algn="ctr">
-                      <a:solidFill>
-                        <a:srgbClr val="D5DCE2"/>
-                      </a:solidFill>
-                      <a:prstDash val="solid"/>
-                      <a:round/>
-                      <a:headEnd type="none" w="med" len="med"/>
-                      <a:tailEnd type="none" w="med" len="med"/>
-                    </a:lnT>
-                    <a:lnB w="6350" cap="flat" cmpd="sng" algn="ctr">
-                      <a:solidFill>
-                        <a:srgbClr val="D5DCE2"/>
-                      </a:solidFill>
-                      <a:prstDash val="solid"/>
-                      <a:round/>
-                      <a:headEnd type="none" w="med" len="med"/>
-                      <a:tailEnd type="none" w="med" len="med"/>
-                    </a:lnB>
-                    <a:solidFill>
-                      <a:srgbClr val="FFFFFF"/>
-                    </a:solidFill>
-                  </a:tcPr>
-                </a:tc>
-              </a:tr>
-              <a:tr h="548640">
-                <a:tc>
-                  <a:txBody>
-                    <a:bodyPr/>
-                    <a:lstStyle/>
-                    <a:p>
-                      <a:pPr indent="0" marL="0">
-                        <a:buNone/>
-                      </a:pPr>
-                      <a:r>
-                        <a:rPr lang="en-US" sz="1200" b="1" dirty="0">
-                          <a:solidFill>
-                            <a:srgbClr val="1F2A33"/>
-                          </a:solidFill>
-                          <a:latin typeface="Calibri" pitchFamily="34" charset="0"/>
-                          <a:ea typeface="Calibri" pitchFamily="34" charset="-122"/>
-                          <a:cs typeface="Calibri" pitchFamily="34" charset="-120"/>
-                        </a:rPr>
-                        <a:t>Task 2: the confirmation feed ends 04/03</a:t>
-                      </a:r>
-                      <a:endParaRPr lang="en-US" sz="1200" dirty="0">
-                        <a:latin typeface="Calibri" charset="0"/>
-                        <a:ea typeface="Calibri" charset="0"/>
-                        <a:cs typeface="Calibri" charset="0"/>
-                      </a:endParaRPr>
-                    </a:p>
-                  </a:txBody>
-                  <a:tcPr marL="45720" marR="45720" marT="45720" marB="45720" anchor="ctr">
-                    <a:lnL w="6350" cap="flat" cmpd="sng" algn="ctr">
-                      <a:solidFill>
-                        <a:srgbClr val="D5DCE2"/>
-                      </a:solidFill>
-                      <a:prstDash val="solid"/>
-                      <a:round/>
-                      <a:headEnd type="none" w="med" len="med"/>
-                      <a:tailEnd type="none" w="med" len="med"/>
-                    </a:lnL>
-                    <a:lnR w="6350" cap="flat" cmpd="sng" algn="ctr">
-                      <a:solidFill>
-                        <a:srgbClr val="D5DCE2"/>
-                      </a:solidFill>
-                      <a:prstDash val="solid"/>
-                      <a:round/>
-                      <a:headEnd type="none" w="med" len="med"/>
-                      <a:tailEnd type="none" w="med" len="med"/>
-                    </a:lnR>
-                    <a:lnT w="6350" cap="flat" cmpd="sng" algn="ctr">
-                      <a:solidFill>
-                        <a:srgbClr val="D5DCE2"/>
-                      </a:solidFill>
-                      <a:prstDash val="solid"/>
-                      <a:round/>
-                      <a:headEnd type="none" w="med" len="med"/>
-                      <a:tailEnd type="none" w="med" len="med"/>
-                    </a:lnT>
-                    <a:lnB w="6350" cap="flat" cmpd="sng" algn="ctr">
-                      <a:solidFill>
-                        <a:srgbClr val="D5DCE2"/>
-                      </a:solidFill>
-                      <a:prstDash val="solid"/>
-                      <a:round/>
-                      <a:headEnd type="none" w="med" len="med"/>
-                      <a:tailEnd type="none" w="med" len="med"/>
-                    </a:lnB>
-                    <a:solidFill>
-                      <a:srgbClr val="F6F8FA"/>
-                    </a:solidFill>
-                  </a:tcPr>
-                </a:tc>
-                <a:tc>
-                  <a:txBody>
-                    <a:bodyPr/>
-                    <a:lstStyle/>
-                    <a:p>
-                      <a:pPr indent="0" marL="0">
-                        <a:buNone/>
-                      </a:pPr>
-                      <a:r>
-                        <a:rPr lang="en-US" sz="1200" dirty="0">
-                          <a:solidFill>
-                            <a:srgbClr val="1F2A33"/>
-                          </a:solidFill>
-                          <a:latin typeface="Calibri" pitchFamily="34" charset="0"/>
-                          <a:ea typeface="Calibri" pitchFamily="34" charset="-122"/>
-                          <a:cs typeface="Calibri" pitchFamily="34" charset="-120"/>
-                        </a:rPr>
-                        <a:t>Promise metrics use POs to 03/30 only</a:t>
-                      </a:r>
-                      <a:endParaRPr lang="en-US" sz="1200" dirty="0">
-                        <a:latin typeface="Calibri" charset="0"/>
-                        <a:ea typeface="Calibri" charset="0"/>
-                        <a:cs typeface="Calibri" charset="0"/>
-                      </a:endParaRPr>
-                    </a:p>
-                  </a:txBody>
-                  <a:tcPr marL="45720" marR="45720" marT="45720" marB="45720" anchor="ctr">
-                    <a:lnL w="6350" cap="flat" cmpd="sng" algn="ctr">
-                      <a:solidFill>
-                        <a:srgbClr val="D5DCE2"/>
-                      </a:solidFill>
-                      <a:prstDash val="solid"/>
-                      <a:round/>
-                      <a:headEnd type="none" w="med" len="med"/>
-                      <a:tailEnd type="none" w="med" len="med"/>
-                    </a:lnL>
-                    <a:lnR w="6350" cap="flat" cmpd="sng" algn="ctr">
-                      <a:solidFill>
-                        <a:srgbClr val="D5DCE2"/>
-                      </a:solidFill>
-                      <a:prstDash val="solid"/>
-                      <a:round/>
-                      <a:headEnd type="none" w="med" len="med"/>
-                      <a:tailEnd type="none" w="med" len="med"/>
-                    </a:lnR>
-                    <a:lnT w="6350" cap="flat" cmpd="sng" algn="ctr">
-                      <a:solidFill>
-                        <a:srgbClr val="D5DCE2"/>
-                      </a:solidFill>
-                      <a:prstDash val="solid"/>
-                      <a:round/>
-                      <a:headEnd type="none" w="med" len="med"/>
-                      <a:tailEnd type="none" w="med" len="med"/>
-                    </a:lnT>
-                    <a:lnB w="6350" cap="flat" cmpd="sng" algn="ctr">
-                      <a:solidFill>
-                        <a:srgbClr val="D5DCE2"/>
-                      </a:solidFill>
-                      <a:prstDash val="solid"/>
-                      <a:round/>
-                      <a:headEnd type="none" w="med" len="med"/>
-                      <a:tailEnd type="none" w="med" len="med"/>
-                    </a:lnB>
-                    <a:solidFill>
-                      <a:srgbClr val="F6F8FA"/>
-                    </a:solidFill>
-                  </a:tcPr>
-                </a:tc>
-                <a:tc>
-                  <a:txBody>
-                    <a:bodyPr/>
-                    <a:lstStyle/>
-                    <a:p>
-                      <a:pPr indent="0" marL="0">
-                        <a:buNone/>
-                      </a:pPr>
-                      <a:r>
-                        <a:rPr lang="en-US" sz="1200" dirty="0">
-                          <a:solidFill>
-                            <a:srgbClr val="1F2A33"/>
-                          </a:solidFill>
-                          <a:latin typeface="Calibri" pitchFamily="34" charset="0"/>
-                          <a:ea typeface="Calibri" pitchFamily="34" charset="-122"/>
-                          <a:cs typeface="Calibri" pitchFamily="34" charset="-120"/>
-                        </a:rPr>
-                        <a:t>Ask why the feed stopped</a:t>
-                      </a:r>
-                      <a:endParaRPr lang="en-US" sz="1200" dirty="0">
-                        <a:latin typeface="Calibri" charset="0"/>
-                        <a:ea typeface="Calibri" charset="0"/>
-                        <a:cs typeface="Calibri" charset="0"/>
-                      </a:endParaRPr>
-                    </a:p>
-                  </a:txBody>
-                  <a:tcPr marL="45720" marR="45720" marT="45720" marB="45720" anchor="ctr">
-                    <a:lnL w="6350" cap="flat" cmpd="sng" algn="ctr">
-                      <a:solidFill>
-                        <a:srgbClr val="D5DCE2"/>
-                      </a:solidFill>
-                      <a:prstDash val="solid"/>
-                      <a:round/>
-                      <a:headEnd type="none" w="med" len="med"/>
-                      <a:tailEnd type="none" w="med" len="med"/>
-                    </a:lnL>
-                    <a:lnR w="6350" cap="flat" cmpd="sng" algn="ctr">
-                      <a:solidFill>
-                        <a:srgbClr val="D5DCE2"/>
-                      </a:solidFill>
-                      <a:prstDash val="solid"/>
-                      <a:round/>
-                      <a:headEnd type="none" w="med" len="med"/>
-                      <a:tailEnd type="none" w="med" len="med"/>
-                    </a:lnR>
-                    <a:lnT w="6350" cap="flat" cmpd="sng" algn="ctr">
-                      <a:solidFill>
-                        <a:srgbClr val="D5DCE2"/>
-                      </a:solidFill>
-                      <a:prstDash val="solid"/>
-                      <a:round/>
-                      <a:headEnd type="none" w="med" len="med"/>
-                      <a:tailEnd type="none" w="med" len="med"/>
-                    </a:lnT>
-                    <a:lnB w="6350" cap="flat" cmpd="sng" algn="ctr">
-                      <a:solidFill>
-                        <a:srgbClr val="D5DCE2"/>
-                      </a:solidFill>
-                      <a:prstDash val="solid"/>
-                      <a:round/>
-                      <a:headEnd type="none" w="med" len="med"/>
-                      <a:tailEnd type="none" w="med" len="med"/>
-                    </a:lnB>
-                    <a:solidFill>
-                      <a:srgbClr val="F6F8FA"/>
-                    </a:solidFill>
-                  </a:tcPr>
-                </a:tc>
-              </a:tr>
-              <a:tr h="548640">
-                <a:tc>
-                  <a:txBody>
-                    <a:bodyPr/>
-                    <a:lstStyle/>
-                    <a:p>
-                      <a:pPr indent="0" marL="0">
-                        <a:buNone/>
-                      </a:pPr>
-                      <a:r>
-                        <a:rPr lang="en-US" sz="1200" b="1" dirty="0">
-                          <a:solidFill>
-                            <a:srgbClr val="1F2A33"/>
-                          </a:solidFill>
-                          <a:latin typeface="Calibri" pitchFamily="34" charset="0"/>
-                          <a:ea typeface="Calibri" pitchFamily="34" charset="-122"/>
-                          <a:cs typeface="Calibri" pitchFamily="34" charset="-120"/>
-                        </a:rPr>
-                        <a:t>Task 2: no production-impact data</a:t>
-                      </a:r>
-                      <a:endParaRPr lang="en-US" sz="1200" dirty="0">
-                        <a:latin typeface="Calibri" charset="0"/>
-                        <a:ea typeface="Calibri" charset="0"/>
-                        <a:cs typeface="Calibri" charset="0"/>
-                      </a:endParaRPr>
-                    </a:p>
-                  </a:txBody>
-                  <a:tcPr marL="45720" marR="45720" marT="45720" marB="45720" anchor="ctr">
-                    <a:lnL w="6350" cap="flat" cmpd="sng" algn="ctr">
-                      <a:solidFill>
-                        <a:srgbClr val="D5DCE2"/>
-                      </a:solidFill>
-                      <a:prstDash val="solid"/>
-                      <a:round/>
-                      <a:headEnd type="none" w="med" len="med"/>
-                      <a:tailEnd type="none" w="med" len="med"/>
-                    </a:lnL>
-                    <a:lnR w="6350" cap="flat" cmpd="sng" algn="ctr">
-                      <a:solidFill>
-                        <a:srgbClr val="D5DCE2"/>
-                      </a:solidFill>
-                      <a:prstDash val="solid"/>
-                      <a:round/>
-                      <a:headEnd type="none" w="med" len="med"/>
-                      <a:tailEnd type="none" w="med" len="med"/>
-                    </a:lnR>
-                    <a:lnT w="6350" cap="flat" cmpd="sng" algn="ctr">
-                      <a:solidFill>
-                        <a:srgbClr val="D5DCE2"/>
-                      </a:solidFill>
-                      <a:prstDash val="solid"/>
-                      <a:round/>
-                      <a:headEnd type="none" w="med" len="med"/>
-                      <a:tailEnd type="none" w="med" len="med"/>
-                    </a:lnT>
-                    <a:lnB w="6350" cap="flat" cmpd="sng" algn="ctr">
-                      <a:solidFill>
-                        <a:srgbClr val="D5DCE2"/>
-                      </a:solidFill>
-                      <a:prstDash val="solid"/>
-                      <a:round/>
-                      <a:headEnd type="none" w="med" len="med"/>
-                      <a:tailEnd type="none" w="med" len="med"/>
-                    </a:lnB>
-                    <a:solidFill>
-                      <a:srgbClr val="FFFFFF"/>
-                    </a:solidFill>
-                  </a:tcPr>
-                </a:tc>
-                <a:tc>
-                  <a:txBody>
-                    <a:bodyPr/>
-                    <a:lstStyle/>
-                    <a:p>
-                      <a:pPr indent="0" marL="0">
-                        <a:buNone/>
-                      </a:pPr>
-                      <a:r>
-                        <a:rPr lang="en-US" sz="1200" dirty="0">
-                          <a:solidFill>
-                            <a:srgbClr val="1F2A33"/>
-                          </a:solidFill>
-                          <a:latin typeface="Calibri" pitchFamily="34" charset="0"/>
-                          <a:ea typeface="Calibri" pitchFamily="34" charset="-122"/>
-                          <a:cs typeface="Calibri" pitchFamily="34" charset="-120"/>
-                        </a:rPr>
-                        <a:t>Can rank exposure, but can't prove cost</a:t>
-                      </a:r>
-                      <a:endParaRPr lang="en-US" sz="1200" dirty="0">
-                        <a:latin typeface="Calibri" charset="0"/>
-                        <a:ea typeface="Calibri" charset="0"/>
-                        <a:cs typeface="Calibri" charset="0"/>
-                      </a:endParaRPr>
-                    </a:p>
-                  </a:txBody>
-                  <a:tcPr marL="45720" marR="45720" marT="45720" marB="45720" anchor="ctr">
-                    <a:lnL w="6350" cap="flat" cmpd="sng" algn="ctr">
-                      <a:solidFill>
-                        <a:srgbClr val="D5DCE2"/>
-                      </a:solidFill>
-                      <a:prstDash val="solid"/>
-                      <a:round/>
-                      <a:headEnd type="none" w="med" len="med"/>
-                      <a:tailEnd type="none" w="med" len="med"/>
-                    </a:lnL>
-                    <a:lnR w="6350" cap="flat" cmpd="sng" algn="ctr">
-                      <a:solidFill>
-                        <a:srgbClr val="D5DCE2"/>
-                      </a:solidFill>
-                      <a:prstDash val="solid"/>
-                      <a:round/>
-                      <a:headEnd type="none" w="med" len="med"/>
-                      <a:tailEnd type="none" w="med" len="med"/>
-                    </a:lnR>
-                    <a:lnT w="6350" cap="flat" cmpd="sng" algn="ctr">
-                      <a:solidFill>
-                        <a:srgbClr val="D5DCE2"/>
-                      </a:solidFill>
-                      <a:prstDash val="solid"/>
-                      <a:round/>
-                      <a:headEnd type="none" w="med" len="med"/>
-                      <a:tailEnd type="none" w="med" len="med"/>
-                    </a:lnT>
-                    <a:lnB w="6350" cap="flat" cmpd="sng" algn="ctr">
-                      <a:solidFill>
-                        <a:srgbClr val="D5DCE2"/>
-                      </a:solidFill>
-                      <a:prstDash val="solid"/>
-                      <a:round/>
-                      <a:headEnd type="none" w="med" len="med"/>
-                      <a:tailEnd type="none" w="med" len="med"/>
-                    </a:lnB>
-                    <a:solidFill>
-                      <a:srgbClr val="FFFFFF"/>
-                    </a:solidFill>
-                  </a:tcPr>
-                </a:tc>
-                <a:tc>
-                  <a:txBody>
-                    <a:bodyPr/>
-                    <a:lstStyle/>
-                    <a:p>
-                      <a:pPr indent="0" marL="0">
-                        <a:buNone/>
-                      </a:pPr>
-                      <a:r>
-                        <a:rPr lang="en-US" sz="1200" dirty="0">
-                          <a:solidFill>
-                            <a:srgbClr val="1F2A33"/>
-                          </a:solidFill>
-                          <a:latin typeface="Calibri" pitchFamily="34" charset="0"/>
-                          <a:ea typeface="Calibri" pitchFamily="34" charset="-122"/>
-                          <a:cs typeface="Calibri" pitchFamily="34" charset="-120"/>
-                        </a:rPr>
-                        <a:t>Link to expedites and downtime; no causal claims until then</a:t>
-                      </a:r>
-                      <a:endParaRPr lang="en-US" sz="1200" dirty="0">
-                        <a:latin typeface="Calibri" charset="0"/>
-                        <a:ea typeface="Calibri" charset="0"/>
-                        <a:cs typeface="Calibri" charset="0"/>
-                      </a:endParaRPr>
-                    </a:p>
-                  </a:txBody>
-                  <a:tcPr marL="45720" marR="45720" marT="45720" marB="45720" anchor="ctr">
-                    <a:lnL w="6350" cap="flat" cmpd="sng" algn="ctr">
-                      <a:solidFill>
-                        <a:srgbClr val="D5DCE2"/>
-                      </a:solidFill>
-                      <a:prstDash val="solid"/>
-                      <a:round/>
-                      <a:headEnd type="none" w="med" len="med"/>
-                      <a:tailEnd type="none" w="med" len="med"/>
-                    </a:lnL>
-                    <a:lnR w="6350" cap="flat" cmpd="sng" algn="ctr">
-                      <a:solidFill>
-                        <a:srgbClr val="D5DCE2"/>
-                      </a:solidFill>
-                      <a:prstDash val="solid"/>
-                      <a:round/>
-                      <a:headEnd type="none" w="med" len="med"/>
-                      <a:tailEnd type="none" w="med" len="med"/>
-                    </a:lnR>
-                    <a:lnT w="6350" cap="flat" cmpd="sng" algn="ctr">
-                      <a:solidFill>
-                        <a:srgbClr val="D5DCE2"/>
-                      </a:solidFill>
-                      <a:prstDash val="solid"/>
-                      <a:round/>
-                      <a:headEnd type="none" w="med" len="med"/>
-                      <a:tailEnd type="none" w="med" len="med"/>
-                    </a:lnT>
-                    <a:lnB w="6350" cap="flat" cmpd="sng" algn="ctr">
-                      <a:solidFill>
-                        <a:srgbClr val="D5DCE2"/>
-                      </a:solidFill>
-                      <a:prstDash val="solid"/>
-                      <a:round/>
-                      <a:headEnd type="none" w="med" len="med"/>
-                      <a:tailEnd type="none" w="med" len="med"/>
-                    </a:lnB>
-                    <a:solidFill>
-                      <a:srgbClr val="FFFFFF"/>
-                    </a:solidFill>
-                  </a:tcPr>
-                </a:tc>
-              </a:tr>
-            </a:tbl>
-          </a:graphicData>
-        </a:graphic>
-      </p:graphicFrame>
     </p:spTree>
   </p:cSld>
   <p:clrMapOvr>
@@ -16490,7 +15153,7 @@
                 <a:ea typeface="Calibri" pitchFamily="34" charset="-122"/>
                 <a:cs typeface="Calibri" pitchFamily="34" charset="-120"/>
               </a:rPr>
-              <a:t>WHAT I WISH I'D ASKED</a:t>
+              <a:t>LIMITS</a:t>
             </a:r>
             <a:endParaRPr lang="en-US" sz="1200" dirty="0"/>
           </a:p>
@@ -16529,7 +15192,7 @@
                 <a:ea typeface="Cambria" pitchFamily="34" charset="-122"/>
                 <a:cs typeface="Cambria" pitchFamily="34" charset="-120"/>
               </a:rPr>
-              <a:t>Questions for Lisa and the plant manager, each tied to the data</a:t>
+              <a:t>Where this falls over, and what catches it when it does</a:t>
             </a:r>
             <a:endParaRPr lang="en-US" sz="2400" dirty="0"/>
           </a:p>
@@ -16574,446 +15237,2097 @@
           </a:p>
         </p:txBody>
       </p:sp>
-      <p:sp>
-        <p:nvSpPr>
-          <p:cNvPr id="5" name="Shape 3"/>
-          <p:cNvSpPr/>
-          <p:nvPr/>
-        </p:nvSpPr>
-        <p:spPr>
-          <a:xfrm>
-            <a:off x="548640" y="1463040"/>
-            <a:ext cx="5364328" cy="4800600"/>
-          </a:xfrm>
-          <a:prstGeom prst="roundRect">
-            <a:avLst>
-              <a:gd name="adj" fmla="val 1524"/>
-            </a:avLst>
-          </a:prstGeom>
-          <a:solidFill>
-            <a:srgbClr val="EEF2F5"/>
-          </a:solidFill>
-          <a:ln w="12700">
-            <a:solidFill>
-              <a:srgbClr val="EEF2F5"/>
-            </a:solidFill>
-            <a:prstDash val="solid"/>
-          </a:ln>
-        </p:spPr>
-      </p:sp>
-      <p:sp>
-        <p:nvSpPr>
-          <p:cNvPr id="6" name="Text 4"/>
-          <p:cNvSpPr txBox="1"/>
-          <p:nvPr/>
-        </p:nvSpPr>
-        <p:spPr>
-          <a:xfrm>
-            <a:off x="822960" y="1600200"/>
-            <a:ext cx="4815688" cy="274320"/>
-          </a:xfrm>
-          <a:prstGeom prst="rect">
-            <a:avLst/>
-          </a:prstGeom>
-          <a:noFill/>
-          <a:ln/>
-        </p:spPr>
-        <p:txBody>
-          <a:bodyPr wrap="square" lIns="0" tIns="0" rIns="0" bIns="0" rtlCol="0" anchor="ctr"/>
-          <a:lstStyle/>
-          <a:p>
-            <a:pPr indent="0" marL="0">
-              <a:buNone/>
-            </a:pPr>
-            <a:r>
-              <a:rPr lang="en-US" sz="1200" b="1" spc="200" kern="0" dirty="0">
-                <a:solidFill>
-                  <a:srgbClr val="D9622B"/>
-                </a:solidFill>
-                <a:latin typeface="Calibri" pitchFamily="34" charset="0"/>
-                <a:ea typeface="Calibri" pitchFamily="34" charset="-122"/>
-                <a:cs typeface="Calibri" pitchFamily="34" charset="-120"/>
-              </a:rPr>
-              <a:t>LISA</a:t>
-            </a:r>
-            <a:endParaRPr lang="en-US" sz="1200" dirty="0"/>
-          </a:p>
-        </p:txBody>
-      </p:sp>
-      <p:sp>
-        <p:nvSpPr>
-          <p:cNvPr id="7" name="Text 5"/>
-          <p:cNvSpPr txBox="1"/>
-          <p:nvPr/>
-        </p:nvSpPr>
-        <p:spPr>
-          <a:xfrm>
-            <a:off x="822960" y="1920240"/>
-            <a:ext cx="4815688" cy="4251960"/>
-          </a:xfrm>
-          <a:prstGeom prst="rect">
-            <a:avLst/>
-          </a:prstGeom>
-          <a:noFill/>
-          <a:ln/>
-        </p:spPr>
-        <p:txBody>
-          <a:bodyPr wrap="square" lIns="381" tIns="381" rIns="381" bIns="381" rtlCol="0" anchor="t"/>
-          <a:lstStyle/>
-          <a:p>
-            <a:pPr marL="342900" indent="-342900">
-              <a:spcAft>
-                <a:spcPts val="600"/>
-              </a:spcAft>
-              <a:buSzPct val="100000"/>
-              <a:buFont typeface="+mj-lt"/>
-              <a:buAutoNum type="arabicPeriod" startAt="1"/>
-            </a:pPr>
-            <a:r>
-              <a:rPr lang="en-US" sz="1300" dirty="0">
-                <a:solidFill>
-                  <a:srgbClr val="1F2A33"/>
-                </a:solidFill>
-                <a:latin typeface="Calibri" pitchFamily="34" charset="0"/>
-                <a:ea typeface="Calibri" pitchFamily="34" charset="-122"/>
-                <a:cs typeface="Calibri" pitchFamily="34" charset="-120"/>
-              </a:rPr>
-              <a:t>When a line is missing from an acknowledgment, what do you do today, and how often was it really dropped vs. confirmed later?</a:t>
-            </a:r>
-            <a:endParaRPr lang="en-US" sz="1300" dirty="0"/>
-          </a:p>
-          <a:p>
-            <a:pPr marL="342900" indent="-342900">
-              <a:spcAft>
-                <a:spcPts val="600"/>
-              </a:spcAft>
-              <a:buSzPct val="100000"/>
-              <a:buFont typeface="+mj-lt"/>
-              <a:buAutoNum type="arabicPeriod" startAt="1"/>
-            </a:pPr>
-            <a:r>
-              <a:rPr lang="en-US" sz="1300" dirty="0">
-                <a:solidFill>
-                  <a:srgbClr val="1F2A33"/>
-                </a:solidFill>
-                <a:latin typeface="Calibri" pitchFamily="34" charset="0"/>
-                <a:ea typeface="Calibri" pitchFamily="34" charset="-122"/>
-                <a:cs typeface="Calibri" pitchFamily="34" charset="-120"/>
-              </a:rPr>
-              <a:t>Which miss cost you most last quarter: a short, a price or a date? That sets the priority order.</a:t>
-            </a:r>
-            <a:endParaRPr lang="en-US" sz="1300" dirty="0"/>
-          </a:p>
-          <a:p>
-            <a:pPr marL="342900" indent="-342900">
-              <a:spcAft>
-                <a:spcPts val="600"/>
-              </a:spcAft>
-              <a:buSzPct val="100000"/>
-              <a:buFont typeface="+mj-lt"/>
-              <a:buAutoNum type="arabicPeriod" startAt="1"/>
-            </a:pPr>
-            <a:r>
-              <a:rPr lang="en-US" sz="1300" dirty="0">
-                <a:solidFill>
-                  <a:srgbClr val="1F2A33"/>
-                </a:solidFill>
-                <a:latin typeface="Calibri" pitchFamily="34" charset="0"/>
-                <a:ea typeface="Calibri" pitchFamily="34" charset="-122"/>
-                <a:cs typeface="Calibri" pitchFamily="34" charset="-120"/>
-              </a:rPr>
-              <a:t>Apex CRES bar confirmed +1-2% since Feb while POs stayed $3.92: a negotiated alloy surcharge that never reached the PO?</a:t>
-            </a:r>
-            <a:endParaRPr lang="en-US" sz="1300" dirty="0"/>
-          </a:p>
-          <a:p>
-            <a:pPr marL="342900" indent="-342900">
-              <a:spcAft>
-                <a:spcPts val="600"/>
-              </a:spcAft>
-              <a:buSzPct val="100000"/>
-              <a:buFont typeface="+mj-lt"/>
-              <a:buAutoNum type="arabicPeriod" startAt="1"/>
-            </a:pPr>
-            <a:r>
-              <a:rPr lang="en-US" sz="1300" dirty="0">
-                <a:solidFill>
-                  <a:srgbClr val="1F2A33"/>
-                </a:solidFill>
-                <a:latin typeface="Calibri" pitchFamily="34" charset="0"/>
-                <a:ea typeface="Calibri" pitchFamily="34" charset="-122"/>
-                <a:cs typeface="Calibri" pitchFamily="34" charset="-120"/>
-              </a:rPr>
-              <a:t>What price difference do you let through without a call? Is 1% right for EUR? Is it different for services?</a:t>
-            </a:r>
-            <a:endParaRPr lang="en-US" sz="1300" dirty="0"/>
-          </a:p>
-          <a:p>
-            <a:pPr marL="342900" indent="-342900">
-              <a:spcAft>
-                <a:spcPts val="600"/>
-              </a:spcAft>
-              <a:buSzPct val="100000"/>
-              <a:buFont typeface="+mj-lt"/>
-              <a:buAutoNum type="arabicPeriod" startAt="1"/>
-            </a:pPr>
-            <a:r>
-              <a:rPr lang="en-US" sz="1300" dirty="0">
-                <a:solidFill>
-                  <a:srgbClr val="1F2A33"/>
-                </a:solidFill>
-                <a:latin typeface="Calibri" pitchFamily="34" charset="0"/>
-                <a:ea typeface="Calibri" pitchFamily="34" charset="-122"/>
-                <a:cs typeface="Calibri" pitchFamily="34" charset="-120"/>
-              </a:rPr>
-              <a:t>Who approves a new vendor part number: you or engineering? Do vendors warn you before renumbering?</a:t>
-            </a:r>
-            <a:endParaRPr lang="en-US" sz="1300" dirty="0"/>
-          </a:p>
-          <a:p>
-            <a:pPr marL="342900" indent="-342900">
-              <a:spcAft>
-                <a:spcPts val="600"/>
-              </a:spcAft>
-              <a:buSzPct val="100000"/>
-              <a:buFont typeface="+mj-lt"/>
-              <a:buAutoNum type="arabicPeriod" startAt="1"/>
-            </a:pPr>
-            <a:r>
-              <a:rPr lang="en-US" sz="1300" dirty="0">
-                <a:solidFill>
-                  <a:srgbClr val="1F2A33"/>
-                </a:solidFill>
-                <a:latin typeface="Calibri" pitchFamily="34" charset="0"/>
-                <a:ea typeface="Calibri" pitchFamily="34" charset="-122"/>
-                <a:cs typeface="Calibri" pitchFamily="34" charset="-120"/>
-              </a:rPr>
-              <a:t>What would you need to see for two weeks before you stop opening every PDF yourself?</a:t>
-            </a:r>
-            <a:endParaRPr lang="en-US" sz="1300" dirty="0"/>
-          </a:p>
-        </p:txBody>
-      </p:sp>
-      <p:sp>
-        <p:nvSpPr>
-          <p:cNvPr id="8" name="Shape 6"/>
-          <p:cNvSpPr/>
-          <p:nvPr/>
-        </p:nvSpPr>
-        <p:spPr>
-          <a:xfrm>
-            <a:off x="6278728" y="1463040"/>
-            <a:ext cx="5364328" cy="4800600"/>
-          </a:xfrm>
-          <a:prstGeom prst="roundRect">
-            <a:avLst>
-              <a:gd name="adj" fmla="val 1524"/>
-            </a:avLst>
-          </a:prstGeom>
-          <a:solidFill>
-            <a:srgbClr val="EEF2F5"/>
-          </a:solidFill>
-          <a:ln w="12700">
-            <a:solidFill>
-              <a:srgbClr val="EEF2F5"/>
-            </a:solidFill>
-            <a:prstDash val="solid"/>
-          </a:ln>
-        </p:spPr>
-      </p:sp>
-      <p:sp>
-        <p:nvSpPr>
-          <p:cNvPr id="9" name="Text 7"/>
-          <p:cNvSpPr txBox="1"/>
-          <p:nvPr/>
-        </p:nvSpPr>
-        <p:spPr>
-          <a:xfrm>
-            <a:off x="6553048" y="1600200"/>
-            <a:ext cx="4815688" cy="274320"/>
-          </a:xfrm>
-          <a:prstGeom prst="rect">
-            <a:avLst/>
-          </a:prstGeom>
-          <a:noFill/>
-          <a:ln/>
-        </p:spPr>
-        <p:txBody>
-          <a:bodyPr wrap="square" lIns="0" tIns="0" rIns="0" bIns="0" rtlCol="0" anchor="ctr"/>
-          <a:lstStyle/>
-          <a:p>
-            <a:pPr indent="0" marL="0">
-              <a:buNone/>
-            </a:pPr>
-            <a:r>
-              <a:rPr lang="en-US" sz="1200" b="1" spc="200" kern="0" dirty="0">
-                <a:solidFill>
-                  <a:srgbClr val="D9622B"/>
-                </a:solidFill>
-                <a:latin typeface="Calibri" pitchFamily="34" charset="0"/>
-                <a:ea typeface="Calibri" pitchFamily="34" charset="-122"/>
-                <a:cs typeface="Calibri" pitchFamily="34" charset="-120"/>
-              </a:rPr>
-              <a:t>PLANT MANAGER</a:t>
-            </a:r>
-            <a:endParaRPr lang="en-US" sz="1200" dirty="0"/>
-          </a:p>
-        </p:txBody>
-      </p:sp>
-      <p:sp>
-        <p:nvSpPr>
-          <p:cNvPr id="10" name="Text 8"/>
-          <p:cNvSpPr txBox="1"/>
-          <p:nvPr/>
-        </p:nvSpPr>
-        <p:spPr>
-          <a:xfrm>
-            <a:off x="6553048" y="1920240"/>
-            <a:ext cx="4815688" cy="4251960"/>
-          </a:xfrm>
-          <a:prstGeom prst="rect">
-            <a:avLst/>
-          </a:prstGeom>
-          <a:noFill/>
-          <a:ln/>
-        </p:spPr>
-        <p:txBody>
-          <a:bodyPr wrap="square" lIns="381" tIns="381" rIns="381" bIns="381" rtlCol="0" anchor="t"/>
-          <a:lstStyle/>
-          <a:p>
-            <a:pPr marL="342900" indent="-342900">
-              <a:spcAft>
-                <a:spcPts val="600"/>
-              </a:spcAft>
-              <a:buSzPct val="100000"/>
-              <a:buFont typeface="+mj-lt"/>
-              <a:buAutoNum type="arabicPeriod" startAt="1"/>
-            </a:pPr>
-            <a:r>
-              <a:rPr lang="en-US" sz="1300" dirty="0">
-                <a:solidFill>
-                  <a:srgbClr val="1F2A33"/>
-                </a:solidFill>
-                <a:latin typeface="Calibri" pitchFamily="34" charset="0"/>
-                <a:ea typeface="Calibri" pitchFamily="34" charset="-122"/>
-                <a:cs typeface="Calibri" pitchFamily="34" charset="-120"/>
-              </a:rPr>
-              <a:t>What does a late heat-treat lot actually cost: downtime, overtime, a customer expedite? That turns on-time % into dollars.</a:t>
-            </a:r>
-            <a:endParaRPr lang="en-US" sz="1300" dirty="0"/>
-          </a:p>
-          <a:p>
-            <a:pPr marL="342900" indent="-342900">
-              <a:spcAft>
-                <a:spcPts val="600"/>
-              </a:spcAft>
-              <a:buSzPct val="100000"/>
-              <a:buFont typeface="+mj-lt"/>
-              <a:buAutoNum type="arabicPeriod" startAt="1"/>
-            </a:pPr>
-            <a:r>
-              <a:rPr lang="en-US" sz="1300" dirty="0">
-                <a:solidFill>
-                  <a:srgbClr val="1F2A33"/>
-                </a:solidFill>
-                <a:latin typeface="Calibri" pitchFamily="34" charset="0"/>
-                <a:ea typeface="Calibri" pitchFamily="34" charset="-122"/>
-                <a:cs typeface="Calibri" pitchFamily="34" charset="-120"/>
-              </a:rPr>
-              <a:t>Who set the 19-day heat-treat lead time in MRP? Continental quotes 28.</a:t>
-            </a:r>
-            <a:endParaRPr lang="en-US" sz="1300" dirty="0"/>
-          </a:p>
-          <a:p>
-            <a:pPr marL="342900" indent="-342900">
-              <a:spcAft>
-                <a:spcPts val="600"/>
-              </a:spcAft>
-              <a:buSzPct val="100000"/>
-              <a:buFont typeface="+mj-lt"/>
-              <a:buAutoNum type="arabicPeriod" startAt="1"/>
-            </a:pPr>
-            <a:r>
-              <a:rPr lang="en-US" sz="1300" dirty="0">
-                <a:solidFill>
-                  <a:srgbClr val="1F2A33"/>
-                </a:solidFill>
-                <a:latin typeface="Calibri" pitchFamily="34" charset="0"/>
-                <a:ea typeface="Calibri" pitchFamily="34" charset="-122"/>
-                <a:cs typeface="Calibri" pitchFamily="34" charset="-120"/>
-              </a:rPr>
-              <a:t>Is Continental the only qualified (e.g. Nadcap) heat treater for these parts, or is there a second source?</a:t>
-            </a:r>
-            <a:endParaRPr lang="en-US" sz="1300" dirty="0"/>
-          </a:p>
-          <a:p>
-            <a:pPr marL="342900" indent="-342900">
-              <a:spcAft>
-                <a:spcPts val="600"/>
-              </a:spcAft>
-              <a:buSzPct val="100000"/>
-              <a:buFont typeface="+mj-lt"/>
-              <a:buAutoNum type="arabicPeriod" startAt="1"/>
-            </a:pPr>
-            <a:r>
-              <a:rPr lang="en-US" sz="1300" dirty="0">
-                <a:solidFill>
-                  <a:srgbClr val="1F2A33"/>
-                </a:solidFill>
-                <a:latin typeface="Calibri" pitchFamily="34" charset="0"/>
-                <a:ea typeface="Calibri" pitchFamily="34" charset="-122"/>
-                <a:cs typeface="Calibri" pitchFamily="34" charset="-120"/>
-              </a:rPr>
-              <a:t>Is Apex at 85% of spend a deliberate single-source decision? Is there a contract price for CRES bar?</a:t>
-            </a:r>
-            <a:endParaRPr lang="en-US" sz="1300" dirty="0"/>
-          </a:p>
-          <a:p>
-            <a:pPr marL="342900" indent="-342900">
-              <a:spcAft>
-                <a:spcPts val="600"/>
-              </a:spcAft>
-              <a:buSzPct val="100000"/>
-              <a:buFont typeface="+mj-lt"/>
-              <a:buAutoNum type="arabicPeriod" startAt="1"/>
-            </a:pPr>
-            <a:r>
-              <a:rPr lang="en-US" sz="1300" dirty="0">
-                <a:solidFill>
-                  <a:srgbClr val="1F2A33"/>
-                </a:solidFill>
-                <a:latin typeface="Calibri" pitchFamily="34" charset="0"/>
-                <a:ea typeface="Calibri" pitchFamily="34" charset="-122"/>
-                <a:cs typeface="Calibri" pitchFamily="34" charset="-120"/>
-              </a:rPr>
-              <a:t>Should months-old short-ship balances be closed? Who can short-close a PO?</a:t>
-            </a:r>
-            <a:endParaRPr lang="en-US" sz="1300" dirty="0"/>
-          </a:p>
-          <a:p>
-            <a:pPr marL="342900" indent="-342900">
-              <a:spcAft>
-                <a:spcPts val="600"/>
-              </a:spcAft>
-              <a:buSzPct val="100000"/>
-              <a:buFont typeface="+mj-lt"/>
-              <a:buAutoNum type="arabicPeriod" startAt="1"/>
-            </a:pPr>
-            <a:r>
-              <a:rPr lang="en-US" sz="1300" dirty="0">
-                <a:solidFill>
-                  <a:srgbClr val="1F2A33"/>
-                </a:solidFill>
-                <a:latin typeface="Calibri" pitchFamily="34" charset="0"/>
-                <a:ea typeface="Calibri" pitchFamily="34" charset="-122"/>
-                <a:cs typeface="Calibri" pitchFamily="34" charset="-120"/>
-              </a:rPr>
-              <a:t>Which decision should this readout drive: re-source, renegotiate or re-plan? How often: monthly?</a:t>
-            </a:r>
-            <a:endParaRPr lang="en-US" sz="1300" dirty="0"/>
-          </a:p>
-        </p:txBody>
-      </p:sp>
+      <p:graphicFrame>
+        <p:nvGraphicFramePr>
+          <p:cNvPr id="18" name="Table 0"/>
+          <p:cNvGraphicFramePr>
+            <a:graphicFrameLocks noGrp="1"/>
+          </p:cNvGraphicFramePr>
+          <p:nvPr>
+            <p:extLst>
+              <p:ext uri="{D42A27DB-BD31-4B8C-83A1-F6EECF244321}">
+                <p14:modId xmlns:p14="http://schemas.microsoft.com/office/powerpoint/2010/main" val="1579011935"/>
+              </p:ext>
+            </p:extLst>
+          </p:nvPr>
+        </p:nvGraphicFramePr>
+        <p:xfrm>
+          <a:off x="548640" y="1417320"/>
+          <a:ext cx="11094415" cy="914400"/>
+        </p:xfrm>
+        <a:graphic>
+          <a:graphicData uri="http://schemas.openxmlformats.org/drawingml/2006/table">
+            <a:tbl>
+              <a:tblPr/>
+              <a:tblGrid>
+                <a:gridCol w="3108960"/>
+                <a:gridCol w="3749040"/>
+                <a:gridCol w="4233672"/>
+              </a:tblGrid>
+              <a:tr h="475488">
+                <a:tc>
+                  <a:txBody>
+                    <a:bodyPr/>
+                    <a:lstStyle/>
+                    <a:p>
+                      <a:pPr indent="0" marL="0">
+                        <a:buNone/>
+                      </a:pPr>
+                      <a:r>
+                        <a:rPr lang="en-US" sz="1300" b="1" dirty="0">
+                          <a:solidFill>
+                            <a:srgbClr val="FFFFFF"/>
+                          </a:solidFill>
+                          <a:latin typeface="Calibri" pitchFamily="34" charset="0"/>
+                          <a:ea typeface="Calibri" pitchFamily="34" charset="-122"/>
+                          <a:cs typeface="Calibri" pitchFamily="34" charset="-120"/>
+                        </a:rPr>
+                        <a:t>Failure mode</a:t>
+                      </a:r>
+                      <a:endParaRPr lang="en-US" sz="1300" dirty="0">
+                        <a:latin typeface="Calibri" charset="0"/>
+                        <a:ea typeface="Calibri" charset="0"/>
+                        <a:cs typeface="Calibri" charset="0"/>
+                      </a:endParaRPr>
+                    </a:p>
+                  </a:txBody>
+                  <a:tcPr marL="45720" marR="45720" marT="45720" marB="45720" anchor="ctr">
+                    <a:lnL w="6350" cap="flat" cmpd="sng" algn="ctr">
+                      <a:solidFill>
+                        <a:srgbClr val="D5DCE2"/>
+                      </a:solidFill>
+                      <a:prstDash val="solid"/>
+                      <a:round/>
+                      <a:headEnd type="none" w="med" len="med"/>
+                      <a:tailEnd type="none" w="med" len="med"/>
+                    </a:lnL>
+                    <a:lnR w="6350" cap="flat" cmpd="sng" algn="ctr">
+                      <a:solidFill>
+                        <a:srgbClr val="D5DCE2"/>
+                      </a:solidFill>
+                      <a:prstDash val="solid"/>
+                      <a:round/>
+                      <a:headEnd type="none" w="med" len="med"/>
+                      <a:tailEnd type="none" w="med" len="med"/>
+                    </a:lnR>
+                    <a:lnT w="6350" cap="flat" cmpd="sng" algn="ctr">
+                      <a:solidFill>
+                        <a:srgbClr val="D5DCE2"/>
+                      </a:solidFill>
+                      <a:prstDash val="solid"/>
+                      <a:round/>
+                      <a:headEnd type="none" w="med" len="med"/>
+                      <a:tailEnd type="none" w="med" len="med"/>
+                    </a:lnT>
+                    <a:lnB w="6350" cap="flat" cmpd="sng" algn="ctr">
+                      <a:solidFill>
+                        <a:srgbClr val="D5DCE2"/>
+                      </a:solidFill>
+                      <a:prstDash val="solid"/>
+                      <a:round/>
+                      <a:headEnd type="none" w="med" len="med"/>
+                      <a:tailEnd type="none" w="med" len="med"/>
+                    </a:lnB>
+                    <a:solidFill>
+                      <a:srgbClr val="1F2A33"/>
+                    </a:solidFill>
+                  </a:tcPr>
+                </a:tc>
+                <a:tc>
+                  <a:txBody>
+                    <a:bodyPr/>
+                    <a:lstStyle/>
+                    <a:p>
+                      <a:pPr indent="0" marL="0">
+                        <a:buNone/>
+                      </a:pPr>
+                      <a:r>
+                        <a:rPr lang="en-US" sz="1300" b="1" dirty="0">
+                          <a:solidFill>
+                            <a:srgbClr val="FFFFFF"/>
+                          </a:solidFill>
+                          <a:latin typeface="Calibri" pitchFamily="34" charset="0"/>
+                          <a:ea typeface="Calibri" pitchFamily="34" charset="-122"/>
+                          <a:cs typeface="Calibri" pitchFamily="34" charset="-120"/>
+                        </a:rPr>
+                        <a:t>What happens today</a:t>
+                      </a:r>
+                      <a:endParaRPr lang="en-US" sz="1300" dirty="0">
+                        <a:latin typeface="Calibri" charset="0"/>
+                        <a:ea typeface="Calibri" charset="0"/>
+                        <a:cs typeface="Calibri" charset="0"/>
+                      </a:endParaRPr>
+                    </a:p>
+                  </a:txBody>
+                  <a:tcPr marL="45720" marR="45720" marT="45720" marB="45720" anchor="ctr">
+                    <a:lnL w="6350" cap="flat" cmpd="sng" algn="ctr">
+                      <a:solidFill>
+                        <a:srgbClr val="D5DCE2"/>
+                      </a:solidFill>
+                      <a:prstDash val="solid"/>
+                      <a:round/>
+                      <a:headEnd type="none" w="med" len="med"/>
+                      <a:tailEnd type="none" w="med" len="med"/>
+                    </a:lnL>
+                    <a:lnR w="6350" cap="flat" cmpd="sng" algn="ctr">
+                      <a:solidFill>
+                        <a:srgbClr val="D5DCE2"/>
+                      </a:solidFill>
+                      <a:prstDash val="solid"/>
+                      <a:round/>
+                      <a:headEnd type="none" w="med" len="med"/>
+                      <a:tailEnd type="none" w="med" len="med"/>
+                    </a:lnR>
+                    <a:lnT w="6350" cap="flat" cmpd="sng" algn="ctr">
+                      <a:solidFill>
+                        <a:srgbClr val="D5DCE2"/>
+                      </a:solidFill>
+                      <a:prstDash val="solid"/>
+                      <a:round/>
+                      <a:headEnd type="none" w="med" len="med"/>
+                      <a:tailEnd type="none" w="med" len="med"/>
+                    </a:lnT>
+                    <a:lnB w="6350" cap="flat" cmpd="sng" algn="ctr">
+                      <a:solidFill>
+                        <a:srgbClr val="D5DCE2"/>
+                      </a:solidFill>
+                      <a:prstDash val="solid"/>
+                      <a:round/>
+                      <a:headEnd type="none" w="med" len="med"/>
+                      <a:tailEnd type="none" w="med" len="med"/>
+                    </a:lnB>
+                    <a:solidFill>
+                      <a:srgbClr val="1F2A33"/>
+                    </a:solidFill>
+                  </a:tcPr>
+                </a:tc>
+                <a:tc>
+                  <a:txBody>
+                    <a:bodyPr/>
+                    <a:lstStyle/>
+                    <a:p>
+                      <a:pPr indent="0" marL="0">
+                        <a:buNone/>
+                      </a:pPr>
+                      <a:r>
+                        <a:rPr lang="en-US" sz="1300" b="1" dirty="0">
+                          <a:solidFill>
+                            <a:srgbClr val="FFFFFF"/>
+                          </a:solidFill>
+                          <a:latin typeface="Calibri" pitchFamily="34" charset="0"/>
+                          <a:ea typeface="Calibri" pitchFamily="34" charset="-122"/>
+                          <a:cs typeface="Calibri" pitchFamily="34" charset="-120"/>
+                        </a:rPr>
+                        <a:t>Mitigation / next step</a:t>
+                      </a:r>
+                      <a:endParaRPr lang="en-US" sz="1300" dirty="0">
+                        <a:latin typeface="Calibri" charset="0"/>
+                        <a:ea typeface="Calibri" charset="0"/>
+                        <a:cs typeface="Calibri" charset="0"/>
+                      </a:endParaRPr>
+                    </a:p>
+                  </a:txBody>
+                  <a:tcPr marL="45720" marR="45720" marT="45720" marB="45720" anchor="ctr">
+                    <a:lnL w="6350" cap="flat" cmpd="sng" algn="ctr">
+                      <a:solidFill>
+                        <a:srgbClr val="D5DCE2"/>
+                      </a:solidFill>
+                      <a:prstDash val="solid"/>
+                      <a:round/>
+                      <a:headEnd type="none" w="med" len="med"/>
+                      <a:tailEnd type="none" w="med" len="med"/>
+                    </a:lnL>
+                    <a:lnR w="6350" cap="flat" cmpd="sng" algn="ctr">
+                      <a:solidFill>
+                        <a:srgbClr val="D5DCE2"/>
+                      </a:solidFill>
+                      <a:prstDash val="solid"/>
+                      <a:round/>
+                      <a:headEnd type="none" w="med" len="med"/>
+                      <a:tailEnd type="none" w="med" len="med"/>
+                    </a:lnR>
+                    <a:lnT w="6350" cap="flat" cmpd="sng" algn="ctr">
+                      <a:solidFill>
+                        <a:srgbClr val="D5DCE2"/>
+                      </a:solidFill>
+                      <a:prstDash val="solid"/>
+                      <a:round/>
+                      <a:headEnd type="none" w="med" len="med"/>
+                      <a:tailEnd type="none" w="med" len="med"/>
+                    </a:lnT>
+                    <a:lnB w="6350" cap="flat" cmpd="sng" algn="ctr">
+                      <a:solidFill>
+                        <a:srgbClr val="D5DCE2"/>
+                      </a:solidFill>
+                      <a:prstDash val="solid"/>
+                      <a:round/>
+                      <a:headEnd type="none" w="med" len="med"/>
+                      <a:tailEnd type="none" w="med" len="med"/>
+                    </a:lnB>
+                    <a:solidFill>
+                      <a:srgbClr val="1F2A33"/>
+                    </a:solidFill>
+                  </a:tcPr>
+                </a:tc>
+              </a:tr>
+              <a:tr h="475488">
+                <a:tc>
+                  <a:txBody>
+                    <a:bodyPr/>
+                    <a:lstStyle/>
+                    <a:p>
+                      <a:pPr indent="0" marL="0">
+                        <a:buNone/>
+                      </a:pPr>
+                      <a:r>
+                        <a:rPr lang="en-US" sz="1200" b="1" dirty="0">
+                          <a:solidFill>
+                            <a:srgbClr val="1F2A33"/>
+                          </a:solidFill>
+                          <a:latin typeface="Calibri" pitchFamily="34" charset="0"/>
+                          <a:ea typeface="Calibri" pitchFamily="34" charset="-122"/>
+                          <a:cs typeface="Calibri" pitchFamily="34" charset="-120"/>
+                        </a:rPr>
+                        <a:t>A new vendor or a changed layout</a:t>
+                      </a:r>
+                      <a:endParaRPr lang="en-US" sz="1200" dirty="0">
+                        <a:latin typeface="Calibri" charset="0"/>
+                        <a:ea typeface="Calibri" charset="0"/>
+                        <a:cs typeface="Calibri" charset="0"/>
+                      </a:endParaRPr>
+                    </a:p>
+                  </a:txBody>
+                  <a:tcPr marL="45720" marR="45720" marT="45720" marB="45720" anchor="ctr">
+                    <a:lnL w="6350" cap="flat" cmpd="sng" algn="ctr">
+                      <a:solidFill>
+                        <a:srgbClr val="D5DCE2"/>
+                      </a:solidFill>
+                      <a:prstDash val="solid"/>
+                      <a:round/>
+                      <a:headEnd type="none" w="med" len="med"/>
+                      <a:tailEnd type="none" w="med" len="med"/>
+                    </a:lnL>
+                    <a:lnR w="6350" cap="flat" cmpd="sng" algn="ctr">
+                      <a:solidFill>
+                        <a:srgbClr val="D5DCE2"/>
+                      </a:solidFill>
+                      <a:prstDash val="solid"/>
+                      <a:round/>
+                      <a:headEnd type="none" w="med" len="med"/>
+                      <a:tailEnd type="none" w="med" len="med"/>
+                    </a:lnR>
+                    <a:lnT w="6350" cap="flat" cmpd="sng" algn="ctr">
+                      <a:solidFill>
+                        <a:srgbClr val="D5DCE2"/>
+                      </a:solidFill>
+                      <a:prstDash val="solid"/>
+                      <a:round/>
+                      <a:headEnd type="none" w="med" len="med"/>
+                      <a:tailEnd type="none" w="med" len="med"/>
+                    </a:lnT>
+                    <a:lnB w="6350" cap="flat" cmpd="sng" algn="ctr">
+                      <a:solidFill>
+                        <a:srgbClr val="D5DCE2"/>
+                      </a:solidFill>
+                      <a:prstDash val="solid"/>
+                      <a:round/>
+                      <a:headEnd type="none" w="med" len="med"/>
+                      <a:tailEnd type="none" w="med" len="med"/>
+                    </a:lnB>
+                    <a:solidFill>
+                      <a:srgbClr val="F6F8FA"/>
+                    </a:solidFill>
+                  </a:tcPr>
+                </a:tc>
+                <a:tc>
+                  <a:txBody>
+                    <a:bodyPr/>
+                    <a:lstStyle/>
+                    <a:p>
+                      <a:pPr indent="0" marL="0">
+                        <a:buNone/>
+                      </a:pPr>
+                      <a:r>
+                        <a:rPr lang="en-US" sz="1200" dirty="0">
+                          <a:solidFill>
+                            <a:srgbClr val="1F2A33"/>
+                          </a:solidFill>
+                          <a:latin typeface="Calibri" pitchFamily="34" charset="0"/>
+                          <a:ea typeface="Calibri" pitchFamily="34" charset="-122"/>
+                          <a:cs typeface="Calibri" pitchFamily="34" charset="-120"/>
+                        </a:rPr>
+                        <a:t>No parser matches; the PDF shows as unreadable</a:t>
+                      </a:r>
+                      <a:endParaRPr lang="en-US" sz="1200" dirty="0">
+                        <a:latin typeface="Calibri" charset="0"/>
+                        <a:ea typeface="Calibri" charset="0"/>
+                        <a:cs typeface="Calibri" charset="0"/>
+                      </a:endParaRPr>
+                    </a:p>
+                  </a:txBody>
+                  <a:tcPr marL="45720" marR="45720" marT="45720" marB="45720" anchor="ctr">
+                    <a:lnL w="6350" cap="flat" cmpd="sng" algn="ctr">
+                      <a:solidFill>
+                        <a:srgbClr val="D5DCE2"/>
+                      </a:solidFill>
+                      <a:prstDash val="solid"/>
+                      <a:round/>
+                      <a:headEnd type="none" w="med" len="med"/>
+                      <a:tailEnd type="none" w="med" len="med"/>
+                    </a:lnL>
+                    <a:lnR w="6350" cap="flat" cmpd="sng" algn="ctr">
+                      <a:solidFill>
+                        <a:srgbClr val="D5DCE2"/>
+                      </a:solidFill>
+                      <a:prstDash val="solid"/>
+                      <a:round/>
+                      <a:headEnd type="none" w="med" len="med"/>
+                      <a:tailEnd type="none" w="med" len="med"/>
+                    </a:lnR>
+                    <a:lnT w="6350" cap="flat" cmpd="sng" algn="ctr">
+                      <a:solidFill>
+                        <a:srgbClr val="D5DCE2"/>
+                      </a:solidFill>
+                      <a:prstDash val="solid"/>
+                      <a:round/>
+                      <a:headEnd type="none" w="med" len="med"/>
+                      <a:tailEnd type="none" w="med" len="med"/>
+                    </a:lnT>
+                    <a:lnB w="6350" cap="flat" cmpd="sng" algn="ctr">
+                      <a:solidFill>
+                        <a:srgbClr val="D5DCE2"/>
+                      </a:solidFill>
+                      <a:prstDash val="solid"/>
+                      <a:round/>
+                      <a:headEnd type="none" w="med" len="med"/>
+                      <a:tailEnd type="none" w="med" len="med"/>
+                    </a:lnB>
+                    <a:solidFill>
+                      <a:srgbClr val="F6F8FA"/>
+                    </a:solidFill>
+                  </a:tcPr>
+                </a:tc>
+                <a:tc>
+                  <a:txBody>
+                    <a:bodyPr/>
+                    <a:lstStyle/>
+                    <a:p>
+                      <a:pPr indent="0" marL="0">
+                        <a:buNone/>
+                      </a:pPr>
+                      <a:r>
+                        <a:rPr lang="en-US" sz="1200" dirty="0">
+                          <a:solidFill>
+                            <a:srgbClr val="1F2A33"/>
+                          </a:solidFill>
+                          <a:latin typeface="Calibri" pitchFamily="34" charset="0"/>
+                          <a:ea typeface="Calibri" pitchFamily="34" charset="-122"/>
+                          <a:cs typeface="Calibri" pitchFamily="34" charset="-120"/>
+                        </a:rPr>
+                        <a:t>Beacon's acknowledgment form removes the layout problem; meanwhile manual form or AI reader (off by default)</a:t>
+                      </a:r>
+                      <a:endParaRPr lang="en-US" sz="1200" dirty="0">
+                        <a:latin typeface="Calibri" charset="0"/>
+                        <a:ea typeface="Calibri" charset="0"/>
+                        <a:cs typeface="Calibri" charset="0"/>
+                      </a:endParaRPr>
+                    </a:p>
+                  </a:txBody>
+                  <a:tcPr marL="45720" marR="45720" marT="45720" marB="45720" anchor="ctr">
+                    <a:lnL w="6350" cap="flat" cmpd="sng" algn="ctr">
+                      <a:solidFill>
+                        <a:srgbClr val="D5DCE2"/>
+                      </a:solidFill>
+                      <a:prstDash val="solid"/>
+                      <a:round/>
+                      <a:headEnd type="none" w="med" len="med"/>
+                      <a:tailEnd type="none" w="med" len="med"/>
+                    </a:lnL>
+                    <a:lnR w="6350" cap="flat" cmpd="sng" algn="ctr">
+                      <a:solidFill>
+                        <a:srgbClr val="D5DCE2"/>
+                      </a:solidFill>
+                      <a:prstDash val="solid"/>
+                      <a:round/>
+                      <a:headEnd type="none" w="med" len="med"/>
+                      <a:tailEnd type="none" w="med" len="med"/>
+                    </a:lnR>
+                    <a:lnT w="6350" cap="flat" cmpd="sng" algn="ctr">
+                      <a:solidFill>
+                        <a:srgbClr val="D5DCE2"/>
+                      </a:solidFill>
+                      <a:prstDash val="solid"/>
+                      <a:round/>
+                      <a:headEnd type="none" w="med" len="med"/>
+                      <a:tailEnd type="none" w="med" len="med"/>
+                    </a:lnT>
+                    <a:lnB w="6350" cap="flat" cmpd="sng" algn="ctr">
+                      <a:solidFill>
+                        <a:srgbClr val="D5DCE2"/>
+                      </a:solidFill>
+                      <a:prstDash val="solid"/>
+                      <a:round/>
+                      <a:headEnd type="none" w="med" len="med"/>
+                      <a:tailEnd type="none" w="med" len="med"/>
+                    </a:lnB>
+                    <a:solidFill>
+                      <a:srgbClr val="F6F8FA"/>
+                    </a:solidFill>
+                  </a:tcPr>
+                </a:tc>
+              </a:tr>
+              <a:tr h="475488">
+                <a:tc>
+                  <a:txBody>
+                    <a:bodyPr/>
+                    <a:lstStyle/>
+                    <a:p>
+                      <a:pPr indent="0" marL="0">
+                        <a:buNone/>
+                      </a:pPr>
+                      <a:r>
+                        <a:rPr lang="en-US" sz="1200" b="1" dirty="0">
+                          <a:solidFill>
+                            <a:srgbClr val="1F2A33"/>
+                          </a:solidFill>
+                          <a:latin typeface="Calibri" pitchFamily="34" charset="0"/>
+                          <a:ea typeface="Calibri" pitchFamily="34" charset="-122"/>
+                          <a:cs typeface="Calibri" pitchFamily="34" charset="-120"/>
+                        </a:rPr>
+                        <a:t>Vendors don't use the form</a:t>
+                      </a:r>
+                      <a:endParaRPr lang="en-US" sz="1200" dirty="0">
+                        <a:latin typeface="Calibri" charset="0"/>
+                        <a:ea typeface="Calibri" charset="0"/>
+                        <a:cs typeface="Calibri" charset="0"/>
+                      </a:endParaRPr>
+                    </a:p>
+                  </a:txBody>
+                  <a:tcPr marL="45720" marR="45720" marT="45720" marB="45720" anchor="ctr">
+                    <a:lnL w="6350" cap="flat" cmpd="sng" algn="ctr">
+                      <a:solidFill>
+                        <a:srgbClr val="D5DCE2"/>
+                      </a:solidFill>
+                      <a:prstDash val="solid"/>
+                      <a:round/>
+                      <a:headEnd type="none" w="med" len="med"/>
+                      <a:tailEnd type="none" w="med" len="med"/>
+                    </a:lnL>
+                    <a:lnR w="6350" cap="flat" cmpd="sng" algn="ctr">
+                      <a:solidFill>
+                        <a:srgbClr val="D5DCE2"/>
+                      </a:solidFill>
+                      <a:prstDash val="solid"/>
+                      <a:round/>
+                      <a:headEnd type="none" w="med" len="med"/>
+                      <a:tailEnd type="none" w="med" len="med"/>
+                    </a:lnR>
+                    <a:lnT w="6350" cap="flat" cmpd="sng" algn="ctr">
+                      <a:solidFill>
+                        <a:srgbClr val="D5DCE2"/>
+                      </a:solidFill>
+                      <a:prstDash val="solid"/>
+                      <a:round/>
+                      <a:headEnd type="none" w="med" len="med"/>
+                      <a:tailEnd type="none" w="med" len="med"/>
+                    </a:lnT>
+                    <a:lnB w="6350" cap="flat" cmpd="sng" algn="ctr">
+                      <a:solidFill>
+                        <a:srgbClr val="D5DCE2"/>
+                      </a:solidFill>
+                      <a:prstDash val="solid"/>
+                      <a:round/>
+                      <a:headEnd type="none" w="med" len="med"/>
+                      <a:tailEnd type="none" w="med" len="med"/>
+                    </a:lnB>
+                    <a:solidFill>
+                      <a:srgbClr val="FFFFFF"/>
+                    </a:solidFill>
+                  </a:tcPr>
+                </a:tc>
+                <a:tc>
+                  <a:txBody>
+                    <a:bodyPr/>
+                    <a:lstStyle/>
+                    <a:p>
+                      <a:pPr indent="0" marL="0">
+                        <a:buNone/>
+                      </a:pPr>
+                      <a:r>
+                        <a:rPr lang="en-US" sz="1200" dirty="0">
+                          <a:solidFill>
+                            <a:srgbClr val="1F2A33"/>
+                          </a:solidFill>
+                          <a:latin typeface="Calibri" pitchFamily="34" charset="0"/>
+                          <a:ea typeface="Calibri" pitchFamily="34" charset="-122"/>
+                          <a:cs typeface="Calibri" pitchFamily="34" charset="-120"/>
+                        </a:rPr>
+                        <a:t>They keep sending their own PDFs</a:t>
+                      </a:r>
+                      <a:endParaRPr lang="en-US" sz="1200" dirty="0">
+                        <a:latin typeface="Calibri" charset="0"/>
+                        <a:ea typeface="Calibri" charset="0"/>
+                        <a:cs typeface="Calibri" charset="0"/>
+                      </a:endParaRPr>
+                    </a:p>
+                  </a:txBody>
+                  <a:tcPr marL="45720" marR="45720" marT="45720" marB="45720" anchor="ctr">
+                    <a:lnL w="6350" cap="flat" cmpd="sng" algn="ctr">
+                      <a:solidFill>
+                        <a:srgbClr val="D5DCE2"/>
+                      </a:solidFill>
+                      <a:prstDash val="solid"/>
+                      <a:round/>
+                      <a:headEnd type="none" w="med" len="med"/>
+                      <a:tailEnd type="none" w="med" len="med"/>
+                    </a:lnL>
+                    <a:lnR w="6350" cap="flat" cmpd="sng" algn="ctr">
+                      <a:solidFill>
+                        <a:srgbClr val="D5DCE2"/>
+                      </a:solidFill>
+                      <a:prstDash val="solid"/>
+                      <a:round/>
+                      <a:headEnd type="none" w="med" len="med"/>
+                      <a:tailEnd type="none" w="med" len="med"/>
+                    </a:lnR>
+                    <a:lnT w="6350" cap="flat" cmpd="sng" algn="ctr">
+                      <a:solidFill>
+                        <a:srgbClr val="D5DCE2"/>
+                      </a:solidFill>
+                      <a:prstDash val="solid"/>
+                      <a:round/>
+                      <a:headEnd type="none" w="med" len="med"/>
+                      <a:tailEnd type="none" w="med" len="med"/>
+                    </a:lnT>
+                    <a:lnB w="6350" cap="flat" cmpd="sng" algn="ctr">
+                      <a:solidFill>
+                        <a:srgbClr val="D5DCE2"/>
+                      </a:solidFill>
+                      <a:prstDash val="solid"/>
+                      <a:round/>
+                      <a:headEnd type="none" w="med" len="med"/>
+                      <a:tailEnd type="none" w="med" len="med"/>
+                    </a:lnB>
+                    <a:solidFill>
+                      <a:srgbClr val="FFFFFF"/>
+                    </a:solidFill>
+                  </a:tcPr>
+                </a:tc>
+                <a:tc>
+                  <a:txBody>
+                    <a:bodyPr/>
+                    <a:lstStyle/>
+                    <a:p>
+                      <a:pPr indent="0" marL="0">
+                        <a:buNone/>
+                      </a:pPr>
+                      <a:r>
+                        <a:rPr lang="en-US" sz="1200" dirty="0">
+                          <a:solidFill>
+                            <a:srgbClr val="1F2A33"/>
+                          </a:solidFill>
+                          <a:latin typeface="Calibri" pitchFamily="34" charset="0"/>
+                          <a:ea typeface="Calibri" pitchFamily="34" charset="-122"/>
+                          <a:cs typeface="Calibri" pitchFamily="34" charset="-120"/>
+                        </a:rPr>
+                        <a:t>PDFs keep working; start with the 3 vendors that cost the most reading time</a:t>
+                      </a:r>
+                      <a:endParaRPr lang="en-US" sz="1200" dirty="0">
+                        <a:latin typeface="Calibri" charset="0"/>
+                        <a:ea typeface="Calibri" charset="0"/>
+                        <a:cs typeface="Calibri" charset="0"/>
+                      </a:endParaRPr>
+                    </a:p>
+                  </a:txBody>
+                  <a:tcPr marL="45720" marR="45720" marT="45720" marB="45720" anchor="ctr">
+                    <a:lnL w="6350" cap="flat" cmpd="sng" algn="ctr">
+                      <a:solidFill>
+                        <a:srgbClr val="D5DCE2"/>
+                      </a:solidFill>
+                      <a:prstDash val="solid"/>
+                      <a:round/>
+                      <a:headEnd type="none" w="med" len="med"/>
+                      <a:tailEnd type="none" w="med" len="med"/>
+                    </a:lnL>
+                    <a:lnR w="6350" cap="flat" cmpd="sng" algn="ctr">
+                      <a:solidFill>
+                        <a:srgbClr val="D5DCE2"/>
+                      </a:solidFill>
+                      <a:prstDash val="solid"/>
+                      <a:round/>
+                      <a:headEnd type="none" w="med" len="med"/>
+                      <a:tailEnd type="none" w="med" len="med"/>
+                    </a:lnR>
+                    <a:lnT w="6350" cap="flat" cmpd="sng" algn="ctr">
+                      <a:solidFill>
+                        <a:srgbClr val="D5DCE2"/>
+                      </a:solidFill>
+                      <a:prstDash val="solid"/>
+                      <a:round/>
+                      <a:headEnd type="none" w="med" len="med"/>
+                      <a:tailEnd type="none" w="med" len="med"/>
+                    </a:lnT>
+                    <a:lnB w="6350" cap="flat" cmpd="sng" algn="ctr">
+                      <a:solidFill>
+                        <a:srgbClr val="D5DCE2"/>
+                      </a:solidFill>
+                      <a:prstDash val="solid"/>
+                      <a:round/>
+                      <a:headEnd type="none" w="med" len="med"/>
+                      <a:tailEnd type="none" w="med" len="med"/>
+                    </a:lnB>
+                    <a:solidFill>
+                      <a:srgbClr val="FFFFFF"/>
+                    </a:solidFill>
+                  </a:tcPr>
+                </a:tc>
+              </a:tr>
+              <a:tr h="475488">
+                <a:tc>
+                  <a:txBody>
+                    <a:bodyPr/>
+                    <a:lstStyle/>
+                    <a:p>
+                      <a:pPr indent="0" marL="0">
+                        <a:buNone/>
+                      </a:pPr>
+                      <a:r>
+                        <a:rPr lang="en-US" sz="1200" b="1" dirty="0">
+                          <a:solidFill>
+                            <a:srgbClr val="1F2A33"/>
+                          </a:solidFill>
+                          <a:latin typeface="Calibri" pitchFamily="34" charset="0"/>
+                          <a:ea typeface="Calibri" pitchFamily="34" charset="-122"/>
+                          <a:cs typeface="Calibri" pitchFamily="34" charset="-120"/>
+                        </a:rPr>
+                        <a:t>A poor scan</a:t>
+                      </a:r>
+                      <a:endParaRPr lang="en-US" sz="1200" dirty="0">
+                        <a:latin typeface="Calibri" charset="0"/>
+                        <a:ea typeface="Calibri" charset="0"/>
+                        <a:cs typeface="Calibri" charset="0"/>
+                      </a:endParaRPr>
+                    </a:p>
+                  </a:txBody>
+                  <a:tcPr marL="45720" marR="45720" marT="45720" marB="45720" anchor="ctr">
+                    <a:lnL w="6350" cap="flat" cmpd="sng" algn="ctr">
+                      <a:solidFill>
+                        <a:srgbClr val="D5DCE2"/>
+                      </a:solidFill>
+                      <a:prstDash val="solid"/>
+                      <a:round/>
+                      <a:headEnd type="none" w="med" len="med"/>
+                      <a:tailEnd type="none" w="med" len="med"/>
+                    </a:lnL>
+                    <a:lnR w="6350" cap="flat" cmpd="sng" algn="ctr">
+                      <a:solidFill>
+                        <a:srgbClr val="D5DCE2"/>
+                      </a:solidFill>
+                      <a:prstDash val="solid"/>
+                      <a:round/>
+                      <a:headEnd type="none" w="med" len="med"/>
+                      <a:tailEnd type="none" w="med" len="med"/>
+                    </a:lnR>
+                    <a:lnT w="6350" cap="flat" cmpd="sng" algn="ctr">
+                      <a:solidFill>
+                        <a:srgbClr val="D5DCE2"/>
+                      </a:solidFill>
+                      <a:prstDash val="solid"/>
+                      <a:round/>
+                      <a:headEnd type="none" w="med" len="med"/>
+                      <a:tailEnd type="none" w="med" len="med"/>
+                    </a:lnT>
+                    <a:lnB w="6350" cap="flat" cmpd="sng" algn="ctr">
+                      <a:solidFill>
+                        <a:srgbClr val="D5DCE2"/>
+                      </a:solidFill>
+                      <a:prstDash val="solid"/>
+                      <a:round/>
+                      <a:headEnd type="none" w="med" len="med"/>
+                      <a:tailEnd type="none" w="med" len="med"/>
+                    </a:lnB>
+                    <a:solidFill>
+                      <a:srgbClr val="F6F8FA"/>
+                    </a:solidFill>
+                  </a:tcPr>
+                </a:tc>
+                <a:tc>
+                  <a:txBody>
+                    <a:bodyPr/>
+                    <a:lstStyle/>
+                    <a:p>
+                      <a:pPr indent="0" marL="0">
+                        <a:buNone/>
+                      </a:pPr>
+                      <a:r>
+                        <a:rPr lang="en-US" sz="1200" dirty="0">
+                          <a:solidFill>
+                            <a:srgbClr val="1F2A33"/>
+                          </a:solidFill>
+                          <a:latin typeface="Calibri" pitchFamily="34" charset="0"/>
+                          <a:ea typeface="Calibri" pitchFamily="34" charset="-122"/>
+                          <a:cs typeface="Calibri" pitchFamily="34" charset="-120"/>
+                        </a:rPr>
+                        <a:t>OCR can misread a digit</a:t>
+                      </a:r>
+                      <a:endParaRPr lang="en-US" sz="1200" dirty="0">
+                        <a:latin typeface="Calibri" charset="0"/>
+                        <a:ea typeface="Calibri" charset="0"/>
+                        <a:cs typeface="Calibri" charset="0"/>
+                      </a:endParaRPr>
+                    </a:p>
+                  </a:txBody>
+                  <a:tcPr marL="45720" marR="45720" marT="45720" marB="45720" anchor="ctr">
+                    <a:lnL w="6350" cap="flat" cmpd="sng" algn="ctr">
+                      <a:solidFill>
+                        <a:srgbClr val="D5DCE2"/>
+                      </a:solidFill>
+                      <a:prstDash val="solid"/>
+                      <a:round/>
+                      <a:headEnd type="none" w="med" len="med"/>
+                      <a:tailEnd type="none" w="med" len="med"/>
+                    </a:lnL>
+                    <a:lnR w="6350" cap="flat" cmpd="sng" algn="ctr">
+                      <a:solidFill>
+                        <a:srgbClr val="D5DCE2"/>
+                      </a:solidFill>
+                      <a:prstDash val="solid"/>
+                      <a:round/>
+                      <a:headEnd type="none" w="med" len="med"/>
+                      <a:tailEnd type="none" w="med" len="med"/>
+                    </a:lnR>
+                    <a:lnT w="6350" cap="flat" cmpd="sng" algn="ctr">
+                      <a:solidFill>
+                        <a:srgbClr val="D5DCE2"/>
+                      </a:solidFill>
+                      <a:prstDash val="solid"/>
+                      <a:round/>
+                      <a:headEnd type="none" w="med" len="med"/>
+                      <a:tailEnd type="none" w="med" len="med"/>
+                    </a:lnT>
+                    <a:lnB w="6350" cap="flat" cmpd="sng" algn="ctr">
+                      <a:solidFill>
+                        <a:srgbClr val="D5DCE2"/>
+                      </a:solidFill>
+                      <a:prstDash val="solid"/>
+                      <a:round/>
+                      <a:headEnd type="none" w="med" len="med"/>
+                      <a:tailEnd type="none" w="med" len="med"/>
+                    </a:lnB>
+                    <a:solidFill>
+                      <a:srgbClr val="F6F8FA"/>
+                    </a:solidFill>
+                  </a:tcPr>
+                </a:tc>
+                <a:tc>
+                  <a:txBody>
+                    <a:bodyPr/>
+                    <a:lstStyle/>
+                    <a:p>
+                      <a:pPr indent="0" marL="0">
+                        <a:buNone/>
+                      </a:pPr>
+                      <a:r>
+                        <a:rPr lang="en-US" sz="1200" dirty="0">
+                          <a:solidFill>
+                            <a:srgbClr val="1F2A33"/>
+                          </a:solidFill>
+                          <a:latin typeface="Calibri" pitchFamily="34" charset="0"/>
+                          <a:ea typeface="Calibri" pitchFamily="34" charset="-122"/>
+                          <a:cs typeface="Calibri" pitchFamily="34" charset="-120"/>
+                        </a:rPr>
+                        <a:t>Every OCR'd doc goes to Needs your OK, shown next to the image</a:t>
+                      </a:r>
+                      <a:endParaRPr lang="en-US" sz="1200" dirty="0">
+                        <a:latin typeface="Calibri" charset="0"/>
+                        <a:ea typeface="Calibri" charset="0"/>
+                        <a:cs typeface="Calibri" charset="0"/>
+                      </a:endParaRPr>
+                    </a:p>
+                  </a:txBody>
+                  <a:tcPr marL="45720" marR="45720" marT="45720" marB="45720" anchor="ctr">
+                    <a:lnL w="6350" cap="flat" cmpd="sng" algn="ctr">
+                      <a:solidFill>
+                        <a:srgbClr val="D5DCE2"/>
+                      </a:solidFill>
+                      <a:prstDash val="solid"/>
+                      <a:round/>
+                      <a:headEnd type="none" w="med" len="med"/>
+                      <a:tailEnd type="none" w="med" len="med"/>
+                    </a:lnL>
+                    <a:lnR w="6350" cap="flat" cmpd="sng" algn="ctr">
+                      <a:solidFill>
+                        <a:srgbClr val="D5DCE2"/>
+                      </a:solidFill>
+                      <a:prstDash val="solid"/>
+                      <a:round/>
+                      <a:headEnd type="none" w="med" len="med"/>
+                      <a:tailEnd type="none" w="med" len="med"/>
+                    </a:lnR>
+                    <a:lnT w="6350" cap="flat" cmpd="sng" algn="ctr">
+                      <a:solidFill>
+                        <a:srgbClr val="D5DCE2"/>
+                      </a:solidFill>
+                      <a:prstDash val="solid"/>
+                      <a:round/>
+                      <a:headEnd type="none" w="med" len="med"/>
+                      <a:tailEnd type="none" w="med" len="med"/>
+                    </a:lnT>
+                    <a:lnB w="6350" cap="flat" cmpd="sng" algn="ctr">
+                      <a:solidFill>
+                        <a:srgbClr val="D5DCE2"/>
+                      </a:solidFill>
+                      <a:prstDash val="solid"/>
+                      <a:round/>
+                      <a:headEnd type="none" w="med" len="med"/>
+                      <a:tailEnd type="none" w="med" len="med"/>
+                    </a:lnB>
+                    <a:solidFill>
+                      <a:srgbClr val="F6F8FA"/>
+                    </a:solidFill>
+                  </a:tcPr>
+                </a:tc>
+              </a:tr>
+              <a:tr h="475488">
+                <a:tc>
+                  <a:txBody>
+                    <a:bodyPr/>
+                    <a:lstStyle/>
+                    <a:p>
+                      <a:pPr indent="0" marL="0">
+                        <a:buNone/>
+                      </a:pPr>
+                      <a:r>
+                        <a:rPr lang="en-US" sz="1200" b="1" dirty="0">
+                          <a:solidFill>
+                            <a:srgbClr val="1F2A33"/>
+                          </a:solidFill>
+                          <a:latin typeface="Calibri" pitchFamily="34" charset="0"/>
+                          <a:ea typeface="Calibri" pitchFamily="34" charset="-122"/>
+                          <a:cs typeface="Calibri" pitchFamily="34" charset="-120"/>
+                        </a:rPr>
+                        <a:t>Two PO lines with the same qty and price</a:t>
+                      </a:r>
+                      <a:endParaRPr lang="en-US" sz="1200" dirty="0">
+                        <a:latin typeface="Calibri" charset="0"/>
+                        <a:ea typeface="Calibri" charset="0"/>
+                        <a:cs typeface="Calibri" charset="0"/>
+                      </a:endParaRPr>
+                    </a:p>
+                  </a:txBody>
+                  <a:tcPr marL="45720" marR="45720" marT="45720" marB="45720" anchor="ctr">
+                    <a:lnL w="6350" cap="flat" cmpd="sng" algn="ctr">
+                      <a:solidFill>
+                        <a:srgbClr val="D5DCE2"/>
+                      </a:solidFill>
+                      <a:prstDash val="solid"/>
+                      <a:round/>
+                      <a:headEnd type="none" w="med" len="med"/>
+                      <a:tailEnd type="none" w="med" len="med"/>
+                    </a:lnL>
+                    <a:lnR w="6350" cap="flat" cmpd="sng" algn="ctr">
+                      <a:solidFill>
+                        <a:srgbClr val="D5DCE2"/>
+                      </a:solidFill>
+                      <a:prstDash val="solid"/>
+                      <a:round/>
+                      <a:headEnd type="none" w="med" len="med"/>
+                      <a:tailEnd type="none" w="med" len="med"/>
+                    </a:lnR>
+                    <a:lnT w="6350" cap="flat" cmpd="sng" algn="ctr">
+                      <a:solidFill>
+                        <a:srgbClr val="D5DCE2"/>
+                      </a:solidFill>
+                      <a:prstDash val="solid"/>
+                      <a:round/>
+                      <a:headEnd type="none" w="med" len="med"/>
+                      <a:tailEnd type="none" w="med" len="med"/>
+                    </a:lnT>
+                    <a:lnB w="6350" cap="flat" cmpd="sng" algn="ctr">
+                      <a:solidFill>
+                        <a:srgbClr val="D5DCE2"/>
+                      </a:solidFill>
+                      <a:prstDash val="solid"/>
+                      <a:round/>
+                      <a:headEnd type="none" w="med" len="med"/>
+                      <a:tailEnd type="none" w="med" len="med"/>
+                    </a:lnB>
+                    <a:solidFill>
+                      <a:srgbClr val="FFFFFF"/>
+                    </a:solidFill>
+                  </a:tcPr>
+                </a:tc>
+                <a:tc>
+                  <a:txBody>
+                    <a:bodyPr/>
+                    <a:lstStyle/>
+                    <a:p>
+                      <a:pPr indent="0" marL="0">
+                        <a:buNone/>
+                      </a:pPr>
+                      <a:r>
+                        <a:rPr lang="en-US" sz="1200" dirty="0">
+                          <a:solidFill>
+                            <a:srgbClr val="1F2A33"/>
+                          </a:solidFill>
+                          <a:latin typeface="Calibri" pitchFamily="34" charset="0"/>
+                          <a:ea typeface="Calibri" pitchFamily="34" charset="-122"/>
+                          <a:cs typeface="Calibri" pitchFamily="34" charset="-120"/>
+                        </a:rPr>
+                        <a:t>An L4 inference could pair the wrong lines</a:t>
+                      </a:r>
+                      <a:endParaRPr lang="en-US" sz="1200" dirty="0">
+                        <a:latin typeface="Calibri" charset="0"/>
+                        <a:ea typeface="Calibri" charset="0"/>
+                        <a:cs typeface="Calibri" charset="0"/>
+                      </a:endParaRPr>
+                    </a:p>
+                  </a:txBody>
+                  <a:tcPr marL="45720" marR="45720" marT="45720" marB="45720" anchor="ctr">
+                    <a:lnL w="6350" cap="flat" cmpd="sng" algn="ctr">
+                      <a:solidFill>
+                        <a:srgbClr val="D5DCE2"/>
+                      </a:solidFill>
+                      <a:prstDash val="solid"/>
+                      <a:round/>
+                      <a:headEnd type="none" w="med" len="med"/>
+                      <a:tailEnd type="none" w="med" len="med"/>
+                    </a:lnL>
+                    <a:lnR w="6350" cap="flat" cmpd="sng" algn="ctr">
+                      <a:solidFill>
+                        <a:srgbClr val="D5DCE2"/>
+                      </a:solidFill>
+                      <a:prstDash val="solid"/>
+                      <a:round/>
+                      <a:headEnd type="none" w="med" len="med"/>
+                      <a:tailEnd type="none" w="med" len="med"/>
+                    </a:lnR>
+                    <a:lnT w="6350" cap="flat" cmpd="sng" algn="ctr">
+                      <a:solidFill>
+                        <a:srgbClr val="D5DCE2"/>
+                      </a:solidFill>
+                      <a:prstDash val="solid"/>
+                      <a:round/>
+                      <a:headEnd type="none" w="med" len="med"/>
+                      <a:tailEnd type="none" w="med" len="med"/>
+                    </a:lnT>
+                    <a:lnB w="6350" cap="flat" cmpd="sng" algn="ctr">
+                      <a:solidFill>
+                        <a:srgbClr val="D5DCE2"/>
+                      </a:solidFill>
+                      <a:prstDash val="solid"/>
+                      <a:round/>
+                      <a:headEnd type="none" w="med" len="med"/>
+                      <a:tailEnd type="none" w="med" len="med"/>
+                    </a:lnB>
+                    <a:solidFill>
+                      <a:srgbClr val="FFFFFF"/>
+                    </a:solidFill>
+                  </a:tcPr>
+                </a:tc>
+                <a:tc>
+                  <a:txBody>
+                    <a:bodyPr/>
+                    <a:lstStyle/>
+                    <a:p>
+                      <a:pPr indent="0" marL="0">
+                        <a:buNone/>
+                      </a:pPr>
+                      <a:r>
+                        <a:rPr lang="en-US" sz="1200" dirty="0">
+                          <a:solidFill>
+                            <a:srgbClr val="1F2A33"/>
+                          </a:solidFill>
+                          <a:latin typeface="Calibri" pitchFamily="34" charset="0"/>
+                          <a:ea typeface="Calibri" pitchFamily="34" charset="-122"/>
+                          <a:cs typeface="Calibri" pitchFamily="34" charset="-120"/>
+                        </a:rPr>
+                        <a:t>L4 is never HIGH; always goes to review</a:t>
+                      </a:r>
+                      <a:endParaRPr lang="en-US" sz="1200" dirty="0">
+                        <a:latin typeface="Calibri" charset="0"/>
+                        <a:ea typeface="Calibri" charset="0"/>
+                        <a:cs typeface="Calibri" charset="0"/>
+                      </a:endParaRPr>
+                    </a:p>
+                  </a:txBody>
+                  <a:tcPr marL="45720" marR="45720" marT="45720" marB="45720" anchor="ctr">
+                    <a:lnL w="6350" cap="flat" cmpd="sng" algn="ctr">
+                      <a:solidFill>
+                        <a:srgbClr val="D5DCE2"/>
+                      </a:solidFill>
+                      <a:prstDash val="solid"/>
+                      <a:round/>
+                      <a:headEnd type="none" w="med" len="med"/>
+                      <a:tailEnd type="none" w="med" len="med"/>
+                    </a:lnL>
+                    <a:lnR w="6350" cap="flat" cmpd="sng" algn="ctr">
+                      <a:solidFill>
+                        <a:srgbClr val="D5DCE2"/>
+                      </a:solidFill>
+                      <a:prstDash val="solid"/>
+                      <a:round/>
+                      <a:headEnd type="none" w="med" len="med"/>
+                      <a:tailEnd type="none" w="med" len="med"/>
+                    </a:lnR>
+                    <a:lnT w="6350" cap="flat" cmpd="sng" algn="ctr">
+                      <a:solidFill>
+                        <a:srgbClr val="D5DCE2"/>
+                      </a:solidFill>
+                      <a:prstDash val="solid"/>
+                      <a:round/>
+                      <a:headEnd type="none" w="med" len="med"/>
+                      <a:tailEnd type="none" w="med" len="med"/>
+                    </a:lnT>
+                    <a:lnB w="6350" cap="flat" cmpd="sng" algn="ctr">
+                      <a:solidFill>
+                        <a:srgbClr val="D5DCE2"/>
+                      </a:solidFill>
+                      <a:prstDash val="solid"/>
+                      <a:round/>
+                      <a:headEnd type="none" w="med" len="med"/>
+                      <a:tailEnd type="none" w="med" len="med"/>
+                    </a:lnB>
+                    <a:solidFill>
+                      <a:srgbClr val="FFFFFF"/>
+                    </a:solidFill>
+                  </a:tcPr>
+                </a:tc>
+              </a:tr>
+              <a:tr h="475488">
+                <a:tc>
+                  <a:txBody>
+                    <a:bodyPr/>
+                    <a:lstStyle/>
+                    <a:p>
+                      <a:pPr indent="0" marL="0">
+                        <a:buNone/>
+                      </a:pPr>
+                      <a:r>
+                        <a:rPr lang="en-US" sz="1200" b="1" dirty="0">
+                          <a:solidFill>
+                            <a:srgbClr val="1F2A33"/>
+                          </a:solidFill>
+                          <a:latin typeface="Calibri" pitchFamily="34" charset="0"/>
+                          <a:ea typeface="Calibri" pitchFamily="34" charset="-122"/>
+                          <a:cs typeface="Calibri" pitchFamily="34" charset="-120"/>
+                        </a:rPr>
+                        <a:t>A stale open-PO CSV</a:t>
+                      </a:r>
+                      <a:endParaRPr lang="en-US" sz="1200" dirty="0">
+                        <a:latin typeface="Calibri" charset="0"/>
+                        <a:ea typeface="Calibri" charset="0"/>
+                        <a:cs typeface="Calibri" charset="0"/>
+                      </a:endParaRPr>
+                    </a:p>
+                  </a:txBody>
+                  <a:tcPr marL="45720" marR="45720" marT="45720" marB="45720" anchor="ctr">
+                    <a:lnL w="6350" cap="flat" cmpd="sng" algn="ctr">
+                      <a:solidFill>
+                        <a:srgbClr val="D5DCE2"/>
+                      </a:solidFill>
+                      <a:prstDash val="solid"/>
+                      <a:round/>
+                      <a:headEnd type="none" w="med" len="med"/>
+                      <a:tailEnd type="none" w="med" len="med"/>
+                    </a:lnL>
+                    <a:lnR w="6350" cap="flat" cmpd="sng" algn="ctr">
+                      <a:solidFill>
+                        <a:srgbClr val="D5DCE2"/>
+                      </a:solidFill>
+                      <a:prstDash val="solid"/>
+                      <a:round/>
+                      <a:headEnd type="none" w="med" len="med"/>
+                      <a:tailEnd type="none" w="med" len="med"/>
+                    </a:lnR>
+                    <a:lnT w="6350" cap="flat" cmpd="sng" algn="ctr">
+                      <a:solidFill>
+                        <a:srgbClr val="D5DCE2"/>
+                      </a:solidFill>
+                      <a:prstDash val="solid"/>
+                      <a:round/>
+                      <a:headEnd type="none" w="med" len="med"/>
+                      <a:tailEnd type="none" w="med" len="med"/>
+                    </a:lnT>
+                    <a:lnB w="6350" cap="flat" cmpd="sng" algn="ctr">
+                      <a:solidFill>
+                        <a:srgbClr val="D5DCE2"/>
+                      </a:solidFill>
+                      <a:prstDash val="solid"/>
+                      <a:round/>
+                      <a:headEnd type="none" w="med" len="med"/>
+                      <a:tailEnd type="none" w="med" len="med"/>
+                    </a:lnB>
+                    <a:solidFill>
+                      <a:srgbClr val="F6F8FA"/>
+                    </a:solidFill>
+                  </a:tcPr>
+                </a:tc>
+                <a:tc>
+                  <a:txBody>
+                    <a:bodyPr/>
+                    <a:lstStyle/>
+                    <a:p>
+                      <a:pPr indent="0" marL="0">
+                        <a:buNone/>
+                      </a:pPr>
+                      <a:r>
+                        <a:rPr lang="en-US" sz="1200" dirty="0">
+                          <a:solidFill>
+                            <a:srgbClr val="1F2A33"/>
+                          </a:solidFill>
+                          <a:latin typeface="Calibri" pitchFamily="34" charset="0"/>
+                          <a:ea typeface="Calibri" pitchFamily="34" charset="-122"/>
+                          <a:cs typeface="Calibri" pitchFamily="34" charset="-120"/>
+                        </a:rPr>
+                        <a:t>False "PO not open" or "possible dropped line"</a:t>
+                      </a:r>
+                      <a:endParaRPr lang="en-US" sz="1200" dirty="0">
+                        <a:latin typeface="Calibri" charset="0"/>
+                        <a:ea typeface="Calibri" charset="0"/>
+                        <a:cs typeface="Calibri" charset="0"/>
+                      </a:endParaRPr>
+                    </a:p>
+                  </a:txBody>
+                  <a:tcPr marL="45720" marR="45720" marT="45720" marB="45720" anchor="ctr">
+                    <a:lnL w="6350" cap="flat" cmpd="sng" algn="ctr">
+                      <a:solidFill>
+                        <a:srgbClr val="D5DCE2"/>
+                      </a:solidFill>
+                      <a:prstDash val="solid"/>
+                      <a:round/>
+                      <a:headEnd type="none" w="med" len="med"/>
+                      <a:tailEnd type="none" w="med" len="med"/>
+                    </a:lnL>
+                    <a:lnR w="6350" cap="flat" cmpd="sng" algn="ctr">
+                      <a:solidFill>
+                        <a:srgbClr val="D5DCE2"/>
+                      </a:solidFill>
+                      <a:prstDash val="solid"/>
+                      <a:round/>
+                      <a:headEnd type="none" w="med" len="med"/>
+                      <a:tailEnd type="none" w="med" len="med"/>
+                    </a:lnR>
+                    <a:lnT w="6350" cap="flat" cmpd="sng" algn="ctr">
+                      <a:solidFill>
+                        <a:srgbClr val="D5DCE2"/>
+                      </a:solidFill>
+                      <a:prstDash val="solid"/>
+                      <a:round/>
+                      <a:headEnd type="none" w="med" len="med"/>
+                      <a:tailEnd type="none" w="med" len="med"/>
+                    </a:lnT>
+                    <a:lnB w="6350" cap="flat" cmpd="sng" algn="ctr">
+                      <a:solidFill>
+                        <a:srgbClr val="D5DCE2"/>
+                      </a:solidFill>
+                      <a:prstDash val="solid"/>
+                      <a:round/>
+                      <a:headEnd type="none" w="med" len="med"/>
+                      <a:tailEnd type="none" w="med" len="med"/>
+                    </a:lnB>
+                    <a:solidFill>
+                      <a:srgbClr val="F6F8FA"/>
+                    </a:solidFill>
+                  </a:tcPr>
+                </a:tc>
+                <a:tc>
+                  <a:txBody>
+                    <a:bodyPr/>
+                    <a:lstStyle/>
+                    <a:p>
+                      <a:pPr indent="0" marL="0">
+                        <a:buNone/>
+                      </a:pPr>
+                      <a:r>
+                        <a:rPr lang="en-US" sz="1200" dirty="0">
+                          <a:solidFill>
+                            <a:srgbClr val="1F2A33"/>
+                          </a:solidFill>
+                          <a:latin typeface="Calibri" pitchFamily="34" charset="0"/>
+                          <a:ea typeface="Calibri" pitchFamily="34" charset="-122"/>
+                          <a:cs typeface="Calibri" pitchFamily="34" charset="-120"/>
+                        </a:rPr>
+                        <a:t>Pull the export each morning; show its as-of date</a:t>
+                      </a:r>
+                      <a:endParaRPr lang="en-US" sz="1200" dirty="0">
+                        <a:latin typeface="Calibri" charset="0"/>
+                        <a:ea typeface="Calibri" charset="0"/>
+                        <a:cs typeface="Calibri" charset="0"/>
+                      </a:endParaRPr>
+                    </a:p>
+                  </a:txBody>
+                  <a:tcPr marL="45720" marR="45720" marT="45720" marB="45720" anchor="ctr">
+                    <a:lnL w="6350" cap="flat" cmpd="sng" algn="ctr">
+                      <a:solidFill>
+                        <a:srgbClr val="D5DCE2"/>
+                      </a:solidFill>
+                      <a:prstDash val="solid"/>
+                      <a:round/>
+                      <a:headEnd type="none" w="med" len="med"/>
+                      <a:tailEnd type="none" w="med" len="med"/>
+                    </a:lnL>
+                    <a:lnR w="6350" cap="flat" cmpd="sng" algn="ctr">
+                      <a:solidFill>
+                        <a:srgbClr val="D5DCE2"/>
+                      </a:solidFill>
+                      <a:prstDash val="solid"/>
+                      <a:round/>
+                      <a:headEnd type="none" w="med" len="med"/>
+                      <a:tailEnd type="none" w="med" len="med"/>
+                    </a:lnR>
+                    <a:lnT w="6350" cap="flat" cmpd="sng" algn="ctr">
+                      <a:solidFill>
+                        <a:srgbClr val="D5DCE2"/>
+                      </a:solidFill>
+                      <a:prstDash val="solid"/>
+                      <a:round/>
+                      <a:headEnd type="none" w="med" len="med"/>
+                      <a:tailEnd type="none" w="med" len="med"/>
+                    </a:lnT>
+                    <a:lnB w="6350" cap="flat" cmpd="sng" algn="ctr">
+                      <a:solidFill>
+                        <a:srgbClr val="D5DCE2"/>
+                      </a:solidFill>
+                      <a:prstDash val="solid"/>
+                      <a:round/>
+                      <a:headEnd type="none" w="med" len="med"/>
+                      <a:tailEnd type="none" w="med" len="med"/>
+                    </a:lnB>
+                    <a:solidFill>
+                      <a:srgbClr val="F6F8FA"/>
+                    </a:solidFill>
+                  </a:tcPr>
+                </a:tc>
+              </a:tr>
+              <a:tr h="475488">
+                <a:tc>
+                  <a:txBody>
+                    <a:bodyPr/>
+                    <a:lstStyle/>
+                    <a:p>
+                      <a:pPr indent="0" marL="0">
+                        <a:buNone/>
+                      </a:pPr>
+                      <a:r>
+                        <a:rPr lang="en-US" sz="1200" b="1" dirty="0">
+                          <a:solidFill>
+                            <a:srgbClr val="1F2A33"/>
+                          </a:solidFill>
+                          <a:latin typeface="Calibri" pitchFamily="34" charset="0"/>
+                          <a:ea typeface="Calibri" pitchFamily="34" charset="-122"/>
+                          <a:cs typeface="Calibri" pitchFamily="34" charset="-120"/>
+                        </a:rPr>
+                        <a:t>FX and price tolerance</a:t>
+                      </a:r>
+                      <a:endParaRPr lang="en-US" sz="1200" dirty="0">
+                        <a:latin typeface="Calibri" charset="0"/>
+                        <a:ea typeface="Calibri" charset="0"/>
+                        <a:cs typeface="Calibri" charset="0"/>
+                      </a:endParaRPr>
+                    </a:p>
+                  </a:txBody>
+                  <a:tcPr marL="45720" marR="45720" marT="45720" marB="45720" anchor="ctr">
+                    <a:lnL w="6350" cap="flat" cmpd="sng" algn="ctr">
+                      <a:solidFill>
+                        <a:srgbClr val="D5DCE2"/>
+                      </a:solidFill>
+                      <a:prstDash val="solid"/>
+                      <a:round/>
+                      <a:headEnd type="none" w="med" len="med"/>
+                      <a:tailEnd type="none" w="med" len="med"/>
+                    </a:lnL>
+                    <a:lnR w="6350" cap="flat" cmpd="sng" algn="ctr">
+                      <a:solidFill>
+                        <a:srgbClr val="D5DCE2"/>
+                      </a:solidFill>
+                      <a:prstDash val="solid"/>
+                      <a:round/>
+                      <a:headEnd type="none" w="med" len="med"/>
+                      <a:tailEnd type="none" w="med" len="med"/>
+                    </a:lnR>
+                    <a:lnT w="6350" cap="flat" cmpd="sng" algn="ctr">
+                      <a:solidFill>
+                        <a:srgbClr val="D5DCE2"/>
+                      </a:solidFill>
+                      <a:prstDash val="solid"/>
+                      <a:round/>
+                      <a:headEnd type="none" w="med" len="med"/>
+                      <a:tailEnd type="none" w="med" len="med"/>
+                    </a:lnT>
+                    <a:lnB w="6350" cap="flat" cmpd="sng" algn="ctr">
+                      <a:solidFill>
+                        <a:srgbClr val="D5DCE2"/>
+                      </a:solidFill>
+                      <a:prstDash val="solid"/>
+                      <a:round/>
+                      <a:headEnd type="none" w="med" len="med"/>
+                      <a:tailEnd type="none" w="med" len="med"/>
+                    </a:lnB>
+                    <a:solidFill>
+                      <a:srgbClr val="FFFFFF"/>
+                    </a:solidFill>
+                  </a:tcPr>
+                </a:tc>
+                <a:tc>
+                  <a:txBody>
+                    <a:bodyPr/>
+                    <a:lstStyle/>
+                    <a:p>
+                      <a:pPr indent="0" marL="0">
+                        <a:buNone/>
+                      </a:pPr>
+                      <a:r>
+                        <a:rPr lang="en-US" sz="1200" dirty="0">
+                          <a:solidFill>
+                            <a:srgbClr val="1F2A33"/>
+                          </a:solidFill>
+                          <a:latin typeface="Calibri" pitchFamily="34" charset="0"/>
+                          <a:ea typeface="Calibri" pitchFamily="34" charset="-122"/>
+                          <a:cs typeface="Calibri" pitchFamily="34" charset="-120"/>
+                        </a:rPr>
+                        <a:t>EUR checked at the ERP monthly rate, 1% band</a:t>
+                      </a:r>
+                      <a:endParaRPr lang="en-US" sz="1200" dirty="0">
+                        <a:latin typeface="Calibri" charset="0"/>
+                        <a:ea typeface="Calibri" charset="0"/>
+                        <a:cs typeface="Calibri" charset="0"/>
+                      </a:endParaRPr>
+                    </a:p>
+                  </a:txBody>
+                  <a:tcPr marL="45720" marR="45720" marT="45720" marB="45720" anchor="ctr">
+                    <a:lnL w="6350" cap="flat" cmpd="sng" algn="ctr">
+                      <a:solidFill>
+                        <a:srgbClr val="D5DCE2"/>
+                      </a:solidFill>
+                      <a:prstDash val="solid"/>
+                      <a:round/>
+                      <a:headEnd type="none" w="med" len="med"/>
+                      <a:tailEnd type="none" w="med" len="med"/>
+                    </a:lnL>
+                    <a:lnR w="6350" cap="flat" cmpd="sng" algn="ctr">
+                      <a:solidFill>
+                        <a:srgbClr val="D5DCE2"/>
+                      </a:solidFill>
+                      <a:prstDash val="solid"/>
+                      <a:round/>
+                      <a:headEnd type="none" w="med" len="med"/>
+                      <a:tailEnd type="none" w="med" len="med"/>
+                    </a:lnR>
+                    <a:lnT w="6350" cap="flat" cmpd="sng" algn="ctr">
+                      <a:solidFill>
+                        <a:srgbClr val="D5DCE2"/>
+                      </a:solidFill>
+                      <a:prstDash val="solid"/>
+                      <a:round/>
+                      <a:headEnd type="none" w="med" len="med"/>
+                      <a:tailEnd type="none" w="med" len="med"/>
+                    </a:lnT>
+                    <a:lnB w="6350" cap="flat" cmpd="sng" algn="ctr">
+                      <a:solidFill>
+                        <a:srgbClr val="D5DCE2"/>
+                      </a:solidFill>
+                      <a:prstDash val="solid"/>
+                      <a:round/>
+                      <a:headEnd type="none" w="med" len="med"/>
+                      <a:tailEnd type="none" w="med" len="med"/>
+                    </a:lnB>
+                    <a:solidFill>
+                      <a:srgbClr val="FFFFFF"/>
+                    </a:solidFill>
+                  </a:tcPr>
+                </a:tc>
+                <a:tc>
+                  <a:txBody>
+                    <a:bodyPr/>
+                    <a:lstStyle/>
+                    <a:p>
+                      <a:pPr indent="0" marL="0">
+                        <a:buNone/>
+                      </a:pPr>
+                      <a:r>
+                        <a:rPr lang="en-US" sz="1200" dirty="0">
+                          <a:solidFill>
+                            <a:srgbClr val="1F2A33"/>
+                          </a:solidFill>
+                          <a:latin typeface="Calibri" pitchFamily="34" charset="0"/>
+                          <a:ea typeface="Calibri" pitchFamily="34" charset="-122"/>
+                          <a:cs typeface="Calibri" pitchFamily="34" charset="-120"/>
+                        </a:rPr>
+                        <a:t>Confirm with Lisa and AP what counts as a real difference</a:t>
+                      </a:r>
+                      <a:endParaRPr lang="en-US" sz="1200" dirty="0">
+                        <a:latin typeface="Calibri" charset="0"/>
+                        <a:ea typeface="Calibri" charset="0"/>
+                        <a:cs typeface="Calibri" charset="0"/>
+                      </a:endParaRPr>
+                    </a:p>
+                  </a:txBody>
+                  <a:tcPr marL="45720" marR="45720" marT="45720" marB="45720" anchor="ctr">
+                    <a:lnL w="6350" cap="flat" cmpd="sng" algn="ctr">
+                      <a:solidFill>
+                        <a:srgbClr val="D5DCE2"/>
+                      </a:solidFill>
+                      <a:prstDash val="solid"/>
+                      <a:round/>
+                      <a:headEnd type="none" w="med" len="med"/>
+                      <a:tailEnd type="none" w="med" len="med"/>
+                    </a:lnL>
+                    <a:lnR w="6350" cap="flat" cmpd="sng" algn="ctr">
+                      <a:solidFill>
+                        <a:srgbClr val="D5DCE2"/>
+                      </a:solidFill>
+                      <a:prstDash val="solid"/>
+                      <a:round/>
+                      <a:headEnd type="none" w="med" len="med"/>
+                      <a:tailEnd type="none" w="med" len="med"/>
+                    </a:lnR>
+                    <a:lnT w="6350" cap="flat" cmpd="sng" algn="ctr">
+                      <a:solidFill>
+                        <a:srgbClr val="D5DCE2"/>
+                      </a:solidFill>
+                      <a:prstDash val="solid"/>
+                      <a:round/>
+                      <a:headEnd type="none" w="med" len="med"/>
+                      <a:tailEnd type="none" w="med" len="med"/>
+                    </a:lnT>
+                    <a:lnB w="6350" cap="flat" cmpd="sng" algn="ctr">
+                      <a:solidFill>
+                        <a:srgbClr val="D5DCE2"/>
+                      </a:solidFill>
+                      <a:prstDash val="solid"/>
+                      <a:round/>
+                      <a:headEnd type="none" w="med" len="med"/>
+                      <a:tailEnd type="none" w="med" len="med"/>
+                    </a:lnB>
+                    <a:solidFill>
+                      <a:srgbClr val="FFFFFF"/>
+                    </a:solidFill>
+                  </a:tcPr>
+                </a:tc>
+              </a:tr>
+              <a:tr h="475488">
+                <a:tc>
+                  <a:txBody>
+                    <a:bodyPr/>
+                    <a:lstStyle/>
+                    <a:p>
+                      <a:pPr indent="0" marL="0">
+                        <a:buNone/>
+                      </a:pPr>
+                      <a:r>
+                        <a:rPr lang="en-US" sz="1200" b="1" dirty="0">
+                          <a:solidFill>
+                            <a:srgbClr val="1F2A33"/>
+                          </a:solidFill>
+                          <a:latin typeface="Calibri" pitchFamily="34" charset="0"/>
+                          <a:ea typeface="Calibri" pitchFamily="34" charset="-122"/>
+                          <a:cs typeface="Calibri" pitchFamily="34" charset="-120"/>
+                        </a:rPr>
+                        <a:t>Task 2: value at PO price</a:t>
+                      </a:r>
+                      <a:endParaRPr lang="en-US" sz="1200" dirty="0">
+                        <a:latin typeface="Calibri" charset="0"/>
+                        <a:ea typeface="Calibri" charset="0"/>
+                        <a:cs typeface="Calibri" charset="0"/>
+                      </a:endParaRPr>
+                    </a:p>
+                  </a:txBody>
+                  <a:tcPr marL="45720" marR="45720" marT="45720" marB="45720" anchor="ctr">
+                    <a:lnL w="6350" cap="flat" cmpd="sng" algn="ctr">
+                      <a:solidFill>
+                        <a:srgbClr val="D5DCE2"/>
+                      </a:solidFill>
+                      <a:prstDash val="solid"/>
+                      <a:round/>
+                      <a:headEnd type="none" w="med" len="med"/>
+                      <a:tailEnd type="none" w="med" len="med"/>
+                    </a:lnL>
+                    <a:lnR w="6350" cap="flat" cmpd="sng" algn="ctr">
+                      <a:solidFill>
+                        <a:srgbClr val="D5DCE2"/>
+                      </a:solidFill>
+                      <a:prstDash val="solid"/>
+                      <a:round/>
+                      <a:headEnd type="none" w="med" len="med"/>
+                      <a:tailEnd type="none" w="med" len="med"/>
+                    </a:lnR>
+                    <a:lnT w="6350" cap="flat" cmpd="sng" algn="ctr">
+                      <a:solidFill>
+                        <a:srgbClr val="D5DCE2"/>
+                      </a:solidFill>
+                      <a:prstDash val="solid"/>
+                      <a:round/>
+                      <a:headEnd type="none" w="med" len="med"/>
+                      <a:tailEnd type="none" w="med" len="med"/>
+                    </a:lnT>
+                    <a:lnB w="6350" cap="flat" cmpd="sng" algn="ctr">
+                      <a:solidFill>
+                        <a:srgbClr val="D5DCE2"/>
+                      </a:solidFill>
+                      <a:prstDash val="solid"/>
+                      <a:round/>
+                      <a:headEnd type="none" w="med" len="med"/>
+                      <a:tailEnd type="none" w="med" len="med"/>
+                    </a:lnB>
+                    <a:solidFill>
+                      <a:srgbClr val="F6F8FA"/>
+                    </a:solidFill>
+                  </a:tcPr>
+                </a:tc>
+                <a:tc>
+                  <a:txBody>
+                    <a:bodyPr/>
+                    <a:lstStyle/>
+                    <a:p>
+                      <a:pPr indent="0" marL="0">
+                        <a:buNone/>
+                      </a:pPr>
+                      <a:r>
+                        <a:rPr lang="en-US" sz="1200" dirty="0">
+                          <a:solidFill>
+                            <a:srgbClr val="1F2A33"/>
+                          </a:solidFill>
+                          <a:latin typeface="Calibri" pitchFamily="34" charset="0"/>
+                          <a:ea typeface="Calibri" pitchFamily="34" charset="-122"/>
+                          <a:cs typeface="Calibri" pitchFamily="34" charset="-120"/>
+                        </a:rPr>
+                        <a:t>Not invoiced cost; no AP data in the extract</a:t>
+                      </a:r>
+                      <a:endParaRPr lang="en-US" sz="1200" dirty="0">
+                        <a:latin typeface="Calibri" charset="0"/>
+                        <a:ea typeface="Calibri" charset="0"/>
+                        <a:cs typeface="Calibri" charset="0"/>
+                      </a:endParaRPr>
+                    </a:p>
+                  </a:txBody>
+                  <a:tcPr marL="45720" marR="45720" marT="45720" marB="45720" anchor="ctr">
+                    <a:lnL w="6350" cap="flat" cmpd="sng" algn="ctr">
+                      <a:solidFill>
+                        <a:srgbClr val="D5DCE2"/>
+                      </a:solidFill>
+                      <a:prstDash val="solid"/>
+                      <a:round/>
+                      <a:headEnd type="none" w="med" len="med"/>
+                      <a:tailEnd type="none" w="med" len="med"/>
+                    </a:lnL>
+                    <a:lnR w="6350" cap="flat" cmpd="sng" algn="ctr">
+                      <a:solidFill>
+                        <a:srgbClr val="D5DCE2"/>
+                      </a:solidFill>
+                      <a:prstDash val="solid"/>
+                      <a:round/>
+                      <a:headEnd type="none" w="med" len="med"/>
+                      <a:tailEnd type="none" w="med" len="med"/>
+                    </a:lnR>
+                    <a:lnT w="6350" cap="flat" cmpd="sng" algn="ctr">
+                      <a:solidFill>
+                        <a:srgbClr val="D5DCE2"/>
+                      </a:solidFill>
+                      <a:prstDash val="solid"/>
+                      <a:round/>
+                      <a:headEnd type="none" w="med" len="med"/>
+                      <a:tailEnd type="none" w="med" len="med"/>
+                    </a:lnT>
+                    <a:lnB w="6350" cap="flat" cmpd="sng" algn="ctr">
+                      <a:solidFill>
+                        <a:srgbClr val="D5DCE2"/>
+                      </a:solidFill>
+                      <a:prstDash val="solid"/>
+                      <a:round/>
+                      <a:headEnd type="none" w="med" len="med"/>
+                      <a:tailEnd type="none" w="med" len="med"/>
+                    </a:lnB>
+                    <a:solidFill>
+                      <a:srgbClr val="F6F8FA"/>
+                    </a:solidFill>
+                  </a:tcPr>
+                </a:tc>
+                <a:tc>
+                  <a:txBody>
+                    <a:bodyPr/>
+                    <a:lstStyle/>
+                    <a:p>
+                      <a:pPr indent="0" marL="0">
+                        <a:buNone/>
+                      </a:pPr>
+                      <a:r>
+                        <a:rPr lang="en-US" sz="1200" dirty="0">
+                          <a:solidFill>
+                            <a:srgbClr val="1F2A33"/>
+                          </a:solidFill>
+                          <a:latin typeface="Calibri" pitchFamily="34" charset="0"/>
+                          <a:ea typeface="Calibri" pitchFamily="34" charset="-122"/>
+                          <a:cs typeface="Calibri" pitchFamily="34" charset="-120"/>
+                        </a:rPr>
+                        <a:t>Add invoice lines, then true price variance</a:t>
+                      </a:r>
+                      <a:endParaRPr lang="en-US" sz="1200" dirty="0">
+                        <a:latin typeface="Calibri" charset="0"/>
+                        <a:ea typeface="Calibri" charset="0"/>
+                        <a:cs typeface="Calibri" charset="0"/>
+                      </a:endParaRPr>
+                    </a:p>
+                  </a:txBody>
+                  <a:tcPr marL="45720" marR="45720" marT="45720" marB="45720" anchor="ctr">
+                    <a:lnL w="6350" cap="flat" cmpd="sng" algn="ctr">
+                      <a:solidFill>
+                        <a:srgbClr val="D5DCE2"/>
+                      </a:solidFill>
+                      <a:prstDash val="solid"/>
+                      <a:round/>
+                      <a:headEnd type="none" w="med" len="med"/>
+                      <a:tailEnd type="none" w="med" len="med"/>
+                    </a:lnL>
+                    <a:lnR w="6350" cap="flat" cmpd="sng" algn="ctr">
+                      <a:solidFill>
+                        <a:srgbClr val="D5DCE2"/>
+                      </a:solidFill>
+                      <a:prstDash val="solid"/>
+                      <a:round/>
+                      <a:headEnd type="none" w="med" len="med"/>
+                      <a:tailEnd type="none" w="med" len="med"/>
+                    </a:lnR>
+                    <a:lnT w="6350" cap="flat" cmpd="sng" algn="ctr">
+                      <a:solidFill>
+                        <a:srgbClr val="D5DCE2"/>
+                      </a:solidFill>
+                      <a:prstDash val="solid"/>
+                      <a:round/>
+                      <a:headEnd type="none" w="med" len="med"/>
+                      <a:tailEnd type="none" w="med" len="med"/>
+                    </a:lnT>
+                    <a:lnB w="6350" cap="flat" cmpd="sng" algn="ctr">
+                      <a:solidFill>
+                        <a:srgbClr val="D5DCE2"/>
+                      </a:solidFill>
+                      <a:prstDash val="solid"/>
+                      <a:round/>
+                      <a:headEnd type="none" w="med" len="med"/>
+                      <a:tailEnd type="none" w="med" len="med"/>
+                    </a:lnB>
+                    <a:solidFill>
+                      <a:srgbClr val="F6F8FA"/>
+                    </a:solidFill>
+                  </a:tcPr>
+                </a:tc>
+              </a:tr>
+              <a:tr h="475488">
+                <a:tc>
+                  <a:txBody>
+                    <a:bodyPr/>
+                    <a:lstStyle/>
+                    <a:p>
+                      <a:pPr indent="0" marL="0">
+                        <a:buNone/>
+                      </a:pPr>
+                      <a:r>
+                        <a:rPr lang="en-US" sz="1200" b="1" dirty="0">
+                          <a:solidFill>
+                            <a:srgbClr val="1F2A33"/>
+                          </a:solidFill>
+                          <a:latin typeface="Calibri" pitchFamily="34" charset="0"/>
+                          <a:ea typeface="Calibri" pitchFamily="34" charset="-122"/>
+                          <a:cs typeface="Calibri" pitchFamily="34" charset="-120"/>
+                        </a:rPr>
+                        <a:t>Task 2: the confirmation feed ends 04/03</a:t>
+                      </a:r>
+                      <a:endParaRPr lang="en-US" sz="1200" dirty="0">
+                        <a:latin typeface="Calibri" charset="0"/>
+                        <a:ea typeface="Calibri" charset="0"/>
+                        <a:cs typeface="Calibri" charset="0"/>
+                      </a:endParaRPr>
+                    </a:p>
+                  </a:txBody>
+                  <a:tcPr marL="45720" marR="45720" marT="45720" marB="45720" anchor="ctr">
+                    <a:lnL w="6350" cap="flat" cmpd="sng" algn="ctr">
+                      <a:solidFill>
+                        <a:srgbClr val="D5DCE2"/>
+                      </a:solidFill>
+                      <a:prstDash val="solid"/>
+                      <a:round/>
+                      <a:headEnd type="none" w="med" len="med"/>
+                      <a:tailEnd type="none" w="med" len="med"/>
+                    </a:lnL>
+                    <a:lnR w="6350" cap="flat" cmpd="sng" algn="ctr">
+                      <a:solidFill>
+                        <a:srgbClr val="D5DCE2"/>
+                      </a:solidFill>
+                      <a:prstDash val="solid"/>
+                      <a:round/>
+                      <a:headEnd type="none" w="med" len="med"/>
+                      <a:tailEnd type="none" w="med" len="med"/>
+                    </a:lnR>
+                    <a:lnT w="6350" cap="flat" cmpd="sng" algn="ctr">
+                      <a:solidFill>
+                        <a:srgbClr val="D5DCE2"/>
+                      </a:solidFill>
+                      <a:prstDash val="solid"/>
+                      <a:round/>
+                      <a:headEnd type="none" w="med" len="med"/>
+                      <a:tailEnd type="none" w="med" len="med"/>
+                    </a:lnT>
+                    <a:lnB w="6350" cap="flat" cmpd="sng" algn="ctr">
+                      <a:solidFill>
+                        <a:srgbClr val="D5DCE2"/>
+                      </a:solidFill>
+                      <a:prstDash val="solid"/>
+                      <a:round/>
+                      <a:headEnd type="none" w="med" len="med"/>
+                      <a:tailEnd type="none" w="med" len="med"/>
+                    </a:lnB>
+                    <a:solidFill>
+                      <a:srgbClr val="FFFFFF"/>
+                    </a:solidFill>
+                  </a:tcPr>
+                </a:tc>
+                <a:tc>
+                  <a:txBody>
+                    <a:bodyPr/>
+                    <a:lstStyle/>
+                    <a:p>
+                      <a:pPr indent="0" marL="0">
+                        <a:buNone/>
+                      </a:pPr>
+                      <a:r>
+                        <a:rPr lang="en-US" sz="1200" dirty="0">
+                          <a:solidFill>
+                            <a:srgbClr val="1F2A33"/>
+                          </a:solidFill>
+                          <a:latin typeface="Calibri" pitchFamily="34" charset="0"/>
+                          <a:ea typeface="Calibri" pitchFamily="34" charset="-122"/>
+                          <a:cs typeface="Calibri" pitchFamily="34" charset="-120"/>
+                        </a:rPr>
+                        <a:t>Promise metrics use POs to 03/30 only</a:t>
+                      </a:r>
+                      <a:endParaRPr lang="en-US" sz="1200" dirty="0">
+                        <a:latin typeface="Calibri" charset="0"/>
+                        <a:ea typeface="Calibri" charset="0"/>
+                        <a:cs typeface="Calibri" charset="0"/>
+                      </a:endParaRPr>
+                    </a:p>
+                  </a:txBody>
+                  <a:tcPr marL="45720" marR="45720" marT="45720" marB="45720" anchor="ctr">
+                    <a:lnL w="6350" cap="flat" cmpd="sng" algn="ctr">
+                      <a:solidFill>
+                        <a:srgbClr val="D5DCE2"/>
+                      </a:solidFill>
+                      <a:prstDash val="solid"/>
+                      <a:round/>
+                      <a:headEnd type="none" w="med" len="med"/>
+                      <a:tailEnd type="none" w="med" len="med"/>
+                    </a:lnL>
+                    <a:lnR w="6350" cap="flat" cmpd="sng" algn="ctr">
+                      <a:solidFill>
+                        <a:srgbClr val="D5DCE2"/>
+                      </a:solidFill>
+                      <a:prstDash val="solid"/>
+                      <a:round/>
+                      <a:headEnd type="none" w="med" len="med"/>
+                      <a:tailEnd type="none" w="med" len="med"/>
+                    </a:lnR>
+                    <a:lnT w="6350" cap="flat" cmpd="sng" algn="ctr">
+                      <a:solidFill>
+                        <a:srgbClr val="D5DCE2"/>
+                      </a:solidFill>
+                      <a:prstDash val="solid"/>
+                      <a:round/>
+                      <a:headEnd type="none" w="med" len="med"/>
+                      <a:tailEnd type="none" w="med" len="med"/>
+                    </a:lnT>
+                    <a:lnB w="6350" cap="flat" cmpd="sng" algn="ctr">
+                      <a:solidFill>
+                        <a:srgbClr val="D5DCE2"/>
+                      </a:solidFill>
+                      <a:prstDash val="solid"/>
+                      <a:round/>
+                      <a:headEnd type="none" w="med" len="med"/>
+                      <a:tailEnd type="none" w="med" len="med"/>
+                    </a:lnB>
+                    <a:solidFill>
+                      <a:srgbClr val="FFFFFF"/>
+                    </a:solidFill>
+                  </a:tcPr>
+                </a:tc>
+                <a:tc>
+                  <a:txBody>
+                    <a:bodyPr/>
+                    <a:lstStyle/>
+                    <a:p>
+                      <a:pPr indent="0" marL="0">
+                        <a:buNone/>
+                      </a:pPr>
+                      <a:r>
+                        <a:rPr lang="en-US" sz="1200" dirty="0">
+                          <a:solidFill>
+                            <a:srgbClr val="1F2A33"/>
+                          </a:solidFill>
+                          <a:latin typeface="Calibri" pitchFamily="34" charset="0"/>
+                          <a:ea typeface="Calibri" pitchFamily="34" charset="-122"/>
+                          <a:cs typeface="Calibri" pitchFamily="34" charset="-120"/>
+                        </a:rPr>
+                        <a:t>Ask why the feed stopped</a:t>
+                      </a:r>
+                      <a:endParaRPr lang="en-US" sz="1200" dirty="0">
+                        <a:latin typeface="Calibri" charset="0"/>
+                        <a:ea typeface="Calibri" charset="0"/>
+                        <a:cs typeface="Calibri" charset="0"/>
+                      </a:endParaRPr>
+                    </a:p>
+                  </a:txBody>
+                  <a:tcPr marL="45720" marR="45720" marT="45720" marB="45720" anchor="ctr">
+                    <a:lnL w="6350" cap="flat" cmpd="sng" algn="ctr">
+                      <a:solidFill>
+                        <a:srgbClr val="D5DCE2"/>
+                      </a:solidFill>
+                      <a:prstDash val="solid"/>
+                      <a:round/>
+                      <a:headEnd type="none" w="med" len="med"/>
+                      <a:tailEnd type="none" w="med" len="med"/>
+                    </a:lnL>
+                    <a:lnR w="6350" cap="flat" cmpd="sng" algn="ctr">
+                      <a:solidFill>
+                        <a:srgbClr val="D5DCE2"/>
+                      </a:solidFill>
+                      <a:prstDash val="solid"/>
+                      <a:round/>
+                      <a:headEnd type="none" w="med" len="med"/>
+                      <a:tailEnd type="none" w="med" len="med"/>
+                    </a:lnR>
+                    <a:lnT w="6350" cap="flat" cmpd="sng" algn="ctr">
+                      <a:solidFill>
+                        <a:srgbClr val="D5DCE2"/>
+                      </a:solidFill>
+                      <a:prstDash val="solid"/>
+                      <a:round/>
+                      <a:headEnd type="none" w="med" len="med"/>
+                      <a:tailEnd type="none" w="med" len="med"/>
+                    </a:lnT>
+                    <a:lnB w="6350" cap="flat" cmpd="sng" algn="ctr">
+                      <a:solidFill>
+                        <a:srgbClr val="D5DCE2"/>
+                      </a:solidFill>
+                      <a:prstDash val="solid"/>
+                      <a:round/>
+                      <a:headEnd type="none" w="med" len="med"/>
+                      <a:tailEnd type="none" w="med" len="med"/>
+                    </a:lnB>
+                    <a:solidFill>
+                      <a:srgbClr val="FFFFFF"/>
+                    </a:solidFill>
+                  </a:tcPr>
+                </a:tc>
+              </a:tr>
+              <a:tr h="475488">
+                <a:tc>
+                  <a:txBody>
+                    <a:bodyPr/>
+                    <a:lstStyle/>
+                    <a:p>
+                      <a:pPr indent="0" marL="0">
+                        <a:buNone/>
+                      </a:pPr>
+                      <a:r>
+                        <a:rPr lang="en-US" sz="1200" b="1" dirty="0">
+                          <a:solidFill>
+                            <a:srgbClr val="1F2A33"/>
+                          </a:solidFill>
+                          <a:latin typeface="Calibri" pitchFamily="34" charset="0"/>
+                          <a:ea typeface="Calibri" pitchFamily="34" charset="-122"/>
+                          <a:cs typeface="Calibri" pitchFamily="34" charset="-120"/>
+                        </a:rPr>
+                        <a:t>Task 2: no production-impact data</a:t>
+                      </a:r>
+                      <a:endParaRPr lang="en-US" sz="1200" dirty="0">
+                        <a:latin typeface="Calibri" charset="0"/>
+                        <a:ea typeface="Calibri" charset="0"/>
+                        <a:cs typeface="Calibri" charset="0"/>
+                      </a:endParaRPr>
+                    </a:p>
+                  </a:txBody>
+                  <a:tcPr marL="45720" marR="45720" marT="45720" marB="45720" anchor="ctr">
+                    <a:lnL w="6350" cap="flat" cmpd="sng" algn="ctr">
+                      <a:solidFill>
+                        <a:srgbClr val="D5DCE2"/>
+                      </a:solidFill>
+                      <a:prstDash val="solid"/>
+                      <a:round/>
+                      <a:headEnd type="none" w="med" len="med"/>
+                      <a:tailEnd type="none" w="med" len="med"/>
+                    </a:lnL>
+                    <a:lnR w="6350" cap="flat" cmpd="sng" algn="ctr">
+                      <a:solidFill>
+                        <a:srgbClr val="D5DCE2"/>
+                      </a:solidFill>
+                      <a:prstDash val="solid"/>
+                      <a:round/>
+                      <a:headEnd type="none" w="med" len="med"/>
+                      <a:tailEnd type="none" w="med" len="med"/>
+                    </a:lnR>
+                    <a:lnT w="6350" cap="flat" cmpd="sng" algn="ctr">
+                      <a:solidFill>
+                        <a:srgbClr val="D5DCE2"/>
+                      </a:solidFill>
+                      <a:prstDash val="solid"/>
+                      <a:round/>
+                      <a:headEnd type="none" w="med" len="med"/>
+                      <a:tailEnd type="none" w="med" len="med"/>
+                    </a:lnT>
+                    <a:lnB w="6350" cap="flat" cmpd="sng" algn="ctr">
+                      <a:solidFill>
+                        <a:srgbClr val="D5DCE2"/>
+                      </a:solidFill>
+                      <a:prstDash val="solid"/>
+                      <a:round/>
+                      <a:headEnd type="none" w="med" len="med"/>
+                      <a:tailEnd type="none" w="med" len="med"/>
+                    </a:lnB>
+                    <a:solidFill>
+                      <a:srgbClr val="F6F8FA"/>
+                    </a:solidFill>
+                  </a:tcPr>
+                </a:tc>
+                <a:tc>
+                  <a:txBody>
+                    <a:bodyPr/>
+                    <a:lstStyle/>
+                    <a:p>
+                      <a:pPr indent="0" marL="0">
+                        <a:buNone/>
+                      </a:pPr>
+                      <a:r>
+                        <a:rPr lang="en-US" sz="1200" dirty="0">
+                          <a:solidFill>
+                            <a:srgbClr val="1F2A33"/>
+                          </a:solidFill>
+                          <a:latin typeface="Calibri" pitchFamily="34" charset="0"/>
+                          <a:ea typeface="Calibri" pitchFamily="34" charset="-122"/>
+                          <a:cs typeface="Calibri" pitchFamily="34" charset="-120"/>
+                        </a:rPr>
+                        <a:t>Can rank exposure, but can't prove cost</a:t>
+                      </a:r>
+                      <a:endParaRPr lang="en-US" sz="1200" dirty="0">
+                        <a:latin typeface="Calibri" charset="0"/>
+                        <a:ea typeface="Calibri" charset="0"/>
+                        <a:cs typeface="Calibri" charset="0"/>
+                      </a:endParaRPr>
+                    </a:p>
+                  </a:txBody>
+                  <a:tcPr marL="45720" marR="45720" marT="45720" marB="45720" anchor="ctr">
+                    <a:lnL w="6350" cap="flat" cmpd="sng" algn="ctr">
+                      <a:solidFill>
+                        <a:srgbClr val="D5DCE2"/>
+                      </a:solidFill>
+                      <a:prstDash val="solid"/>
+                      <a:round/>
+                      <a:headEnd type="none" w="med" len="med"/>
+                      <a:tailEnd type="none" w="med" len="med"/>
+                    </a:lnL>
+                    <a:lnR w="6350" cap="flat" cmpd="sng" algn="ctr">
+                      <a:solidFill>
+                        <a:srgbClr val="D5DCE2"/>
+                      </a:solidFill>
+                      <a:prstDash val="solid"/>
+                      <a:round/>
+                      <a:headEnd type="none" w="med" len="med"/>
+                      <a:tailEnd type="none" w="med" len="med"/>
+                    </a:lnR>
+                    <a:lnT w="6350" cap="flat" cmpd="sng" algn="ctr">
+                      <a:solidFill>
+                        <a:srgbClr val="D5DCE2"/>
+                      </a:solidFill>
+                      <a:prstDash val="solid"/>
+                      <a:round/>
+                      <a:headEnd type="none" w="med" len="med"/>
+                      <a:tailEnd type="none" w="med" len="med"/>
+                    </a:lnT>
+                    <a:lnB w="6350" cap="flat" cmpd="sng" algn="ctr">
+                      <a:solidFill>
+                        <a:srgbClr val="D5DCE2"/>
+                      </a:solidFill>
+                      <a:prstDash val="solid"/>
+                      <a:round/>
+                      <a:headEnd type="none" w="med" len="med"/>
+                      <a:tailEnd type="none" w="med" len="med"/>
+                    </a:lnB>
+                    <a:solidFill>
+                      <a:srgbClr val="F6F8FA"/>
+                    </a:solidFill>
+                  </a:tcPr>
+                </a:tc>
+                <a:tc>
+                  <a:txBody>
+                    <a:bodyPr/>
+                    <a:lstStyle/>
+                    <a:p>
+                      <a:pPr indent="0" marL="0">
+                        <a:buNone/>
+                      </a:pPr>
+                      <a:r>
+                        <a:rPr lang="en-US" sz="1200" dirty="0">
+                          <a:solidFill>
+                            <a:srgbClr val="1F2A33"/>
+                          </a:solidFill>
+                          <a:latin typeface="Calibri" pitchFamily="34" charset="0"/>
+                          <a:ea typeface="Calibri" pitchFamily="34" charset="-122"/>
+                          <a:cs typeface="Calibri" pitchFamily="34" charset="-120"/>
+                        </a:rPr>
+                        <a:t>Link to expedites and downtime; no causal claims until then</a:t>
+                      </a:r>
+                      <a:endParaRPr lang="en-US" sz="1200" dirty="0">
+                        <a:latin typeface="Calibri" charset="0"/>
+                        <a:ea typeface="Calibri" charset="0"/>
+                        <a:cs typeface="Calibri" charset="0"/>
+                      </a:endParaRPr>
+                    </a:p>
+                  </a:txBody>
+                  <a:tcPr marL="45720" marR="45720" marT="45720" marB="45720" anchor="ctr">
+                    <a:lnL w="6350" cap="flat" cmpd="sng" algn="ctr">
+                      <a:solidFill>
+                        <a:srgbClr val="D5DCE2"/>
+                      </a:solidFill>
+                      <a:prstDash val="solid"/>
+                      <a:round/>
+                      <a:headEnd type="none" w="med" len="med"/>
+                      <a:tailEnd type="none" w="med" len="med"/>
+                    </a:lnL>
+                    <a:lnR w="6350" cap="flat" cmpd="sng" algn="ctr">
+                      <a:solidFill>
+                        <a:srgbClr val="D5DCE2"/>
+                      </a:solidFill>
+                      <a:prstDash val="solid"/>
+                      <a:round/>
+                      <a:headEnd type="none" w="med" len="med"/>
+                      <a:tailEnd type="none" w="med" len="med"/>
+                    </a:lnR>
+                    <a:lnT w="6350" cap="flat" cmpd="sng" algn="ctr">
+                      <a:solidFill>
+                        <a:srgbClr val="D5DCE2"/>
+                      </a:solidFill>
+                      <a:prstDash val="solid"/>
+                      <a:round/>
+                      <a:headEnd type="none" w="med" len="med"/>
+                      <a:tailEnd type="none" w="med" len="med"/>
+                    </a:lnT>
+                    <a:lnB w="6350" cap="flat" cmpd="sng" algn="ctr">
+                      <a:solidFill>
+                        <a:srgbClr val="D5DCE2"/>
+                      </a:solidFill>
+                      <a:prstDash val="solid"/>
+                      <a:round/>
+                      <a:headEnd type="none" w="med" len="med"/>
+                      <a:tailEnd type="none" w="med" len="med"/>
+                    </a:lnB>
+                    <a:solidFill>
+                      <a:srgbClr val="F6F8FA"/>
+                    </a:solidFill>
+                  </a:tcPr>
+                </a:tc>
+              </a:tr>
+            </a:tbl>
+          </a:graphicData>
+        </a:graphic>
+      </p:graphicFrame>
     </p:spTree>
   </p:cSld>
   <p:clrMapOvr>
@@ -17079,7 +17393,7 @@
                 <a:ea typeface="Calibri" pitchFamily="34" charset="-122"/>
                 <a:cs typeface="Calibri" pitchFamily="34" charset="-120"/>
               </a:rPr>
-              <a:t>DATA I WISH I'D HAD · NEXT STEPS</a:t>
+              <a:t>WHAT I WISH I'D ASKED</a:t>
             </a:r>
             <a:endParaRPr lang="en-US" sz="1200" dirty="0"/>
           </a:p>
@@ -17118,7 +17432,7 @@
                 <a:ea typeface="Cambria" pitchFamily="34" charset="-122"/>
                 <a:cs typeface="Cambria" pitchFamily="34" charset="-120"/>
               </a:rPr>
-              <a:t>What would sharpen the answers, and how this goes into use</a:t>
+              <a:t>Questions for Lisa and the plant manager, each tied to the data</a:t>
             </a:r>
             <a:endParaRPr lang="en-US" sz="2400" dirty="0"/>
           </a:p>
@@ -17158,6 +17472,595 @@
                 <a:cs typeface="Calibri" pitchFamily="34" charset="-120"/>
               </a:rPr>
               <a:t>Beacon Fasteners · FDE case   18</a:t>
+            </a:r>
+            <a:endParaRPr lang="en-US" sz="900" dirty="0"/>
+          </a:p>
+        </p:txBody>
+      </p:sp>
+      <p:sp>
+        <p:nvSpPr>
+          <p:cNvPr id="5" name="Shape 3"/>
+          <p:cNvSpPr/>
+          <p:nvPr/>
+        </p:nvSpPr>
+        <p:spPr>
+          <a:xfrm>
+            <a:off x="548640" y="1463040"/>
+            <a:ext cx="5364328" cy="4800600"/>
+          </a:xfrm>
+          <a:prstGeom prst="roundRect">
+            <a:avLst>
+              <a:gd name="adj" fmla="val 1524"/>
+            </a:avLst>
+          </a:prstGeom>
+          <a:solidFill>
+            <a:srgbClr val="EEF2F5"/>
+          </a:solidFill>
+          <a:ln w="12700">
+            <a:solidFill>
+              <a:srgbClr val="EEF2F5"/>
+            </a:solidFill>
+            <a:prstDash val="solid"/>
+          </a:ln>
+        </p:spPr>
+      </p:sp>
+      <p:sp>
+        <p:nvSpPr>
+          <p:cNvPr id="6" name="Text 4"/>
+          <p:cNvSpPr txBox="1"/>
+          <p:nvPr/>
+        </p:nvSpPr>
+        <p:spPr>
+          <a:xfrm>
+            <a:off x="822960" y="1600200"/>
+            <a:ext cx="4815688" cy="274320"/>
+          </a:xfrm>
+          <a:prstGeom prst="rect">
+            <a:avLst/>
+          </a:prstGeom>
+          <a:noFill/>
+          <a:ln/>
+        </p:spPr>
+        <p:txBody>
+          <a:bodyPr wrap="square" lIns="0" tIns="0" rIns="0" bIns="0" rtlCol="0" anchor="ctr"/>
+          <a:lstStyle/>
+          <a:p>
+            <a:pPr indent="0" marL="0">
+              <a:buNone/>
+            </a:pPr>
+            <a:r>
+              <a:rPr lang="en-US" sz="1200" b="1" spc="200" kern="0" dirty="0">
+                <a:solidFill>
+                  <a:srgbClr val="D9622B"/>
+                </a:solidFill>
+                <a:latin typeface="Calibri" pitchFamily="34" charset="0"/>
+                <a:ea typeface="Calibri" pitchFamily="34" charset="-122"/>
+                <a:cs typeface="Calibri" pitchFamily="34" charset="-120"/>
+              </a:rPr>
+              <a:t>LISA</a:t>
+            </a:r>
+            <a:endParaRPr lang="en-US" sz="1200" dirty="0"/>
+          </a:p>
+        </p:txBody>
+      </p:sp>
+      <p:sp>
+        <p:nvSpPr>
+          <p:cNvPr id="7" name="Text 5"/>
+          <p:cNvSpPr txBox="1"/>
+          <p:nvPr/>
+        </p:nvSpPr>
+        <p:spPr>
+          <a:xfrm>
+            <a:off x="822960" y="1920240"/>
+            <a:ext cx="4815688" cy="4251960"/>
+          </a:xfrm>
+          <a:prstGeom prst="rect">
+            <a:avLst/>
+          </a:prstGeom>
+          <a:noFill/>
+          <a:ln/>
+        </p:spPr>
+        <p:txBody>
+          <a:bodyPr wrap="square" lIns="381" tIns="381" rIns="381" bIns="381" rtlCol="0" anchor="t"/>
+          <a:lstStyle/>
+          <a:p>
+            <a:pPr marL="342900" indent="-342900">
+              <a:spcAft>
+                <a:spcPts val="600"/>
+              </a:spcAft>
+              <a:buSzPct val="100000"/>
+              <a:buFont typeface="+mj-lt"/>
+              <a:buAutoNum type="arabicPeriod" startAt="1"/>
+            </a:pPr>
+            <a:r>
+              <a:rPr lang="en-US" sz="1300" dirty="0">
+                <a:solidFill>
+                  <a:srgbClr val="1F2A33"/>
+                </a:solidFill>
+                <a:latin typeface="Calibri" pitchFamily="34" charset="0"/>
+                <a:ea typeface="Calibri" pitchFamily="34" charset="-122"/>
+                <a:cs typeface="Calibri" pitchFamily="34" charset="-120"/>
+              </a:rPr>
+              <a:t>When a line is missing from an acknowledgment, what do you do today, and how often was it really dropped vs. confirmed later?</a:t>
+            </a:r>
+            <a:endParaRPr lang="en-US" sz="1300" dirty="0"/>
+          </a:p>
+          <a:p>
+            <a:pPr marL="342900" indent="-342900">
+              <a:spcAft>
+                <a:spcPts val="600"/>
+              </a:spcAft>
+              <a:buSzPct val="100000"/>
+              <a:buFont typeface="+mj-lt"/>
+              <a:buAutoNum type="arabicPeriod" startAt="1"/>
+            </a:pPr>
+            <a:r>
+              <a:rPr lang="en-US" sz="1300" dirty="0">
+                <a:solidFill>
+                  <a:srgbClr val="1F2A33"/>
+                </a:solidFill>
+                <a:latin typeface="Calibri" pitchFamily="34" charset="0"/>
+                <a:ea typeface="Calibri" pitchFamily="34" charset="-122"/>
+                <a:cs typeface="Calibri" pitchFamily="34" charset="-120"/>
+              </a:rPr>
+              <a:t>Which miss cost you most last quarter: a short, a price or a date? That sets the priority order.</a:t>
+            </a:r>
+            <a:endParaRPr lang="en-US" sz="1300" dirty="0"/>
+          </a:p>
+          <a:p>
+            <a:pPr marL="342900" indent="-342900">
+              <a:spcAft>
+                <a:spcPts val="600"/>
+              </a:spcAft>
+              <a:buSzPct val="100000"/>
+              <a:buFont typeface="+mj-lt"/>
+              <a:buAutoNum type="arabicPeriod" startAt="1"/>
+            </a:pPr>
+            <a:r>
+              <a:rPr lang="en-US" sz="1300" dirty="0">
+                <a:solidFill>
+                  <a:srgbClr val="1F2A33"/>
+                </a:solidFill>
+                <a:latin typeface="Calibri" pitchFamily="34" charset="0"/>
+                <a:ea typeface="Calibri" pitchFamily="34" charset="-122"/>
+                <a:cs typeface="Calibri" pitchFamily="34" charset="-120"/>
+              </a:rPr>
+              <a:t>Apex CRES bar confirmed +1-2% since Feb while POs stayed $3.92: a negotiated alloy surcharge that never reached the PO?</a:t>
+            </a:r>
+            <a:endParaRPr lang="en-US" sz="1300" dirty="0"/>
+          </a:p>
+          <a:p>
+            <a:pPr marL="342900" indent="-342900">
+              <a:spcAft>
+                <a:spcPts val="600"/>
+              </a:spcAft>
+              <a:buSzPct val="100000"/>
+              <a:buFont typeface="+mj-lt"/>
+              <a:buAutoNum type="arabicPeriod" startAt="1"/>
+            </a:pPr>
+            <a:r>
+              <a:rPr lang="en-US" sz="1300" dirty="0">
+                <a:solidFill>
+                  <a:srgbClr val="1F2A33"/>
+                </a:solidFill>
+                <a:latin typeface="Calibri" pitchFamily="34" charset="0"/>
+                <a:ea typeface="Calibri" pitchFamily="34" charset="-122"/>
+                <a:cs typeface="Calibri" pitchFamily="34" charset="-120"/>
+              </a:rPr>
+              <a:t>What price difference do you let through without a call? Is 1% right for EUR? Is it different for services?</a:t>
+            </a:r>
+            <a:endParaRPr lang="en-US" sz="1300" dirty="0"/>
+          </a:p>
+          <a:p>
+            <a:pPr marL="342900" indent="-342900">
+              <a:spcAft>
+                <a:spcPts val="600"/>
+              </a:spcAft>
+              <a:buSzPct val="100000"/>
+              <a:buFont typeface="+mj-lt"/>
+              <a:buAutoNum type="arabicPeriod" startAt="1"/>
+            </a:pPr>
+            <a:r>
+              <a:rPr lang="en-US" sz="1300" dirty="0">
+                <a:solidFill>
+                  <a:srgbClr val="1F2A33"/>
+                </a:solidFill>
+                <a:latin typeface="Calibri" pitchFamily="34" charset="0"/>
+                <a:ea typeface="Calibri" pitchFamily="34" charset="-122"/>
+                <a:cs typeface="Calibri" pitchFamily="34" charset="-120"/>
+              </a:rPr>
+              <a:t>Who approves a new vendor part number: you or engineering? Do vendors warn you before renumbering?</a:t>
+            </a:r>
+            <a:endParaRPr lang="en-US" sz="1300" dirty="0"/>
+          </a:p>
+          <a:p>
+            <a:pPr marL="342900" indent="-342900">
+              <a:spcAft>
+                <a:spcPts val="600"/>
+              </a:spcAft>
+              <a:buSzPct val="100000"/>
+              <a:buFont typeface="+mj-lt"/>
+              <a:buAutoNum type="arabicPeriod" startAt="1"/>
+            </a:pPr>
+            <a:r>
+              <a:rPr lang="en-US" sz="1300" dirty="0">
+                <a:solidFill>
+                  <a:srgbClr val="1F2A33"/>
+                </a:solidFill>
+                <a:latin typeface="Calibri" pitchFamily="34" charset="0"/>
+                <a:ea typeface="Calibri" pitchFamily="34" charset="-122"/>
+                <a:cs typeface="Calibri" pitchFamily="34" charset="-120"/>
+              </a:rPr>
+              <a:t>What would you need to see for two weeks before you stop opening every PDF yourself?</a:t>
+            </a:r>
+            <a:endParaRPr lang="en-US" sz="1300" dirty="0"/>
+          </a:p>
+        </p:txBody>
+      </p:sp>
+      <p:sp>
+        <p:nvSpPr>
+          <p:cNvPr id="8" name="Shape 6"/>
+          <p:cNvSpPr/>
+          <p:nvPr/>
+        </p:nvSpPr>
+        <p:spPr>
+          <a:xfrm>
+            <a:off x="6278728" y="1463040"/>
+            <a:ext cx="5364328" cy="4800600"/>
+          </a:xfrm>
+          <a:prstGeom prst="roundRect">
+            <a:avLst>
+              <a:gd name="adj" fmla="val 1524"/>
+            </a:avLst>
+          </a:prstGeom>
+          <a:solidFill>
+            <a:srgbClr val="EEF2F5"/>
+          </a:solidFill>
+          <a:ln w="12700">
+            <a:solidFill>
+              <a:srgbClr val="EEF2F5"/>
+            </a:solidFill>
+            <a:prstDash val="solid"/>
+          </a:ln>
+        </p:spPr>
+      </p:sp>
+      <p:sp>
+        <p:nvSpPr>
+          <p:cNvPr id="9" name="Text 7"/>
+          <p:cNvSpPr txBox="1"/>
+          <p:nvPr/>
+        </p:nvSpPr>
+        <p:spPr>
+          <a:xfrm>
+            <a:off x="6553048" y="1600200"/>
+            <a:ext cx="4815688" cy="274320"/>
+          </a:xfrm>
+          <a:prstGeom prst="rect">
+            <a:avLst/>
+          </a:prstGeom>
+          <a:noFill/>
+          <a:ln/>
+        </p:spPr>
+        <p:txBody>
+          <a:bodyPr wrap="square" lIns="0" tIns="0" rIns="0" bIns="0" rtlCol="0" anchor="ctr"/>
+          <a:lstStyle/>
+          <a:p>
+            <a:pPr indent="0" marL="0">
+              <a:buNone/>
+            </a:pPr>
+            <a:r>
+              <a:rPr lang="en-US" sz="1200" b="1" spc="200" kern="0" dirty="0">
+                <a:solidFill>
+                  <a:srgbClr val="D9622B"/>
+                </a:solidFill>
+                <a:latin typeface="Calibri" pitchFamily="34" charset="0"/>
+                <a:ea typeface="Calibri" pitchFamily="34" charset="-122"/>
+                <a:cs typeface="Calibri" pitchFamily="34" charset="-120"/>
+              </a:rPr>
+              <a:t>PLANT MANAGER</a:t>
+            </a:r>
+            <a:endParaRPr lang="en-US" sz="1200" dirty="0"/>
+          </a:p>
+        </p:txBody>
+      </p:sp>
+      <p:sp>
+        <p:nvSpPr>
+          <p:cNvPr id="10" name="Text 8"/>
+          <p:cNvSpPr txBox="1"/>
+          <p:nvPr/>
+        </p:nvSpPr>
+        <p:spPr>
+          <a:xfrm>
+            <a:off x="6553048" y="1920240"/>
+            <a:ext cx="4815688" cy="4251960"/>
+          </a:xfrm>
+          <a:prstGeom prst="rect">
+            <a:avLst/>
+          </a:prstGeom>
+          <a:noFill/>
+          <a:ln/>
+        </p:spPr>
+        <p:txBody>
+          <a:bodyPr wrap="square" lIns="381" tIns="381" rIns="381" bIns="381" rtlCol="0" anchor="t"/>
+          <a:lstStyle/>
+          <a:p>
+            <a:pPr marL="342900" indent="-342900">
+              <a:spcAft>
+                <a:spcPts val="600"/>
+              </a:spcAft>
+              <a:buSzPct val="100000"/>
+              <a:buFont typeface="+mj-lt"/>
+              <a:buAutoNum type="arabicPeriod" startAt="1"/>
+            </a:pPr>
+            <a:r>
+              <a:rPr lang="en-US" sz="1300" dirty="0">
+                <a:solidFill>
+                  <a:srgbClr val="1F2A33"/>
+                </a:solidFill>
+                <a:latin typeface="Calibri" pitchFamily="34" charset="0"/>
+                <a:ea typeface="Calibri" pitchFamily="34" charset="-122"/>
+                <a:cs typeface="Calibri" pitchFamily="34" charset="-120"/>
+              </a:rPr>
+              <a:t>What does a late heat-treat lot actually cost: downtime, overtime, a customer expedite? That turns on-time % into dollars.</a:t>
+            </a:r>
+            <a:endParaRPr lang="en-US" sz="1300" dirty="0"/>
+          </a:p>
+          <a:p>
+            <a:pPr marL="342900" indent="-342900">
+              <a:spcAft>
+                <a:spcPts val="600"/>
+              </a:spcAft>
+              <a:buSzPct val="100000"/>
+              <a:buFont typeface="+mj-lt"/>
+              <a:buAutoNum type="arabicPeriod" startAt="1"/>
+            </a:pPr>
+            <a:r>
+              <a:rPr lang="en-US" sz="1300" dirty="0">
+                <a:solidFill>
+                  <a:srgbClr val="1F2A33"/>
+                </a:solidFill>
+                <a:latin typeface="Calibri" pitchFamily="34" charset="0"/>
+                <a:ea typeface="Calibri" pitchFamily="34" charset="-122"/>
+                <a:cs typeface="Calibri" pitchFamily="34" charset="-120"/>
+              </a:rPr>
+              <a:t>Who set the 19-day heat-treat lead time in MRP? Continental quotes 28.</a:t>
+            </a:r>
+            <a:endParaRPr lang="en-US" sz="1300" dirty="0"/>
+          </a:p>
+          <a:p>
+            <a:pPr marL="342900" indent="-342900">
+              <a:spcAft>
+                <a:spcPts val="600"/>
+              </a:spcAft>
+              <a:buSzPct val="100000"/>
+              <a:buFont typeface="+mj-lt"/>
+              <a:buAutoNum type="arabicPeriod" startAt="1"/>
+            </a:pPr>
+            <a:r>
+              <a:rPr lang="en-US" sz="1300" dirty="0">
+                <a:solidFill>
+                  <a:srgbClr val="1F2A33"/>
+                </a:solidFill>
+                <a:latin typeface="Calibri" pitchFamily="34" charset="0"/>
+                <a:ea typeface="Calibri" pitchFamily="34" charset="-122"/>
+                <a:cs typeface="Calibri" pitchFamily="34" charset="-120"/>
+              </a:rPr>
+              <a:t>Is Continental the only qualified (e.g. Nadcap) heat treater for these parts, or is there a second source?</a:t>
+            </a:r>
+            <a:endParaRPr lang="en-US" sz="1300" dirty="0"/>
+          </a:p>
+          <a:p>
+            <a:pPr marL="342900" indent="-342900">
+              <a:spcAft>
+                <a:spcPts val="600"/>
+              </a:spcAft>
+              <a:buSzPct val="100000"/>
+              <a:buFont typeface="+mj-lt"/>
+              <a:buAutoNum type="arabicPeriod" startAt="1"/>
+            </a:pPr>
+            <a:r>
+              <a:rPr lang="en-US" sz="1300" dirty="0">
+                <a:solidFill>
+                  <a:srgbClr val="1F2A33"/>
+                </a:solidFill>
+                <a:latin typeface="Calibri" pitchFamily="34" charset="0"/>
+                <a:ea typeface="Calibri" pitchFamily="34" charset="-122"/>
+                <a:cs typeface="Calibri" pitchFamily="34" charset="-120"/>
+              </a:rPr>
+              <a:t>Is Apex at 85% of spend a deliberate single-source decision? Is there a contract price for CRES bar?</a:t>
+            </a:r>
+            <a:endParaRPr lang="en-US" sz="1300" dirty="0"/>
+          </a:p>
+          <a:p>
+            <a:pPr marL="342900" indent="-342900">
+              <a:spcAft>
+                <a:spcPts val="600"/>
+              </a:spcAft>
+              <a:buSzPct val="100000"/>
+              <a:buFont typeface="+mj-lt"/>
+              <a:buAutoNum type="arabicPeriod" startAt="1"/>
+            </a:pPr>
+            <a:r>
+              <a:rPr lang="en-US" sz="1300" dirty="0">
+                <a:solidFill>
+                  <a:srgbClr val="1F2A33"/>
+                </a:solidFill>
+                <a:latin typeface="Calibri" pitchFamily="34" charset="0"/>
+                <a:ea typeface="Calibri" pitchFamily="34" charset="-122"/>
+                <a:cs typeface="Calibri" pitchFamily="34" charset="-120"/>
+              </a:rPr>
+              <a:t>Should months-old short-ship balances be closed? Who can short-close a PO?</a:t>
+            </a:r>
+            <a:endParaRPr lang="en-US" sz="1300" dirty="0"/>
+          </a:p>
+          <a:p>
+            <a:pPr marL="342900" indent="-342900">
+              <a:spcAft>
+                <a:spcPts val="600"/>
+              </a:spcAft>
+              <a:buSzPct val="100000"/>
+              <a:buFont typeface="+mj-lt"/>
+              <a:buAutoNum type="arabicPeriod" startAt="1"/>
+            </a:pPr>
+            <a:r>
+              <a:rPr lang="en-US" sz="1300" dirty="0">
+                <a:solidFill>
+                  <a:srgbClr val="1F2A33"/>
+                </a:solidFill>
+                <a:latin typeface="Calibri" pitchFamily="34" charset="0"/>
+                <a:ea typeface="Calibri" pitchFamily="34" charset="-122"/>
+                <a:cs typeface="Calibri" pitchFamily="34" charset="-120"/>
+              </a:rPr>
+              <a:t>Which decision should this readout drive: re-source, renegotiate or re-plan? How often: monthly?</a:t>
+            </a:r>
+            <a:endParaRPr lang="en-US" sz="1300" dirty="0"/>
+          </a:p>
+        </p:txBody>
+      </p:sp>
+    </p:spTree>
+  </p:cSld>
+  <p:clrMapOvr>
+    <a:masterClrMapping/>
+  </p:clrMapOvr>
+</p:sld>
+</file>
+
+<file path=ppt/slides/slide19.xml><?xml version="1.0" encoding="utf-8"?>
+<p:sld xmlns:a="http://schemas.openxmlformats.org/drawingml/2006/main" xmlns:r="http://schemas.openxmlformats.org/officeDocument/2006/relationships" xmlns:p="http://schemas.openxmlformats.org/presentationml/2006/main">
+  <p:cSld name="Slide 19">
+    <p:bg>
+      <p:bgPr>
+        <a:solidFill>
+          <a:srgbClr val="FFFFFF"/>
+        </a:solidFill>
+      </p:bgPr>
+    </p:bg>
+    <p:spTree>
+      <p:nvGrpSpPr>
+        <p:cNvPr id="1" name=""/>
+        <p:cNvGrpSpPr/>
+        <p:nvPr/>
+      </p:nvGrpSpPr>
+      <p:grpSpPr>
+        <a:xfrm>
+          <a:off x="0" y="0"/>
+          <a:ext cx="0" cy="0"/>
+          <a:chOff x="0" y="0"/>
+          <a:chExt cx="0" cy="0"/>
+        </a:xfrm>
+      </p:grpSpPr>
+      <p:sp>
+        <p:nvSpPr>
+          <p:cNvPr id="2" name="Text 0"/>
+          <p:cNvSpPr txBox="1"/>
+          <p:nvPr/>
+        </p:nvSpPr>
+        <p:spPr>
+          <a:xfrm>
+            <a:off x="548640" y="320040"/>
+            <a:ext cx="8229600" cy="274320"/>
+          </a:xfrm>
+          <a:prstGeom prst="rect">
+            <a:avLst/>
+          </a:prstGeom>
+          <a:noFill/>
+          <a:ln/>
+        </p:spPr>
+        <p:txBody>
+          <a:bodyPr wrap="square" lIns="0" tIns="0" rIns="0" bIns="0" rtlCol="0" anchor="ctr"/>
+          <a:lstStyle/>
+          <a:p>
+            <a:pPr indent="0" marL="0">
+              <a:buNone/>
+            </a:pPr>
+            <a:r>
+              <a:rPr lang="en-US" sz="1200" b="1" spc="200" kern="0" dirty="0">
+                <a:solidFill>
+                  <a:srgbClr val="D9622B"/>
+                </a:solidFill>
+                <a:latin typeface="Calibri" pitchFamily="34" charset="0"/>
+                <a:ea typeface="Calibri" pitchFamily="34" charset="-122"/>
+                <a:cs typeface="Calibri" pitchFamily="34" charset="-120"/>
+              </a:rPr>
+              <a:t>DATA I WISH I'D HAD · NEXT STEPS</a:t>
+            </a:r>
+            <a:endParaRPr lang="en-US" sz="1200" dirty="0"/>
+          </a:p>
+        </p:txBody>
+      </p:sp>
+      <p:sp>
+        <p:nvSpPr>
+          <p:cNvPr id="3" name="Text 1"/>
+          <p:cNvSpPr txBox="1"/>
+          <p:nvPr/>
+        </p:nvSpPr>
+        <p:spPr>
+          <a:xfrm>
+            <a:off x="548640" y="594360"/>
+            <a:ext cx="11094415" cy="685800"/>
+          </a:xfrm>
+          <a:prstGeom prst="rect">
+            <a:avLst/>
+          </a:prstGeom>
+          <a:noFill/>
+          <a:ln/>
+        </p:spPr>
+        <p:txBody>
+          <a:bodyPr wrap="square" lIns="0" tIns="0" rIns="0" bIns="0" rtlCol="0" anchor="t"/>
+          <a:lstStyle/>
+          <a:p>
+            <a:pPr indent="0" marL="0">
+              <a:buNone/>
+            </a:pPr>
+            <a:r>
+              <a:rPr lang="en-US" sz="2400" b="1" dirty="0">
+                <a:solidFill>
+                  <a:srgbClr val="1F2A33"/>
+                </a:solidFill>
+                <a:latin typeface="Cambria" pitchFamily="34" charset="0"/>
+                <a:ea typeface="Cambria" pitchFamily="34" charset="-122"/>
+                <a:cs typeface="Cambria" pitchFamily="34" charset="-120"/>
+              </a:rPr>
+              <a:t>What would sharpen the answers, and how this goes into use</a:t>
+            </a:r>
+            <a:endParaRPr lang="en-US" sz="2400" dirty="0"/>
+          </a:p>
+        </p:txBody>
+      </p:sp>
+      <p:sp>
+        <p:nvSpPr>
+          <p:cNvPr id="4" name="Text 2"/>
+          <p:cNvSpPr txBox="1"/>
+          <p:nvPr/>
+        </p:nvSpPr>
+        <p:spPr>
+          <a:xfrm>
+            <a:off x="7985455" y="6473952"/>
+            <a:ext cx="3657600" cy="228600"/>
+          </a:xfrm>
+          <a:prstGeom prst="rect">
+            <a:avLst/>
+          </a:prstGeom>
+          <a:noFill/>
+          <a:ln/>
+        </p:spPr>
+        <p:txBody>
+          <a:bodyPr wrap="square" lIns="0" tIns="0" rIns="0" bIns="0" rtlCol="0" anchor="ctr"/>
+          <a:lstStyle/>
+          <a:p>
+            <a:pPr algn="r" indent="0" marL="0">
+              <a:buNone/>
+            </a:pPr>
+            <a:r>
+              <a:rPr lang="en-US" sz="900" dirty="0">
+                <a:solidFill>
+                  <a:srgbClr val="7D8B97"/>
+                </a:solidFill>
+                <a:latin typeface="Calibri" pitchFamily="34" charset="0"/>
+                <a:ea typeface="Calibri" pitchFamily="34" charset="-122"/>
+                <a:cs typeface="Calibri" pitchFamily="34" charset="-120"/>
+              </a:rPr>
+              <a:t>Beacon Fasteners · FDE case   19</a:t>
             </a:r>
             <a:endParaRPr lang="en-US" sz="900" dirty="0"/>
           </a:p>
@@ -17694,7 +18597,7 @@
                 <a:ea typeface="Calibri" pitchFamily="34" charset="-122"/>
                 <a:cs typeface="Calibri" pitchFamily="34" charset="-120"/>
               </a:rPr>
-              <a:t>Point it at the shared acknowledgment inbox folder and schedule it for 6am, so the workbook is waiting when she arrives.</a:t>
+              <a:t>Send supplier packs to Continental, Ostmark and Heritage; attach the acknowledgment form to their new POs. Schedule the 6am run.</a:t>
             </a:r>
             <a:endParaRPr lang="en-US" sz="1300" dirty="0"/>
           </a:p>
@@ -17799,7 +18702,7 @@
                 <a:ea typeface="Calibri" pitchFamily="34" charset="-122"/>
                 <a:cs typeface="Calibri" pitchFamily="34" charset="-120"/>
               </a:rPr>
-              <a:t>Lisa approves the pending part numbers; export the crosswalk as the part-master seed.</a:t>
+              <a:t>Planning updates MRP lead times from the gap report; Lisa clears the $128k of old open balances; crosswalk becomes the part-master seed.</a:t>
             </a:r>
             <a:endParaRPr lang="en-US" sz="1300" dirty="0"/>
           </a:p>
@@ -18634,6 +19537,44 @@
                 <a:cs typeface="Calibri" pitchFamily="34" charset="-120"/>
               </a:rPr>
               <a:t>handled items stay handled, the first promise date is never overwritten.</a:t>
+            </a:r>
+            <a:endParaRPr lang="en-US" sz="1300" dirty="0"/>
+          </a:p>
+          <a:p>
+            <a:pPr marL="342900" indent="-342900">
+              <a:spcAft>
+                <a:spcPts val="600"/>
+              </a:spcAft>
+              <a:buSzPct val="100000"/>
+              <a:buChar char="•"/>
+            </a:pPr>
+            <a:r>
+              <a:rPr lang="en-US" sz="1300" b="1" dirty="0">
+                <a:solidFill>
+                  <a:srgbClr val="1F2A33"/>
+                </a:solidFill>
+                <a:latin typeface="Calibri" pitchFamily="34" charset="0"/>
+                <a:ea typeface="Calibri" pitchFamily="34" charset="-122"/>
+                <a:cs typeface="Calibri" pitchFamily="34" charset="-120"/>
+              </a:rPr>
+              <a:t>Fixes it at the source: </a:t>
+            </a:r>
+            <a:pPr indent="0" marL="0">
+              <a:spcAft>
+                <a:spcPts val="600"/>
+              </a:spcAft>
+              <a:buNone/>
+            </a:pPr>
+            <a:r>
+              <a:rPr lang="en-US" sz="1300" dirty="0">
+                <a:solidFill>
+                  <a:srgbClr val="1F2A33"/>
+                </a:solidFill>
+                <a:latin typeface="Calibri" pitchFamily="34" charset="0"/>
+                <a:ea typeface="Calibri" pitchFamily="34" charset="-122"/>
+                <a:cs typeface="Calibri" pitchFamily="34" charset="-120"/>
+              </a:rPr>
+              <a:t>Beacon's own acknowledgment form and supplier pack, pre-filled from the ERP.</a:t>
             </a:r>
             <a:endParaRPr lang="en-US" sz="1300" dirty="0"/>
           </a:p>
@@ -29575,7 +30516,7 @@
                 <a:ea typeface="Calibri" pitchFamily="34" charset="-122"/>
                 <a:cs typeface="Calibri" pitchFamily="34" charset="-120"/>
               </a:rPr>
-              <a:t>44 automated tests. TestDayTwo runs day 1 on the real PDFs, applies Lisa's Excel edits, then feeds a revised vendor PDF on day 2 and checks each row above.</a:t>
+              <a:t>58 automated tests. TestDayTwo runs day 1 on the real PDFs, applies Lisa's Excel edits, then feeds a revised vendor PDF on day 2 and checks each row above.</a:t>
             </a:r>
             <a:endParaRPr lang="en-US" sz="1300" dirty="0"/>
           </a:p>
@@ -29646,7 +30587,7 @@
                 <a:ea typeface="Calibri" pitchFamily="34" charset="-122"/>
                 <a:cs typeface="Calibri" pitchFamily="34" charset="-120"/>
               </a:rPr>
-              <a:t>TASK 2 · DATA BEFORE METRICS</a:t>
+              <a:t>TASK 1 · PAST FEEDS FUTURE</a:t>
             </a:r>
             <a:endParaRPr lang="en-US" sz="1200" dirty="0"/>
           </a:p>
@@ -29685,7 +30626,7 @@
                 <a:ea typeface="Cambria" pitchFamily="34" charset="-122"/>
                 <a:cs typeface="Cambria" pitchFamily="34" charset="-120"/>
               </a:rPr>
-              <a:t>The ERP extract looks clean but isn't: 8 traps found first</a:t>
+              <a:t>Fix it at the source: Beacon's own forms, pre-filled from the ERP</a:t>
             </a:r>
             <a:endParaRPr lang="en-US" sz="2400" dirty="0"/>
           </a:p>
@@ -29732,356 +30673,41 @@
       </p:sp>
       <p:sp>
         <p:nvSpPr>
-          <p:cNvPr id="5" name="Text 3"/>
+          <p:cNvPr id="5" name="Shape 3"/>
+          <p:cNvSpPr/>
+          <p:nvPr/>
+        </p:nvSpPr>
+        <p:spPr>
+          <a:xfrm>
+            <a:off x="548640" y="1463040"/>
+            <a:ext cx="5120640" cy="2423160"/>
+          </a:xfrm>
+          <a:prstGeom prst="roundRect">
+            <a:avLst>
+              <a:gd name="adj" fmla="val 3019"/>
+            </a:avLst>
+          </a:prstGeom>
+          <a:solidFill>
+            <a:srgbClr val="EEF2F5"/>
+          </a:solidFill>
+          <a:ln w="12700">
+            <a:solidFill>
+              <a:srgbClr val="EEF2F5"/>
+            </a:solidFill>
+            <a:prstDash val="solid"/>
+          </a:ln>
+        </p:spPr>
+      </p:sp>
+      <p:sp>
+        <p:nvSpPr>
+          <p:cNvPr id="6" name="Text 4"/>
           <p:cNvSpPr txBox="1"/>
           <p:nvPr/>
         </p:nvSpPr>
         <p:spPr>
           <a:xfrm>
-            <a:off x="548640" y="1508760"/>
-            <a:ext cx="6035040" cy="4663440"/>
-          </a:xfrm>
-          <a:prstGeom prst="rect">
-            <a:avLst/>
-          </a:prstGeom>
-          <a:noFill/>
-          <a:ln/>
-        </p:spPr>
-        <p:txBody>
-          <a:bodyPr wrap="square" lIns="635" tIns="635" rIns="635" bIns="635" rtlCol="0" anchor="t"/>
-          <a:lstStyle/>
-          <a:p>
-            <a:pPr marL="342900" indent="-342900">
-              <a:spcAft>
-                <a:spcPts val="600"/>
-              </a:spcAft>
-              <a:buSzPct val="100000"/>
-              <a:buChar char="•"/>
-            </a:pPr>
-            <a:r>
-              <a:rPr lang="en-US" sz="1400" b="1" dirty="0">
-                <a:solidFill>
-                  <a:srgbClr val="1F2A33"/>
-                </a:solidFill>
-                <a:latin typeface="Calibri" pitchFamily="34" charset="0"/>
-                <a:ea typeface="Calibri" pitchFamily="34" charset="-122"/>
-                <a:cs typeface="Calibri" pitchFamily="34" charset="-120"/>
-              </a:rPr>
-              <a:t>Receipt dates are MM/DD/YYYY text: </a:t>
-            </a:r>
-            <a:pPr indent="0" marL="0">
-              <a:spcAft>
-                <a:spcPts val="600"/>
-              </a:spcAft>
-              <a:buNone/>
-            </a:pPr>
-            <a:r>
-              <a:rPr lang="en-US" sz="1400" dirty="0">
-                <a:solidFill>
-                  <a:srgbClr val="1F2A33"/>
-                </a:solidFill>
-                <a:latin typeface="Calibri" pitchFamily="34" charset="0"/>
-                <a:ea typeface="Calibri" pitchFamily="34" charset="-122"/>
-                <a:cs typeface="Calibri" pitchFamily="34" charset="-120"/>
-              </a:rPr>
-              <a:t>SQLite date() returns NULL on every row.</a:t>
-            </a:r>
-            <a:endParaRPr lang="en-US" sz="1400" dirty="0"/>
-          </a:p>
-          <a:p>
-            <a:pPr marL="342900" indent="-342900">
-              <a:spcAft>
-                <a:spcPts val="600"/>
-              </a:spcAft>
-              <a:buSzPct val="100000"/>
-              <a:buChar char="•"/>
-            </a:pPr>
-            <a:r>
-              <a:rPr lang="en-US" sz="1400" b="1" dirty="0">
-                <a:solidFill>
-                  <a:srgbClr val="1F2A33"/>
-                </a:solidFill>
-                <a:latin typeface="Calibri" pitchFamily="34" charset="0"/>
-                <a:ea typeface="Calibri" pitchFamily="34" charset="-122"/>
-                <a:cs typeface="Calibri" pitchFamily="34" charset="-120"/>
-              </a:rPr>
-              <a:t>50 reversal pairs </a:t>
-            </a:r>
-            <a:pPr indent="0" marL="0">
-              <a:spcAft>
-                <a:spcPts val="600"/>
-              </a:spcAft>
-              <a:buNone/>
-            </a:pPr>
-            <a:r>
-              <a:rPr lang="en-US" sz="1400" dirty="0">
-                <a:solidFill>
-                  <a:srgbClr val="1F2A33"/>
-                </a:solidFill>
-                <a:latin typeface="Calibri" pitchFamily="34" charset="0"/>
-                <a:ea typeface="Calibri" pitchFamily="34" charset="-122"/>
-                <a:cs typeface="Calibri" pitchFamily="34" charset="-120"/>
-              </a:rPr>
-              <a:t>(keyed in error, then reversed) plus 1 unreversed duplicate (txn 701546).</a:t>
-            </a:r>
-            <a:endParaRPr lang="en-US" sz="1400" dirty="0"/>
-          </a:p>
-          <a:p>
-            <a:pPr marL="342900" indent="-342900">
-              <a:spcAft>
-                <a:spcPts val="600"/>
-              </a:spcAft>
-              <a:buSzPct val="100000"/>
-              <a:buChar char="•"/>
-            </a:pPr>
-            <a:r>
-              <a:rPr lang="en-US" sz="1400" b="1" dirty="0">
-                <a:solidFill>
-                  <a:srgbClr val="1F2A33"/>
-                </a:solidFill>
-                <a:latin typeface="Calibri" pitchFamily="34" charset="0"/>
-                <a:ea typeface="Calibri" pitchFamily="34" charset="-122"/>
-                <a:cs typeface="Calibri" pitchFamily="34" charset="-120"/>
-              </a:rPr>
-              <a:t>po_line.qty_received is wrong </a:t>
-            </a:r>
-            <a:pPr indent="0" marL="0">
-              <a:spcAft>
-                <a:spcPts val="600"/>
-              </a:spcAft>
-              <a:buNone/>
-            </a:pPr>
-            <a:r>
-              <a:rPr lang="en-US" sz="1400" dirty="0">
-                <a:solidFill>
-                  <a:srgbClr val="1F2A33"/>
-                </a:solidFill>
-                <a:latin typeface="Calibri" pitchFamily="34" charset="0"/>
-                <a:ea typeface="Calibri" pitchFamily="34" charset="-122"/>
-                <a:cs typeface="Calibri" pitchFamily="34" charset="-120"/>
-              </a:rPr>
-              <a:t>on 169 lines; receipts are used instead.</a:t>
-            </a:r>
-            <a:endParaRPr lang="en-US" sz="1400" dirty="0"/>
-          </a:p>
-          <a:p>
-            <a:pPr marL="342900" indent="-342900">
-              <a:spcAft>
-                <a:spcPts val="600"/>
-              </a:spcAft>
-              <a:buSzPct val="100000"/>
-              <a:buChar char="•"/>
-            </a:pPr>
-            <a:r>
-              <a:rPr lang="en-US" sz="1400" b="1" dirty="0">
-                <a:solidFill>
-                  <a:srgbClr val="1F2A33"/>
-                </a:solidFill>
-                <a:latin typeface="Calibri" pitchFamily="34" charset="0"/>
-                <a:ea typeface="Calibri" pitchFamily="34" charset="-122"/>
-                <a:cs typeface="Calibri" pitchFamily="34" charset="-120"/>
-              </a:rPr>
-              <a:t>30 superseded confirmations: </a:t>
-            </a:r>
-            <a:pPr indent="0" marL="0">
-              <a:spcAft>
-                <a:spcPts val="600"/>
-              </a:spcAft>
-              <a:buNone/>
-            </a:pPr>
-            <a:r>
-              <a:rPr lang="en-US" sz="1400" dirty="0">
-                <a:solidFill>
-                  <a:srgbClr val="1F2A33"/>
-                </a:solidFill>
-                <a:latin typeface="Calibri" pitchFamily="34" charset="0"/>
-                <a:ea typeface="Calibri" pitchFamily="34" charset="-122"/>
-                <a:cs typeface="Calibri" pitchFamily="34" charset="-120"/>
-              </a:rPr>
-              <a:t>only the latest is used.</a:t>
-            </a:r>
-            <a:endParaRPr lang="en-US" sz="1400" dirty="0"/>
-          </a:p>
-          <a:p>
-            <a:pPr marL="342900" indent="-342900">
-              <a:spcAft>
-                <a:spcPts val="600"/>
-              </a:spcAft>
-              <a:buSzPct val="100000"/>
-              <a:buChar char="•"/>
-            </a:pPr>
-            <a:r>
-              <a:rPr lang="en-US" sz="1400" b="1" dirty="0">
-                <a:solidFill>
-                  <a:srgbClr val="1F2A33"/>
-                </a:solidFill>
-                <a:latin typeface="Calibri" pitchFamily="34" charset="0"/>
-                <a:ea typeface="Calibri" pitchFamily="34" charset="-122"/>
-                <a:cs typeface="Calibri" pitchFamily="34" charset="-120"/>
-              </a:rPr>
-              <a:t>Confirmation feed stops 2026-04-03: </a:t>
-            </a:r>
-            <a:pPr indent="0" marL="0">
-              <a:spcAft>
-                <a:spcPts val="600"/>
-              </a:spcAft>
-              <a:buNone/>
-            </a:pPr>
-            <a:r>
-              <a:rPr lang="en-US" sz="1400" dirty="0">
-                <a:solidFill>
-                  <a:srgbClr val="1F2A33"/>
-                </a:solidFill>
-                <a:latin typeface="Calibri" pitchFamily="34" charset="0"/>
-                <a:ea typeface="Calibri" pitchFamily="34" charset="-122"/>
-                <a:cs typeface="Calibri" pitchFamily="34" charset="-120"/>
-              </a:rPr>
-              <a:t>promise metrics use POs to 03/30 only.</a:t>
-            </a:r>
-            <a:endParaRPr lang="en-US" sz="1400" dirty="0"/>
-          </a:p>
-          <a:p>
-            <a:pPr marL="342900" indent="-342900">
-              <a:spcAft>
-                <a:spcPts val="600"/>
-              </a:spcAft>
-              <a:buSzPct val="100000"/>
-              <a:buChar char="•"/>
-            </a:pPr>
-            <a:r>
-              <a:rPr lang="en-US" sz="1400" b="1" dirty="0">
-                <a:solidFill>
-                  <a:srgbClr val="1F2A33"/>
-                </a:solidFill>
-                <a:latin typeface="Calibri" pitchFamily="34" charset="0"/>
-                <a:ea typeface="Calibri" pitchFamily="34" charset="-122"/>
-                <a:cs typeface="Calibri" pitchFamily="34" charset="-120"/>
-              </a:rPr>
-              <a:t>Ostmark PO prices are already USD: </a:t>
-            </a:r>
-            <a:pPr indent="0" marL="0">
-              <a:spcAft>
-                <a:spcPts val="600"/>
-              </a:spcAft>
-              <a:buNone/>
-            </a:pPr>
-            <a:r>
-              <a:rPr lang="en-US" sz="1400" dirty="0">
-                <a:solidFill>
-                  <a:srgbClr val="1F2A33"/>
-                </a:solidFill>
-                <a:latin typeface="Calibri" pitchFamily="34" charset="0"/>
-                <a:ea typeface="Calibri" pitchFamily="34" charset="-122"/>
-                <a:cs typeface="Calibri" pitchFamily="34" charset="-120"/>
-              </a:rPr>
-              <a:t>converting again adds about $76k.</a:t>
-            </a:r>
-            <a:endParaRPr lang="en-US" sz="1400" dirty="0"/>
-          </a:p>
-          <a:p>
-            <a:pPr marL="342900" indent="-342900">
-              <a:spcAft>
-                <a:spcPts val="600"/>
-              </a:spcAft>
-              <a:buSzPct val="100000"/>
-              <a:buChar char="•"/>
-            </a:pPr>
-            <a:r>
-              <a:rPr lang="en-US" sz="1400" b="1" dirty="0">
-                <a:solidFill>
-                  <a:srgbClr val="1F2A33"/>
-                </a:solidFill>
-                <a:latin typeface="Calibri" pitchFamily="34" charset="0"/>
-                <a:ea typeface="Calibri" pitchFamily="34" charset="-122"/>
-                <a:cs typeface="Calibri" pitchFamily="34" charset="-120"/>
-              </a:rPr>
-              <a:t>qc_hold dates are unreliable </a:t>
-            </a:r>
-            <a:pPr indent="0" marL="0">
-              <a:spcAft>
-                <a:spcPts val="600"/>
-              </a:spcAft>
-              <a:buNone/>
-            </a:pPr>
-            <a:r>
-              <a:rPr lang="en-US" sz="1400" dirty="0">
-                <a:solidFill>
-                  <a:srgbClr val="1F2A33"/>
-                </a:solidFill>
-                <a:latin typeface="Calibri" pitchFamily="34" charset="0"/>
-                <a:ea typeface="Calibri" pitchFamily="34" charset="-122"/>
-                <a:cs typeface="Calibri" pitchFamily="34" charset="-120"/>
-              </a:rPr>
-              <a:t>(16 before the PO existed): shown as counts only.</a:t>
-            </a:r>
-            <a:endParaRPr lang="en-US" sz="1400" dirty="0"/>
-          </a:p>
-          <a:p>
-            <a:pPr marL="342900" indent="-342900">
-              <a:spcAft>
-                <a:spcPts val="600"/>
-              </a:spcAft>
-              <a:buSzPct val="100000"/>
-              <a:buChar char="•"/>
-            </a:pPr>
-            <a:r>
-              <a:rPr lang="en-US" sz="1400" b="1" dirty="0">
-                <a:solidFill>
-                  <a:srgbClr val="1F2A33"/>
-                </a:solidFill>
-                <a:latin typeface="Calibri" pitchFamily="34" charset="0"/>
-                <a:ea typeface="Calibri" pitchFamily="34" charset="-122"/>
-                <a:cs typeface="Calibri" pitchFamily="34" charset="-120"/>
-              </a:rPr>
-              <a:t>5 decoy tables </a:t>
-            </a:r>
-            <a:pPr indent="0" marL="0">
-              <a:spcAft>
-                <a:spcPts val="600"/>
-              </a:spcAft>
-              <a:buNone/>
-            </a:pPr>
-            <a:r>
-              <a:rPr lang="en-US" sz="1400" dirty="0">
-                <a:solidFill>
-                  <a:srgbClr val="1F2A33"/>
-                </a:solidFill>
-                <a:latin typeface="Calibri" pitchFamily="34" charset="0"/>
-                <a:ea typeface="Calibri" pitchFamily="34" charset="-122"/>
-                <a:cs typeface="Calibri" pitchFamily="34" charset="-120"/>
-              </a:rPr>
-              <a:t>with no link to vendor performance (GL, MRP, users, …).</a:t>
-            </a:r>
-            <a:endParaRPr lang="en-US" sz="1400" dirty="0"/>
-          </a:p>
-        </p:txBody>
-      </p:sp>
-      <p:graphicFrame>
-        <p:nvGraphicFramePr>
-          <p:cNvPr id="6" name="Chart 0" descr=""/>
-          <p:cNvGraphicFramePr/>
-          <p:nvPr/>
-        </p:nvGraphicFramePr>
-        <p:xfrm>
-          <a:off x="6858000" y="1463040"/>
-          <a:ext cx="4785055" cy="3931920"/>
-        </p:xfrm>
-        <a:graphic xmlns:a="http://schemas.openxmlformats.org/drawingml/2006/main">
-          <a:graphicData uri="http://schemas.openxmlformats.org/drawingml/2006/chart">
-            <c:chart xmlns:c="http://schemas.openxmlformats.org/drawingml/2006/chart" r:id="rId1"/>
-          </a:graphicData>
-        </a:graphic>
-      </p:graphicFrame>
-      <p:sp>
-        <p:nvSpPr>
-          <p:cNvPr id="7" name="Text 4"/>
-          <p:cNvSpPr txBox="1"/>
-          <p:nvPr/>
-        </p:nvSpPr>
-        <p:spPr>
-          <a:xfrm>
-            <a:off x="6858000" y="5486400"/>
-            <a:ext cx="4785055" cy="731520"/>
+            <a:off x="777240" y="1572768"/>
+            <a:ext cx="4663440" cy="347472"/>
           </a:xfrm>
           <a:prstGeom prst="rect">
             <a:avLst/>
@@ -30097,17 +30723,573 @@
               <a:buNone/>
             </a:pPr>
             <a:r>
-              <a:rPr lang="en-US" sz="1300" i="1" dirty="0">
+              <a:rPr lang="en-US" sz="1600" b="1" dirty="0">
                 <a:solidFill>
-                  <a:srgbClr val="4E5D6A"/>
+                  <a:srgbClr val="1F2A33"/>
+                </a:solidFill>
+                <a:latin typeface="Cambria" pitchFamily="34" charset="0"/>
+                <a:ea typeface="Cambria" pitchFamily="34" charset="-122"/>
+                <a:cs typeface="Cambria" pitchFamily="34" charset="-120"/>
+              </a:rPr>
+              <a:t>PO acknowledgment form</a:t>
+            </a:r>
+            <a:endParaRPr lang="en-US" sz="1600" dirty="0"/>
+          </a:p>
+        </p:txBody>
+      </p:sp>
+      <p:sp>
+        <p:nvSpPr>
+          <p:cNvPr id="7" name="Text 5"/>
+          <p:cNvSpPr txBox="1"/>
+          <p:nvPr/>
+        </p:nvSpPr>
+        <p:spPr>
+          <a:xfrm>
+            <a:off x="777240" y="1901952"/>
+            <a:ext cx="4663440" cy="274320"/>
+          </a:xfrm>
+          <a:prstGeom prst="rect">
+            <a:avLst/>
+          </a:prstGeom>
+          <a:noFill/>
+          <a:ln/>
+        </p:spPr>
+        <p:txBody>
+          <a:bodyPr wrap="square" lIns="0" tIns="0" rIns="0" bIns="0" rtlCol="0" anchor="ctr"/>
+          <a:lstStyle/>
+          <a:p>
+            <a:pPr indent="0" marL="0">
+              <a:buNone/>
+            </a:pPr>
+            <a:r>
+              <a:rPr lang="en-US" sz="1200" i="1" dirty="0">
+                <a:solidFill>
+                  <a:srgbClr val="D9622B"/>
                 </a:solidFill>
                 <a:latin typeface="Calibri" pitchFamily="34" charset="0"/>
                 <a:ea typeface="Calibri" pitchFamily="34" charset="-122"/>
                 <a:cs typeface="Calibri" pitchFamily="34" charset="-120"/>
               </a:rPr>
-              <a:t>The naive answers are wrong by +$1.3M and -$2.9M. Every number in the readout says which records it counts (Definitions tab).</a:t>
-            </a:r>
-            <a:endParaRPr lang="en-US" sz="1300" dirty="0"/>
+              <a:t>One Excel file per PO, sent with it</a:t>
+            </a:r>
+            <a:endParaRPr lang="en-US" sz="1200" dirty="0"/>
+          </a:p>
+        </p:txBody>
+      </p:sp>
+      <p:sp>
+        <p:nvSpPr>
+          <p:cNvPr id="8" name="Text 6"/>
+          <p:cNvSpPr txBox="1"/>
+          <p:nvPr/>
+        </p:nvSpPr>
+        <p:spPr>
+          <a:xfrm>
+            <a:off x="777240" y="2212848"/>
+            <a:ext cx="4663440" cy="1600200"/>
+          </a:xfrm>
+          <a:prstGeom prst="rect">
+            <a:avLst/>
+          </a:prstGeom>
+          <a:noFill/>
+          <a:ln/>
+        </p:spPr>
+        <p:txBody>
+          <a:bodyPr wrap="square" lIns="635" tIns="635" rIns="635" bIns="635" rtlCol="0" anchor="t"/>
+          <a:lstStyle/>
+          <a:p>
+            <a:pPr marL="342900" indent="-342900">
+              <a:spcAft>
+                <a:spcPts val="200"/>
+              </a:spcAft>
+              <a:buSzPct val="100000"/>
+              <a:buChar char="•"/>
+            </a:pPr>
+            <a:r>
+              <a:rPr lang="en-US" sz="1200" dirty="0">
+                <a:solidFill>
+                  <a:srgbClr val="1F2A33"/>
+                </a:solidFill>
+                <a:latin typeface="Calibri" pitchFamily="34" charset="0"/>
+                <a:ea typeface="Calibri" pitchFamily="34" charset="-122"/>
+                <a:cs typeface="Calibri" pitchFamily="34" charset="-120"/>
+              </a:rPr>
+              <a:t>Our lines locked; rows can't be deleted, so nothing drops silently</a:t>
+            </a:r>
+            <a:endParaRPr lang="en-US" sz="1200" dirty="0"/>
+          </a:p>
+          <a:p>
+            <a:pPr marL="342900" indent="-342900">
+              <a:spcAft>
+                <a:spcPts val="200"/>
+              </a:spcAft>
+              <a:buSzPct val="100000"/>
+              <a:buChar char="•"/>
+            </a:pPr>
+            <a:r>
+              <a:rPr lang="en-US" sz="1200" dirty="0">
+                <a:solidFill>
+                  <a:srgbClr val="1F2A33"/>
+                </a:solidFill>
+                <a:latin typeface="Calibri" pitchFamily="34" charset="0"/>
+                <a:ea typeface="Calibri" pitchFamily="34" charset="-122"/>
+                <a:cs typeface="Calibri" pitchFamily="34" charset="-120"/>
+              </a:rPr>
+              <a:t>Every line: Accept / Accept with changes / Cannot supply</a:t>
+            </a:r>
+            <a:endParaRPr lang="en-US" sz="1200" dirty="0"/>
+          </a:p>
+          <a:p>
+            <a:pPr marL="342900" indent="-342900">
+              <a:spcAft>
+                <a:spcPts val="200"/>
+              </a:spcAft>
+              <a:buSzPct val="100000"/>
+              <a:buChar char="•"/>
+            </a:pPr>
+            <a:r>
+              <a:rPr lang="en-US" sz="1200" dirty="0">
+                <a:solidFill>
+                  <a:srgbClr val="1F2A33"/>
+                </a:solidFill>
+                <a:latin typeface="Calibri" pitchFamily="34" charset="0"/>
+                <a:ea typeface="Calibri" pitchFamily="34" charset="-122"/>
+                <a:cs typeface="Calibri" pitchFamily="34" charset="-120"/>
+              </a:rPr>
+              <a:t>One real delivery date; Excel refuses "KW 20-22"</a:t>
+            </a:r>
+            <a:endParaRPr lang="en-US" sz="1200" dirty="0"/>
+          </a:p>
+          <a:p>
+            <a:pPr marL="342900" indent="-342900">
+              <a:spcAft>
+                <a:spcPts val="200"/>
+              </a:spcAft>
+              <a:buSzPct val="100000"/>
+              <a:buChar char="•"/>
+            </a:pPr>
+            <a:r>
+              <a:rPr lang="en-US" sz="1200" dirty="0">
+                <a:solidFill>
+                  <a:srgbClr val="1F2A33"/>
+                </a:solidFill>
+                <a:latin typeface="Calibri" pitchFamily="34" charset="0"/>
+                <a:ea typeface="Calibri" pitchFamily="34" charset="-122"/>
+                <a:cs typeface="Calibri" pitchFamily="34" charset="-120"/>
+              </a:rPr>
+              <a:t>Reason code for any qty or price change</a:t>
+            </a:r>
+            <a:endParaRPr lang="en-US" sz="1200" dirty="0"/>
+          </a:p>
+          <a:p>
+            <a:pPr marL="342900" indent="-342900">
+              <a:spcAft>
+                <a:spcPts val="200"/>
+              </a:spcAft>
+              <a:buSzPct val="100000"/>
+              <a:buChar char="•"/>
+            </a:pPr>
+            <a:r>
+              <a:rPr lang="en-US" sz="1200" dirty="0">
+                <a:solidFill>
+                  <a:srgbClr val="1F2A33"/>
+                </a:solidFill>
+                <a:latin typeface="Calibri" pitchFamily="34" charset="0"/>
+                <a:ea typeface="Calibri" pitchFamily="34" charset="-122"/>
+                <a:cs typeface="Calibri" pitchFamily="34" charset="-120"/>
+              </a:rPr>
+              <a:t>Returned file drops into the same check: HIGH match, no OCR</a:t>
+            </a:r>
+            <a:endParaRPr lang="en-US" sz="1200" dirty="0"/>
+          </a:p>
+        </p:txBody>
+      </p:sp>
+      <p:sp>
+        <p:nvSpPr>
+          <p:cNvPr id="9" name="Shape 7"/>
+          <p:cNvSpPr/>
+          <p:nvPr/>
+        </p:nvSpPr>
+        <p:spPr>
+          <a:xfrm>
+            <a:off x="548640" y="4023360"/>
+            <a:ext cx="5120640" cy="2103120"/>
+          </a:xfrm>
+          <a:prstGeom prst="roundRect">
+            <a:avLst>
+              <a:gd name="adj" fmla="val 3478"/>
+            </a:avLst>
+          </a:prstGeom>
+          <a:solidFill>
+            <a:srgbClr val="EEF2F5"/>
+          </a:solidFill>
+          <a:ln w="12700">
+            <a:solidFill>
+              <a:srgbClr val="EEF2F5"/>
+            </a:solidFill>
+            <a:prstDash val="solid"/>
+          </a:ln>
+        </p:spPr>
+      </p:sp>
+      <p:sp>
+        <p:nvSpPr>
+          <p:cNvPr id="10" name="Text 8"/>
+          <p:cNvSpPr txBox="1"/>
+          <p:nvPr/>
+        </p:nvSpPr>
+        <p:spPr>
+          <a:xfrm>
+            <a:off x="777240" y="4133088"/>
+            <a:ext cx="4663440" cy="347472"/>
+          </a:xfrm>
+          <a:prstGeom prst="rect">
+            <a:avLst/>
+          </a:prstGeom>
+          <a:noFill/>
+          <a:ln/>
+        </p:spPr>
+        <p:txBody>
+          <a:bodyPr wrap="square" lIns="0" tIns="0" rIns="0" bIns="0" rtlCol="0" anchor="ctr"/>
+          <a:lstStyle/>
+          <a:p>
+            <a:pPr indent="0" marL="0">
+              <a:buNone/>
+            </a:pPr>
+            <a:r>
+              <a:rPr lang="en-US" sz="1600" b="1" dirty="0">
+                <a:solidFill>
+                  <a:srgbClr val="1F2A33"/>
+                </a:solidFill>
+                <a:latin typeface="Cambria" pitchFamily="34" charset="0"/>
+                <a:ea typeface="Cambria" pitchFamily="34" charset="-122"/>
+                <a:cs typeface="Cambria" pitchFamily="34" charset="-120"/>
+              </a:rPr>
+              <a:t>Supplier information pack</a:t>
+            </a:r>
+            <a:endParaRPr lang="en-US" sz="1600" dirty="0"/>
+          </a:p>
+        </p:txBody>
+      </p:sp>
+      <p:sp>
+        <p:nvSpPr>
+          <p:cNvPr id="11" name="Text 9"/>
+          <p:cNvSpPr txBox="1"/>
+          <p:nvPr/>
+        </p:nvSpPr>
+        <p:spPr>
+          <a:xfrm>
+            <a:off x="777240" y="4462272"/>
+            <a:ext cx="4663440" cy="274320"/>
+          </a:xfrm>
+          <a:prstGeom prst="rect">
+            <a:avLst/>
+          </a:prstGeom>
+          <a:noFill/>
+          <a:ln/>
+        </p:spPr>
+        <p:txBody>
+          <a:bodyPr wrap="square" lIns="0" tIns="0" rIns="0" bIns="0" rtlCol="0" anchor="ctr"/>
+          <a:lstStyle/>
+          <a:p>
+            <a:pPr indent="0" marL="0">
+              <a:buNone/>
+            </a:pPr>
+            <a:r>
+              <a:rPr lang="en-US" sz="1200" i="1" dirty="0">
+                <a:solidFill>
+                  <a:srgbClr val="D9622B"/>
+                </a:solidFill>
+                <a:latin typeface="Calibri" pitchFamily="34" charset="0"/>
+                <a:ea typeface="Calibri" pitchFamily="34" charset="-122"/>
+                <a:cs typeface="Calibri" pitchFamily="34" charset="-120"/>
+              </a:rPr>
+              <a:t>Once per vendor, pre-filled from 8 months of ERP</a:t>
+            </a:r>
+            <a:endParaRPr lang="en-US" sz="1200" dirty="0"/>
+          </a:p>
+        </p:txBody>
+      </p:sp>
+      <p:sp>
+        <p:nvSpPr>
+          <p:cNvPr id="12" name="Text 10"/>
+          <p:cNvSpPr txBox="1"/>
+          <p:nvPr/>
+        </p:nvSpPr>
+        <p:spPr>
+          <a:xfrm>
+            <a:off x="777240" y="4773168"/>
+            <a:ext cx="4663440" cy="1280160"/>
+          </a:xfrm>
+          <a:prstGeom prst="rect">
+            <a:avLst/>
+          </a:prstGeom>
+          <a:noFill/>
+          <a:ln/>
+        </p:spPr>
+        <p:txBody>
+          <a:bodyPr wrap="square" lIns="635" tIns="635" rIns="635" bIns="635" rtlCol="0" anchor="t"/>
+          <a:lstStyle/>
+          <a:p>
+            <a:pPr marL="342900" indent="-342900">
+              <a:spcAft>
+                <a:spcPts val="200"/>
+              </a:spcAft>
+              <a:buSzPct val="100000"/>
+              <a:buChar char="•"/>
+            </a:pPr>
+            <a:r>
+              <a:rPr lang="en-US" sz="1200" dirty="0">
+                <a:solidFill>
+                  <a:srgbClr val="1F2A33"/>
+                </a:solidFill>
+                <a:latin typeface="Calibri" pitchFamily="34" charset="0"/>
+                <a:ea typeface="Calibri" pitchFamily="34" charset="-122"/>
+                <a:cs typeface="Calibri" pitchFamily="34" charset="-120"/>
+              </a:rPr>
+              <a:t>Every part we buy from them, with planned / quoted / actual lead time</a:t>
+            </a:r>
+            <a:endParaRPr lang="en-US" sz="1200" dirty="0"/>
+          </a:p>
+          <a:p>
+            <a:pPr marL="342900" indent="-342900">
+              <a:spcAft>
+                <a:spcPts val="200"/>
+              </a:spcAft>
+              <a:buSzPct val="100000"/>
+              <a:buChar char="•"/>
+            </a:pPr>
+            <a:r>
+              <a:rPr lang="en-US" sz="1200" dirty="0">
+                <a:solidFill>
+                  <a:srgbClr val="1F2A33"/>
+                </a:solidFill>
+                <a:latin typeface="Calibri" pitchFamily="34" charset="0"/>
+                <a:ea typeface="Calibri" pitchFamily="34" charset="-122"/>
+                <a:cs typeface="Calibri" pitchFamily="34" charset="-120"/>
+              </a:rPr>
+              <a:t>They confirm their part numbers → Lisa's approval queue</a:t>
+            </a:r>
+            <a:endParaRPr lang="en-US" sz="1200" dirty="0"/>
+          </a:p>
+          <a:p>
+            <a:pPr marL="342900" indent="-342900">
+              <a:spcAft>
+                <a:spcPts val="200"/>
+              </a:spcAft>
+              <a:buSzPct val="100000"/>
+              <a:buChar char="•"/>
+            </a:pPr>
+            <a:r>
+              <a:rPr lang="en-US" sz="1200" dirty="0">
+                <a:solidFill>
+                  <a:srgbClr val="1F2A33"/>
+                </a:solidFill>
+                <a:latin typeface="Calibri" pitchFamily="34" charset="0"/>
+                <a:ea typeface="Calibri" pitchFamily="34" charset="-122"/>
+                <a:cs typeface="Calibri" pitchFamily="34" charset="-120"/>
+              </a:rPr>
+              <a:t>Standard lead times → gap report for planning</a:t>
+            </a:r>
+            <a:endParaRPr lang="en-US" sz="1200" dirty="0"/>
+          </a:p>
+          <a:p>
+            <a:pPr marL="342900" indent="-342900">
+              <a:spcAft>
+                <a:spcPts val="200"/>
+              </a:spcAft>
+              <a:buSzPct val="100000"/>
+              <a:buChar char="•"/>
+            </a:pPr>
+            <a:r>
+              <a:rPr lang="en-US" sz="1200" dirty="0">
+                <a:solidFill>
+                  <a:srgbClr val="1F2A33"/>
+                </a:solidFill>
+                <a:latin typeface="Calibri" pitchFamily="34" charset="0"/>
+                <a:ea typeface="Calibri" pitchFamily="34" charset="-122"/>
+                <a:cs typeface="Calibri" pitchFamily="34" charset="-120"/>
+              </a:rPr>
+              <a:t>Contacts, turnaround, AS9100 / Nadcap expiry</a:t>
+            </a:r>
+            <a:endParaRPr lang="en-US" sz="1200" dirty="0"/>
+          </a:p>
+        </p:txBody>
+      </p:sp>
+      <p:sp>
+        <p:nvSpPr>
+          <p:cNvPr id="13" name="Text 11"/>
+          <p:cNvSpPr txBox="1"/>
+          <p:nvPr/>
+        </p:nvSpPr>
+        <p:spPr>
+          <a:xfrm>
+            <a:off x="5989320" y="1463040"/>
+            <a:ext cx="5653735" cy="457200"/>
+          </a:xfrm>
+          <a:prstGeom prst="rect">
+            <a:avLst/>
+          </a:prstGeom>
+          <a:noFill/>
+          <a:ln/>
+        </p:spPr>
+        <p:txBody>
+          <a:bodyPr wrap="square" lIns="0" tIns="0" rIns="0" bIns="0" rtlCol="0" anchor="t"/>
+          <a:lstStyle/>
+          <a:p>
+            <a:pPr indent="0" marL="0">
+              <a:buNone/>
+            </a:pPr>
+            <a:r>
+              <a:rPr lang="en-US" sz="1200" b="1" dirty="0">
+                <a:solidFill>
+                  <a:srgbClr val="1F2A33"/>
+                </a:solidFill>
+                <a:latin typeface="Calibri" pitchFamily="34" charset="0"/>
+                <a:ea typeface="Calibri" pitchFamily="34" charset="-122"/>
+                <a:cs typeface="Calibri" pitchFamily="34" charset="-120"/>
+              </a:rPr>
+              <a:t>Ostmark answers on the form: line 2 is now "Vendor declined" (act today, with the reason), not a guess</a:t>
+            </a:r>
+            <a:endParaRPr lang="en-US" sz="1200" dirty="0"/>
+          </a:p>
+        </p:txBody>
+      </p:sp>
+      <p:pic>
+        <p:nvPicPr>
+          <p:cNvPr id="14" name="Image 0" descr="/home/user/BeaconFasteners/Beacon Superday-Submission/presentation/assets/today_after_form_c.png">    </p:cNvPr>
+          <p:cNvPicPr>
+            <a:picLocks noChangeAspect="1"/>
+          </p:cNvPicPr>
+          <p:nvPr/>
+        </p:nvPicPr>
+        <p:blipFill>
+          <a:blip r:embed="rId1"/>
+          <a:stretch>
+            <a:fillRect/>
+          </a:stretch>
+        </p:blipFill>
+        <p:spPr>
+          <a:xfrm>
+            <a:off x="5989320" y="1920240"/>
+            <a:ext cx="5653735" cy="1638764"/>
+          </a:xfrm>
+          <a:prstGeom prst="rect">
+            <a:avLst/>
+          </a:prstGeom>
+          <a:effectLst>
+            <a:outerShdw sx="100000" sy="100000" kx="0" ky="0" algn="bl" rotWithShape="0" blurRad="76200" dist="25400" dir="5400000">
+              <a:srgbClr val="000000">
+                <a:alpha val="25000"/>
+              </a:srgbClr>
+            </a:outerShdw>
+          </a:effectLst>
+        </p:spPr>
+      </p:pic>
+      <p:sp>
+        <p:nvSpPr>
+          <p:cNvPr id="15" name="Text 12"/>
+          <p:cNvSpPr txBox="1"/>
+          <p:nvPr/>
+        </p:nvSpPr>
+        <p:spPr>
+          <a:xfrm>
+            <a:off x="5989320" y="3833324"/>
+            <a:ext cx="5653735" cy="274320"/>
+          </a:xfrm>
+          <a:prstGeom prst="rect">
+            <a:avLst/>
+          </a:prstGeom>
+          <a:noFill/>
+          <a:ln/>
+        </p:spPr>
+        <p:txBody>
+          <a:bodyPr wrap="square" lIns="0" tIns="0" rIns="0" bIns="0" rtlCol="0" anchor="ctr"/>
+          <a:lstStyle/>
+          <a:p>
+            <a:pPr indent="0" marL="0">
+              <a:buNone/>
+            </a:pPr>
+            <a:r>
+              <a:rPr lang="en-US" sz="1200" b="1" dirty="0">
+                <a:solidFill>
+                  <a:srgbClr val="1F2A33"/>
+                </a:solidFill>
+                <a:latin typeface="Calibri" pitchFamily="34" charset="0"/>
+                <a:ea typeface="Calibri" pitchFamily="34" charset="-122"/>
+                <a:cs typeface="Calibri" pitchFamily="34" charset="-120"/>
+              </a:rPr>
+              <a:t>Continental returns its pack: MRP plans 19 days, their standard is 28</a:t>
+            </a:r>
+            <a:endParaRPr lang="en-US" sz="1200" dirty="0"/>
+          </a:p>
+        </p:txBody>
+      </p:sp>
+      <p:pic>
+        <p:nvPicPr>
+          <p:cNvPr id="16" name="Image 1" descr="/home/user/BeaconFasteners/Beacon Superday-Submission/presentation/assets/pack_gaps_c.png">    </p:cNvPr>
+          <p:cNvPicPr>
+            <a:picLocks noChangeAspect="1"/>
+          </p:cNvPicPr>
+          <p:nvPr/>
+        </p:nvPicPr>
+        <p:blipFill>
+          <a:blip r:embed="rId2"/>
+          <a:stretch>
+            <a:fillRect/>
+          </a:stretch>
+        </p:blipFill>
+        <p:spPr>
+          <a:xfrm>
+            <a:off x="5989320" y="4153364"/>
+            <a:ext cx="5653735" cy="1761671"/>
+          </a:xfrm>
+          <a:prstGeom prst="rect">
+            <a:avLst/>
+          </a:prstGeom>
+          <a:effectLst>
+            <a:outerShdw sx="100000" sy="100000" kx="0" ky="0" algn="bl" rotWithShape="0" blurRad="76200" dist="25400" dir="5400000">
+              <a:srgbClr val="000000">
+                <a:alpha val="25000"/>
+              </a:srgbClr>
+            </a:outerShdw>
+          </a:effectLst>
+        </p:spPr>
+      </p:pic>
+      <p:sp>
+        <p:nvSpPr>
+          <p:cNvPr id="17" name="Text 13"/>
+          <p:cNvSpPr txBox="1"/>
+          <p:nvPr/>
+        </p:nvSpPr>
+        <p:spPr>
+          <a:xfrm>
+            <a:off x="5989320" y="5989320"/>
+            <a:ext cx="5653735" cy="365760"/>
+          </a:xfrm>
+          <a:prstGeom prst="rect">
+            <a:avLst/>
+          </a:prstGeom>
+          <a:noFill/>
+          <a:ln/>
+        </p:spPr>
+        <p:txBody>
+          <a:bodyPr wrap="square" lIns="0" tIns="0" rIns="0" bIns="0" rtlCol="0" anchor="ctr"/>
+          <a:lstStyle/>
+          <a:p>
+            <a:pPr indent="0" marL="0">
+              <a:buNone/>
+            </a:pPr>
+            <a:r>
+              <a:rPr lang="en-US" sz="1100" i="1" dirty="0">
+                <a:solidFill>
+                  <a:srgbClr val="7D8B97"/>
+                </a:solidFill>
+                <a:latin typeface="Calibri" pitchFamily="34" charset="0"/>
+                <a:ea typeface="Calibri" pitchFamily="34" charset="-122"/>
+                <a:cs typeface="Calibri" pitchFamily="34" charset="-120"/>
+              </a:rPr>
+              <a:t>Vendor replies in the demo are synthetic. Plain Excel: no portal, no logins; PDFs keep working for everyone else.</a:t>
+            </a:r>
+            <a:endParaRPr lang="en-US" sz="1100" dirty="0"/>
           </a:p>
         </p:txBody>
       </p:sp>

--- a/Beacon Superday-Submission/presentation/Beacon_FDE_Casestudy.pptx
+++ b/Beacon Superday-Submission/presentation/Beacon_FDE_Casestudy.pptx
@@ -28,9 +28,10 @@
     <p:sldId id="276" r:id="rId22"/>
     <p:sldId id="277" r:id="rId23"/>
     <p:sldId id="278" r:id="rId24"/>
+    <p:sldId id="279" r:id="rId25"/>
   </p:sldIdLst>
   <p:notesMasterIdLst>
-    <p:notesMasterId r:id="rId25"/>
+    <p:notesMasterId r:id="rId26"/>
   </p:notesMasterIdLst>
   <p:sldSz cx="12192000" cy="6858000"/>
   <p:notesSz cx="6858000" cy="12192000"/>
@@ -1603,7 +1604,7 @@
           <a:p>
             <a:r>
               <a:rPr lang="en-US" dirty="0"/>
-              <a:t>One line: I turned an unstructured confirmation process into a controlled daily workflow, and eight months of ERP data into a supplier decision. ~22 minutes of talk: 3 on the problem, 9 on Task 1, 7 on Task 2, 3 on limits and questions, then Q&amp;A. Every number shown came out of the tools on the case data.</a:t>
+              <a:t/>
             </a:r>
             <a:endParaRPr lang="en-US" dirty="0"/>
           </a:p>
@@ -1691,7 +1692,7 @@
           <a:p>
             <a:r>
               <a:rPr lang="en-US" dirty="0"/>
-              <a:t>Each trap was verified independently. The date format one is sneaky: a SQL-only analysis silently returns nothing by month. Received value = net receipt qty times PO unit price. Receipts carry no price, so this is value at PO price, not invoiced cost; I say that on the readout.</a:t>
+              <a:t/>
             </a:r>
             <a:endParaRPr lang="en-US" dirty="0"/>
           </a:p>
@@ -1867,7 +1868,7 @@
           <a:p>
             <a:r>
               <a:rPr lang="en-US" dirty="0"/>
-              <a:t>I deliberately did not build a 0-100 vendor score. Any weighting of lateness vs price vs shortage would be my opinion dressed up as math. Instead, the table shows absolute and relative numbers side by side, with the denominators.</a:t>
+              <a:t/>
             </a:r>
             <a:endParaRPr lang="en-US" dirty="0"/>
           </a:p>
@@ -1955,7 +1956,7 @@
           <a:p>
             <a:r>
               <a:rPr lang="en-US" dirty="0"/>
-              <a:t>Questions for the call: can you commit to a standard lead time we can load into MRP? When you confirm a date you meet it 58% of the time; what drives the misses: furnace capacity, batching, or late incoming parts from us? 51% of lines arrive split; can partial lots be avoided or flagged? Language is deliberate: highest observed delivery exposure, not 'caused production delays'. The ERP has no production-impact data.</a:t>
+              <a:t/>
             </a:r>
             <a:endParaRPr lang="en-US" dirty="0"/>
           </a:p>
@@ -2043,7 +2044,7 @@
           <a:p>
             <a:r>
               <a:rPr lang="en-US" dirty="0"/>
-              <a:t>This is what turns a history lesson into something planning can act on next week. The biggest item is not a late vendor: it's $1.84M of Apex bar due in two weeks with no acknowledgment on file. Part of that may be the ERP confirmation feed stopping on 04/03, which is itself a question for IT. I backtested the rule before trusting it, and I say plainly that it's a watch list.</a:t>
+              <a:t/>
             </a:r>
             <a:endParaRPr lang="en-US" dirty="0"/>
           </a:p>
@@ -2483,7 +2484,7 @@
           <a:p>
             <a:r>
               <a:rPr lang="en-US" dirty="0"/>
-              <a:t>Success metric for week 1: Lisa's reconciliation time drops from about 90 minutes, and the tool misses nothing she catches by hand. False alarms are acceptable at first; misses are not.</a:t>
+              <a:t/>
             </a:r>
             <a:endParaRPr lang="en-US" dirty="0"/>
           </a:p>
@@ -2571,7 +2572,7 @@
           <a:p>
             <a:r>
               <a:rPr lang="en-US" dirty="0"/>
-              <a:t>Task 1 turns 35 PDFs into 23 things to do, worst first, and 22 lines Lisa never has to look at. Task 2 says call Continental first, with the numbers, and says honestly that part of it is our own planning. The forward view turns history into something planning can act on next week.</a:t>
+              <a:t/>
             </a:r>
             <a:endParaRPr lang="en-US" dirty="0"/>
           </a:p>
@@ -2747,7 +2748,7 @@
           <a:p>
             <a:r>
               <a:rPr lang="en-US" dirty="0"/>
-              <a:t>Why Apex isn't first: its delivery is fine. The issue is commercial and cumulative, and the right person is probably Lisa plus whoever owns the supply agreement. The price creep may be a legitimate alloy surcharge that never made it into the PO price; that's a question, not an accusation.</a:t>
+              <a:t/>
             </a:r>
             <a:endParaRPr lang="en-US" dirty="0"/>
           </a:p>
@@ -2835,7 +2836,7 @@
           <a:p>
             <a:r>
               <a:rPr lang="en-US" dirty="0"/>
-              <a:t>This is the answer to 'is it a one-time script?'. The store is one SQLite file: items, notes, append-only promise history, crosswalk approvals and file hashes. The Excel and the app read and write the same store.</a:t>
+              <a:t/>
             </a:r>
             <a:endParaRPr lang="en-US" dirty="0"/>
           </a:p>
@@ -2923,7 +2924,7 @@
           <a:p>
             <a:r>
               <a:rPr lang="en-US" dirty="0"/>
-              <a:t>Live demo here if time allows: open the app, click 'Load this week's sample confirmations', tick one Done, approve one part number, then Download Excel and show the same state in the workbook.</a:t>
+              <a:t/>
             </a:r>
             <a:endParaRPr lang="en-US" dirty="0"/>
           </a:p>
@@ -2947,6 +2948,94 @@
             <a:fld id="{F7021451-1387-4CA6-816F-3879F97B5CBC}" type="slidenum">
               <a:rPr lang="en-US"/>
               <a:t>23</a:t>
+            </a:fld>
+            <a:endParaRPr lang="en-US"/>
+          </a:p>
+        </p:txBody>
+      </p:sp>
+    </p:spTree>
+    <p:extLst>
+      <p:ext uri="{BB962C8B-B14F-4D97-AF65-F5344CB8AC3E}">
+        <p14:creationId xmlns:p14="http://schemas.microsoft.com/office/powerpoint/2010/main" val="1024086991"/>
+      </p:ext>
+    </p:extLst>
+  </p:cSld>
+  <p:clrMapOvr>
+    <a:masterClrMapping/>
+  </p:clrMapOvr>
+</p:notes>
+</file>
+
+<file path=ppt/notesSlides/notesSlide24.xml><?xml version="1.0" encoding="utf-8"?>
+<p:notes xmlns:a="http://schemas.openxmlformats.org/drawingml/2006/main" xmlns:r="http://schemas.openxmlformats.org/officeDocument/2006/relationships" xmlns:p="http://schemas.openxmlformats.org/presentationml/2006/main">
+  <p:cSld>
+    <p:spTree>
+      <p:nvGrpSpPr>
+        <p:cNvPr id="1" name=""/>
+        <p:cNvGrpSpPr/>
+        <p:nvPr/>
+      </p:nvGrpSpPr>
+      <p:grpSpPr>
+        <a:xfrm>
+          <a:off x="0" y="0"/>
+          <a:ext cx="0" cy="0"/>
+          <a:chOff x="0" y="0"/>
+          <a:chExt cx="0" cy="0"/>
+        </a:xfrm>
+      </p:grpSpPr>
+      <p:sp>
+        <p:nvSpPr>
+          <p:cNvPr id="2" name="Slide Image Placeholder 1"/>
+          <p:cNvSpPr>
+            <a:spLocks noGrp="1" noRot="1" noChangeAspect="1"/>
+          </p:cNvSpPr>
+          <p:nvPr>
+            <p:ph type="sldImg"/>
+          </p:nvPr>
+        </p:nvSpPr>
+        <p:spPr/>
+      </p:sp>
+      <p:sp>
+        <p:nvSpPr>
+          <p:cNvPr id="3" name="Notes Placeholder 2"/>
+          <p:cNvSpPr>
+            <a:spLocks noGrp="1"/>
+          </p:cNvSpPr>
+          <p:nvPr>
+            <p:ph type="body" idx="1"/>
+          </p:nvPr>
+        </p:nvSpPr>
+        <p:spPr/>
+        <p:txBody>
+          <a:bodyPr/>
+          <a:lstStyle/>
+          <a:p>
+            <a:r>
+              <a:rPr lang="en-US" dirty="0"/>
+              <a:t/>
+            </a:r>
+            <a:endParaRPr lang="en-US" dirty="0"/>
+          </a:p>
+        </p:txBody>
+      </p:sp>
+      <p:sp>
+        <p:nvSpPr>
+          <p:cNvPr id="4" name="Slide Number Placeholder 3"/>
+          <p:cNvSpPr>
+            <a:spLocks noGrp="1"/>
+          </p:cNvSpPr>
+          <p:nvPr>
+            <p:ph type="sldNum" sz="quarter" idx="10"/>
+          </p:nvPr>
+        </p:nvSpPr>
+        <p:spPr/>
+        <p:txBody>
+          <a:bodyPr/>
+          <a:lstStyle/>
+          <a:p>
+            <a:fld id="{F7021451-1387-4CA6-816F-3879F97B5CBC}" type="slidenum">
+              <a:rPr lang="en-US"/>
+              <a:t>24</a:t>
             </a:fld>
             <a:endParaRPr lang="en-US"/>
           </a:p>
@@ -3011,7 +3100,7 @@
           <a:p>
             <a:r>
               <a:rPr lang="en-US" dirty="0"/>
-              <a:t>I didn't start by asking which technology to use. I started with the buyer's daily decision, the plant's risk, and the smallest reliable workflow that improves both. Design test for everything: could the user act on it tomorrow morning without me in the room?</a:t>
+              <a:t/>
             </a:r>
             <a:endParaRPr lang="en-US" dirty="0"/>
           </a:p>
@@ -3099,7 +3188,7 @@
           <a:p>
             <a:r>
               <a:rPr lang="en-US" dirty="0"/>
-              <a:t>Say roughly how long each step took you. The point to land: the order was set by risk. Data traps or a broken dropped-line check would sink the work; a plainer UI would not. When something had to give, polish gave, not coverage.</a:t>
+              <a:t/>
             </a:r>
             <a:endParaRPr lang="en-US" dirty="0"/>
           </a:p>
@@ -3187,7 +3276,7 @@
           <a:p>
             <a:r>
               <a:rPr lang="en-US" dirty="0"/>
-              <a:t>Why Excel: Lisa already works from a PO list in Excel and Outlook. A new tool that needs a login and training won't get used. The app exists for the two things Excel is bad at: dragging PDFs in and one-click approval of part numbers. Both read and write the same memory file, so they always agree.</a:t>
+              <a:t/>
             </a:r>
             <a:endParaRPr lang="en-US" dirty="0"/>
           </a:p>
@@ -3275,7 +3364,7 @@
           <a:p>
             <a:r>
               <a:rPr lang="en-US" dirty="0"/>
-              <a:t>Tolerances were chosen from the data, not invented. USD prices: any change is flagged, because ERP prices are exact to 4 decimals. EUR prices: flagged over 1%, because month-to-month FX noise in the ERP rates is about 0.3%. On this data every L4 inference was an exact qty and price match, but it still goes to review because two lines could share both.</a:t>
+              <a:t/>
             </a:r>
             <a:endParaRPr lang="en-US" dirty="0"/>
           </a:p>
@@ -3363,7 +3452,7 @@
           <a:p>
             <a:r>
               <a:rPr lang="en-US" dirty="0"/>
-              <a:t>Why Excel: it is where Lisa already works, it needs no login or training, and her edits flow back into the tool. The small browser app is optional, for drag-and-drop and one-click approvals; it shares the same memory.</a:t>
+              <a:t/>
             </a:r>
             <a:endParaRPr lang="en-US" dirty="0"/>
           </a:p>
@@ -3451,7 +3540,7 @@
           <a:p>
             <a:r>
               <a:rPr lang="en-US" dirty="0"/>
-              <a:t>The dropped line is the headline: it's the thing Lisa said matters most and the hardest to see, because it's an absence. The tool knows it's missing because it starts from the open PO list, not from the PDF. The stray PO shows the same idea in reverse. 13 'check' items are mostly date sanity: acknowledgments dated before the PO, or Continental promise dates before the confirmation date.</a:t>
+              <a:t/>
             </a:r>
             <a:endParaRPr lang="en-US" dirty="0"/>
           </a:p>
@@ -3539,7 +3628,7 @@
           <a:p>
             <a:r>
               <a:rPr lang="en-US" dirty="0"/>
-              <a:t>This is the answer to past vs future. The past: the ERP tells us every part each vendor supplies, what we paid, and the real lead times; it pre-fills both forms and gives Lisa a list of $128k of old open balances to chase or short-close. The future: the vendor answers in our format, so the three hardest problems (dropped lines, week-range dates, vendor part numbers) are prevented rather than detected. Roll out to the three vendors that cost the most reading time first: Continental's scans, Ostmark's German week ranges, Heritage's part numbers.</a:t>
+              <a:t/>
             </a:r>
             <a:endParaRPr lang="en-US" dirty="0"/>
           </a:p>
@@ -11376,7 +11465,7 @@
                 <a:ea typeface="Calibri" pitchFamily="34" charset="-122"/>
                 <a:cs typeface="Calibri" pitchFamily="34" charset="-120"/>
               </a:rPr>
-              <a:t>TASK 2 · TOWARD THE PART-NUMBER CLEANUP</a:t>
+              <a:t>AI · WHERE IT EARNS ITS PLACE</a:t>
             </a:r>
             <a:endParaRPr lang="en-US" sz="1200" dirty="0"/>
           </a:p>
@@ -11415,7 +11504,7 @@
                 <a:ea typeface="Cambria" pitchFamily="34" charset="-122"/>
                 <a:cs typeface="Cambria" pitchFamily="34" charset="-120"/>
               </a:rPr>
-              <a:t>The crosswalk grows from daily work and seeds the part master</a:t>
+              <a:t>Claude reads and explains; it never decides or calculates</a:t>
             </a:r>
             <a:endParaRPr lang="en-US" sz="2400" dirty="0"/>
           </a:p>
@@ -11460,9 +11549,750 @@
           </a:p>
         </p:txBody>
       </p:sp>
+      <p:sp>
+        <p:nvSpPr>
+          <p:cNvPr id="5" name="Shape 3"/>
+          <p:cNvSpPr/>
+          <p:nvPr/>
+        </p:nvSpPr>
+        <p:spPr>
+          <a:xfrm>
+            <a:off x="548640" y="1463040"/>
+            <a:ext cx="5364328" cy="2331720"/>
+          </a:xfrm>
+          <a:prstGeom prst="roundRect">
+            <a:avLst>
+              <a:gd name="adj" fmla="val 3137"/>
+            </a:avLst>
+          </a:prstGeom>
+          <a:solidFill>
+            <a:srgbClr val="EEF2F5"/>
+          </a:solidFill>
+          <a:ln w="12700">
+            <a:solidFill>
+              <a:srgbClr val="EEF2F5"/>
+            </a:solidFill>
+            <a:prstDash val="solid"/>
+          </a:ln>
+        </p:spPr>
+      </p:sp>
+      <p:sp>
+        <p:nvSpPr>
+          <p:cNvPr id="6" name="Text 4"/>
+          <p:cNvSpPr txBox="1"/>
+          <p:nvPr/>
+        </p:nvSpPr>
+        <p:spPr>
+          <a:xfrm>
+            <a:off x="822960" y="1600200"/>
+            <a:ext cx="4815688" cy="274320"/>
+          </a:xfrm>
+          <a:prstGeom prst="rect">
+            <a:avLst/>
+          </a:prstGeom>
+          <a:noFill/>
+          <a:ln/>
+        </p:spPr>
+        <p:txBody>
+          <a:bodyPr wrap="square" lIns="0" tIns="0" rIns="0" bIns="0" rtlCol="0" anchor="ctr"/>
+          <a:lstStyle/>
+          <a:p>
+            <a:pPr indent="0" marL="0">
+              <a:buNone/>
+            </a:pPr>
+            <a:r>
+              <a:rPr lang="en-US" sz="1100" b="1" spc="200" kern="0" dirty="0">
+                <a:solidFill>
+                  <a:srgbClr val="D9622B"/>
+                </a:solidFill>
+                <a:latin typeface="Calibri" pitchFamily="34" charset="0"/>
+                <a:ea typeface="Calibri" pitchFamily="34" charset="-122"/>
+                <a:cs typeface="Calibri" pitchFamily="34" charset="-120"/>
+              </a:rPr>
+              <a:t>TASK 1 · AI READER</a:t>
+            </a:r>
+            <a:endParaRPr lang="en-US" sz="1100" dirty="0"/>
+          </a:p>
+        </p:txBody>
+      </p:sp>
+      <p:sp>
+        <p:nvSpPr>
+          <p:cNvPr id="7" name="Text 5"/>
+          <p:cNvSpPr txBox="1"/>
+          <p:nvPr/>
+        </p:nvSpPr>
+        <p:spPr>
+          <a:xfrm>
+            <a:off x="822960" y="1874520"/>
+            <a:ext cx="4815688" cy="365760"/>
+          </a:xfrm>
+          <a:prstGeom prst="rect">
+            <a:avLst/>
+          </a:prstGeom>
+          <a:noFill/>
+          <a:ln/>
+        </p:spPr>
+        <p:txBody>
+          <a:bodyPr wrap="square" lIns="0" tIns="0" rIns="0" bIns="0" rtlCol="0" anchor="ctr"/>
+          <a:lstStyle/>
+          <a:p>
+            <a:pPr indent="0" marL="0">
+              <a:buNone/>
+            </a:pPr>
+            <a:r>
+              <a:rPr lang="en-US" sz="1700" b="1" dirty="0">
+                <a:solidFill>
+                  <a:srgbClr val="1F2A33"/>
+                </a:solidFill>
+                <a:latin typeface="Cambria" pitchFamily="34" charset="0"/>
+                <a:ea typeface="Cambria" pitchFamily="34" charset="-122"/>
+                <a:cs typeface="Cambria" pitchFamily="34" charset="-120"/>
+              </a:rPr>
+              <a:t>Reads any PDF no template can</a:t>
+            </a:r>
+            <a:endParaRPr lang="en-US" sz="1700" dirty="0"/>
+          </a:p>
+        </p:txBody>
+      </p:sp>
+      <p:sp>
+        <p:nvSpPr>
+          <p:cNvPr id="8" name="Text 6"/>
+          <p:cNvSpPr txBox="1"/>
+          <p:nvPr/>
+        </p:nvSpPr>
+        <p:spPr>
+          <a:xfrm>
+            <a:off x="822960" y="2377440"/>
+            <a:ext cx="2407844" cy="594360"/>
+          </a:xfrm>
+          <a:prstGeom prst="rect">
+            <a:avLst/>
+          </a:prstGeom>
+          <a:noFill/>
+          <a:ln/>
+        </p:spPr>
+        <p:txBody>
+          <a:bodyPr wrap="square" lIns="0" tIns="0" rIns="0" bIns="0" rtlCol="0" anchor="ctr"/>
+          <a:lstStyle/>
+          <a:p>
+            <a:pPr indent="0" marL="0">
+              <a:buNone/>
+            </a:pPr>
+            <a:r>
+              <a:rPr lang="en-US" sz="2600" b="1" dirty="0">
+                <a:solidFill>
+                  <a:srgbClr val="2E7D4F"/>
+                </a:solidFill>
+                <a:latin typeface="Cambria" pitchFamily="34" charset="0"/>
+                <a:ea typeface="Cambria" pitchFamily="34" charset="-122"/>
+                <a:cs typeface="Cambria" pitchFamily="34" charset="-120"/>
+              </a:rPr>
+              <a:t>125 / 125</a:t>
+            </a:r>
+            <a:endParaRPr lang="en-US" sz="2600" dirty="0"/>
+          </a:p>
+        </p:txBody>
+      </p:sp>
+      <p:sp>
+        <p:nvSpPr>
+          <p:cNvPr id="9" name="Text 7"/>
+          <p:cNvSpPr txBox="1"/>
+          <p:nvPr/>
+        </p:nvSpPr>
+        <p:spPr>
+          <a:xfrm>
+            <a:off x="822960" y="2980944"/>
+            <a:ext cx="2224964" cy="502920"/>
+          </a:xfrm>
+          <a:prstGeom prst="rect">
+            <a:avLst/>
+          </a:prstGeom>
+          <a:noFill/>
+          <a:ln/>
+        </p:spPr>
+        <p:txBody>
+          <a:bodyPr wrap="square" lIns="0" tIns="0" rIns="0" bIns="0" rtlCol="0" anchor="t"/>
+          <a:lstStyle/>
+          <a:p>
+            <a:pPr indent="0" marL="0">
+              <a:buNone/>
+            </a:pPr>
+            <a:r>
+              <a:rPr lang="en-US" sz="1200" dirty="0">
+                <a:solidFill>
+                  <a:srgbClr val="4E5D6A"/>
+                </a:solidFill>
+                <a:latin typeface="Calibri" pitchFamily="34" charset="0"/>
+                <a:ea typeface="Calibri" pitchFamily="34" charset="-122"/>
+                <a:cs typeface="Calibri" pitchFamily="34" charset="-120"/>
+              </a:rPr>
+              <a:t>qty, price and date fields matched the parsers on all 35 PDFs</a:t>
+            </a:r>
+            <a:endParaRPr lang="en-US" sz="1200" dirty="0"/>
+          </a:p>
+        </p:txBody>
+      </p:sp>
+      <p:sp>
+        <p:nvSpPr>
+          <p:cNvPr id="10" name="Text 8"/>
+          <p:cNvSpPr txBox="1"/>
+          <p:nvPr/>
+        </p:nvSpPr>
+        <p:spPr>
+          <a:xfrm>
+            <a:off x="3230804" y="2377440"/>
+            <a:ext cx="2407844" cy="594360"/>
+          </a:xfrm>
+          <a:prstGeom prst="rect">
+            <a:avLst/>
+          </a:prstGeom>
+          <a:noFill/>
+          <a:ln/>
+        </p:spPr>
+        <p:txBody>
+          <a:bodyPr wrap="square" lIns="0" tIns="0" rIns="0" bIns="0" rtlCol="0" anchor="ctr"/>
+          <a:lstStyle/>
+          <a:p>
+            <a:pPr indent="0" marL="0">
+              <a:buNone/>
+            </a:pPr>
+            <a:r>
+              <a:rPr lang="en-US" sz="2600" b="1" dirty="0">
+                <a:solidFill>
+                  <a:srgbClr val="2E7D4F"/>
+                </a:solidFill>
+                <a:latin typeface="Cambria" pitchFamily="34" charset="0"/>
+                <a:ea typeface="Cambria" pitchFamily="34" charset="-122"/>
+                <a:cs typeface="Cambria" pitchFamily="34" charset="-120"/>
+              </a:rPr>
+              <a:t>44 / 44</a:t>
+            </a:r>
+            <a:endParaRPr lang="en-US" sz="2600" dirty="0"/>
+          </a:p>
+        </p:txBody>
+      </p:sp>
+      <p:sp>
+        <p:nvSpPr>
+          <p:cNvPr id="11" name="Text 9"/>
+          <p:cNvSpPr txBox="1"/>
+          <p:nvPr/>
+        </p:nvSpPr>
+        <p:spPr>
+          <a:xfrm>
+            <a:off x="3230804" y="2980944"/>
+            <a:ext cx="2224964" cy="502920"/>
+          </a:xfrm>
+          <a:prstGeom prst="rect">
+            <a:avLst/>
+          </a:prstGeom>
+          <a:noFill/>
+          <a:ln/>
+        </p:spPr>
+        <p:txBody>
+          <a:bodyPr wrap="square" lIns="0" tIns="0" rIns="0" bIns="0" rtlCol="0" anchor="t"/>
+          <a:lstStyle/>
+          <a:p>
+            <a:pPr indent="0" marL="0">
+              <a:buNone/>
+            </a:pPr>
+            <a:r>
+              <a:rPr lang="en-US" sz="1200" dirty="0">
+                <a:solidFill>
+                  <a:srgbClr val="4E5D6A"/>
+                </a:solidFill>
+                <a:latin typeface="Calibri" pitchFamily="34" charset="0"/>
+                <a:ea typeface="Calibri" pitchFamily="34" charset="-122"/>
+                <a:cs typeface="Calibri" pitchFamily="34" charset="-120"/>
+              </a:rPr>
+              <a:t>lines identical to the OCR run with no Tesseract installed</a:t>
+            </a:r>
+            <a:endParaRPr lang="en-US" sz="1200" dirty="0"/>
+          </a:p>
+        </p:txBody>
+      </p:sp>
+      <p:sp>
+        <p:nvSpPr>
+          <p:cNvPr id="12" name="Shape 10"/>
+          <p:cNvSpPr/>
+          <p:nvPr/>
+        </p:nvSpPr>
+        <p:spPr>
+          <a:xfrm>
+            <a:off x="6278728" y="1463040"/>
+            <a:ext cx="5364328" cy="2331720"/>
+          </a:xfrm>
+          <a:prstGeom prst="roundRect">
+            <a:avLst>
+              <a:gd name="adj" fmla="val 3137"/>
+            </a:avLst>
+          </a:prstGeom>
+          <a:solidFill>
+            <a:srgbClr val="EEF2F5"/>
+          </a:solidFill>
+          <a:ln w="12700">
+            <a:solidFill>
+              <a:srgbClr val="EEF2F5"/>
+            </a:solidFill>
+            <a:prstDash val="solid"/>
+          </a:ln>
+        </p:spPr>
+      </p:sp>
+      <p:sp>
+        <p:nvSpPr>
+          <p:cNvPr id="13" name="Text 11"/>
+          <p:cNvSpPr txBox="1"/>
+          <p:nvPr/>
+        </p:nvSpPr>
+        <p:spPr>
+          <a:xfrm>
+            <a:off x="6553048" y="1600200"/>
+            <a:ext cx="4815688" cy="274320"/>
+          </a:xfrm>
+          <a:prstGeom prst="rect">
+            <a:avLst/>
+          </a:prstGeom>
+          <a:noFill/>
+          <a:ln/>
+        </p:spPr>
+        <p:txBody>
+          <a:bodyPr wrap="square" lIns="0" tIns="0" rIns="0" bIns="0" rtlCol="0" anchor="ctr"/>
+          <a:lstStyle/>
+          <a:p>
+            <a:pPr indent="0" marL="0">
+              <a:buNone/>
+            </a:pPr>
+            <a:r>
+              <a:rPr lang="en-US" sz="1100" b="1" spc="200" kern="0" dirty="0">
+                <a:solidFill>
+                  <a:srgbClr val="D9622B"/>
+                </a:solidFill>
+                <a:latin typeface="Calibri" pitchFamily="34" charset="0"/>
+                <a:ea typeface="Calibri" pitchFamily="34" charset="-122"/>
+                <a:cs typeface="Calibri" pitchFamily="34" charset="-120"/>
+              </a:rPr>
+              <a:t>TASK 2 · VENDOR Q&amp;A</a:t>
+            </a:r>
+            <a:endParaRPr lang="en-US" sz="1100" dirty="0"/>
+          </a:p>
+        </p:txBody>
+      </p:sp>
+      <p:sp>
+        <p:nvSpPr>
+          <p:cNvPr id="14" name="Text 12"/>
+          <p:cNvSpPr txBox="1"/>
+          <p:nvPr/>
+        </p:nvSpPr>
+        <p:spPr>
+          <a:xfrm>
+            <a:off x="6553048" y="1874520"/>
+            <a:ext cx="4815688" cy="365760"/>
+          </a:xfrm>
+          <a:prstGeom prst="rect">
+            <a:avLst/>
+          </a:prstGeom>
+          <a:noFill/>
+          <a:ln/>
+        </p:spPr>
+        <p:txBody>
+          <a:bodyPr wrap="square" lIns="0" tIns="0" rIns="0" bIns="0" rtlCol="0" anchor="ctr"/>
+          <a:lstStyle/>
+          <a:p>
+            <a:pPr indent="0" marL="0">
+              <a:buNone/>
+            </a:pPr>
+            <a:r>
+              <a:rPr lang="en-US" sz="1700" b="1" dirty="0">
+                <a:solidFill>
+                  <a:srgbClr val="1F2A33"/>
+                </a:solidFill>
+                <a:latin typeface="Cambria" pitchFamily="34" charset="0"/>
+                <a:ea typeface="Cambria" pitchFamily="34" charset="-122"/>
+                <a:cs typeface="Cambria" pitchFamily="34" charset="-120"/>
+              </a:rPr>
+              <a:t>Grounded, plain-English answers</a:t>
+            </a:r>
+            <a:endParaRPr lang="en-US" sz="1700" dirty="0"/>
+          </a:p>
+        </p:txBody>
+      </p:sp>
+      <p:sp>
+        <p:nvSpPr>
+          <p:cNvPr id="15" name="Text 13"/>
+          <p:cNvSpPr txBox="1"/>
+          <p:nvPr/>
+        </p:nvSpPr>
+        <p:spPr>
+          <a:xfrm>
+            <a:off x="6553048" y="2377440"/>
+            <a:ext cx="2407844" cy="594360"/>
+          </a:xfrm>
+          <a:prstGeom prst="rect">
+            <a:avLst/>
+          </a:prstGeom>
+          <a:noFill/>
+          <a:ln/>
+        </p:spPr>
+        <p:txBody>
+          <a:bodyPr wrap="square" lIns="0" tIns="0" rIns="0" bIns="0" rtlCol="0" anchor="ctr"/>
+          <a:lstStyle/>
+          <a:p>
+            <a:pPr indent="0" marL="0">
+              <a:buNone/>
+            </a:pPr>
+            <a:r>
+              <a:rPr lang="en-US" sz="2600" b="1" dirty="0">
+                <a:solidFill>
+                  <a:srgbClr val="2E7D4F"/>
+                </a:solidFill>
+                <a:latin typeface="Cambria" pitchFamily="34" charset="0"/>
+                <a:ea typeface="Cambria" pitchFamily="34" charset="-122"/>
+                <a:cs typeface="Cambria" pitchFamily="34" charset="-120"/>
+              </a:rPr>
+              <a:t>100%</a:t>
+            </a:r>
+            <a:endParaRPr lang="en-US" sz="2600" dirty="0"/>
+          </a:p>
+        </p:txBody>
+      </p:sp>
+      <p:sp>
+        <p:nvSpPr>
+          <p:cNvPr id="16" name="Text 14"/>
+          <p:cNvSpPr txBox="1"/>
+          <p:nvPr/>
+        </p:nvSpPr>
+        <p:spPr>
+          <a:xfrm>
+            <a:off x="6553048" y="2980944"/>
+            <a:ext cx="2224964" cy="502920"/>
+          </a:xfrm>
+          <a:prstGeom prst="rect">
+            <a:avLst/>
+          </a:prstGeom>
+          <a:noFill/>
+          <a:ln/>
+        </p:spPr>
+        <p:txBody>
+          <a:bodyPr wrap="square" lIns="0" tIns="0" rIns="0" bIns="0" rtlCol="0" anchor="t"/>
+          <a:lstStyle/>
+          <a:p>
+            <a:pPr indent="0" marL="0">
+              <a:buNone/>
+            </a:pPr>
+            <a:r>
+              <a:rPr lang="en-US" sz="1200" dirty="0">
+                <a:solidFill>
+                  <a:srgbClr val="4E5D6A"/>
+                </a:solidFill>
+                <a:latin typeface="Calibri" pitchFamily="34" charset="0"/>
+                <a:ea typeface="Calibri" pitchFamily="34" charset="-122"/>
+                <a:cs typeface="Calibri" pitchFamily="34" charset="-120"/>
+              </a:rPr>
+              <a:t>of quoted figures verified against an independent recomputation</a:t>
+            </a:r>
+            <a:endParaRPr lang="en-US" sz="1200" dirty="0"/>
+          </a:p>
+        </p:txBody>
+      </p:sp>
+      <p:sp>
+        <p:nvSpPr>
+          <p:cNvPr id="17" name="Text 15"/>
+          <p:cNvSpPr txBox="1"/>
+          <p:nvPr/>
+        </p:nvSpPr>
+        <p:spPr>
+          <a:xfrm>
+            <a:off x="8960891" y="2377440"/>
+            <a:ext cx="2407844" cy="594360"/>
+          </a:xfrm>
+          <a:prstGeom prst="rect">
+            <a:avLst/>
+          </a:prstGeom>
+          <a:noFill/>
+          <a:ln/>
+        </p:spPr>
+        <p:txBody>
+          <a:bodyPr wrap="square" lIns="0" tIns="0" rIns="0" bIns="0" rtlCol="0" anchor="ctr"/>
+          <a:lstStyle/>
+          <a:p>
+            <a:pPr indent="0" marL="0">
+              <a:buNone/>
+            </a:pPr>
+            <a:r>
+              <a:rPr lang="en-US" sz="2600" b="1" dirty="0">
+                <a:solidFill>
+                  <a:srgbClr val="2E7D4F"/>
+                </a:solidFill>
+                <a:latin typeface="Cambria" pitchFamily="34" charset="0"/>
+                <a:ea typeface="Cambria" pitchFamily="34" charset="-122"/>
+                <a:cs typeface="Cambria" pitchFamily="34" charset="-120"/>
+              </a:rPr>
+              <a:t>0</a:t>
+            </a:r>
+            <a:endParaRPr lang="en-US" sz="2600" dirty="0"/>
+          </a:p>
+        </p:txBody>
+      </p:sp>
+      <p:sp>
+        <p:nvSpPr>
+          <p:cNvPr id="18" name="Text 16"/>
+          <p:cNvSpPr txBox="1"/>
+          <p:nvPr/>
+        </p:nvSpPr>
+        <p:spPr>
+          <a:xfrm>
+            <a:off x="8960891" y="2980944"/>
+            <a:ext cx="2224964" cy="502920"/>
+          </a:xfrm>
+          <a:prstGeom prst="rect">
+            <a:avLst/>
+          </a:prstGeom>
+          <a:noFill/>
+          <a:ln/>
+        </p:spPr>
+        <p:txBody>
+          <a:bodyPr wrap="square" lIns="0" tIns="0" rIns="0" bIns="0" rtlCol="0" anchor="t"/>
+          <a:lstStyle/>
+          <a:p>
+            <a:pPr indent="0" marL="0">
+              <a:buNone/>
+            </a:pPr>
+            <a:r>
+              <a:rPr lang="en-US" sz="1200" dirty="0">
+                <a:solidFill>
+                  <a:srgbClr val="4E5D6A"/>
+                </a:solidFill>
+                <a:latin typeface="Calibri" pitchFamily="34" charset="0"/>
+                <a:ea typeface="Calibri" pitchFamily="34" charset="-122"/>
+                <a:cs typeface="Calibri" pitchFamily="34" charset="-120"/>
+              </a:rPr>
+              <a:t>causal claims: it said downtime is not in the data</a:t>
+            </a:r>
+            <a:endParaRPr lang="en-US" sz="1200" dirty="0"/>
+          </a:p>
+        </p:txBody>
+      </p:sp>
+      <p:pic>
+        <p:nvPicPr>
+          <p:cNvPr id="19" name="Image 0" descr="/home/user/BeaconFasteners/Beacon Superday-Submission/presentation/assets/ai_chat.png">    </p:cNvPr>
+          <p:cNvPicPr>
+            <a:picLocks noChangeAspect="1"/>
+          </p:cNvPicPr>
+          <p:nvPr/>
+        </p:nvPicPr>
+        <p:blipFill>
+          <a:blip r:embed="rId1"/>
+          <a:stretch>
+            <a:fillRect/>
+          </a:stretch>
+        </p:blipFill>
+        <p:spPr>
+          <a:xfrm>
+            <a:off x="1655629" y="4023360"/>
+            <a:ext cx="8880438" cy="1783080"/>
+          </a:xfrm>
+          <a:prstGeom prst="rect">
+            <a:avLst/>
+          </a:prstGeom>
+          <a:effectLst>
+            <a:outerShdw sx="100000" sy="100000" kx="0" ky="0" algn="bl" rotWithShape="0" blurRad="76200" dist="25400" dir="5400000">
+              <a:srgbClr val="000000">
+                <a:alpha val="20000"/>
+              </a:srgbClr>
+            </a:outerShdw>
+          </a:effectLst>
+        </p:spPr>
+      </p:pic>
+      <p:sp>
+        <p:nvSpPr>
+          <p:cNvPr id="20" name="Text 17"/>
+          <p:cNvSpPr txBox="1"/>
+          <p:nvPr/>
+        </p:nvSpPr>
+        <p:spPr>
+          <a:xfrm>
+            <a:off x="548640" y="5897880"/>
+            <a:ext cx="11094415" cy="320040"/>
+          </a:xfrm>
+          <a:prstGeom prst="rect">
+            <a:avLst/>
+          </a:prstGeom>
+          <a:noFill/>
+          <a:ln/>
+        </p:spPr>
+        <p:txBody>
+          <a:bodyPr wrap="square" lIns="0" tIns="0" rIns="0" bIns="0" rtlCol="0" anchor="ctr"/>
+          <a:lstStyle/>
+          <a:p>
+            <a:pPr indent="0" marL="0">
+              <a:buNone/>
+            </a:pPr>
+            <a:r>
+              <a:rPr lang="en-US" sz="1200" i="1" dirty="0">
+                <a:solidFill>
+                  <a:srgbClr val="4E5D6A"/>
+                </a:solidFill>
+                <a:latin typeface="Calibri" pitchFamily="34" charset="0"/>
+                <a:ea typeface="Calibri" pitchFamily="34" charset="-122"/>
+                <a:cs typeface="Calibri" pitchFamily="34" charset="-120"/>
+              </a:rPr>
+              <a:t>Sees only cleaned tables · quotes every figure · totals precomputed · AI-read items go to review · off without a key</a:t>
+            </a:r>
+            <a:endParaRPr lang="en-US" sz="1200" dirty="0"/>
+          </a:p>
+        </p:txBody>
+      </p:sp>
+    </p:spTree>
+  </p:cSld>
+  <p:clrMapOvr>
+    <a:masterClrMapping/>
+  </p:clrMapOvr>
+</p:sld>
+</file>
+
+<file path=ppt/slides/slide16.xml><?xml version="1.0" encoding="utf-8"?>
+<p:sld xmlns:a="http://schemas.openxmlformats.org/drawingml/2006/main" xmlns:r="http://schemas.openxmlformats.org/officeDocument/2006/relationships" xmlns:p="http://schemas.openxmlformats.org/presentationml/2006/main">
+  <p:cSld name="Slide 16">
+    <p:bg>
+      <p:bgPr>
+        <a:solidFill>
+          <a:srgbClr val="FFFFFF"/>
+        </a:solidFill>
+      </p:bgPr>
+    </p:bg>
+    <p:spTree>
+      <p:nvGrpSpPr>
+        <p:cNvPr id="1" name=""/>
+        <p:cNvGrpSpPr/>
+        <p:nvPr/>
+      </p:nvGrpSpPr>
+      <p:grpSpPr>
+        <a:xfrm>
+          <a:off x="0" y="0"/>
+          <a:ext cx="0" cy="0"/>
+          <a:chOff x="0" y="0"/>
+          <a:chExt cx="0" cy="0"/>
+        </a:xfrm>
+      </p:grpSpPr>
+      <p:sp>
+        <p:nvSpPr>
+          <p:cNvPr id="2" name="Text 0"/>
+          <p:cNvSpPr txBox="1"/>
+          <p:nvPr/>
+        </p:nvSpPr>
+        <p:spPr>
+          <a:xfrm>
+            <a:off x="548640" y="320040"/>
+            <a:ext cx="8229600" cy="274320"/>
+          </a:xfrm>
+          <a:prstGeom prst="rect">
+            <a:avLst/>
+          </a:prstGeom>
+          <a:noFill/>
+          <a:ln/>
+        </p:spPr>
+        <p:txBody>
+          <a:bodyPr wrap="square" lIns="0" tIns="0" rIns="0" bIns="0" rtlCol="0" anchor="ctr"/>
+          <a:lstStyle/>
+          <a:p>
+            <a:pPr indent="0" marL="0">
+              <a:buNone/>
+            </a:pPr>
+            <a:r>
+              <a:rPr lang="en-US" sz="1200" b="1" spc="200" kern="0" dirty="0">
+                <a:solidFill>
+                  <a:srgbClr val="D9622B"/>
+                </a:solidFill>
+                <a:latin typeface="Calibri" pitchFamily="34" charset="0"/>
+                <a:ea typeface="Calibri" pitchFamily="34" charset="-122"/>
+                <a:cs typeface="Calibri" pitchFamily="34" charset="-120"/>
+              </a:rPr>
+              <a:t>TASK 2 · TOWARD THE PART-NUMBER CLEANUP</a:t>
+            </a:r>
+            <a:endParaRPr lang="en-US" sz="1200" dirty="0"/>
+          </a:p>
+        </p:txBody>
+      </p:sp>
+      <p:sp>
+        <p:nvSpPr>
+          <p:cNvPr id="3" name="Text 1"/>
+          <p:cNvSpPr txBox="1"/>
+          <p:nvPr/>
+        </p:nvSpPr>
+        <p:spPr>
+          <a:xfrm>
+            <a:off x="548640" y="594360"/>
+            <a:ext cx="11094415" cy="685800"/>
+          </a:xfrm>
+          <a:prstGeom prst="rect">
+            <a:avLst/>
+          </a:prstGeom>
+          <a:noFill/>
+          <a:ln/>
+        </p:spPr>
+        <p:txBody>
+          <a:bodyPr wrap="square" lIns="0" tIns="0" rIns="0" bIns="0" rtlCol="0" anchor="t"/>
+          <a:lstStyle/>
+          <a:p>
+            <a:pPr indent="0" marL="0">
+              <a:buNone/>
+            </a:pPr>
+            <a:r>
+              <a:rPr lang="en-US" sz="2400" b="1" dirty="0">
+                <a:solidFill>
+                  <a:srgbClr val="1F2A33"/>
+                </a:solidFill>
+                <a:latin typeface="Cambria" pitchFamily="34" charset="0"/>
+                <a:ea typeface="Cambria" pitchFamily="34" charset="-122"/>
+                <a:cs typeface="Cambria" pitchFamily="34" charset="-120"/>
+              </a:rPr>
+              <a:t>The crosswalk grows from daily work and seeds the part master</a:t>
+            </a:r>
+            <a:endParaRPr lang="en-US" sz="2400" dirty="0"/>
+          </a:p>
+        </p:txBody>
+      </p:sp>
+      <p:sp>
+        <p:nvSpPr>
+          <p:cNvPr id="4" name="Text 2"/>
+          <p:cNvSpPr txBox="1"/>
+          <p:nvPr/>
+        </p:nvSpPr>
+        <p:spPr>
+          <a:xfrm>
+            <a:off x="7985455" y="6473952"/>
+            <a:ext cx="3657600" cy="228600"/>
+          </a:xfrm>
+          <a:prstGeom prst="rect">
+            <a:avLst/>
+          </a:prstGeom>
+          <a:noFill/>
+          <a:ln/>
+        </p:spPr>
+        <p:txBody>
+          <a:bodyPr wrap="square" lIns="0" tIns="0" rIns="0" bIns="0" rtlCol="0" anchor="ctr"/>
+          <a:lstStyle/>
+          <a:p>
+            <a:pPr algn="r" indent="0" marL="0">
+              <a:buNone/>
+            </a:pPr>
+            <a:r>
+              <a:rPr lang="en-US" sz="900" dirty="0">
+                <a:solidFill>
+                  <a:srgbClr val="7D8B97"/>
+                </a:solidFill>
+                <a:latin typeface="Calibri" pitchFamily="34" charset="0"/>
+                <a:ea typeface="Calibri" pitchFamily="34" charset="-122"/>
+                <a:cs typeface="Calibri" pitchFamily="34" charset="-120"/>
+              </a:rPr>
+              <a:t>Beacon Fasteners · FDE case   16</a:t>
+            </a:r>
+            <a:endParaRPr lang="en-US" sz="900" dirty="0"/>
+          </a:p>
+        </p:txBody>
+      </p:sp>
       <p:graphicFrame>
         <p:nvGraphicFramePr>
-          <p:cNvPr id="16" name="Table 0"/>
+          <p:cNvPr id="17" name="Table 0"/>
           <p:cNvGraphicFramePr>
             <a:graphicFrameLocks noGrp="1"/>
           </p:cNvGraphicFramePr>
@@ -14212,1169 +15042,6 @@
 </p:sld>
 </file>
 
-<file path=ppt/slides/slide16.xml><?xml version="1.0" encoding="utf-8"?>
-<p:sld xmlns:a="http://schemas.openxmlformats.org/drawingml/2006/main" xmlns:r="http://schemas.openxmlformats.org/officeDocument/2006/relationships" xmlns:p="http://schemas.openxmlformats.org/presentationml/2006/main">
-  <p:cSld name="Slide 16">
-    <p:bg>
-      <p:bgPr>
-        <a:solidFill>
-          <a:srgbClr val="FFFFFF"/>
-        </a:solidFill>
-      </p:bgPr>
-    </p:bg>
-    <p:spTree>
-      <p:nvGrpSpPr>
-        <p:cNvPr id="1" name=""/>
-        <p:cNvGrpSpPr/>
-        <p:nvPr/>
-      </p:nvGrpSpPr>
-      <p:grpSpPr>
-        <a:xfrm>
-          <a:off x="0" y="0"/>
-          <a:ext cx="0" cy="0"/>
-          <a:chOff x="0" y="0"/>
-          <a:chExt cx="0" cy="0"/>
-        </a:xfrm>
-      </p:grpSpPr>
-      <p:sp>
-        <p:nvSpPr>
-          <p:cNvPr id="2" name="Text 0"/>
-          <p:cNvSpPr txBox="1"/>
-          <p:nvPr/>
-        </p:nvSpPr>
-        <p:spPr>
-          <a:xfrm>
-            <a:off x="548640" y="320040"/>
-            <a:ext cx="8229600" cy="274320"/>
-          </a:xfrm>
-          <a:prstGeom prst="rect">
-            <a:avLst/>
-          </a:prstGeom>
-          <a:noFill/>
-          <a:ln/>
-        </p:spPr>
-        <p:txBody>
-          <a:bodyPr wrap="square" lIns="0" tIns="0" rIns="0" bIns="0" rtlCol="0" anchor="ctr"/>
-          <a:lstStyle/>
-          <a:p>
-            <a:pPr indent="0" marL="0">
-              <a:buNone/>
-            </a:pPr>
-            <a:r>
-              <a:rPr lang="en-US" sz="1200" b="1" spc="200" kern="0" dirty="0">
-                <a:solidFill>
-                  <a:srgbClr val="D9622B"/>
-                </a:solidFill>
-                <a:latin typeface="Calibri" pitchFamily="34" charset="0"/>
-                <a:ea typeface="Calibri" pitchFamily="34" charset="-122"/>
-                <a:cs typeface="Calibri" pitchFamily="34" charset="-120"/>
-              </a:rPr>
-              <a:t>SCOPE</a:t>
-            </a:r>
-            <a:endParaRPr lang="en-US" sz="1200" dirty="0"/>
-          </a:p>
-        </p:txBody>
-      </p:sp>
-      <p:sp>
-        <p:nvSpPr>
-          <p:cNvPr id="3" name="Text 1"/>
-          <p:cNvSpPr txBox="1"/>
-          <p:nvPr/>
-        </p:nvSpPr>
-        <p:spPr>
-          <a:xfrm>
-            <a:off x="548640" y="594360"/>
-            <a:ext cx="11094415" cy="685800"/>
-          </a:xfrm>
-          <a:prstGeom prst="rect">
-            <a:avLst/>
-          </a:prstGeom>
-          <a:noFill/>
-          <a:ln/>
-        </p:spPr>
-        <p:txBody>
-          <a:bodyPr wrap="square" lIns="0" tIns="0" rIns="0" bIns="0" rtlCol="0" anchor="t"/>
-          <a:lstStyle/>
-          <a:p>
-            <a:pPr indent="0" marL="0">
-              <a:buNone/>
-            </a:pPr>
-            <a:r>
-              <a:rPr lang="en-US" sz="2400" b="1" dirty="0">
-                <a:solidFill>
-                  <a:srgbClr val="1F2A33"/>
-                </a:solidFill>
-                <a:latin typeface="Cambria" pitchFamily="34" charset="0"/>
-                <a:ea typeface="Cambria" pitchFamily="34" charset="-122"/>
-                <a:cs typeface="Cambria" pitchFamily="34" charset="-120"/>
-              </a:rPr>
-              <a:t>What I deliberately did not build, and why</a:t>
-            </a:r>
-            <a:endParaRPr lang="en-US" sz="2400" dirty="0"/>
-          </a:p>
-        </p:txBody>
-      </p:sp>
-      <p:sp>
-        <p:nvSpPr>
-          <p:cNvPr id="4" name="Text 2"/>
-          <p:cNvSpPr txBox="1"/>
-          <p:nvPr/>
-        </p:nvSpPr>
-        <p:spPr>
-          <a:xfrm>
-            <a:off x="7985455" y="6473952"/>
-            <a:ext cx="3657600" cy="228600"/>
-          </a:xfrm>
-          <a:prstGeom prst="rect">
-            <a:avLst/>
-          </a:prstGeom>
-          <a:noFill/>
-          <a:ln/>
-        </p:spPr>
-        <p:txBody>
-          <a:bodyPr wrap="square" lIns="0" tIns="0" rIns="0" bIns="0" rtlCol="0" anchor="ctr"/>
-          <a:lstStyle/>
-          <a:p>
-            <a:pPr algn="r" indent="0" marL="0">
-              <a:buNone/>
-            </a:pPr>
-            <a:r>
-              <a:rPr lang="en-US" sz="900" dirty="0">
-                <a:solidFill>
-                  <a:srgbClr val="7D8B97"/>
-                </a:solidFill>
-                <a:latin typeface="Calibri" pitchFamily="34" charset="0"/>
-                <a:ea typeface="Calibri" pitchFamily="34" charset="-122"/>
-                <a:cs typeface="Calibri" pitchFamily="34" charset="-120"/>
-              </a:rPr>
-              <a:t>Beacon Fasteners · FDE case   16</a:t>
-            </a:r>
-            <a:endParaRPr lang="en-US" sz="900" dirty="0"/>
-          </a:p>
-        </p:txBody>
-      </p:sp>
-      <p:sp>
-        <p:nvSpPr>
-          <p:cNvPr id="5" name="Shape 3"/>
-          <p:cNvSpPr/>
-          <p:nvPr/>
-        </p:nvSpPr>
-        <p:spPr>
-          <a:xfrm>
-            <a:off x="548640" y="1554480"/>
-            <a:ext cx="3515258" cy="2148840"/>
-          </a:xfrm>
-          <a:prstGeom prst="roundRect">
-            <a:avLst>
-              <a:gd name="adj" fmla="val 3404"/>
-            </a:avLst>
-          </a:prstGeom>
-          <a:solidFill>
-            <a:srgbClr val="EEF2F5"/>
-          </a:solidFill>
-          <a:ln w="12700">
-            <a:solidFill>
-              <a:srgbClr val="EEF2F5"/>
-            </a:solidFill>
-            <a:prstDash val="solid"/>
-          </a:ln>
-        </p:spPr>
-      </p:sp>
-      <p:sp>
-        <p:nvSpPr>
-          <p:cNvPr id="6" name="Shape 4"/>
-          <p:cNvSpPr/>
-          <p:nvPr/>
-        </p:nvSpPr>
-        <p:spPr>
-          <a:xfrm>
-            <a:off x="777240" y="1810512"/>
-            <a:ext cx="329184" cy="329184"/>
-          </a:xfrm>
-          <a:prstGeom prst="ellipse">
-            <a:avLst/>
-          </a:prstGeom>
-          <a:solidFill>
-            <a:srgbClr val="FFFFFF"/>
-          </a:solidFill>
-          <a:ln w="19050">
-            <a:solidFill>
-              <a:srgbClr val="7D8B97"/>
-            </a:solidFill>
-            <a:prstDash val="solid"/>
-          </a:ln>
-        </p:spPr>
-      </p:sp>
-      <p:sp>
-        <p:nvSpPr>
-          <p:cNvPr id="7" name="Text 5"/>
-          <p:cNvSpPr txBox="1"/>
-          <p:nvPr/>
-        </p:nvSpPr>
-        <p:spPr>
-          <a:xfrm>
-            <a:off x="777240" y="1810512"/>
-            <a:ext cx="329184" cy="329184"/>
-          </a:xfrm>
-          <a:prstGeom prst="rect">
-            <a:avLst/>
-          </a:prstGeom>
-          <a:noFill/>
-          <a:ln/>
-        </p:spPr>
-        <p:txBody>
-          <a:bodyPr wrap="square" lIns="0" tIns="0" rIns="0" bIns="0" rtlCol="0" anchor="ctr"/>
-          <a:lstStyle/>
-          <a:p>
-            <a:pPr algn="ctr" indent="0" marL="0">
-              <a:buNone/>
-            </a:pPr>
-            <a:r>
-              <a:rPr lang="en-US" sz="1300" b="1" dirty="0">
-                <a:solidFill>
-                  <a:srgbClr val="7D8B97"/>
-                </a:solidFill>
-                <a:latin typeface="Calibri" pitchFamily="34" charset="0"/>
-                <a:ea typeface="Calibri" pitchFamily="34" charset="-122"/>
-                <a:cs typeface="Calibri" pitchFamily="34" charset="-120"/>
-              </a:rPr>
-              <a:t>✕</a:t>
-            </a:r>
-            <a:endParaRPr lang="en-US" sz="1300" dirty="0"/>
-          </a:p>
-        </p:txBody>
-      </p:sp>
-      <p:sp>
-        <p:nvSpPr>
-          <p:cNvPr id="8" name="Text 6"/>
-          <p:cNvSpPr txBox="1"/>
-          <p:nvPr/>
-        </p:nvSpPr>
-        <p:spPr>
-          <a:xfrm>
-            <a:off x="1234440" y="1755648"/>
-            <a:ext cx="2646578" cy="457200"/>
-          </a:xfrm>
-          <a:prstGeom prst="rect">
-            <a:avLst/>
-          </a:prstGeom>
-          <a:noFill/>
-          <a:ln/>
-        </p:spPr>
-        <p:txBody>
-          <a:bodyPr wrap="square" lIns="0" tIns="0" rIns="0" bIns="0" rtlCol="0" anchor="ctr"/>
-          <a:lstStyle/>
-          <a:p>
-            <a:pPr indent="0" marL="0">
-              <a:buNone/>
-            </a:pPr>
-            <a:r>
-              <a:rPr lang="en-US" sz="1500" b="1" dirty="0">
-                <a:solidFill>
-                  <a:srgbClr val="1F2A33"/>
-                </a:solidFill>
-                <a:latin typeface="Calibri" pitchFamily="34" charset="0"/>
-                <a:ea typeface="Calibri" pitchFamily="34" charset="-122"/>
-                <a:cs typeface="Calibri" pitchFamily="34" charset="-120"/>
-              </a:rPr>
-              <a:t>ERP integration or write-back</a:t>
-            </a:r>
-            <a:endParaRPr lang="en-US" sz="1500" dirty="0"/>
-          </a:p>
-        </p:txBody>
-      </p:sp>
-      <p:sp>
-        <p:nvSpPr>
-          <p:cNvPr id="9" name="Text 7"/>
-          <p:cNvSpPr txBox="1"/>
-          <p:nvPr/>
-        </p:nvSpPr>
-        <p:spPr>
-          <a:xfrm>
-            <a:off x="777240" y="2377440"/>
-            <a:ext cx="3058058" cy="1188720"/>
-          </a:xfrm>
-          <a:prstGeom prst="rect">
-            <a:avLst/>
-          </a:prstGeom>
-          <a:noFill/>
-          <a:ln/>
-        </p:spPr>
-        <p:txBody>
-          <a:bodyPr wrap="square" lIns="0" tIns="0" rIns="0" bIns="0" rtlCol="0" anchor="t"/>
-          <a:lstStyle/>
-          <a:p>
-            <a:pPr indent="0" marL="0">
-              <a:buNone/>
-            </a:pPr>
-            <a:r>
-              <a:rPr lang="en-US" sz="1300" dirty="0">
-                <a:solidFill>
-                  <a:srgbClr val="4E5D6A"/>
-                </a:solidFill>
-                <a:latin typeface="Calibri" pitchFamily="34" charset="0"/>
-                <a:ea typeface="Calibri" pitchFamily="34" charset="-122"/>
-                <a:cs typeface="Calibri" pitchFamily="34" charset="-120"/>
-              </a:rPr>
-              <a:t>No API access, and a wrong write is expensive. The CSV export is the contract; integration comes after trust.</a:t>
-            </a:r>
-            <a:endParaRPr lang="en-US" sz="1300" dirty="0"/>
-          </a:p>
-        </p:txBody>
-      </p:sp>
-      <p:sp>
-        <p:nvSpPr>
-          <p:cNvPr id="10" name="Shape 8"/>
-          <p:cNvSpPr/>
-          <p:nvPr/>
-        </p:nvSpPr>
-        <p:spPr>
-          <a:xfrm>
-            <a:off x="4338218" y="1554480"/>
-            <a:ext cx="3515258" cy="2148840"/>
-          </a:xfrm>
-          <a:prstGeom prst="roundRect">
-            <a:avLst>
-              <a:gd name="adj" fmla="val 3404"/>
-            </a:avLst>
-          </a:prstGeom>
-          <a:solidFill>
-            <a:srgbClr val="EEF2F5"/>
-          </a:solidFill>
-          <a:ln w="12700">
-            <a:solidFill>
-              <a:srgbClr val="EEF2F5"/>
-            </a:solidFill>
-            <a:prstDash val="solid"/>
-          </a:ln>
-        </p:spPr>
-      </p:sp>
-      <p:sp>
-        <p:nvSpPr>
-          <p:cNvPr id="11" name="Shape 9"/>
-          <p:cNvSpPr/>
-          <p:nvPr/>
-        </p:nvSpPr>
-        <p:spPr>
-          <a:xfrm>
-            <a:off x="4566818" y="1810512"/>
-            <a:ext cx="329184" cy="329184"/>
-          </a:xfrm>
-          <a:prstGeom prst="ellipse">
-            <a:avLst/>
-          </a:prstGeom>
-          <a:solidFill>
-            <a:srgbClr val="FFFFFF"/>
-          </a:solidFill>
-          <a:ln w="19050">
-            <a:solidFill>
-              <a:srgbClr val="7D8B97"/>
-            </a:solidFill>
-            <a:prstDash val="solid"/>
-          </a:ln>
-        </p:spPr>
-      </p:sp>
-      <p:sp>
-        <p:nvSpPr>
-          <p:cNvPr id="12" name="Text 10"/>
-          <p:cNvSpPr txBox="1"/>
-          <p:nvPr/>
-        </p:nvSpPr>
-        <p:spPr>
-          <a:xfrm>
-            <a:off x="4566818" y="1810512"/>
-            <a:ext cx="329184" cy="329184"/>
-          </a:xfrm>
-          <a:prstGeom prst="rect">
-            <a:avLst/>
-          </a:prstGeom>
-          <a:noFill/>
-          <a:ln/>
-        </p:spPr>
-        <p:txBody>
-          <a:bodyPr wrap="square" lIns="0" tIns="0" rIns="0" bIns="0" rtlCol="0" anchor="ctr"/>
-          <a:lstStyle/>
-          <a:p>
-            <a:pPr algn="ctr" indent="0" marL="0">
-              <a:buNone/>
-            </a:pPr>
-            <a:r>
-              <a:rPr lang="en-US" sz="1300" b="1" dirty="0">
-                <a:solidFill>
-                  <a:srgbClr val="7D8B97"/>
-                </a:solidFill>
-                <a:latin typeface="Calibri" pitchFamily="34" charset="0"/>
-                <a:ea typeface="Calibri" pitchFamily="34" charset="-122"/>
-                <a:cs typeface="Calibri" pitchFamily="34" charset="-120"/>
-              </a:rPr>
-              <a:t>✕</a:t>
-            </a:r>
-            <a:endParaRPr lang="en-US" sz="1300" dirty="0"/>
-          </a:p>
-        </p:txBody>
-      </p:sp>
-      <p:sp>
-        <p:nvSpPr>
-          <p:cNvPr id="13" name="Text 11"/>
-          <p:cNvSpPr txBox="1"/>
-          <p:nvPr/>
-        </p:nvSpPr>
-        <p:spPr>
-          <a:xfrm>
-            <a:off x="5024018" y="1755648"/>
-            <a:ext cx="2646578" cy="457200"/>
-          </a:xfrm>
-          <a:prstGeom prst="rect">
-            <a:avLst/>
-          </a:prstGeom>
-          <a:noFill/>
-          <a:ln/>
-        </p:spPr>
-        <p:txBody>
-          <a:bodyPr wrap="square" lIns="0" tIns="0" rIns="0" bIns="0" rtlCol="0" anchor="ctr"/>
-          <a:lstStyle/>
-          <a:p>
-            <a:pPr indent="0" marL="0">
-              <a:buNone/>
-            </a:pPr>
-            <a:r>
-              <a:rPr lang="en-US" sz="1500" b="1" dirty="0">
-                <a:solidFill>
-                  <a:srgbClr val="1F2A33"/>
-                </a:solidFill>
-                <a:latin typeface="Calibri" pitchFamily="34" charset="0"/>
-                <a:ea typeface="Calibri" pitchFamily="34" charset="-122"/>
-                <a:cs typeface="Calibri" pitchFamily="34" charset="-120"/>
-              </a:rPr>
-              <a:t>Auto-emailing vendors</a:t>
-            </a:r>
-            <a:endParaRPr lang="en-US" sz="1500" dirty="0"/>
-          </a:p>
-        </p:txBody>
-      </p:sp>
-      <p:sp>
-        <p:nvSpPr>
-          <p:cNvPr id="14" name="Text 12"/>
-          <p:cNvSpPr txBox="1"/>
-          <p:nvPr/>
-        </p:nvSpPr>
-        <p:spPr>
-          <a:xfrm>
-            <a:off x="4566818" y="2377440"/>
-            <a:ext cx="3058058" cy="1188720"/>
-          </a:xfrm>
-          <a:prstGeom prst="rect">
-            <a:avLst/>
-          </a:prstGeom>
-          <a:noFill/>
-          <a:ln/>
-        </p:spPr>
-        <p:txBody>
-          <a:bodyPr wrap="square" lIns="0" tIns="0" rIns="0" bIns="0" rtlCol="0" anchor="t"/>
-          <a:lstStyle/>
-          <a:p>
-            <a:pPr indent="0" marL="0">
-              <a:buNone/>
-            </a:pPr>
-            <a:r>
-              <a:rPr lang="en-US" sz="1300" dirty="0">
-                <a:solidFill>
-                  <a:srgbClr val="4E5D6A"/>
-                </a:solidFill>
-                <a:latin typeface="Calibri" pitchFamily="34" charset="0"/>
-                <a:ea typeface="Calibri" pitchFamily="34" charset="-122"/>
-                <a:cs typeface="Calibri" pitchFamily="34" charset="-120"/>
-              </a:rPr>
-              <a:t>The tool drafts emails; Lisa sends them. Vendor relationships are hers.</a:t>
-            </a:r>
-            <a:endParaRPr lang="en-US" sz="1300" dirty="0"/>
-          </a:p>
-        </p:txBody>
-      </p:sp>
-      <p:sp>
-        <p:nvSpPr>
-          <p:cNvPr id="15" name="Shape 13"/>
-          <p:cNvSpPr/>
-          <p:nvPr/>
-        </p:nvSpPr>
-        <p:spPr>
-          <a:xfrm>
-            <a:off x="8127797" y="1554480"/>
-            <a:ext cx="3515258" cy="2148840"/>
-          </a:xfrm>
-          <a:prstGeom prst="roundRect">
-            <a:avLst>
-              <a:gd name="adj" fmla="val 3404"/>
-            </a:avLst>
-          </a:prstGeom>
-          <a:solidFill>
-            <a:srgbClr val="EEF2F5"/>
-          </a:solidFill>
-          <a:ln w="12700">
-            <a:solidFill>
-              <a:srgbClr val="EEF2F5"/>
-            </a:solidFill>
-            <a:prstDash val="solid"/>
-          </a:ln>
-        </p:spPr>
-      </p:sp>
-      <p:sp>
-        <p:nvSpPr>
-          <p:cNvPr id="16" name="Shape 14"/>
-          <p:cNvSpPr/>
-          <p:nvPr/>
-        </p:nvSpPr>
-        <p:spPr>
-          <a:xfrm>
-            <a:off x="8356397" y="1810512"/>
-            <a:ext cx="329184" cy="329184"/>
-          </a:xfrm>
-          <a:prstGeom prst="ellipse">
-            <a:avLst/>
-          </a:prstGeom>
-          <a:solidFill>
-            <a:srgbClr val="FFFFFF"/>
-          </a:solidFill>
-          <a:ln w="19050">
-            <a:solidFill>
-              <a:srgbClr val="7D8B97"/>
-            </a:solidFill>
-            <a:prstDash val="solid"/>
-          </a:ln>
-        </p:spPr>
-      </p:sp>
-      <p:sp>
-        <p:nvSpPr>
-          <p:cNvPr id="17" name="Text 15"/>
-          <p:cNvSpPr txBox="1"/>
-          <p:nvPr/>
-        </p:nvSpPr>
-        <p:spPr>
-          <a:xfrm>
-            <a:off x="8356397" y="1810512"/>
-            <a:ext cx="329184" cy="329184"/>
-          </a:xfrm>
-          <a:prstGeom prst="rect">
-            <a:avLst/>
-          </a:prstGeom>
-          <a:noFill/>
-          <a:ln/>
-        </p:spPr>
-        <p:txBody>
-          <a:bodyPr wrap="square" lIns="0" tIns="0" rIns="0" bIns="0" rtlCol="0" anchor="ctr"/>
-          <a:lstStyle/>
-          <a:p>
-            <a:pPr algn="ctr" indent="0" marL="0">
-              <a:buNone/>
-            </a:pPr>
-            <a:r>
-              <a:rPr lang="en-US" sz="1300" b="1" dirty="0">
-                <a:solidFill>
-                  <a:srgbClr val="7D8B97"/>
-                </a:solidFill>
-                <a:latin typeface="Calibri" pitchFamily="34" charset="0"/>
-                <a:ea typeface="Calibri" pitchFamily="34" charset="-122"/>
-                <a:cs typeface="Calibri" pitchFamily="34" charset="-120"/>
-              </a:rPr>
-              <a:t>✕</a:t>
-            </a:r>
-            <a:endParaRPr lang="en-US" sz="1300" dirty="0"/>
-          </a:p>
-        </p:txBody>
-      </p:sp>
-      <p:sp>
-        <p:nvSpPr>
-          <p:cNvPr id="18" name="Text 16"/>
-          <p:cNvSpPr txBox="1"/>
-          <p:nvPr/>
-        </p:nvSpPr>
-        <p:spPr>
-          <a:xfrm>
-            <a:off x="8813597" y="1755648"/>
-            <a:ext cx="2646578" cy="457200"/>
-          </a:xfrm>
-          <a:prstGeom prst="rect">
-            <a:avLst/>
-          </a:prstGeom>
-          <a:noFill/>
-          <a:ln/>
-        </p:spPr>
-        <p:txBody>
-          <a:bodyPr wrap="square" lIns="0" tIns="0" rIns="0" bIns="0" rtlCol="0" anchor="ctr"/>
-          <a:lstStyle/>
-          <a:p>
-            <a:pPr indent="0" marL="0">
-              <a:buNone/>
-            </a:pPr>
-            <a:r>
-              <a:rPr lang="en-US" sz="1500" b="1" dirty="0">
-                <a:solidFill>
-                  <a:srgbClr val="1F2A33"/>
-                </a:solidFill>
-                <a:latin typeface="Calibri" pitchFamily="34" charset="0"/>
-                <a:ea typeface="Calibri" pitchFamily="34" charset="-122"/>
-                <a:cs typeface="Calibri" pitchFamily="34" charset="-120"/>
-              </a:rPr>
-              <a:t>LLM-first extraction</a:t>
-            </a:r>
-            <a:endParaRPr lang="en-US" sz="1500" dirty="0"/>
-          </a:p>
-        </p:txBody>
-      </p:sp>
-      <p:sp>
-        <p:nvSpPr>
-          <p:cNvPr id="19" name="Text 17"/>
-          <p:cNvSpPr txBox="1"/>
-          <p:nvPr/>
-        </p:nvSpPr>
-        <p:spPr>
-          <a:xfrm>
-            <a:off x="8356397" y="2377440"/>
-            <a:ext cx="3058058" cy="1188720"/>
-          </a:xfrm>
-          <a:prstGeom prst="rect">
-            <a:avLst/>
-          </a:prstGeom>
-          <a:noFill/>
-          <a:ln/>
-        </p:spPr>
-        <p:txBody>
-          <a:bodyPr wrap="square" lIns="0" tIns="0" rIns="0" bIns="0" rtlCol="0" anchor="t"/>
-          <a:lstStyle/>
-          <a:p>
-            <a:pPr indent="0" marL="0">
-              <a:buNone/>
-            </a:pPr>
-            <a:r>
-              <a:rPr lang="en-US" sz="1300" dirty="0">
-                <a:solidFill>
-                  <a:srgbClr val="4E5D6A"/>
-                </a:solidFill>
-                <a:latin typeface="Calibri" pitchFamily="34" charset="0"/>
-                <a:ea typeface="Calibri" pitchFamily="34" charset="-122"/>
-                <a:cs typeface="Calibri" pitchFamily="34" charset="-120"/>
-              </a:rPr>
-              <a:t>6 stable layouts parse deterministically and auditably. The AI reader is a fallback, off by default.</a:t>
-            </a:r>
-            <a:endParaRPr lang="en-US" sz="1300" dirty="0"/>
-          </a:p>
-        </p:txBody>
-      </p:sp>
-      <p:sp>
-        <p:nvSpPr>
-          <p:cNvPr id="20" name="Shape 18"/>
-          <p:cNvSpPr/>
-          <p:nvPr/>
-        </p:nvSpPr>
-        <p:spPr>
-          <a:xfrm>
-            <a:off x="548640" y="3977640"/>
-            <a:ext cx="3515258" cy="2148840"/>
-          </a:xfrm>
-          <a:prstGeom prst="roundRect">
-            <a:avLst>
-              <a:gd name="adj" fmla="val 3404"/>
-            </a:avLst>
-          </a:prstGeom>
-          <a:solidFill>
-            <a:srgbClr val="EEF2F5"/>
-          </a:solidFill>
-          <a:ln w="12700">
-            <a:solidFill>
-              <a:srgbClr val="EEF2F5"/>
-            </a:solidFill>
-            <a:prstDash val="solid"/>
-          </a:ln>
-        </p:spPr>
-      </p:sp>
-      <p:sp>
-        <p:nvSpPr>
-          <p:cNvPr id="21" name="Shape 19"/>
-          <p:cNvSpPr/>
-          <p:nvPr/>
-        </p:nvSpPr>
-        <p:spPr>
-          <a:xfrm>
-            <a:off x="777240" y="4233672"/>
-            <a:ext cx="329184" cy="329184"/>
-          </a:xfrm>
-          <a:prstGeom prst="ellipse">
-            <a:avLst/>
-          </a:prstGeom>
-          <a:solidFill>
-            <a:srgbClr val="FFFFFF"/>
-          </a:solidFill>
-          <a:ln w="19050">
-            <a:solidFill>
-              <a:srgbClr val="7D8B97"/>
-            </a:solidFill>
-            <a:prstDash val="solid"/>
-          </a:ln>
-        </p:spPr>
-      </p:sp>
-      <p:sp>
-        <p:nvSpPr>
-          <p:cNvPr id="22" name="Text 20"/>
-          <p:cNvSpPr txBox="1"/>
-          <p:nvPr/>
-        </p:nvSpPr>
-        <p:spPr>
-          <a:xfrm>
-            <a:off x="777240" y="4233672"/>
-            <a:ext cx="329184" cy="329184"/>
-          </a:xfrm>
-          <a:prstGeom prst="rect">
-            <a:avLst/>
-          </a:prstGeom>
-          <a:noFill/>
-          <a:ln/>
-        </p:spPr>
-        <p:txBody>
-          <a:bodyPr wrap="square" lIns="0" tIns="0" rIns="0" bIns="0" rtlCol="0" anchor="ctr"/>
-          <a:lstStyle/>
-          <a:p>
-            <a:pPr algn="ctr" indent="0" marL="0">
-              <a:buNone/>
-            </a:pPr>
-            <a:r>
-              <a:rPr lang="en-US" sz="1300" b="1" dirty="0">
-                <a:solidFill>
-                  <a:srgbClr val="7D8B97"/>
-                </a:solidFill>
-                <a:latin typeface="Calibri" pitchFamily="34" charset="0"/>
-                <a:ea typeface="Calibri" pitchFamily="34" charset="-122"/>
-                <a:cs typeface="Calibri" pitchFamily="34" charset="-120"/>
-              </a:rPr>
-              <a:t>✕</a:t>
-            </a:r>
-            <a:endParaRPr lang="en-US" sz="1300" dirty="0"/>
-          </a:p>
-        </p:txBody>
-      </p:sp>
-      <p:sp>
-        <p:nvSpPr>
-          <p:cNvPr id="23" name="Text 21"/>
-          <p:cNvSpPr txBox="1"/>
-          <p:nvPr/>
-        </p:nvSpPr>
-        <p:spPr>
-          <a:xfrm>
-            <a:off x="1234440" y="4178808"/>
-            <a:ext cx="2646578" cy="457200"/>
-          </a:xfrm>
-          <a:prstGeom prst="rect">
-            <a:avLst/>
-          </a:prstGeom>
-          <a:noFill/>
-          <a:ln/>
-        </p:spPr>
-        <p:txBody>
-          <a:bodyPr wrap="square" lIns="0" tIns="0" rIns="0" bIns="0" rtlCol="0" anchor="ctr"/>
-          <a:lstStyle/>
-          <a:p>
-            <a:pPr indent="0" marL="0">
-              <a:buNone/>
-            </a:pPr>
-            <a:r>
-              <a:rPr lang="en-US" sz="1500" b="1" dirty="0">
-                <a:solidFill>
-                  <a:srgbClr val="1F2A33"/>
-                </a:solidFill>
-                <a:latin typeface="Calibri" pitchFamily="34" charset="0"/>
-                <a:ea typeface="Calibri" pitchFamily="34" charset="-122"/>
-                <a:cs typeface="Calibri" pitchFamily="34" charset="-120"/>
-              </a:rPr>
-              <a:t>Full master-data (MDM) platform</a:t>
-            </a:r>
-            <a:endParaRPr lang="en-US" sz="1500" dirty="0"/>
-          </a:p>
-        </p:txBody>
-      </p:sp>
-      <p:sp>
-        <p:nvSpPr>
-          <p:cNvPr id="24" name="Text 22"/>
-          <p:cNvSpPr txBox="1"/>
-          <p:nvPr/>
-        </p:nvSpPr>
-        <p:spPr>
-          <a:xfrm>
-            <a:off x="777240" y="4800600"/>
-            <a:ext cx="3058058" cy="1188720"/>
-          </a:xfrm>
-          <a:prstGeom prst="rect">
-            <a:avLst/>
-          </a:prstGeom>
-          <a:noFill/>
-          <a:ln/>
-        </p:spPr>
-        <p:txBody>
-          <a:bodyPr wrap="square" lIns="0" tIns="0" rIns="0" bIns="0" rtlCol="0" anchor="t"/>
-          <a:lstStyle/>
-          <a:p>
-            <a:pPr indent="0" marL="0">
-              <a:buNone/>
-            </a:pPr>
-            <a:r>
-              <a:rPr lang="en-US" sz="1300" dirty="0">
-                <a:solidFill>
-                  <a:srgbClr val="4E5D6A"/>
-                </a:solidFill>
-                <a:latin typeface="Calibri" pitchFamily="34" charset="0"/>
-                <a:ea typeface="Calibri" pitchFamily="34" charset="-122"/>
-                <a:cs typeface="Calibri" pitchFamily="34" charset="-120"/>
-              </a:rPr>
-              <a:t>The crosswalk file, with source, confidence and review status, is the seed. The platform comes later.</a:t>
-            </a:r>
-            <a:endParaRPr lang="en-US" sz="1300" dirty="0"/>
-          </a:p>
-        </p:txBody>
-      </p:sp>
-      <p:sp>
-        <p:nvSpPr>
-          <p:cNvPr id="25" name="Shape 23"/>
-          <p:cNvSpPr/>
-          <p:nvPr/>
-        </p:nvSpPr>
-        <p:spPr>
-          <a:xfrm>
-            <a:off x="4338218" y="3977640"/>
-            <a:ext cx="3515258" cy="2148840"/>
-          </a:xfrm>
-          <a:prstGeom prst="roundRect">
-            <a:avLst>
-              <a:gd name="adj" fmla="val 3404"/>
-            </a:avLst>
-          </a:prstGeom>
-          <a:solidFill>
-            <a:srgbClr val="EEF2F5"/>
-          </a:solidFill>
-          <a:ln w="12700">
-            <a:solidFill>
-              <a:srgbClr val="EEF2F5"/>
-            </a:solidFill>
-            <a:prstDash val="solid"/>
-          </a:ln>
-        </p:spPr>
-      </p:sp>
-      <p:sp>
-        <p:nvSpPr>
-          <p:cNvPr id="26" name="Shape 24"/>
-          <p:cNvSpPr/>
-          <p:nvPr/>
-        </p:nvSpPr>
-        <p:spPr>
-          <a:xfrm>
-            <a:off x="4566818" y="4233672"/>
-            <a:ext cx="329184" cy="329184"/>
-          </a:xfrm>
-          <a:prstGeom prst="ellipse">
-            <a:avLst/>
-          </a:prstGeom>
-          <a:solidFill>
-            <a:srgbClr val="FFFFFF"/>
-          </a:solidFill>
-          <a:ln w="19050">
-            <a:solidFill>
-              <a:srgbClr val="7D8B97"/>
-            </a:solidFill>
-            <a:prstDash val="solid"/>
-          </a:ln>
-        </p:spPr>
-      </p:sp>
-      <p:sp>
-        <p:nvSpPr>
-          <p:cNvPr id="27" name="Text 25"/>
-          <p:cNvSpPr txBox="1"/>
-          <p:nvPr/>
-        </p:nvSpPr>
-        <p:spPr>
-          <a:xfrm>
-            <a:off x="4566818" y="4233672"/>
-            <a:ext cx="329184" cy="329184"/>
-          </a:xfrm>
-          <a:prstGeom prst="rect">
-            <a:avLst/>
-          </a:prstGeom>
-          <a:noFill/>
-          <a:ln/>
-        </p:spPr>
-        <p:txBody>
-          <a:bodyPr wrap="square" lIns="0" tIns="0" rIns="0" bIns="0" rtlCol="0" anchor="ctr"/>
-          <a:lstStyle/>
-          <a:p>
-            <a:pPr algn="ctr" indent="0" marL="0">
-              <a:buNone/>
-            </a:pPr>
-            <a:r>
-              <a:rPr lang="en-US" sz="1300" b="1" dirty="0">
-                <a:solidFill>
-                  <a:srgbClr val="7D8B97"/>
-                </a:solidFill>
-                <a:latin typeface="Calibri" pitchFamily="34" charset="0"/>
-                <a:ea typeface="Calibri" pitchFamily="34" charset="-122"/>
-                <a:cs typeface="Calibri" pitchFamily="34" charset="-120"/>
-              </a:rPr>
-              <a:t>✕</a:t>
-            </a:r>
-            <a:endParaRPr lang="en-US" sz="1300" dirty="0"/>
-          </a:p>
-        </p:txBody>
-      </p:sp>
-      <p:sp>
-        <p:nvSpPr>
-          <p:cNvPr id="28" name="Text 26"/>
-          <p:cNvSpPr txBox="1"/>
-          <p:nvPr/>
-        </p:nvSpPr>
-        <p:spPr>
-          <a:xfrm>
-            <a:off x="5024018" y="4178808"/>
-            <a:ext cx="2646578" cy="457200"/>
-          </a:xfrm>
-          <a:prstGeom prst="rect">
-            <a:avLst/>
-          </a:prstGeom>
-          <a:noFill/>
-          <a:ln/>
-        </p:spPr>
-        <p:txBody>
-          <a:bodyPr wrap="square" lIns="0" tIns="0" rIns="0" bIns="0" rtlCol="0" anchor="ctr"/>
-          <a:lstStyle/>
-          <a:p>
-            <a:pPr indent="0" marL="0">
-              <a:buNone/>
-            </a:pPr>
-            <a:r>
-              <a:rPr lang="en-US" sz="1500" b="1" dirty="0">
-                <a:solidFill>
-                  <a:srgbClr val="1F2A33"/>
-                </a:solidFill>
-                <a:latin typeface="Calibri" pitchFamily="34" charset="0"/>
-                <a:ea typeface="Calibri" pitchFamily="34" charset="-122"/>
-                <a:cs typeface="Calibri" pitchFamily="34" charset="-120"/>
-              </a:rPr>
-              <a:t>A 0-100 vendor score</a:t>
-            </a:r>
-            <a:endParaRPr lang="en-US" sz="1500" dirty="0"/>
-          </a:p>
-        </p:txBody>
-      </p:sp>
-      <p:sp>
-        <p:nvSpPr>
-          <p:cNvPr id="29" name="Text 27"/>
-          <p:cNvSpPr txBox="1"/>
-          <p:nvPr/>
-        </p:nvSpPr>
-        <p:spPr>
-          <a:xfrm>
-            <a:off x="4566818" y="4800600"/>
-            <a:ext cx="3058058" cy="1188720"/>
-          </a:xfrm>
-          <a:prstGeom prst="rect">
-            <a:avLst/>
-          </a:prstGeom>
-          <a:noFill/>
-          <a:ln/>
-        </p:spPr>
-        <p:txBody>
-          <a:bodyPr wrap="square" lIns="0" tIns="0" rIns="0" bIns="0" rtlCol="0" anchor="t"/>
-          <a:lstStyle/>
-          <a:p>
-            <a:pPr indent="0" marL="0">
-              <a:buNone/>
-            </a:pPr>
-            <a:r>
-              <a:rPr lang="en-US" sz="1300" dirty="0">
-                <a:solidFill>
-                  <a:srgbClr val="4E5D6A"/>
-                </a:solidFill>
-                <a:latin typeface="Calibri" pitchFamily="34" charset="0"/>
-                <a:ea typeface="Calibri" pitchFamily="34" charset="-122"/>
-                <a:cs typeface="Calibri" pitchFamily="34" charset="-120"/>
-              </a:rPr>
-              <a:t>The weights would be invented. An evidence table with denominators is more honest.</a:t>
-            </a:r>
-            <a:endParaRPr lang="en-US" sz="1300" dirty="0"/>
-          </a:p>
-        </p:txBody>
-      </p:sp>
-      <p:sp>
-        <p:nvSpPr>
-          <p:cNvPr id="30" name="Shape 28"/>
-          <p:cNvSpPr/>
-          <p:nvPr/>
-        </p:nvSpPr>
-        <p:spPr>
-          <a:xfrm>
-            <a:off x="8127797" y="3977640"/>
-            <a:ext cx="3515258" cy="2148840"/>
-          </a:xfrm>
-          <a:prstGeom prst="roundRect">
-            <a:avLst>
-              <a:gd name="adj" fmla="val 3404"/>
-            </a:avLst>
-          </a:prstGeom>
-          <a:solidFill>
-            <a:srgbClr val="EEF2F5"/>
-          </a:solidFill>
-          <a:ln w="12700">
-            <a:solidFill>
-              <a:srgbClr val="EEF2F5"/>
-            </a:solidFill>
-            <a:prstDash val="solid"/>
-          </a:ln>
-        </p:spPr>
-      </p:sp>
-      <p:sp>
-        <p:nvSpPr>
-          <p:cNvPr id="31" name="Shape 29"/>
-          <p:cNvSpPr/>
-          <p:nvPr/>
-        </p:nvSpPr>
-        <p:spPr>
-          <a:xfrm>
-            <a:off x="8356397" y="4233672"/>
-            <a:ext cx="329184" cy="329184"/>
-          </a:xfrm>
-          <a:prstGeom prst="ellipse">
-            <a:avLst/>
-          </a:prstGeom>
-          <a:solidFill>
-            <a:srgbClr val="FFFFFF"/>
-          </a:solidFill>
-          <a:ln w="19050">
-            <a:solidFill>
-              <a:srgbClr val="7D8B97"/>
-            </a:solidFill>
-            <a:prstDash val="solid"/>
-          </a:ln>
-        </p:spPr>
-      </p:sp>
-      <p:sp>
-        <p:nvSpPr>
-          <p:cNvPr id="32" name="Text 30"/>
-          <p:cNvSpPr txBox="1"/>
-          <p:nvPr/>
-        </p:nvSpPr>
-        <p:spPr>
-          <a:xfrm>
-            <a:off x="8356397" y="4233672"/>
-            <a:ext cx="329184" cy="329184"/>
-          </a:xfrm>
-          <a:prstGeom prst="rect">
-            <a:avLst/>
-          </a:prstGeom>
-          <a:noFill/>
-          <a:ln/>
-        </p:spPr>
-        <p:txBody>
-          <a:bodyPr wrap="square" lIns="0" tIns="0" rIns="0" bIns="0" rtlCol="0" anchor="ctr"/>
-          <a:lstStyle/>
-          <a:p>
-            <a:pPr algn="ctr" indent="0" marL="0">
-              <a:buNone/>
-            </a:pPr>
-            <a:r>
-              <a:rPr lang="en-US" sz="1300" b="1" dirty="0">
-                <a:solidFill>
-                  <a:srgbClr val="7D8B97"/>
-                </a:solidFill>
-                <a:latin typeface="Calibri" pitchFamily="34" charset="0"/>
-                <a:ea typeface="Calibri" pitchFamily="34" charset="-122"/>
-                <a:cs typeface="Calibri" pitchFamily="34" charset="-120"/>
-              </a:rPr>
-              <a:t>✕</a:t>
-            </a:r>
-            <a:endParaRPr lang="en-US" sz="1300" dirty="0"/>
-          </a:p>
-        </p:txBody>
-      </p:sp>
-      <p:sp>
-        <p:nvSpPr>
-          <p:cNvPr id="33" name="Text 31"/>
-          <p:cNvSpPr txBox="1"/>
-          <p:nvPr/>
-        </p:nvSpPr>
-        <p:spPr>
-          <a:xfrm>
-            <a:off x="8813597" y="4178808"/>
-            <a:ext cx="2646578" cy="457200"/>
-          </a:xfrm>
-          <a:prstGeom prst="rect">
-            <a:avLst/>
-          </a:prstGeom>
-          <a:noFill/>
-          <a:ln/>
-        </p:spPr>
-        <p:txBody>
-          <a:bodyPr wrap="square" lIns="0" tIns="0" rIns="0" bIns="0" rtlCol="0" anchor="ctr"/>
-          <a:lstStyle/>
-          <a:p>
-            <a:pPr indent="0" marL="0">
-              <a:buNone/>
-            </a:pPr>
-            <a:r>
-              <a:rPr lang="en-US" sz="1500" b="1" dirty="0">
-                <a:solidFill>
-                  <a:srgbClr val="1F2A33"/>
-                </a:solidFill>
-                <a:latin typeface="Calibri" pitchFamily="34" charset="0"/>
-                <a:ea typeface="Calibri" pitchFamily="34" charset="-122"/>
-                <a:cs typeface="Calibri" pitchFamily="34" charset="-120"/>
-              </a:rPr>
-              <a:t>A chatbot or a big web app</a:t>
-            </a:r>
-            <a:endParaRPr lang="en-US" sz="1500" dirty="0"/>
-          </a:p>
-        </p:txBody>
-      </p:sp>
-      <p:sp>
-        <p:nvSpPr>
-          <p:cNvPr id="34" name="Text 32"/>
-          <p:cNvSpPr txBox="1"/>
-          <p:nvPr/>
-        </p:nvSpPr>
-        <p:spPr>
-          <a:xfrm>
-            <a:off x="8356397" y="4800600"/>
-            <a:ext cx="3058058" cy="1188720"/>
-          </a:xfrm>
-          <a:prstGeom prst="rect">
-            <a:avLst/>
-          </a:prstGeom>
-          <a:noFill/>
-          <a:ln/>
-        </p:spPr>
-        <p:txBody>
-          <a:bodyPr wrap="square" lIns="0" tIns="0" rIns="0" bIns="0" rtlCol="0" anchor="t"/>
-          <a:lstStyle/>
-          <a:p>
-            <a:pPr indent="0" marL="0">
-              <a:buNone/>
-            </a:pPr>
-            <a:r>
-              <a:rPr lang="en-US" sz="1300" dirty="0">
-                <a:solidFill>
-                  <a:srgbClr val="4E5D6A"/>
-                </a:solidFill>
-                <a:latin typeface="Calibri" pitchFamily="34" charset="0"/>
-                <a:ea typeface="Calibri" pitchFamily="34" charset="-122"/>
-                <a:cs typeface="Calibri" pitchFamily="34" charset="-120"/>
-              </a:rPr>
-              <a:t>Lisa needs a morning action queue, not another interface. Excel is where she works; the small app is optional.</a:t>
-            </a:r>
-            <a:endParaRPr lang="en-US" sz="1300" dirty="0"/>
-          </a:p>
-        </p:txBody>
-      </p:sp>
-    </p:spTree>
-  </p:cSld>
-  <p:clrMapOvr>
-    <a:masterClrMapping/>
-  </p:clrMapOvr>
-</p:sld>
-</file>
-
 <file path=ppt/slides/slide17.xml><?xml version="1.0" encoding="utf-8"?>
 <p:sld xmlns:a="http://schemas.openxmlformats.org/drawingml/2006/main" xmlns:r="http://schemas.openxmlformats.org/officeDocument/2006/relationships" xmlns:p="http://schemas.openxmlformats.org/presentationml/2006/main">
   <p:cSld name="Slide 17">
@@ -15432,7 +15099,7 @@
                 <a:ea typeface="Calibri" pitchFamily="34" charset="-122"/>
                 <a:cs typeface="Calibri" pitchFamily="34" charset="-120"/>
               </a:rPr>
-              <a:t>LIMITS</a:t>
+              <a:t>SCOPE</a:t>
             </a:r>
             <a:endParaRPr lang="en-US" sz="1200" dirty="0"/>
           </a:p>
@@ -15471,7 +15138,7 @@
                 <a:ea typeface="Cambria" pitchFamily="34" charset="-122"/>
                 <a:cs typeface="Cambria" pitchFamily="34" charset="-120"/>
               </a:rPr>
-              <a:t>Where this falls over, and what catches it when it does</a:t>
+              <a:t>What I deliberately did not build, and why</a:t>
             </a:r>
             <a:endParaRPr lang="en-US" sz="2400" dirty="0"/>
           </a:p>
@@ -15516,9 +15183,1172 @@
           </a:p>
         </p:txBody>
       </p:sp>
+      <p:sp>
+        <p:nvSpPr>
+          <p:cNvPr id="5" name="Shape 3"/>
+          <p:cNvSpPr/>
+          <p:nvPr/>
+        </p:nvSpPr>
+        <p:spPr>
+          <a:xfrm>
+            <a:off x="548640" y="1554480"/>
+            <a:ext cx="3515258" cy="2148840"/>
+          </a:xfrm>
+          <a:prstGeom prst="roundRect">
+            <a:avLst>
+              <a:gd name="adj" fmla="val 3404"/>
+            </a:avLst>
+          </a:prstGeom>
+          <a:solidFill>
+            <a:srgbClr val="EEF2F5"/>
+          </a:solidFill>
+          <a:ln w="12700">
+            <a:solidFill>
+              <a:srgbClr val="EEF2F5"/>
+            </a:solidFill>
+            <a:prstDash val="solid"/>
+          </a:ln>
+        </p:spPr>
+      </p:sp>
+      <p:sp>
+        <p:nvSpPr>
+          <p:cNvPr id="6" name="Shape 4"/>
+          <p:cNvSpPr/>
+          <p:nvPr/>
+        </p:nvSpPr>
+        <p:spPr>
+          <a:xfrm>
+            <a:off x="777240" y="1810512"/>
+            <a:ext cx="329184" cy="329184"/>
+          </a:xfrm>
+          <a:prstGeom prst="ellipse">
+            <a:avLst/>
+          </a:prstGeom>
+          <a:solidFill>
+            <a:srgbClr val="FFFFFF"/>
+          </a:solidFill>
+          <a:ln w="19050">
+            <a:solidFill>
+              <a:srgbClr val="7D8B97"/>
+            </a:solidFill>
+            <a:prstDash val="solid"/>
+          </a:ln>
+        </p:spPr>
+      </p:sp>
+      <p:sp>
+        <p:nvSpPr>
+          <p:cNvPr id="7" name="Text 5"/>
+          <p:cNvSpPr txBox="1"/>
+          <p:nvPr/>
+        </p:nvSpPr>
+        <p:spPr>
+          <a:xfrm>
+            <a:off x="777240" y="1810512"/>
+            <a:ext cx="329184" cy="329184"/>
+          </a:xfrm>
+          <a:prstGeom prst="rect">
+            <a:avLst/>
+          </a:prstGeom>
+          <a:noFill/>
+          <a:ln/>
+        </p:spPr>
+        <p:txBody>
+          <a:bodyPr wrap="square" lIns="0" tIns="0" rIns="0" bIns="0" rtlCol="0" anchor="ctr"/>
+          <a:lstStyle/>
+          <a:p>
+            <a:pPr algn="ctr" indent="0" marL="0">
+              <a:buNone/>
+            </a:pPr>
+            <a:r>
+              <a:rPr lang="en-US" sz="1300" b="1" dirty="0">
+                <a:solidFill>
+                  <a:srgbClr val="7D8B97"/>
+                </a:solidFill>
+                <a:latin typeface="Calibri" pitchFamily="34" charset="0"/>
+                <a:ea typeface="Calibri" pitchFamily="34" charset="-122"/>
+                <a:cs typeface="Calibri" pitchFamily="34" charset="-120"/>
+              </a:rPr>
+              <a:t>✕</a:t>
+            </a:r>
+            <a:endParaRPr lang="en-US" sz="1300" dirty="0"/>
+          </a:p>
+        </p:txBody>
+      </p:sp>
+      <p:sp>
+        <p:nvSpPr>
+          <p:cNvPr id="8" name="Text 6"/>
+          <p:cNvSpPr txBox="1"/>
+          <p:nvPr/>
+        </p:nvSpPr>
+        <p:spPr>
+          <a:xfrm>
+            <a:off x="1234440" y="1755648"/>
+            <a:ext cx="2646578" cy="457200"/>
+          </a:xfrm>
+          <a:prstGeom prst="rect">
+            <a:avLst/>
+          </a:prstGeom>
+          <a:noFill/>
+          <a:ln/>
+        </p:spPr>
+        <p:txBody>
+          <a:bodyPr wrap="square" lIns="0" tIns="0" rIns="0" bIns="0" rtlCol="0" anchor="ctr"/>
+          <a:lstStyle/>
+          <a:p>
+            <a:pPr indent="0" marL="0">
+              <a:buNone/>
+            </a:pPr>
+            <a:r>
+              <a:rPr lang="en-US" sz="1500" b="1" dirty="0">
+                <a:solidFill>
+                  <a:srgbClr val="1F2A33"/>
+                </a:solidFill>
+                <a:latin typeface="Calibri" pitchFamily="34" charset="0"/>
+                <a:ea typeface="Calibri" pitchFamily="34" charset="-122"/>
+                <a:cs typeface="Calibri" pitchFamily="34" charset="-120"/>
+              </a:rPr>
+              <a:t>ERP integration or write-back</a:t>
+            </a:r>
+            <a:endParaRPr lang="en-US" sz="1500" dirty="0"/>
+          </a:p>
+        </p:txBody>
+      </p:sp>
+      <p:sp>
+        <p:nvSpPr>
+          <p:cNvPr id="9" name="Text 7"/>
+          <p:cNvSpPr txBox="1"/>
+          <p:nvPr/>
+        </p:nvSpPr>
+        <p:spPr>
+          <a:xfrm>
+            <a:off x="777240" y="2377440"/>
+            <a:ext cx="3058058" cy="1188720"/>
+          </a:xfrm>
+          <a:prstGeom prst="rect">
+            <a:avLst/>
+          </a:prstGeom>
+          <a:noFill/>
+          <a:ln/>
+        </p:spPr>
+        <p:txBody>
+          <a:bodyPr wrap="square" lIns="0" tIns="0" rIns="0" bIns="0" rtlCol="0" anchor="t"/>
+          <a:lstStyle/>
+          <a:p>
+            <a:pPr indent="0" marL="0">
+              <a:buNone/>
+            </a:pPr>
+            <a:r>
+              <a:rPr lang="en-US" sz="1300" dirty="0">
+                <a:solidFill>
+                  <a:srgbClr val="4E5D6A"/>
+                </a:solidFill>
+                <a:latin typeface="Calibri" pitchFamily="34" charset="0"/>
+                <a:ea typeface="Calibri" pitchFamily="34" charset="-122"/>
+                <a:cs typeface="Calibri" pitchFamily="34" charset="-120"/>
+              </a:rPr>
+              <a:t>No API access, and a wrong write is expensive. The CSV export is the contract; integration comes after trust.</a:t>
+            </a:r>
+            <a:endParaRPr lang="en-US" sz="1300" dirty="0"/>
+          </a:p>
+        </p:txBody>
+      </p:sp>
+      <p:sp>
+        <p:nvSpPr>
+          <p:cNvPr id="10" name="Shape 8"/>
+          <p:cNvSpPr/>
+          <p:nvPr/>
+        </p:nvSpPr>
+        <p:spPr>
+          <a:xfrm>
+            <a:off x="4338218" y="1554480"/>
+            <a:ext cx="3515258" cy="2148840"/>
+          </a:xfrm>
+          <a:prstGeom prst="roundRect">
+            <a:avLst>
+              <a:gd name="adj" fmla="val 3404"/>
+            </a:avLst>
+          </a:prstGeom>
+          <a:solidFill>
+            <a:srgbClr val="EEF2F5"/>
+          </a:solidFill>
+          <a:ln w="12700">
+            <a:solidFill>
+              <a:srgbClr val="EEF2F5"/>
+            </a:solidFill>
+            <a:prstDash val="solid"/>
+          </a:ln>
+        </p:spPr>
+      </p:sp>
+      <p:sp>
+        <p:nvSpPr>
+          <p:cNvPr id="11" name="Shape 9"/>
+          <p:cNvSpPr/>
+          <p:nvPr/>
+        </p:nvSpPr>
+        <p:spPr>
+          <a:xfrm>
+            <a:off x="4566818" y="1810512"/>
+            <a:ext cx="329184" cy="329184"/>
+          </a:xfrm>
+          <a:prstGeom prst="ellipse">
+            <a:avLst/>
+          </a:prstGeom>
+          <a:solidFill>
+            <a:srgbClr val="FFFFFF"/>
+          </a:solidFill>
+          <a:ln w="19050">
+            <a:solidFill>
+              <a:srgbClr val="7D8B97"/>
+            </a:solidFill>
+            <a:prstDash val="solid"/>
+          </a:ln>
+        </p:spPr>
+      </p:sp>
+      <p:sp>
+        <p:nvSpPr>
+          <p:cNvPr id="12" name="Text 10"/>
+          <p:cNvSpPr txBox="1"/>
+          <p:nvPr/>
+        </p:nvSpPr>
+        <p:spPr>
+          <a:xfrm>
+            <a:off x="4566818" y="1810512"/>
+            <a:ext cx="329184" cy="329184"/>
+          </a:xfrm>
+          <a:prstGeom prst="rect">
+            <a:avLst/>
+          </a:prstGeom>
+          <a:noFill/>
+          <a:ln/>
+        </p:spPr>
+        <p:txBody>
+          <a:bodyPr wrap="square" lIns="0" tIns="0" rIns="0" bIns="0" rtlCol="0" anchor="ctr"/>
+          <a:lstStyle/>
+          <a:p>
+            <a:pPr algn="ctr" indent="0" marL="0">
+              <a:buNone/>
+            </a:pPr>
+            <a:r>
+              <a:rPr lang="en-US" sz="1300" b="1" dirty="0">
+                <a:solidFill>
+                  <a:srgbClr val="7D8B97"/>
+                </a:solidFill>
+                <a:latin typeface="Calibri" pitchFamily="34" charset="0"/>
+                <a:ea typeface="Calibri" pitchFamily="34" charset="-122"/>
+                <a:cs typeface="Calibri" pitchFamily="34" charset="-120"/>
+              </a:rPr>
+              <a:t>✕</a:t>
+            </a:r>
+            <a:endParaRPr lang="en-US" sz="1300" dirty="0"/>
+          </a:p>
+        </p:txBody>
+      </p:sp>
+      <p:sp>
+        <p:nvSpPr>
+          <p:cNvPr id="13" name="Text 11"/>
+          <p:cNvSpPr txBox="1"/>
+          <p:nvPr/>
+        </p:nvSpPr>
+        <p:spPr>
+          <a:xfrm>
+            <a:off x="5024018" y="1755648"/>
+            <a:ext cx="2646578" cy="457200"/>
+          </a:xfrm>
+          <a:prstGeom prst="rect">
+            <a:avLst/>
+          </a:prstGeom>
+          <a:noFill/>
+          <a:ln/>
+        </p:spPr>
+        <p:txBody>
+          <a:bodyPr wrap="square" lIns="0" tIns="0" rIns="0" bIns="0" rtlCol="0" anchor="ctr"/>
+          <a:lstStyle/>
+          <a:p>
+            <a:pPr indent="0" marL="0">
+              <a:buNone/>
+            </a:pPr>
+            <a:r>
+              <a:rPr lang="en-US" sz="1500" b="1" dirty="0">
+                <a:solidFill>
+                  <a:srgbClr val="1F2A33"/>
+                </a:solidFill>
+                <a:latin typeface="Calibri" pitchFamily="34" charset="0"/>
+                <a:ea typeface="Calibri" pitchFamily="34" charset="-122"/>
+                <a:cs typeface="Calibri" pitchFamily="34" charset="-120"/>
+              </a:rPr>
+              <a:t>Auto-emailing vendors</a:t>
+            </a:r>
+            <a:endParaRPr lang="en-US" sz="1500" dirty="0"/>
+          </a:p>
+        </p:txBody>
+      </p:sp>
+      <p:sp>
+        <p:nvSpPr>
+          <p:cNvPr id="14" name="Text 12"/>
+          <p:cNvSpPr txBox="1"/>
+          <p:nvPr/>
+        </p:nvSpPr>
+        <p:spPr>
+          <a:xfrm>
+            <a:off x="4566818" y="2377440"/>
+            <a:ext cx="3058058" cy="1188720"/>
+          </a:xfrm>
+          <a:prstGeom prst="rect">
+            <a:avLst/>
+          </a:prstGeom>
+          <a:noFill/>
+          <a:ln/>
+        </p:spPr>
+        <p:txBody>
+          <a:bodyPr wrap="square" lIns="0" tIns="0" rIns="0" bIns="0" rtlCol="0" anchor="t"/>
+          <a:lstStyle/>
+          <a:p>
+            <a:pPr indent="0" marL="0">
+              <a:buNone/>
+            </a:pPr>
+            <a:r>
+              <a:rPr lang="en-US" sz="1300" dirty="0">
+                <a:solidFill>
+                  <a:srgbClr val="4E5D6A"/>
+                </a:solidFill>
+                <a:latin typeface="Calibri" pitchFamily="34" charset="0"/>
+                <a:ea typeface="Calibri" pitchFamily="34" charset="-122"/>
+                <a:cs typeface="Calibri" pitchFamily="34" charset="-120"/>
+              </a:rPr>
+              <a:t>The tool drafts emails; Lisa sends them. Vendor relationships are hers.</a:t>
+            </a:r>
+            <a:endParaRPr lang="en-US" sz="1300" dirty="0"/>
+          </a:p>
+        </p:txBody>
+      </p:sp>
+      <p:sp>
+        <p:nvSpPr>
+          <p:cNvPr id="15" name="Shape 13"/>
+          <p:cNvSpPr/>
+          <p:nvPr/>
+        </p:nvSpPr>
+        <p:spPr>
+          <a:xfrm>
+            <a:off x="8127797" y="1554480"/>
+            <a:ext cx="3515258" cy="2148840"/>
+          </a:xfrm>
+          <a:prstGeom prst="roundRect">
+            <a:avLst>
+              <a:gd name="adj" fmla="val 3404"/>
+            </a:avLst>
+          </a:prstGeom>
+          <a:solidFill>
+            <a:srgbClr val="EEF2F5"/>
+          </a:solidFill>
+          <a:ln w="12700">
+            <a:solidFill>
+              <a:srgbClr val="EEF2F5"/>
+            </a:solidFill>
+            <a:prstDash val="solid"/>
+          </a:ln>
+        </p:spPr>
+      </p:sp>
+      <p:sp>
+        <p:nvSpPr>
+          <p:cNvPr id="16" name="Shape 14"/>
+          <p:cNvSpPr/>
+          <p:nvPr/>
+        </p:nvSpPr>
+        <p:spPr>
+          <a:xfrm>
+            <a:off x="8356397" y="1810512"/>
+            <a:ext cx="329184" cy="329184"/>
+          </a:xfrm>
+          <a:prstGeom prst="ellipse">
+            <a:avLst/>
+          </a:prstGeom>
+          <a:solidFill>
+            <a:srgbClr val="FFFFFF"/>
+          </a:solidFill>
+          <a:ln w="19050">
+            <a:solidFill>
+              <a:srgbClr val="7D8B97"/>
+            </a:solidFill>
+            <a:prstDash val="solid"/>
+          </a:ln>
+        </p:spPr>
+      </p:sp>
+      <p:sp>
+        <p:nvSpPr>
+          <p:cNvPr id="17" name="Text 15"/>
+          <p:cNvSpPr txBox="1"/>
+          <p:nvPr/>
+        </p:nvSpPr>
+        <p:spPr>
+          <a:xfrm>
+            <a:off x="8356397" y="1810512"/>
+            <a:ext cx="329184" cy="329184"/>
+          </a:xfrm>
+          <a:prstGeom prst="rect">
+            <a:avLst/>
+          </a:prstGeom>
+          <a:noFill/>
+          <a:ln/>
+        </p:spPr>
+        <p:txBody>
+          <a:bodyPr wrap="square" lIns="0" tIns="0" rIns="0" bIns="0" rtlCol="0" anchor="ctr"/>
+          <a:lstStyle/>
+          <a:p>
+            <a:pPr algn="ctr" indent="0" marL="0">
+              <a:buNone/>
+            </a:pPr>
+            <a:r>
+              <a:rPr lang="en-US" sz="1300" b="1" dirty="0">
+                <a:solidFill>
+                  <a:srgbClr val="7D8B97"/>
+                </a:solidFill>
+                <a:latin typeface="Calibri" pitchFamily="34" charset="0"/>
+                <a:ea typeface="Calibri" pitchFamily="34" charset="-122"/>
+                <a:cs typeface="Calibri" pitchFamily="34" charset="-120"/>
+              </a:rPr>
+              <a:t>✕</a:t>
+            </a:r>
+            <a:endParaRPr lang="en-US" sz="1300" dirty="0"/>
+          </a:p>
+        </p:txBody>
+      </p:sp>
+      <p:sp>
+        <p:nvSpPr>
+          <p:cNvPr id="18" name="Text 16"/>
+          <p:cNvSpPr txBox="1"/>
+          <p:nvPr/>
+        </p:nvSpPr>
+        <p:spPr>
+          <a:xfrm>
+            <a:off x="8813597" y="1755648"/>
+            <a:ext cx="2646578" cy="457200"/>
+          </a:xfrm>
+          <a:prstGeom prst="rect">
+            <a:avLst/>
+          </a:prstGeom>
+          <a:noFill/>
+          <a:ln/>
+        </p:spPr>
+        <p:txBody>
+          <a:bodyPr wrap="square" lIns="0" tIns="0" rIns="0" bIns="0" rtlCol="0" anchor="ctr"/>
+          <a:lstStyle/>
+          <a:p>
+            <a:pPr indent="0" marL="0">
+              <a:buNone/>
+            </a:pPr>
+            <a:r>
+              <a:rPr lang="en-US" sz="1500" b="1" dirty="0">
+                <a:solidFill>
+                  <a:srgbClr val="1F2A33"/>
+                </a:solidFill>
+                <a:latin typeface="Calibri" pitchFamily="34" charset="0"/>
+                <a:ea typeface="Calibri" pitchFamily="34" charset="-122"/>
+                <a:cs typeface="Calibri" pitchFamily="34" charset="-120"/>
+              </a:rPr>
+              <a:t>LLM-first extraction</a:t>
+            </a:r>
+            <a:endParaRPr lang="en-US" sz="1500" dirty="0"/>
+          </a:p>
+        </p:txBody>
+      </p:sp>
+      <p:sp>
+        <p:nvSpPr>
+          <p:cNvPr id="19" name="Text 17"/>
+          <p:cNvSpPr txBox="1"/>
+          <p:nvPr/>
+        </p:nvSpPr>
+        <p:spPr>
+          <a:xfrm>
+            <a:off x="8356397" y="2377440"/>
+            <a:ext cx="3058058" cy="1188720"/>
+          </a:xfrm>
+          <a:prstGeom prst="rect">
+            <a:avLst/>
+          </a:prstGeom>
+          <a:noFill/>
+          <a:ln/>
+        </p:spPr>
+        <p:txBody>
+          <a:bodyPr wrap="square" lIns="0" tIns="0" rIns="0" bIns="0" rtlCol="0" anchor="t"/>
+          <a:lstStyle/>
+          <a:p>
+            <a:pPr indent="0" marL="0">
+              <a:buNone/>
+            </a:pPr>
+            <a:r>
+              <a:rPr lang="en-US" sz="1300" dirty="0">
+                <a:solidFill>
+                  <a:srgbClr val="4E5D6A"/>
+                </a:solidFill>
+                <a:latin typeface="Calibri" pitchFamily="34" charset="0"/>
+                <a:ea typeface="Calibri" pitchFamily="34" charset="-122"/>
+                <a:cs typeface="Calibri" pitchFamily="34" charset="-120"/>
+              </a:rPr>
+              <a:t>6 stable layouts parse deterministically and auditably. Claude is the tested fallback, not the default.</a:t>
+            </a:r>
+            <a:endParaRPr lang="en-US" sz="1300" dirty="0"/>
+          </a:p>
+        </p:txBody>
+      </p:sp>
+      <p:sp>
+        <p:nvSpPr>
+          <p:cNvPr id="20" name="Shape 18"/>
+          <p:cNvSpPr/>
+          <p:nvPr/>
+        </p:nvSpPr>
+        <p:spPr>
+          <a:xfrm>
+            <a:off x="548640" y="3977640"/>
+            <a:ext cx="3515258" cy="2148840"/>
+          </a:xfrm>
+          <a:prstGeom prst="roundRect">
+            <a:avLst>
+              <a:gd name="adj" fmla="val 3404"/>
+            </a:avLst>
+          </a:prstGeom>
+          <a:solidFill>
+            <a:srgbClr val="EEF2F5"/>
+          </a:solidFill>
+          <a:ln w="12700">
+            <a:solidFill>
+              <a:srgbClr val="EEF2F5"/>
+            </a:solidFill>
+            <a:prstDash val="solid"/>
+          </a:ln>
+        </p:spPr>
+      </p:sp>
+      <p:sp>
+        <p:nvSpPr>
+          <p:cNvPr id="21" name="Shape 19"/>
+          <p:cNvSpPr/>
+          <p:nvPr/>
+        </p:nvSpPr>
+        <p:spPr>
+          <a:xfrm>
+            <a:off x="777240" y="4233672"/>
+            <a:ext cx="329184" cy="329184"/>
+          </a:xfrm>
+          <a:prstGeom prst="ellipse">
+            <a:avLst/>
+          </a:prstGeom>
+          <a:solidFill>
+            <a:srgbClr val="FFFFFF"/>
+          </a:solidFill>
+          <a:ln w="19050">
+            <a:solidFill>
+              <a:srgbClr val="7D8B97"/>
+            </a:solidFill>
+            <a:prstDash val="solid"/>
+          </a:ln>
+        </p:spPr>
+      </p:sp>
+      <p:sp>
+        <p:nvSpPr>
+          <p:cNvPr id="22" name="Text 20"/>
+          <p:cNvSpPr txBox="1"/>
+          <p:nvPr/>
+        </p:nvSpPr>
+        <p:spPr>
+          <a:xfrm>
+            <a:off x="777240" y="4233672"/>
+            <a:ext cx="329184" cy="329184"/>
+          </a:xfrm>
+          <a:prstGeom prst="rect">
+            <a:avLst/>
+          </a:prstGeom>
+          <a:noFill/>
+          <a:ln/>
+        </p:spPr>
+        <p:txBody>
+          <a:bodyPr wrap="square" lIns="0" tIns="0" rIns="0" bIns="0" rtlCol="0" anchor="ctr"/>
+          <a:lstStyle/>
+          <a:p>
+            <a:pPr algn="ctr" indent="0" marL="0">
+              <a:buNone/>
+            </a:pPr>
+            <a:r>
+              <a:rPr lang="en-US" sz="1300" b="1" dirty="0">
+                <a:solidFill>
+                  <a:srgbClr val="7D8B97"/>
+                </a:solidFill>
+                <a:latin typeface="Calibri" pitchFamily="34" charset="0"/>
+                <a:ea typeface="Calibri" pitchFamily="34" charset="-122"/>
+                <a:cs typeface="Calibri" pitchFamily="34" charset="-120"/>
+              </a:rPr>
+              <a:t>✕</a:t>
+            </a:r>
+            <a:endParaRPr lang="en-US" sz="1300" dirty="0"/>
+          </a:p>
+        </p:txBody>
+      </p:sp>
+      <p:sp>
+        <p:nvSpPr>
+          <p:cNvPr id="23" name="Text 21"/>
+          <p:cNvSpPr txBox="1"/>
+          <p:nvPr/>
+        </p:nvSpPr>
+        <p:spPr>
+          <a:xfrm>
+            <a:off x="1234440" y="4178808"/>
+            <a:ext cx="2646578" cy="457200"/>
+          </a:xfrm>
+          <a:prstGeom prst="rect">
+            <a:avLst/>
+          </a:prstGeom>
+          <a:noFill/>
+          <a:ln/>
+        </p:spPr>
+        <p:txBody>
+          <a:bodyPr wrap="square" lIns="0" tIns="0" rIns="0" bIns="0" rtlCol="0" anchor="ctr"/>
+          <a:lstStyle/>
+          <a:p>
+            <a:pPr indent="0" marL="0">
+              <a:buNone/>
+            </a:pPr>
+            <a:r>
+              <a:rPr lang="en-US" sz="1500" b="1" dirty="0">
+                <a:solidFill>
+                  <a:srgbClr val="1F2A33"/>
+                </a:solidFill>
+                <a:latin typeface="Calibri" pitchFamily="34" charset="0"/>
+                <a:ea typeface="Calibri" pitchFamily="34" charset="-122"/>
+                <a:cs typeface="Calibri" pitchFamily="34" charset="-120"/>
+              </a:rPr>
+              <a:t>Full master-data (MDM) platform</a:t>
+            </a:r>
+            <a:endParaRPr lang="en-US" sz="1500" dirty="0"/>
+          </a:p>
+        </p:txBody>
+      </p:sp>
+      <p:sp>
+        <p:nvSpPr>
+          <p:cNvPr id="24" name="Text 22"/>
+          <p:cNvSpPr txBox="1"/>
+          <p:nvPr/>
+        </p:nvSpPr>
+        <p:spPr>
+          <a:xfrm>
+            <a:off x="777240" y="4800600"/>
+            <a:ext cx="3058058" cy="1188720"/>
+          </a:xfrm>
+          <a:prstGeom prst="rect">
+            <a:avLst/>
+          </a:prstGeom>
+          <a:noFill/>
+          <a:ln/>
+        </p:spPr>
+        <p:txBody>
+          <a:bodyPr wrap="square" lIns="0" tIns="0" rIns="0" bIns="0" rtlCol="0" anchor="t"/>
+          <a:lstStyle/>
+          <a:p>
+            <a:pPr indent="0" marL="0">
+              <a:buNone/>
+            </a:pPr>
+            <a:r>
+              <a:rPr lang="en-US" sz="1300" dirty="0">
+                <a:solidFill>
+                  <a:srgbClr val="4E5D6A"/>
+                </a:solidFill>
+                <a:latin typeface="Calibri" pitchFamily="34" charset="0"/>
+                <a:ea typeface="Calibri" pitchFamily="34" charset="-122"/>
+                <a:cs typeface="Calibri" pitchFamily="34" charset="-120"/>
+              </a:rPr>
+              <a:t>The crosswalk file, with source, confidence and review status, is the seed. The platform comes later.</a:t>
+            </a:r>
+            <a:endParaRPr lang="en-US" sz="1300" dirty="0"/>
+          </a:p>
+        </p:txBody>
+      </p:sp>
+      <p:sp>
+        <p:nvSpPr>
+          <p:cNvPr id="25" name="Shape 23"/>
+          <p:cNvSpPr/>
+          <p:nvPr/>
+        </p:nvSpPr>
+        <p:spPr>
+          <a:xfrm>
+            <a:off x="4338218" y="3977640"/>
+            <a:ext cx="3515258" cy="2148840"/>
+          </a:xfrm>
+          <a:prstGeom prst="roundRect">
+            <a:avLst>
+              <a:gd name="adj" fmla="val 3404"/>
+            </a:avLst>
+          </a:prstGeom>
+          <a:solidFill>
+            <a:srgbClr val="EEF2F5"/>
+          </a:solidFill>
+          <a:ln w="12700">
+            <a:solidFill>
+              <a:srgbClr val="EEF2F5"/>
+            </a:solidFill>
+            <a:prstDash val="solid"/>
+          </a:ln>
+        </p:spPr>
+      </p:sp>
+      <p:sp>
+        <p:nvSpPr>
+          <p:cNvPr id="26" name="Shape 24"/>
+          <p:cNvSpPr/>
+          <p:nvPr/>
+        </p:nvSpPr>
+        <p:spPr>
+          <a:xfrm>
+            <a:off x="4566818" y="4233672"/>
+            <a:ext cx="329184" cy="329184"/>
+          </a:xfrm>
+          <a:prstGeom prst="ellipse">
+            <a:avLst/>
+          </a:prstGeom>
+          <a:solidFill>
+            <a:srgbClr val="FFFFFF"/>
+          </a:solidFill>
+          <a:ln w="19050">
+            <a:solidFill>
+              <a:srgbClr val="7D8B97"/>
+            </a:solidFill>
+            <a:prstDash val="solid"/>
+          </a:ln>
+        </p:spPr>
+      </p:sp>
+      <p:sp>
+        <p:nvSpPr>
+          <p:cNvPr id="27" name="Text 25"/>
+          <p:cNvSpPr txBox="1"/>
+          <p:nvPr/>
+        </p:nvSpPr>
+        <p:spPr>
+          <a:xfrm>
+            <a:off x="4566818" y="4233672"/>
+            <a:ext cx="329184" cy="329184"/>
+          </a:xfrm>
+          <a:prstGeom prst="rect">
+            <a:avLst/>
+          </a:prstGeom>
+          <a:noFill/>
+          <a:ln/>
+        </p:spPr>
+        <p:txBody>
+          <a:bodyPr wrap="square" lIns="0" tIns="0" rIns="0" bIns="0" rtlCol="0" anchor="ctr"/>
+          <a:lstStyle/>
+          <a:p>
+            <a:pPr algn="ctr" indent="0" marL="0">
+              <a:buNone/>
+            </a:pPr>
+            <a:r>
+              <a:rPr lang="en-US" sz="1300" b="1" dirty="0">
+                <a:solidFill>
+                  <a:srgbClr val="7D8B97"/>
+                </a:solidFill>
+                <a:latin typeface="Calibri" pitchFamily="34" charset="0"/>
+                <a:ea typeface="Calibri" pitchFamily="34" charset="-122"/>
+                <a:cs typeface="Calibri" pitchFamily="34" charset="-120"/>
+              </a:rPr>
+              <a:t>✕</a:t>
+            </a:r>
+            <a:endParaRPr lang="en-US" sz="1300" dirty="0"/>
+          </a:p>
+        </p:txBody>
+      </p:sp>
+      <p:sp>
+        <p:nvSpPr>
+          <p:cNvPr id="28" name="Text 26"/>
+          <p:cNvSpPr txBox="1"/>
+          <p:nvPr/>
+        </p:nvSpPr>
+        <p:spPr>
+          <a:xfrm>
+            <a:off x="5024018" y="4178808"/>
+            <a:ext cx="2646578" cy="457200"/>
+          </a:xfrm>
+          <a:prstGeom prst="rect">
+            <a:avLst/>
+          </a:prstGeom>
+          <a:noFill/>
+          <a:ln/>
+        </p:spPr>
+        <p:txBody>
+          <a:bodyPr wrap="square" lIns="0" tIns="0" rIns="0" bIns="0" rtlCol="0" anchor="ctr"/>
+          <a:lstStyle/>
+          <a:p>
+            <a:pPr indent="0" marL="0">
+              <a:buNone/>
+            </a:pPr>
+            <a:r>
+              <a:rPr lang="en-US" sz="1500" b="1" dirty="0">
+                <a:solidFill>
+                  <a:srgbClr val="1F2A33"/>
+                </a:solidFill>
+                <a:latin typeface="Calibri" pitchFamily="34" charset="0"/>
+                <a:ea typeface="Calibri" pitchFamily="34" charset="-122"/>
+                <a:cs typeface="Calibri" pitchFamily="34" charset="-120"/>
+              </a:rPr>
+              <a:t>A 0-100 vendor score</a:t>
+            </a:r>
+            <a:endParaRPr lang="en-US" sz="1500" dirty="0"/>
+          </a:p>
+        </p:txBody>
+      </p:sp>
+      <p:sp>
+        <p:nvSpPr>
+          <p:cNvPr id="29" name="Text 27"/>
+          <p:cNvSpPr txBox="1"/>
+          <p:nvPr/>
+        </p:nvSpPr>
+        <p:spPr>
+          <a:xfrm>
+            <a:off x="4566818" y="4800600"/>
+            <a:ext cx="3058058" cy="1188720"/>
+          </a:xfrm>
+          <a:prstGeom prst="rect">
+            <a:avLst/>
+          </a:prstGeom>
+          <a:noFill/>
+          <a:ln/>
+        </p:spPr>
+        <p:txBody>
+          <a:bodyPr wrap="square" lIns="0" tIns="0" rIns="0" bIns="0" rtlCol="0" anchor="t"/>
+          <a:lstStyle/>
+          <a:p>
+            <a:pPr indent="0" marL="0">
+              <a:buNone/>
+            </a:pPr>
+            <a:r>
+              <a:rPr lang="en-US" sz="1300" dirty="0">
+                <a:solidFill>
+                  <a:srgbClr val="4E5D6A"/>
+                </a:solidFill>
+                <a:latin typeface="Calibri" pitchFamily="34" charset="0"/>
+                <a:ea typeface="Calibri" pitchFamily="34" charset="-122"/>
+                <a:cs typeface="Calibri" pitchFamily="34" charset="-120"/>
+              </a:rPr>
+              <a:t>The weights would be invented. An evidence table with denominators is more honest.</a:t>
+            </a:r>
+            <a:endParaRPr lang="en-US" sz="1300" dirty="0"/>
+          </a:p>
+        </p:txBody>
+      </p:sp>
+      <p:sp>
+        <p:nvSpPr>
+          <p:cNvPr id="30" name="Shape 28"/>
+          <p:cNvSpPr/>
+          <p:nvPr/>
+        </p:nvSpPr>
+        <p:spPr>
+          <a:xfrm>
+            <a:off x="8127797" y="3977640"/>
+            <a:ext cx="3515258" cy="2148840"/>
+          </a:xfrm>
+          <a:prstGeom prst="roundRect">
+            <a:avLst>
+              <a:gd name="adj" fmla="val 3404"/>
+            </a:avLst>
+          </a:prstGeom>
+          <a:solidFill>
+            <a:srgbClr val="EEF2F5"/>
+          </a:solidFill>
+          <a:ln w="12700">
+            <a:solidFill>
+              <a:srgbClr val="EEF2F5"/>
+            </a:solidFill>
+            <a:prstDash val="solid"/>
+          </a:ln>
+        </p:spPr>
+      </p:sp>
+      <p:sp>
+        <p:nvSpPr>
+          <p:cNvPr id="31" name="Shape 29"/>
+          <p:cNvSpPr/>
+          <p:nvPr/>
+        </p:nvSpPr>
+        <p:spPr>
+          <a:xfrm>
+            <a:off x="8356397" y="4233672"/>
+            <a:ext cx="329184" cy="329184"/>
+          </a:xfrm>
+          <a:prstGeom prst="ellipse">
+            <a:avLst/>
+          </a:prstGeom>
+          <a:solidFill>
+            <a:srgbClr val="FFFFFF"/>
+          </a:solidFill>
+          <a:ln w="19050">
+            <a:solidFill>
+              <a:srgbClr val="7D8B97"/>
+            </a:solidFill>
+            <a:prstDash val="solid"/>
+          </a:ln>
+        </p:spPr>
+      </p:sp>
+      <p:sp>
+        <p:nvSpPr>
+          <p:cNvPr id="32" name="Text 30"/>
+          <p:cNvSpPr txBox="1"/>
+          <p:nvPr/>
+        </p:nvSpPr>
+        <p:spPr>
+          <a:xfrm>
+            <a:off x="8356397" y="4233672"/>
+            <a:ext cx="329184" cy="329184"/>
+          </a:xfrm>
+          <a:prstGeom prst="rect">
+            <a:avLst/>
+          </a:prstGeom>
+          <a:noFill/>
+          <a:ln/>
+        </p:spPr>
+        <p:txBody>
+          <a:bodyPr wrap="square" lIns="0" tIns="0" rIns="0" bIns="0" rtlCol="0" anchor="ctr"/>
+          <a:lstStyle/>
+          <a:p>
+            <a:pPr algn="ctr" indent="0" marL="0">
+              <a:buNone/>
+            </a:pPr>
+            <a:r>
+              <a:rPr lang="en-US" sz="1300" b="1" dirty="0">
+                <a:solidFill>
+                  <a:srgbClr val="7D8B97"/>
+                </a:solidFill>
+                <a:latin typeface="Calibri" pitchFamily="34" charset="0"/>
+                <a:ea typeface="Calibri" pitchFamily="34" charset="-122"/>
+                <a:cs typeface="Calibri" pitchFamily="34" charset="-120"/>
+              </a:rPr>
+              <a:t>✕</a:t>
+            </a:r>
+            <a:endParaRPr lang="en-US" sz="1300" dirty="0"/>
+          </a:p>
+        </p:txBody>
+      </p:sp>
+      <p:sp>
+        <p:nvSpPr>
+          <p:cNvPr id="33" name="Text 31"/>
+          <p:cNvSpPr txBox="1"/>
+          <p:nvPr/>
+        </p:nvSpPr>
+        <p:spPr>
+          <a:xfrm>
+            <a:off x="8813597" y="4178808"/>
+            <a:ext cx="2646578" cy="457200"/>
+          </a:xfrm>
+          <a:prstGeom prst="rect">
+            <a:avLst/>
+          </a:prstGeom>
+          <a:noFill/>
+          <a:ln/>
+        </p:spPr>
+        <p:txBody>
+          <a:bodyPr wrap="square" lIns="0" tIns="0" rIns="0" bIns="0" rtlCol="0" anchor="ctr"/>
+          <a:lstStyle/>
+          <a:p>
+            <a:pPr indent="0" marL="0">
+              <a:buNone/>
+            </a:pPr>
+            <a:r>
+              <a:rPr lang="en-US" sz="1500" b="1" dirty="0">
+                <a:solidFill>
+                  <a:srgbClr val="1F2A33"/>
+                </a:solidFill>
+                <a:latin typeface="Calibri" pitchFamily="34" charset="0"/>
+                <a:ea typeface="Calibri" pitchFamily="34" charset="-122"/>
+                <a:cs typeface="Calibri" pitchFamily="34" charset="-120"/>
+              </a:rPr>
+              <a:t>A chatbot or a big web app</a:t>
+            </a:r>
+            <a:endParaRPr lang="en-US" sz="1500" dirty="0"/>
+          </a:p>
+        </p:txBody>
+      </p:sp>
+      <p:sp>
+        <p:nvSpPr>
+          <p:cNvPr id="34" name="Text 32"/>
+          <p:cNvSpPr txBox="1"/>
+          <p:nvPr/>
+        </p:nvSpPr>
+        <p:spPr>
+          <a:xfrm>
+            <a:off x="8356397" y="4800600"/>
+            <a:ext cx="3058058" cy="1188720"/>
+          </a:xfrm>
+          <a:prstGeom prst="rect">
+            <a:avLst/>
+          </a:prstGeom>
+          <a:noFill/>
+          <a:ln/>
+        </p:spPr>
+        <p:txBody>
+          <a:bodyPr wrap="square" lIns="0" tIns="0" rIns="0" bIns="0" rtlCol="0" anchor="t"/>
+          <a:lstStyle/>
+          <a:p>
+            <a:pPr indent="0" marL="0">
+              <a:buNone/>
+            </a:pPr>
+            <a:r>
+              <a:rPr lang="en-US" sz="1300" dirty="0">
+                <a:solidFill>
+                  <a:srgbClr val="4E5D6A"/>
+                </a:solidFill>
+                <a:latin typeface="Calibri" pitchFamily="34" charset="0"/>
+                <a:ea typeface="Calibri" pitchFamily="34" charset="-122"/>
+                <a:cs typeface="Calibri" pitchFamily="34" charset="-120"/>
+              </a:rPr>
+              <a:t>Lisa needs a morning action queue, not another interface. Excel is where she works; the small app is optional.</a:t>
+            </a:r>
+            <a:endParaRPr lang="en-US" sz="1300" dirty="0"/>
+          </a:p>
+        </p:txBody>
+      </p:sp>
+    </p:spTree>
+  </p:cSld>
+  <p:clrMapOvr>
+    <a:masterClrMapping/>
+  </p:clrMapOvr>
+</p:sld>
+</file>
+
+<file path=ppt/slides/slide18.xml><?xml version="1.0" encoding="utf-8"?>
+<p:sld xmlns:a="http://schemas.openxmlformats.org/drawingml/2006/main" xmlns:r="http://schemas.openxmlformats.org/officeDocument/2006/relationships" xmlns:p="http://schemas.openxmlformats.org/presentationml/2006/main">
+  <p:cSld name="Slide 18">
+    <p:bg>
+      <p:bgPr>
+        <a:solidFill>
+          <a:srgbClr val="FFFFFF"/>
+        </a:solidFill>
+      </p:bgPr>
+    </p:bg>
+    <p:spTree>
+      <p:nvGrpSpPr>
+        <p:cNvPr id="1" name=""/>
+        <p:cNvGrpSpPr/>
+        <p:nvPr/>
+      </p:nvGrpSpPr>
+      <p:grpSpPr>
+        <a:xfrm>
+          <a:off x="0" y="0"/>
+          <a:ext cx="0" cy="0"/>
+          <a:chOff x="0" y="0"/>
+          <a:chExt cx="0" cy="0"/>
+        </a:xfrm>
+      </p:grpSpPr>
+      <p:sp>
+        <p:nvSpPr>
+          <p:cNvPr id="2" name="Text 0"/>
+          <p:cNvSpPr txBox="1"/>
+          <p:nvPr/>
+        </p:nvSpPr>
+        <p:spPr>
+          <a:xfrm>
+            <a:off x="548640" y="320040"/>
+            <a:ext cx="8229600" cy="274320"/>
+          </a:xfrm>
+          <a:prstGeom prst="rect">
+            <a:avLst/>
+          </a:prstGeom>
+          <a:noFill/>
+          <a:ln/>
+        </p:spPr>
+        <p:txBody>
+          <a:bodyPr wrap="square" lIns="0" tIns="0" rIns="0" bIns="0" rtlCol="0" anchor="ctr"/>
+          <a:lstStyle/>
+          <a:p>
+            <a:pPr indent="0" marL="0">
+              <a:buNone/>
+            </a:pPr>
+            <a:r>
+              <a:rPr lang="en-US" sz="1200" b="1" spc="200" kern="0" dirty="0">
+                <a:solidFill>
+                  <a:srgbClr val="D9622B"/>
+                </a:solidFill>
+                <a:latin typeface="Calibri" pitchFamily="34" charset="0"/>
+                <a:ea typeface="Calibri" pitchFamily="34" charset="-122"/>
+                <a:cs typeface="Calibri" pitchFamily="34" charset="-120"/>
+              </a:rPr>
+              <a:t>LIMITS</a:t>
+            </a:r>
+            <a:endParaRPr lang="en-US" sz="1200" dirty="0"/>
+          </a:p>
+        </p:txBody>
+      </p:sp>
+      <p:sp>
+        <p:nvSpPr>
+          <p:cNvPr id="3" name="Text 1"/>
+          <p:cNvSpPr txBox="1"/>
+          <p:nvPr/>
+        </p:nvSpPr>
+        <p:spPr>
+          <a:xfrm>
+            <a:off x="548640" y="594360"/>
+            <a:ext cx="11094415" cy="685800"/>
+          </a:xfrm>
+          <a:prstGeom prst="rect">
+            <a:avLst/>
+          </a:prstGeom>
+          <a:noFill/>
+          <a:ln/>
+        </p:spPr>
+        <p:txBody>
+          <a:bodyPr wrap="square" lIns="0" tIns="0" rIns="0" bIns="0" rtlCol="0" anchor="t"/>
+          <a:lstStyle/>
+          <a:p>
+            <a:pPr indent="0" marL="0">
+              <a:buNone/>
+            </a:pPr>
+            <a:r>
+              <a:rPr lang="en-US" sz="2400" b="1" dirty="0">
+                <a:solidFill>
+                  <a:srgbClr val="1F2A33"/>
+                </a:solidFill>
+                <a:latin typeface="Cambria" pitchFamily="34" charset="0"/>
+                <a:ea typeface="Cambria" pitchFamily="34" charset="-122"/>
+                <a:cs typeface="Cambria" pitchFamily="34" charset="-120"/>
+              </a:rPr>
+              <a:t>Where this falls over, and what catches it when it does</a:t>
+            </a:r>
+            <a:endParaRPr lang="en-US" sz="2400" dirty="0"/>
+          </a:p>
+        </p:txBody>
+      </p:sp>
+      <p:sp>
+        <p:nvSpPr>
+          <p:cNvPr id="4" name="Text 2"/>
+          <p:cNvSpPr txBox="1"/>
+          <p:nvPr/>
+        </p:nvSpPr>
+        <p:spPr>
+          <a:xfrm>
+            <a:off x="7985455" y="6473952"/>
+            <a:ext cx="3657600" cy="228600"/>
+          </a:xfrm>
+          <a:prstGeom prst="rect">
+            <a:avLst/>
+          </a:prstGeom>
+          <a:noFill/>
+          <a:ln/>
+        </p:spPr>
+        <p:txBody>
+          <a:bodyPr wrap="square" lIns="0" tIns="0" rIns="0" bIns="0" rtlCol="0" anchor="ctr"/>
+          <a:lstStyle/>
+          <a:p>
+            <a:pPr algn="r" indent="0" marL="0">
+              <a:buNone/>
+            </a:pPr>
+            <a:r>
+              <a:rPr lang="en-US" sz="900" dirty="0">
+                <a:solidFill>
+                  <a:srgbClr val="7D8B97"/>
+                </a:solidFill>
+                <a:latin typeface="Calibri" pitchFamily="34" charset="0"/>
+                <a:ea typeface="Calibri" pitchFamily="34" charset="-122"/>
+                <a:cs typeface="Calibri" pitchFamily="34" charset="-120"/>
+              </a:rPr>
+              <a:t>Beacon Fasteners · FDE case   18</a:t>
+            </a:r>
+            <a:endParaRPr lang="en-US" sz="900" dirty="0"/>
+          </a:p>
+        </p:txBody>
+      </p:sp>
       <p:graphicFrame>
         <p:nvGraphicFramePr>
-          <p:cNvPr id="18" name="Table 0"/>
+          <p:cNvPr id="19" name="Table 0"/>
           <p:cNvGraphicFramePr>
             <a:graphicFrameLocks noGrp="1"/>
           </p:cNvGraphicFramePr>
@@ -15531,7 +16361,7 @@
           </p:nvPr>
         </p:nvGraphicFramePr>
         <p:xfrm>
-          <a:off x="548640" y="1417320"/>
+          <a:off x="548640" y="1554480"/>
           <a:ext cx="11094415" cy="914400"/>
         </p:xfrm>
         <a:graphic>
@@ -15543,7 +16373,7 @@
                 <a:gridCol w="3749040"/>
                 <a:gridCol w="4233672"/>
               </a:tblGrid>
-              <a:tr h="475488">
+              <a:tr h="603504">
                 <a:tc>
                   <a:txBody>
                     <a:bodyPr/>
@@ -15749,7 +16579,7 @@
                   </a:tcPr>
                 </a:tc>
               </a:tr>
-              <a:tr h="475488">
+              <a:tr h="603504">
                 <a:tc>
                   <a:txBody>
                     <a:bodyPr/>
@@ -15759,7 +16589,7 @@
                         <a:buNone/>
                       </a:pPr>
                       <a:r>
-                        <a:rPr lang="en-US" sz="1200" b="1" dirty="0">
+                        <a:rPr lang="en-US" sz="1300" b="1" dirty="0">
                           <a:solidFill>
                             <a:srgbClr val="1F2A33"/>
                           </a:solidFill>
@@ -15769,7 +16599,7 @@
                         </a:rPr>
                         <a:t>A new vendor or a changed layout</a:t>
                       </a:r>
-                      <a:endParaRPr lang="en-US" sz="1200" dirty="0">
+                      <a:endParaRPr lang="en-US" sz="1300" dirty="0">
                         <a:latin typeface="Calibri" charset="0"/>
                         <a:ea typeface="Calibri" charset="0"/>
                         <a:cs typeface="Calibri" charset="0"/>
@@ -15827,7 +16657,7 @@
                         <a:buNone/>
                       </a:pPr>
                       <a:r>
-                        <a:rPr lang="en-US" sz="1200" dirty="0">
+                        <a:rPr lang="en-US" sz="1300" dirty="0">
                           <a:solidFill>
                             <a:srgbClr val="1F2A33"/>
                           </a:solidFill>
@@ -15837,7 +16667,7 @@
                         </a:rPr>
                         <a:t>No parser matches; the PDF shows as unreadable</a:t>
                       </a:r>
-                      <a:endParaRPr lang="en-US" sz="1200" dirty="0">
+                      <a:endParaRPr lang="en-US" sz="1300" dirty="0">
                         <a:latin typeface="Calibri" charset="0"/>
                         <a:ea typeface="Calibri" charset="0"/>
                         <a:cs typeface="Calibri" charset="0"/>
@@ -15895,7 +16725,7 @@
                         <a:buNone/>
                       </a:pPr>
                       <a:r>
-                        <a:rPr lang="en-US" sz="1200" dirty="0">
+                        <a:rPr lang="en-US" sz="1300" dirty="0">
                           <a:solidFill>
                             <a:srgbClr val="1F2A33"/>
                           </a:solidFill>
@@ -15903,9 +16733,9 @@
                           <a:ea typeface="Calibri" pitchFamily="34" charset="-122"/>
                           <a:cs typeface="Calibri" pitchFamily="34" charset="-120"/>
                         </a:rPr>
-                        <a:t>Beacon's acknowledgment form removes the layout problem; meanwhile manual form or AI reader (off by default)</a:t>
+                        <a:t>Claude reads it (tested: 125/125 fields); Beacon's form removes the problem</a:t>
                       </a:r>
-                      <a:endParaRPr lang="en-US" sz="1200" dirty="0">
+                      <a:endParaRPr lang="en-US" sz="1300" dirty="0">
                         <a:latin typeface="Calibri" charset="0"/>
                         <a:ea typeface="Calibri" charset="0"/>
                         <a:cs typeface="Calibri" charset="0"/>
@@ -15955,7 +16785,7 @@
                   </a:tcPr>
                 </a:tc>
               </a:tr>
-              <a:tr h="475488">
+              <a:tr h="603504">
                 <a:tc>
                   <a:txBody>
                     <a:bodyPr/>
@@ -15965,7 +16795,7 @@
                         <a:buNone/>
                       </a:pPr>
                       <a:r>
-                        <a:rPr lang="en-US" sz="1200" b="1" dirty="0">
+                        <a:rPr lang="en-US" sz="1300" b="1" dirty="0">
                           <a:solidFill>
                             <a:srgbClr val="1F2A33"/>
                           </a:solidFill>
@@ -15973,9 +16803,9 @@
                           <a:ea typeface="Calibri" pitchFamily="34" charset="-122"/>
                           <a:cs typeface="Calibri" pitchFamily="34" charset="-120"/>
                         </a:rPr>
-                        <a:t>Vendors don't use the form</a:t>
+                        <a:t>A poor scan</a:t>
                       </a:r>
-                      <a:endParaRPr lang="en-US" sz="1200" dirty="0">
+                      <a:endParaRPr lang="en-US" sz="1300" dirty="0">
                         <a:latin typeface="Calibri" charset="0"/>
                         <a:ea typeface="Calibri" charset="0"/>
                         <a:cs typeface="Calibri" charset="0"/>
@@ -16033,7 +16863,7 @@
                         <a:buNone/>
                       </a:pPr>
                       <a:r>
-                        <a:rPr lang="en-US" sz="1200" dirty="0">
+                        <a:rPr lang="en-US" sz="1300" dirty="0">
                           <a:solidFill>
                             <a:srgbClr val="1F2A33"/>
                           </a:solidFill>
@@ -16041,9 +16871,9 @@
                           <a:ea typeface="Calibri" pitchFamily="34" charset="-122"/>
                           <a:cs typeface="Calibri" pitchFamily="34" charset="-120"/>
                         </a:rPr>
-                        <a:t>They keep sending their own PDFs</a:t>
+                        <a:t>OCR can misread a digit</a:t>
                       </a:r>
-                      <a:endParaRPr lang="en-US" sz="1200" dirty="0">
+                      <a:endParaRPr lang="en-US" sz="1300" dirty="0">
                         <a:latin typeface="Calibri" charset="0"/>
                         <a:ea typeface="Calibri" charset="0"/>
                         <a:cs typeface="Calibri" charset="0"/>
@@ -16101,7 +16931,7 @@
                         <a:buNone/>
                       </a:pPr>
                       <a:r>
-                        <a:rPr lang="en-US" sz="1200" dirty="0">
+                        <a:rPr lang="en-US" sz="1300" dirty="0">
                           <a:solidFill>
                             <a:srgbClr val="1F2A33"/>
                           </a:solidFill>
@@ -16109,9 +16939,9 @@
                           <a:ea typeface="Calibri" pitchFamily="34" charset="-122"/>
                           <a:cs typeface="Calibri" pitchFamily="34" charset="-120"/>
                         </a:rPr>
-                        <a:t>PDFs keep working; start with the 3 vendors that cost the most reading time</a:t>
+                        <a:t>Every OCR'd doc goes to Needs your OK, shown next to the image</a:t>
                       </a:r>
-                      <a:endParaRPr lang="en-US" sz="1200" dirty="0">
+                      <a:endParaRPr lang="en-US" sz="1300" dirty="0">
                         <a:latin typeface="Calibri" charset="0"/>
                         <a:ea typeface="Calibri" charset="0"/>
                         <a:cs typeface="Calibri" charset="0"/>
@@ -16161,7 +16991,7 @@
                   </a:tcPr>
                 </a:tc>
               </a:tr>
-              <a:tr h="475488">
+              <a:tr h="603504">
                 <a:tc>
                   <a:txBody>
                     <a:bodyPr/>
@@ -16171,7 +17001,7 @@
                         <a:buNone/>
                       </a:pPr>
                       <a:r>
-                        <a:rPr lang="en-US" sz="1200" b="1" dirty="0">
+                        <a:rPr lang="en-US" sz="1300" b="1" dirty="0">
                           <a:solidFill>
                             <a:srgbClr val="1F2A33"/>
                           </a:solidFill>
@@ -16179,9 +17009,9 @@
                           <a:ea typeface="Calibri" pitchFamily="34" charset="-122"/>
                           <a:cs typeface="Calibri" pitchFamily="34" charset="-120"/>
                         </a:rPr>
-                        <a:t>A poor scan</a:t>
+                        <a:t>Two PO lines with the same qty and price</a:t>
                       </a:r>
-                      <a:endParaRPr lang="en-US" sz="1200" dirty="0">
+                      <a:endParaRPr lang="en-US" sz="1300" dirty="0">
                         <a:latin typeface="Calibri" charset="0"/>
                         <a:ea typeface="Calibri" charset="0"/>
                         <a:cs typeface="Calibri" charset="0"/>
@@ -16239,7 +17069,7 @@
                         <a:buNone/>
                       </a:pPr>
                       <a:r>
-                        <a:rPr lang="en-US" sz="1200" dirty="0">
+                        <a:rPr lang="en-US" sz="1300" dirty="0">
                           <a:solidFill>
                             <a:srgbClr val="1F2A33"/>
                           </a:solidFill>
@@ -16247,9 +17077,9 @@
                           <a:ea typeface="Calibri" pitchFamily="34" charset="-122"/>
                           <a:cs typeface="Calibri" pitchFamily="34" charset="-120"/>
                         </a:rPr>
-                        <a:t>OCR can misread a digit</a:t>
+                        <a:t>An L4 inference could pair the wrong lines</a:t>
                       </a:r>
-                      <a:endParaRPr lang="en-US" sz="1200" dirty="0">
+                      <a:endParaRPr lang="en-US" sz="1300" dirty="0">
                         <a:latin typeface="Calibri" charset="0"/>
                         <a:ea typeface="Calibri" charset="0"/>
                         <a:cs typeface="Calibri" charset="0"/>
@@ -16307,7 +17137,7 @@
                         <a:buNone/>
                       </a:pPr>
                       <a:r>
-                        <a:rPr lang="en-US" sz="1200" dirty="0">
+                        <a:rPr lang="en-US" sz="1300" dirty="0">
                           <a:solidFill>
                             <a:srgbClr val="1F2A33"/>
                           </a:solidFill>
@@ -16315,9 +17145,9 @@
                           <a:ea typeface="Calibri" pitchFamily="34" charset="-122"/>
                           <a:cs typeface="Calibri" pitchFamily="34" charset="-120"/>
                         </a:rPr>
-                        <a:t>Every OCR'd doc goes to Needs your OK, shown next to the image</a:t>
+                        <a:t>L4 is never HIGH; always goes to review</a:t>
                       </a:r>
-                      <a:endParaRPr lang="en-US" sz="1200" dirty="0">
+                      <a:endParaRPr lang="en-US" sz="1300" dirty="0">
                         <a:latin typeface="Calibri" charset="0"/>
                         <a:ea typeface="Calibri" charset="0"/>
                         <a:cs typeface="Calibri" charset="0"/>
@@ -16367,7 +17197,7 @@
                   </a:tcPr>
                 </a:tc>
               </a:tr>
-              <a:tr h="475488">
+              <a:tr h="603504">
                 <a:tc>
                   <a:txBody>
                     <a:bodyPr/>
@@ -16377,7 +17207,7 @@
                         <a:buNone/>
                       </a:pPr>
                       <a:r>
-                        <a:rPr lang="en-US" sz="1200" b="1" dirty="0">
+                        <a:rPr lang="en-US" sz="1300" b="1" dirty="0">
                           <a:solidFill>
                             <a:srgbClr val="1F2A33"/>
                           </a:solidFill>
@@ -16385,9 +17215,9 @@
                           <a:ea typeface="Calibri" pitchFamily="34" charset="-122"/>
                           <a:cs typeface="Calibri" pitchFamily="34" charset="-120"/>
                         </a:rPr>
-                        <a:t>Two PO lines with the same qty and price</a:t>
+                        <a:t>A stale open-PO CSV</a:t>
                       </a:r>
-                      <a:endParaRPr lang="en-US" sz="1200" dirty="0">
+                      <a:endParaRPr lang="en-US" sz="1300" dirty="0">
                         <a:latin typeface="Calibri" charset="0"/>
                         <a:ea typeface="Calibri" charset="0"/>
                         <a:cs typeface="Calibri" charset="0"/>
@@ -16445,7 +17275,7 @@
                         <a:buNone/>
                       </a:pPr>
                       <a:r>
-                        <a:rPr lang="en-US" sz="1200" dirty="0">
+                        <a:rPr lang="en-US" sz="1300" dirty="0">
                           <a:solidFill>
                             <a:srgbClr val="1F2A33"/>
                           </a:solidFill>
@@ -16453,9 +17283,9 @@
                           <a:ea typeface="Calibri" pitchFamily="34" charset="-122"/>
                           <a:cs typeface="Calibri" pitchFamily="34" charset="-120"/>
                         </a:rPr>
-                        <a:t>An L4 inference could pair the wrong lines</a:t>
+                        <a:t>False "PO not open" or "possible dropped line"</a:t>
                       </a:r>
-                      <a:endParaRPr lang="en-US" sz="1200" dirty="0">
+                      <a:endParaRPr lang="en-US" sz="1300" dirty="0">
                         <a:latin typeface="Calibri" charset="0"/>
                         <a:ea typeface="Calibri" charset="0"/>
                         <a:cs typeface="Calibri" charset="0"/>
@@ -16513,7 +17343,7 @@
                         <a:buNone/>
                       </a:pPr>
                       <a:r>
-                        <a:rPr lang="en-US" sz="1200" dirty="0">
+                        <a:rPr lang="en-US" sz="1300" dirty="0">
                           <a:solidFill>
                             <a:srgbClr val="1F2A33"/>
                           </a:solidFill>
@@ -16521,9 +17351,9 @@
                           <a:ea typeface="Calibri" pitchFamily="34" charset="-122"/>
                           <a:cs typeface="Calibri" pitchFamily="34" charset="-120"/>
                         </a:rPr>
-                        <a:t>L4 is never HIGH; always goes to review</a:t>
+                        <a:t>Pull the export each morning; show its as-of date</a:t>
                       </a:r>
-                      <a:endParaRPr lang="en-US" sz="1200" dirty="0">
+                      <a:endParaRPr lang="en-US" sz="1300" dirty="0">
                         <a:latin typeface="Calibri" charset="0"/>
                         <a:ea typeface="Calibri" charset="0"/>
                         <a:cs typeface="Calibri" charset="0"/>
@@ -16573,7 +17403,7 @@
                   </a:tcPr>
                 </a:tc>
               </a:tr>
-              <a:tr h="475488">
+              <a:tr h="603504">
                 <a:tc>
                   <a:txBody>
                     <a:bodyPr/>
@@ -16583,7 +17413,7 @@
                         <a:buNone/>
                       </a:pPr>
                       <a:r>
-                        <a:rPr lang="en-US" sz="1200" b="1" dirty="0">
+                        <a:rPr lang="en-US" sz="1300" b="1" dirty="0">
                           <a:solidFill>
                             <a:srgbClr val="1F2A33"/>
                           </a:solidFill>
@@ -16591,9 +17421,9 @@
                           <a:ea typeface="Calibri" pitchFamily="34" charset="-122"/>
                           <a:cs typeface="Calibri" pitchFamily="34" charset="-120"/>
                         </a:rPr>
-                        <a:t>A stale open-PO CSV</a:t>
+                        <a:t>Task 2: value at PO price</a:t>
                       </a:r>
-                      <a:endParaRPr lang="en-US" sz="1200" dirty="0">
+                      <a:endParaRPr lang="en-US" sz="1300" dirty="0">
                         <a:latin typeface="Calibri" charset="0"/>
                         <a:ea typeface="Calibri" charset="0"/>
                         <a:cs typeface="Calibri" charset="0"/>
@@ -16651,7 +17481,7 @@
                         <a:buNone/>
                       </a:pPr>
                       <a:r>
-                        <a:rPr lang="en-US" sz="1200" dirty="0">
+                        <a:rPr lang="en-US" sz="1300" dirty="0">
                           <a:solidFill>
                             <a:srgbClr val="1F2A33"/>
                           </a:solidFill>
@@ -16659,9 +17489,9 @@
                           <a:ea typeface="Calibri" pitchFamily="34" charset="-122"/>
                           <a:cs typeface="Calibri" pitchFamily="34" charset="-120"/>
                         </a:rPr>
-                        <a:t>False "PO not open" or "possible dropped line"</a:t>
+                        <a:t>Not invoiced cost; no AP data in the extract</a:t>
                       </a:r>
-                      <a:endParaRPr lang="en-US" sz="1200" dirty="0">
+                      <a:endParaRPr lang="en-US" sz="1300" dirty="0">
                         <a:latin typeface="Calibri" charset="0"/>
                         <a:ea typeface="Calibri" charset="0"/>
                         <a:cs typeface="Calibri" charset="0"/>
@@ -16719,7 +17549,7 @@
                         <a:buNone/>
                       </a:pPr>
                       <a:r>
-                        <a:rPr lang="en-US" sz="1200" dirty="0">
+                        <a:rPr lang="en-US" sz="1300" dirty="0">
                           <a:solidFill>
                             <a:srgbClr val="1F2A33"/>
                           </a:solidFill>
@@ -16727,9 +17557,9 @@
                           <a:ea typeface="Calibri" pitchFamily="34" charset="-122"/>
                           <a:cs typeface="Calibri" pitchFamily="34" charset="-120"/>
                         </a:rPr>
-                        <a:t>Pull the export each morning; show its as-of date</a:t>
+                        <a:t>Add invoice lines, then true price variance</a:t>
                       </a:r>
-                      <a:endParaRPr lang="en-US" sz="1200" dirty="0">
+                      <a:endParaRPr lang="en-US" sz="1300" dirty="0">
                         <a:latin typeface="Calibri" charset="0"/>
                         <a:ea typeface="Calibri" charset="0"/>
                         <a:cs typeface="Calibri" charset="0"/>
@@ -16779,7 +17609,7 @@
                   </a:tcPr>
                 </a:tc>
               </a:tr>
-              <a:tr h="475488">
+              <a:tr h="603504">
                 <a:tc>
                   <a:txBody>
                     <a:bodyPr/>
@@ -16789,7 +17619,7 @@
                         <a:buNone/>
                       </a:pPr>
                       <a:r>
-                        <a:rPr lang="en-US" sz="1200" b="1" dirty="0">
+                        <a:rPr lang="en-US" sz="1300" b="1" dirty="0">
                           <a:solidFill>
                             <a:srgbClr val="1F2A33"/>
                           </a:solidFill>
@@ -16797,9 +17627,9 @@
                           <a:ea typeface="Calibri" pitchFamily="34" charset="-122"/>
                           <a:cs typeface="Calibri" pitchFamily="34" charset="-120"/>
                         </a:rPr>
-                        <a:t>FX and price tolerance</a:t>
+                        <a:t>Task 2: no production-impact data</a:t>
                       </a:r>
-                      <a:endParaRPr lang="en-US" sz="1200" dirty="0">
+                      <a:endParaRPr lang="en-US" sz="1300" dirty="0">
                         <a:latin typeface="Calibri" charset="0"/>
                         <a:ea typeface="Calibri" charset="0"/>
                         <a:cs typeface="Calibri" charset="0"/>
@@ -16857,7 +17687,7 @@
                         <a:buNone/>
                       </a:pPr>
                       <a:r>
-                        <a:rPr lang="en-US" sz="1200" dirty="0">
+                        <a:rPr lang="en-US" sz="1300" dirty="0">
                           <a:solidFill>
                             <a:srgbClr val="1F2A33"/>
                           </a:solidFill>
@@ -16865,9 +17695,9 @@
                           <a:ea typeface="Calibri" pitchFamily="34" charset="-122"/>
                           <a:cs typeface="Calibri" pitchFamily="34" charset="-120"/>
                         </a:rPr>
-                        <a:t>EUR checked at the ERP monthly rate, 1% band</a:t>
+                        <a:t>Can rank exposure, but can't prove cost</a:t>
                       </a:r>
-                      <a:endParaRPr lang="en-US" sz="1200" dirty="0">
+                      <a:endParaRPr lang="en-US" sz="1300" dirty="0">
                         <a:latin typeface="Calibri" charset="0"/>
                         <a:ea typeface="Calibri" charset="0"/>
                         <a:cs typeface="Calibri" charset="0"/>
@@ -16925,625 +17755,7 @@
                         <a:buNone/>
                       </a:pPr>
                       <a:r>
-                        <a:rPr lang="en-US" sz="1200" dirty="0">
-                          <a:solidFill>
-                            <a:srgbClr val="1F2A33"/>
-                          </a:solidFill>
-                          <a:latin typeface="Calibri" pitchFamily="34" charset="0"/>
-                          <a:ea typeface="Calibri" pitchFamily="34" charset="-122"/>
-                          <a:cs typeface="Calibri" pitchFamily="34" charset="-120"/>
-                        </a:rPr>
-                        <a:t>Confirm with Lisa and AP what counts as a real difference</a:t>
-                      </a:r>
-                      <a:endParaRPr lang="en-US" sz="1200" dirty="0">
-                        <a:latin typeface="Calibri" charset="0"/>
-                        <a:ea typeface="Calibri" charset="0"/>
-                        <a:cs typeface="Calibri" charset="0"/>
-                      </a:endParaRPr>
-                    </a:p>
-                  </a:txBody>
-                  <a:tcPr marL="45720" marR="45720" marT="45720" marB="45720" anchor="ctr">
-                    <a:lnL w="6350" cap="flat" cmpd="sng" algn="ctr">
-                      <a:solidFill>
-                        <a:srgbClr val="D5DCE2"/>
-                      </a:solidFill>
-                      <a:prstDash val="solid"/>
-                      <a:round/>
-                      <a:headEnd type="none" w="med" len="med"/>
-                      <a:tailEnd type="none" w="med" len="med"/>
-                    </a:lnL>
-                    <a:lnR w="6350" cap="flat" cmpd="sng" algn="ctr">
-                      <a:solidFill>
-                        <a:srgbClr val="D5DCE2"/>
-                      </a:solidFill>
-                      <a:prstDash val="solid"/>
-                      <a:round/>
-                      <a:headEnd type="none" w="med" len="med"/>
-                      <a:tailEnd type="none" w="med" len="med"/>
-                    </a:lnR>
-                    <a:lnT w="6350" cap="flat" cmpd="sng" algn="ctr">
-                      <a:solidFill>
-                        <a:srgbClr val="D5DCE2"/>
-                      </a:solidFill>
-                      <a:prstDash val="solid"/>
-                      <a:round/>
-                      <a:headEnd type="none" w="med" len="med"/>
-                      <a:tailEnd type="none" w="med" len="med"/>
-                    </a:lnT>
-                    <a:lnB w="6350" cap="flat" cmpd="sng" algn="ctr">
-                      <a:solidFill>
-                        <a:srgbClr val="D5DCE2"/>
-                      </a:solidFill>
-                      <a:prstDash val="solid"/>
-                      <a:round/>
-                      <a:headEnd type="none" w="med" len="med"/>
-                      <a:tailEnd type="none" w="med" len="med"/>
-                    </a:lnB>
-                    <a:solidFill>
-                      <a:srgbClr val="FFFFFF"/>
-                    </a:solidFill>
-                  </a:tcPr>
-                </a:tc>
-              </a:tr>
-              <a:tr h="475488">
-                <a:tc>
-                  <a:txBody>
-                    <a:bodyPr/>
-                    <a:lstStyle/>
-                    <a:p>
-                      <a:pPr indent="0" marL="0">
-                        <a:buNone/>
-                      </a:pPr>
-                      <a:r>
-                        <a:rPr lang="en-US" sz="1200" b="1" dirty="0">
-                          <a:solidFill>
-                            <a:srgbClr val="1F2A33"/>
-                          </a:solidFill>
-                          <a:latin typeface="Calibri" pitchFamily="34" charset="0"/>
-                          <a:ea typeface="Calibri" pitchFamily="34" charset="-122"/>
-                          <a:cs typeface="Calibri" pitchFamily="34" charset="-120"/>
-                        </a:rPr>
-                        <a:t>Task 2: value at PO price</a:t>
-                      </a:r>
-                      <a:endParaRPr lang="en-US" sz="1200" dirty="0">
-                        <a:latin typeface="Calibri" charset="0"/>
-                        <a:ea typeface="Calibri" charset="0"/>
-                        <a:cs typeface="Calibri" charset="0"/>
-                      </a:endParaRPr>
-                    </a:p>
-                  </a:txBody>
-                  <a:tcPr marL="45720" marR="45720" marT="45720" marB="45720" anchor="ctr">
-                    <a:lnL w="6350" cap="flat" cmpd="sng" algn="ctr">
-                      <a:solidFill>
-                        <a:srgbClr val="D5DCE2"/>
-                      </a:solidFill>
-                      <a:prstDash val="solid"/>
-                      <a:round/>
-                      <a:headEnd type="none" w="med" len="med"/>
-                      <a:tailEnd type="none" w="med" len="med"/>
-                    </a:lnL>
-                    <a:lnR w="6350" cap="flat" cmpd="sng" algn="ctr">
-                      <a:solidFill>
-                        <a:srgbClr val="D5DCE2"/>
-                      </a:solidFill>
-                      <a:prstDash val="solid"/>
-                      <a:round/>
-                      <a:headEnd type="none" w="med" len="med"/>
-                      <a:tailEnd type="none" w="med" len="med"/>
-                    </a:lnR>
-                    <a:lnT w="6350" cap="flat" cmpd="sng" algn="ctr">
-                      <a:solidFill>
-                        <a:srgbClr val="D5DCE2"/>
-                      </a:solidFill>
-                      <a:prstDash val="solid"/>
-                      <a:round/>
-                      <a:headEnd type="none" w="med" len="med"/>
-                      <a:tailEnd type="none" w="med" len="med"/>
-                    </a:lnT>
-                    <a:lnB w="6350" cap="flat" cmpd="sng" algn="ctr">
-                      <a:solidFill>
-                        <a:srgbClr val="D5DCE2"/>
-                      </a:solidFill>
-                      <a:prstDash val="solid"/>
-                      <a:round/>
-                      <a:headEnd type="none" w="med" len="med"/>
-                      <a:tailEnd type="none" w="med" len="med"/>
-                    </a:lnB>
-                    <a:solidFill>
-                      <a:srgbClr val="F6F8FA"/>
-                    </a:solidFill>
-                  </a:tcPr>
-                </a:tc>
-                <a:tc>
-                  <a:txBody>
-                    <a:bodyPr/>
-                    <a:lstStyle/>
-                    <a:p>
-                      <a:pPr indent="0" marL="0">
-                        <a:buNone/>
-                      </a:pPr>
-                      <a:r>
-                        <a:rPr lang="en-US" sz="1200" dirty="0">
-                          <a:solidFill>
-                            <a:srgbClr val="1F2A33"/>
-                          </a:solidFill>
-                          <a:latin typeface="Calibri" pitchFamily="34" charset="0"/>
-                          <a:ea typeface="Calibri" pitchFamily="34" charset="-122"/>
-                          <a:cs typeface="Calibri" pitchFamily="34" charset="-120"/>
-                        </a:rPr>
-                        <a:t>Not invoiced cost; no AP data in the extract</a:t>
-                      </a:r>
-                      <a:endParaRPr lang="en-US" sz="1200" dirty="0">
-                        <a:latin typeface="Calibri" charset="0"/>
-                        <a:ea typeface="Calibri" charset="0"/>
-                        <a:cs typeface="Calibri" charset="0"/>
-                      </a:endParaRPr>
-                    </a:p>
-                  </a:txBody>
-                  <a:tcPr marL="45720" marR="45720" marT="45720" marB="45720" anchor="ctr">
-                    <a:lnL w="6350" cap="flat" cmpd="sng" algn="ctr">
-                      <a:solidFill>
-                        <a:srgbClr val="D5DCE2"/>
-                      </a:solidFill>
-                      <a:prstDash val="solid"/>
-                      <a:round/>
-                      <a:headEnd type="none" w="med" len="med"/>
-                      <a:tailEnd type="none" w="med" len="med"/>
-                    </a:lnL>
-                    <a:lnR w="6350" cap="flat" cmpd="sng" algn="ctr">
-                      <a:solidFill>
-                        <a:srgbClr val="D5DCE2"/>
-                      </a:solidFill>
-                      <a:prstDash val="solid"/>
-                      <a:round/>
-                      <a:headEnd type="none" w="med" len="med"/>
-                      <a:tailEnd type="none" w="med" len="med"/>
-                    </a:lnR>
-                    <a:lnT w="6350" cap="flat" cmpd="sng" algn="ctr">
-                      <a:solidFill>
-                        <a:srgbClr val="D5DCE2"/>
-                      </a:solidFill>
-                      <a:prstDash val="solid"/>
-                      <a:round/>
-                      <a:headEnd type="none" w="med" len="med"/>
-                      <a:tailEnd type="none" w="med" len="med"/>
-                    </a:lnT>
-                    <a:lnB w="6350" cap="flat" cmpd="sng" algn="ctr">
-                      <a:solidFill>
-                        <a:srgbClr val="D5DCE2"/>
-                      </a:solidFill>
-                      <a:prstDash val="solid"/>
-                      <a:round/>
-                      <a:headEnd type="none" w="med" len="med"/>
-                      <a:tailEnd type="none" w="med" len="med"/>
-                    </a:lnB>
-                    <a:solidFill>
-                      <a:srgbClr val="F6F8FA"/>
-                    </a:solidFill>
-                  </a:tcPr>
-                </a:tc>
-                <a:tc>
-                  <a:txBody>
-                    <a:bodyPr/>
-                    <a:lstStyle/>
-                    <a:p>
-                      <a:pPr indent="0" marL="0">
-                        <a:buNone/>
-                      </a:pPr>
-                      <a:r>
-                        <a:rPr lang="en-US" sz="1200" dirty="0">
-                          <a:solidFill>
-                            <a:srgbClr val="1F2A33"/>
-                          </a:solidFill>
-                          <a:latin typeface="Calibri" pitchFamily="34" charset="0"/>
-                          <a:ea typeface="Calibri" pitchFamily="34" charset="-122"/>
-                          <a:cs typeface="Calibri" pitchFamily="34" charset="-120"/>
-                        </a:rPr>
-                        <a:t>Add invoice lines, then true price variance</a:t>
-                      </a:r>
-                      <a:endParaRPr lang="en-US" sz="1200" dirty="0">
-                        <a:latin typeface="Calibri" charset="0"/>
-                        <a:ea typeface="Calibri" charset="0"/>
-                        <a:cs typeface="Calibri" charset="0"/>
-                      </a:endParaRPr>
-                    </a:p>
-                  </a:txBody>
-                  <a:tcPr marL="45720" marR="45720" marT="45720" marB="45720" anchor="ctr">
-                    <a:lnL w="6350" cap="flat" cmpd="sng" algn="ctr">
-                      <a:solidFill>
-                        <a:srgbClr val="D5DCE2"/>
-                      </a:solidFill>
-                      <a:prstDash val="solid"/>
-                      <a:round/>
-                      <a:headEnd type="none" w="med" len="med"/>
-                      <a:tailEnd type="none" w="med" len="med"/>
-                    </a:lnL>
-                    <a:lnR w="6350" cap="flat" cmpd="sng" algn="ctr">
-                      <a:solidFill>
-                        <a:srgbClr val="D5DCE2"/>
-                      </a:solidFill>
-                      <a:prstDash val="solid"/>
-                      <a:round/>
-                      <a:headEnd type="none" w="med" len="med"/>
-                      <a:tailEnd type="none" w="med" len="med"/>
-                    </a:lnR>
-                    <a:lnT w="6350" cap="flat" cmpd="sng" algn="ctr">
-                      <a:solidFill>
-                        <a:srgbClr val="D5DCE2"/>
-                      </a:solidFill>
-                      <a:prstDash val="solid"/>
-                      <a:round/>
-                      <a:headEnd type="none" w="med" len="med"/>
-                      <a:tailEnd type="none" w="med" len="med"/>
-                    </a:lnT>
-                    <a:lnB w="6350" cap="flat" cmpd="sng" algn="ctr">
-                      <a:solidFill>
-                        <a:srgbClr val="D5DCE2"/>
-                      </a:solidFill>
-                      <a:prstDash val="solid"/>
-                      <a:round/>
-                      <a:headEnd type="none" w="med" len="med"/>
-                      <a:tailEnd type="none" w="med" len="med"/>
-                    </a:lnB>
-                    <a:solidFill>
-                      <a:srgbClr val="F6F8FA"/>
-                    </a:solidFill>
-                  </a:tcPr>
-                </a:tc>
-              </a:tr>
-              <a:tr h="475488">
-                <a:tc>
-                  <a:txBody>
-                    <a:bodyPr/>
-                    <a:lstStyle/>
-                    <a:p>
-                      <a:pPr indent="0" marL="0">
-                        <a:buNone/>
-                      </a:pPr>
-                      <a:r>
-                        <a:rPr lang="en-US" sz="1200" b="1" dirty="0">
-                          <a:solidFill>
-                            <a:srgbClr val="1F2A33"/>
-                          </a:solidFill>
-                          <a:latin typeface="Calibri" pitchFamily="34" charset="0"/>
-                          <a:ea typeface="Calibri" pitchFamily="34" charset="-122"/>
-                          <a:cs typeface="Calibri" pitchFamily="34" charset="-120"/>
-                        </a:rPr>
-                        <a:t>Task 2: the confirmation feed ends 04/03</a:t>
-                      </a:r>
-                      <a:endParaRPr lang="en-US" sz="1200" dirty="0">
-                        <a:latin typeface="Calibri" charset="0"/>
-                        <a:ea typeface="Calibri" charset="0"/>
-                        <a:cs typeface="Calibri" charset="0"/>
-                      </a:endParaRPr>
-                    </a:p>
-                  </a:txBody>
-                  <a:tcPr marL="45720" marR="45720" marT="45720" marB="45720" anchor="ctr">
-                    <a:lnL w="6350" cap="flat" cmpd="sng" algn="ctr">
-                      <a:solidFill>
-                        <a:srgbClr val="D5DCE2"/>
-                      </a:solidFill>
-                      <a:prstDash val="solid"/>
-                      <a:round/>
-                      <a:headEnd type="none" w="med" len="med"/>
-                      <a:tailEnd type="none" w="med" len="med"/>
-                    </a:lnL>
-                    <a:lnR w="6350" cap="flat" cmpd="sng" algn="ctr">
-                      <a:solidFill>
-                        <a:srgbClr val="D5DCE2"/>
-                      </a:solidFill>
-                      <a:prstDash val="solid"/>
-                      <a:round/>
-                      <a:headEnd type="none" w="med" len="med"/>
-                      <a:tailEnd type="none" w="med" len="med"/>
-                    </a:lnR>
-                    <a:lnT w="6350" cap="flat" cmpd="sng" algn="ctr">
-                      <a:solidFill>
-                        <a:srgbClr val="D5DCE2"/>
-                      </a:solidFill>
-                      <a:prstDash val="solid"/>
-                      <a:round/>
-                      <a:headEnd type="none" w="med" len="med"/>
-                      <a:tailEnd type="none" w="med" len="med"/>
-                    </a:lnT>
-                    <a:lnB w="6350" cap="flat" cmpd="sng" algn="ctr">
-                      <a:solidFill>
-                        <a:srgbClr val="D5DCE2"/>
-                      </a:solidFill>
-                      <a:prstDash val="solid"/>
-                      <a:round/>
-                      <a:headEnd type="none" w="med" len="med"/>
-                      <a:tailEnd type="none" w="med" len="med"/>
-                    </a:lnB>
-                    <a:solidFill>
-                      <a:srgbClr val="FFFFFF"/>
-                    </a:solidFill>
-                  </a:tcPr>
-                </a:tc>
-                <a:tc>
-                  <a:txBody>
-                    <a:bodyPr/>
-                    <a:lstStyle/>
-                    <a:p>
-                      <a:pPr indent="0" marL="0">
-                        <a:buNone/>
-                      </a:pPr>
-                      <a:r>
-                        <a:rPr lang="en-US" sz="1200" dirty="0">
-                          <a:solidFill>
-                            <a:srgbClr val="1F2A33"/>
-                          </a:solidFill>
-                          <a:latin typeface="Calibri" pitchFamily="34" charset="0"/>
-                          <a:ea typeface="Calibri" pitchFamily="34" charset="-122"/>
-                          <a:cs typeface="Calibri" pitchFamily="34" charset="-120"/>
-                        </a:rPr>
-                        <a:t>Promise metrics use POs to 03/30 only</a:t>
-                      </a:r>
-                      <a:endParaRPr lang="en-US" sz="1200" dirty="0">
-                        <a:latin typeface="Calibri" charset="0"/>
-                        <a:ea typeface="Calibri" charset="0"/>
-                        <a:cs typeface="Calibri" charset="0"/>
-                      </a:endParaRPr>
-                    </a:p>
-                  </a:txBody>
-                  <a:tcPr marL="45720" marR="45720" marT="45720" marB="45720" anchor="ctr">
-                    <a:lnL w="6350" cap="flat" cmpd="sng" algn="ctr">
-                      <a:solidFill>
-                        <a:srgbClr val="D5DCE2"/>
-                      </a:solidFill>
-                      <a:prstDash val="solid"/>
-                      <a:round/>
-                      <a:headEnd type="none" w="med" len="med"/>
-                      <a:tailEnd type="none" w="med" len="med"/>
-                    </a:lnL>
-                    <a:lnR w="6350" cap="flat" cmpd="sng" algn="ctr">
-                      <a:solidFill>
-                        <a:srgbClr val="D5DCE2"/>
-                      </a:solidFill>
-                      <a:prstDash val="solid"/>
-                      <a:round/>
-                      <a:headEnd type="none" w="med" len="med"/>
-                      <a:tailEnd type="none" w="med" len="med"/>
-                    </a:lnR>
-                    <a:lnT w="6350" cap="flat" cmpd="sng" algn="ctr">
-                      <a:solidFill>
-                        <a:srgbClr val="D5DCE2"/>
-                      </a:solidFill>
-                      <a:prstDash val="solid"/>
-                      <a:round/>
-                      <a:headEnd type="none" w="med" len="med"/>
-                      <a:tailEnd type="none" w="med" len="med"/>
-                    </a:lnT>
-                    <a:lnB w="6350" cap="flat" cmpd="sng" algn="ctr">
-                      <a:solidFill>
-                        <a:srgbClr val="D5DCE2"/>
-                      </a:solidFill>
-                      <a:prstDash val="solid"/>
-                      <a:round/>
-                      <a:headEnd type="none" w="med" len="med"/>
-                      <a:tailEnd type="none" w="med" len="med"/>
-                    </a:lnB>
-                    <a:solidFill>
-                      <a:srgbClr val="FFFFFF"/>
-                    </a:solidFill>
-                  </a:tcPr>
-                </a:tc>
-                <a:tc>
-                  <a:txBody>
-                    <a:bodyPr/>
-                    <a:lstStyle/>
-                    <a:p>
-                      <a:pPr indent="0" marL="0">
-                        <a:buNone/>
-                      </a:pPr>
-                      <a:r>
-                        <a:rPr lang="en-US" sz="1200" dirty="0">
-                          <a:solidFill>
-                            <a:srgbClr val="1F2A33"/>
-                          </a:solidFill>
-                          <a:latin typeface="Calibri" pitchFamily="34" charset="0"/>
-                          <a:ea typeface="Calibri" pitchFamily="34" charset="-122"/>
-                          <a:cs typeface="Calibri" pitchFamily="34" charset="-120"/>
-                        </a:rPr>
-                        <a:t>Ask why the feed stopped</a:t>
-                      </a:r>
-                      <a:endParaRPr lang="en-US" sz="1200" dirty="0">
-                        <a:latin typeface="Calibri" charset="0"/>
-                        <a:ea typeface="Calibri" charset="0"/>
-                        <a:cs typeface="Calibri" charset="0"/>
-                      </a:endParaRPr>
-                    </a:p>
-                  </a:txBody>
-                  <a:tcPr marL="45720" marR="45720" marT="45720" marB="45720" anchor="ctr">
-                    <a:lnL w="6350" cap="flat" cmpd="sng" algn="ctr">
-                      <a:solidFill>
-                        <a:srgbClr val="D5DCE2"/>
-                      </a:solidFill>
-                      <a:prstDash val="solid"/>
-                      <a:round/>
-                      <a:headEnd type="none" w="med" len="med"/>
-                      <a:tailEnd type="none" w="med" len="med"/>
-                    </a:lnL>
-                    <a:lnR w="6350" cap="flat" cmpd="sng" algn="ctr">
-                      <a:solidFill>
-                        <a:srgbClr val="D5DCE2"/>
-                      </a:solidFill>
-                      <a:prstDash val="solid"/>
-                      <a:round/>
-                      <a:headEnd type="none" w="med" len="med"/>
-                      <a:tailEnd type="none" w="med" len="med"/>
-                    </a:lnR>
-                    <a:lnT w="6350" cap="flat" cmpd="sng" algn="ctr">
-                      <a:solidFill>
-                        <a:srgbClr val="D5DCE2"/>
-                      </a:solidFill>
-                      <a:prstDash val="solid"/>
-                      <a:round/>
-                      <a:headEnd type="none" w="med" len="med"/>
-                      <a:tailEnd type="none" w="med" len="med"/>
-                    </a:lnT>
-                    <a:lnB w="6350" cap="flat" cmpd="sng" algn="ctr">
-                      <a:solidFill>
-                        <a:srgbClr val="D5DCE2"/>
-                      </a:solidFill>
-                      <a:prstDash val="solid"/>
-                      <a:round/>
-                      <a:headEnd type="none" w="med" len="med"/>
-                      <a:tailEnd type="none" w="med" len="med"/>
-                    </a:lnB>
-                    <a:solidFill>
-                      <a:srgbClr val="FFFFFF"/>
-                    </a:solidFill>
-                  </a:tcPr>
-                </a:tc>
-              </a:tr>
-              <a:tr h="475488">
-                <a:tc>
-                  <a:txBody>
-                    <a:bodyPr/>
-                    <a:lstStyle/>
-                    <a:p>
-                      <a:pPr indent="0" marL="0">
-                        <a:buNone/>
-                      </a:pPr>
-                      <a:r>
-                        <a:rPr lang="en-US" sz="1200" b="1" dirty="0">
-                          <a:solidFill>
-                            <a:srgbClr val="1F2A33"/>
-                          </a:solidFill>
-                          <a:latin typeface="Calibri" pitchFamily="34" charset="0"/>
-                          <a:ea typeface="Calibri" pitchFamily="34" charset="-122"/>
-                          <a:cs typeface="Calibri" pitchFamily="34" charset="-120"/>
-                        </a:rPr>
-                        <a:t>Task 2: no production-impact data</a:t>
-                      </a:r>
-                      <a:endParaRPr lang="en-US" sz="1200" dirty="0">
-                        <a:latin typeface="Calibri" charset="0"/>
-                        <a:ea typeface="Calibri" charset="0"/>
-                        <a:cs typeface="Calibri" charset="0"/>
-                      </a:endParaRPr>
-                    </a:p>
-                  </a:txBody>
-                  <a:tcPr marL="45720" marR="45720" marT="45720" marB="45720" anchor="ctr">
-                    <a:lnL w="6350" cap="flat" cmpd="sng" algn="ctr">
-                      <a:solidFill>
-                        <a:srgbClr val="D5DCE2"/>
-                      </a:solidFill>
-                      <a:prstDash val="solid"/>
-                      <a:round/>
-                      <a:headEnd type="none" w="med" len="med"/>
-                      <a:tailEnd type="none" w="med" len="med"/>
-                    </a:lnL>
-                    <a:lnR w="6350" cap="flat" cmpd="sng" algn="ctr">
-                      <a:solidFill>
-                        <a:srgbClr val="D5DCE2"/>
-                      </a:solidFill>
-                      <a:prstDash val="solid"/>
-                      <a:round/>
-                      <a:headEnd type="none" w="med" len="med"/>
-                      <a:tailEnd type="none" w="med" len="med"/>
-                    </a:lnR>
-                    <a:lnT w="6350" cap="flat" cmpd="sng" algn="ctr">
-                      <a:solidFill>
-                        <a:srgbClr val="D5DCE2"/>
-                      </a:solidFill>
-                      <a:prstDash val="solid"/>
-                      <a:round/>
-                      <a:headEnd type="none" w="med" len="med"/>
-                      <a:tailEnd type="none" w="med" len="med"/>
-                    </a:lnT>
-                    <a:lnB w="6350" cap="flat" cmpd="sng" algn="ctr">
-                      <a:solidFill>
-                        <a:srgbClr val="D5DCE2"/>
-                      </a:solidFill>
-                      <a:prstDash val="solid"/>
-                      <a:round/>
-                      <a:headEnd type="none" w="med" len="med"/>
-                      <a:tailEnd type="none" w="med" len="med"/>
-                    </a:lnB>
-                    <a:solidFill>
-                      <a:srgbClr val="F6F8FA"/>
-                    </a:solidFill>
-                  </a:tcPr>
-                </a:tc>
-                <a:tc>
-                  <a:txBody>
-                    <a:bodyPr/>
-                    <a:lstStyle/>
-                    <a:p>
-                      <a:pPr indent="0" marL="0">
-                        <a:buNone/>
-                      </a:pPr>
-                      <a:r>
-                        <a:rPr lang="en-US" sz="1200" dirty="0">
-                          <a:solidFill>
-                            <a:srgbClr val="1F2A33"/>
-                          </a:solidFill>
-                          <a:latin typeface="Calibri" pitchFamily="34" charset="0"/>
-                          <a:ea typeface="Calibri" pitchFamily="34" charset="-122"/>
-                          <a:cs typeface="Calibri" pitchFamily="34" charset="-120"/>
-                        </a:rPr>
-                        <a:t>Can rank exposure, but can't prove cost</a:t>
-                      </a:r>
-                      <a:endParaRPr lang="en-US" sz="1200" dirty="0">
-                        <a:latin typeface="Calibri" charset="0"/>
-                        <a:ea typeface="Calibri" charset="0"/>
-                        <a:cs typeface="Calibri" charset="0"/>
-                      </a:endParaRPr>
-                    </a:p>
-                  </a:txBody>
-                  <a:tcPr marL="45720" marR="45720" marT="45720" marB="45720" anchor="ctr">
-                    <a:lnL w="6350" cap="flat" cmpd="sng" algn="ctr">
-                      <a:solidFill>
-                        <a:srgbClr val="D5DCE2"/>
-                      </a:solidFill>
-                      <a:prstDash val="solid"/>
-                      <a:round/>
-                      <a:headEnd type="none" w="med" len="med"/>
-                      <a:tailEnd type="none" w="med" len="med"/>
-                    </a:lnL>
-                    <a:lnR w="6350" cap="flat" cmpd="sng" algn="ctr">
-                      <a:solidFill>
-                        <a:srgbClr val="D5DCE2"/>
-                      </a:solidFill>
-                      <a:prstDash val="solid"/>
-                      <a:round/>
-                      <a:headEnd type="none" w="med" len="med"/>
-                      <a:tailEnd type="none" w="med" len="med"/>
-                    </a:lnR>
-                    <a:lnT w="6350" cap="flat" cmpd="sng" algn="ctr">
-                      <a:solidFill>
-                        <a:srgbClr val="D5DCE2"/>
-                      </a:solidFill>
-                      <a:prstDash val="solid"/>
-                      <a:round/>
-                      <a:headEnd type="none" w="med" len="med"/>
-                      <a:tailEnd type="none" w="med" len="med"/>
-                    </a:lnT>
-                    <a:lnB w="6350" cap="flat" cmpd="sng" algn="ctr">
-                      <a:solidFill>
-                        <a:srgbClr val="D5DCE2"/>
-                      </a:solidFill>
-                      <a:prstDash val="solid"/>
-                      <a:round/>
-                      <a:headEnd type="none" w="med" len="med"/>
-                      <a:tailEnd type="none" w="med" len="med"/>
-                    </a:lnB>
-                    <a:solidFill>
-                      <a:srgbClr val="F6F8FA"/>
-                    </a:solidFill>
-                  </a:tcPr>
-                </a:tc>
-                <a:tc>
-                  <a:txBody>
-                    <a:bodyPr/>
-                    <a:lstStyle/>
-                    <a:p>
-                      <a:pPr indent="0" marL="0">
-                        <a:buNone/>
-                      </a:pPr>
-                      <a:r>
-                        <a:rPr lang="en-US" sz="1200" dirty="0">
+                        <a:rPr lang="en-US" sz="1300" dirty="0">
                           <a:solidFill>
                             <a:srgbClr val="1F2A33"/>
                           </a:solidFill>
@@ -17553,7 +17765,7 @@
                         </a:rPr>
                         <a:t>Link to expedites and downtime; no causal claims until then</a:t>
                       </a:r>
-                      <a:endParaRPr lang="en-US" sz="1200" dirty="0">
+                      <a:endParaRPr lang="en-US" sz="1300" dirty="0">
                         <a:latin typeface="Calibri" charset="0"/>
                         <a:ea typeface="Calibri" charset="0"/>
                         <a:cs typeface="Calibri" charset="0"/>
@@ -17598,7 +17810,7 @@
                       <a:tailEnd type="none" w="med" len="med"/>
                     </a:lnB>
                     <a:solidFill>
-                      <a:srgbClr val="F6F8FA"/>
+                      <a:srgbClr val="FFFFFF"/>
                     </a:solidFill>
                   </a:tcPr>
                 </a:tc>
@@ -17607,639 +17819,6 @@
           </a:graphicData>
         </a:graphic>
       </p:graphicFrame>
-    </p:spTree>
-  </p:cSld>
-  <p:clrMapOvr>
-    <a:masterClrMapping/>
-  </p:clrMapOvr>
-</p:sld>
-</file>
-
-<file path=ppt/slides/slide18.xml><?xml version="1.0" encoding="utf-8"?>
-<p:sld xmlns:a="http://schemas.openxmlformats.org/drawingml/2006/main" xmlns:r="http://schemas.openxmlformats.org/officeDocument/2006/relationships" xmlns:p="http://schemas.openxmlformats.org/presentationml/2006/main">
-  <p:cSld name="Slide 18">
-    <p:bg>
-      <p:bgPr>
-        <a:solidFill>
-          <a:srgbClr val="FFFFFF"/>
-        </a:solidFill>
-      </p:bgPr>
-    </p:bg>
-    <p:spTree>
-      <p:nvGrpSpPr>
-        <p:cNvPr id="1" name=""/>
-        <p:cNvGrpSpPr/>
-        <p:nvPr/>
-      </p:nvGrpSpPr>
-      <p:grpSpPr>
-        <a:xfrm>
-          <a:off x="0" y="0"/>
-          <a:ext cx="0" cy="0"/>
-          <a:chOff x="0" y="0"/>
-          <a:chExt cx="0" cy="0"/>
-        </a:xfrm>
-      </p:grpSpPr>
-      <p:sp>
-        <p:nvSpPr>
-          <p:cNvPr id="2" name="Text 0"/>
-          <p:cNvSpPr txBox="1"/>
-          <p:nvPr/>
-        </p:nvSpPr>
-        <p:spPr>
-          <a:xfrm>
-            <a:off x="548640" y="320040"/>
-            <a:ext cx="8229600" cy="274320"/>
-          </a:xfrm>
-          <a:prstGeom prst="rect">
-            <a:avLst/>
-          </a:prstGeom>
-          <a:noFill/>
-          <a:ln/>
-        </p:spPr>
-        <p:txBody>
-          <a:bodyPr wrap="square" lIns="0" tIns="0" rIns="0" bIns="0" rtlCol="0" anchor="ctr"/>
-          <a:lstStyle/>
-          <a:p>
-            <a:pPr indent="0" marL="0">
-              <a:buNone/>
-            </a:pPr>
-            <a:r>
-              <a:rPr lang="en-US" sz="1200" b="1" spc="200" kern="0" dirty="0">
-                <a:solidFill>
-                  <a:srgbClr val="D9622B"/>
-                </a:solidFill>
-                <a:latin typeface="Calibri" pitchFamily="34" charset="0"/>
-                <a:ea typeface="Calibri" pitchFamily="34" charset="-122"/>
-                <a:cs typeface="Calibri" pitchFamily="34" charset="-120"/>
-              </a:rPr>
-              <a:t>WHAT I WISH I'D ASKED</a:t>
-            </a:r>
-            <a:endParaRPr lang="en-US" sz="1200" dirty="0"/>
-          </a:p>
-        </p:txBody>
-      </p:sp>
-      <p:sp>
-        <p:nvSpPr>
-          <p:cNvPr id="3" name="Text 1"/>
-          <p:cNvSpPr txBox="1"/>
-          <p:nvPr/>
-        </p:nvSpPr>
-        <p:spPr>
-          <a:xfrm>
-            <a:off x="548640" y="594360"/>
-            <a:ext cx="11094415" cy="685800"/>
-          </a:xfrm>
-          <a:prstGeom prst="rect">
-            <a:avLst/>
-          </a:prstGeom>
-          <a:noFill/>
-          <a:ln/>
-        </p:spPr>
-        <p:txBody>
-          <a:bodyPr wrap="square" lIns="0" tIns="0" rIns="0" bIns="0" rtlCol="0" anchor="t"/>
-          <a:lstStyle/>
-          <a:p>
-            <a:pPr indent="0" marL="0">
-              <a:buNone/>
-            </a:pPr>
-            <a:r>
-              <a:rPr lang="en-US" sz="2400" b="1" dirty="0">
-                <a:solidFill>
-                  <a:srgbClr val="1F2A33"/>
-                </a:solidFill>
-                <a:latin typeface="Cambria" pitchFamily="34" charset="0"/>
-                <a:ea typeface="Cambria" pitchFamily="34" charset="-122"/>
-                <a:cs typeface="Cambria" pitchFamily="34" charset="-120"/>
-              </a:rPr>
-              <a:t>Questions for Lisa and the plant manager, each tied to the data</a:t>
-            </a:r>
-            <a:endParaRPr lang="en-US" sz="2400" dirty="0"/>
-          </a:p>
-        </p:txBody>
-      </p:sp>
-      <p:sp>
-        <p:nvSpPr>
-          <p:cNvPr id="4" name="Text 2"/>
-          <p:cNvSpPr txBox="1"/>
-          <p:nvPr/>
-        </p:nvSpPr>
-        <p:spPr>
-          <a:xfrm>
-            <a:off x="7985455" y="6473952"/>
-            <a:ext cx="3657600" cy="228600"/>
-          </a:xfrm>
-          <a:prstGeom prst="rect">
-            <a:avLst/>
-          </a:prstGeom>
-          <a:noFill/>
-          <a:ln/>
-        </p:spPr>
-        <p:txBody>
-          <a:bodyPr wrap="square" lIns="0" tIns="0" rIns="0" bIns="0" rtlCol="0" anchor="ctr"/>
-          <a:lstStyle/>
-          <a:p>
-            <a:pPr algn="r" indent="0" marL="0">
-              <a:buNone/>
-            </a:pPr>
-            <a:r>
-              <a:rPr lang="en-US" sz="900" dirty="0">
-                <a:solidFill>
-                  <a:srgbClr val="7D8B97"/>
-                </a:solidFill>
-                <a:latin typeface="Calibri" pitchFamily="34" charset="0"/>
-                <a:ea typeface="Calibri" pitchFamily="34" charset="-122"/>
-                <a:cs typeface="Calibri" pitchFamily="34" charset="-120"/>
-              </a:rPr>
-              <a:t>Beacon Fasteners · FDE case   18</a:t>
-            </a:r>
-            <a:endParaRPr lang="en-US" sz="900" dirty="0"/>
-          </a:p>
-        </p:txBody>
-      </p:sp>
-      <p:sp>
-        <p:nvSpPr>
-          <p:cNvPr id="5" name="Shape 3"/>
-          <p:cNvSpPr/>
-          <p:nvPr/>
-        </p:nvSpPr>
-        <p:spPr>
-          <a:xfrm>
-            <a:off x="548640" y="1463040"/>
-            <a:ext cx="5364328" cy="4800600"/>
-          </a:xfrm>
-          <a:prstGeom prst="roundRect">
-            <a:avLst>
-              <a:gd name="adj" fmla="val 1524"/>
-            </a:avLst>
-          </a:prstGeom>
-          <a:solidFill>
-            <a:srgbClr val="EEF2F5"/>
-          </a:solidFill>
-          <a:ln w="12700">
-            <a:solidFill>
-              <a:srgbClr val="EEF2F5"/>
-            </a:solidFill>
-            <a:prstDash val="solid"/>
-          </a:ln>
-        </p:spPr>
-      </p:sp>
-      <p:sp>
-        <p:nvSpPr>
-          <p:cNvPr id="6" name="Text 4"/>
-          <p:cNvSpPr txBox="1"/>
-          <p:nvPr/>
-        </p:nvSpPr>
-        <p:spPr>
-          <a:xfrm>
-            <a:off x="822960" y="1600200"/>
-            <a:ext cx="4815688" cy="274320"/>
-          </a:xfrm>
-          <a:prstGeom prst="rect">
-            <a:avLst/>
-          </a:prstGeom>
-          <a:noFill/>
-          <a:ln/>
-        </p:spPr>
-        <p:txBody>
-          <a:bodyPr wrap="square" lIns="0" tIns="0" rIns="0" bIns="0" rtlCol="0" anchor="ctr"/>
-          <a:lstStyle/>
-          <a:p>
-            <a:pPr indent="0" marL="0">
-              <a:buNone/>
-            </a:pPr>
-            <a:r>
-              <a:rPr lang="en-US" sz="1200" b="1" spc="200" kern="0" dirty="0">
-                <a:solidFill>
-                  <a:srgbClr val="D9622B"/>
-                </a:solidFill>
-                <a:latin typeface="Calibri" pitchFamily="34" charset="0"/>
-                <a:ea typeface="Calibri" pitchFamily="34" charset="-122"/>
-                <a:cs typeface="Calibri" pitchFamily="34" charset="-120"/>
-              </a:rPr>
-              <a:t>LISA</a:t>
-            </a:r>
-            <a:endParaRPr lang="en-US" sz="1200" dirty="0"/>
-          </a:p>
-        </p:txBody>
-      </p:sp>
-      <p:sp>
-        <p:nvSpPr>
-          <p:cNvPr id="7" name="Text 5"/>
-          <p:cNvSpPr txBox="1"/>
-          <p:nvPr/>
-        </p:nvSpPr>
-        <p:spPr>
-          <a:xfrm>
-            <a:off x="822960" y="1920240"/>
-            <a:ext cx="4815688" cy="4251960"/>
-          </a:xfrm>
-          <a:prstGeom prst="rect">
-            <a:avLst/>
-          </a:prstGeom>
-          <a:noFill/>
-          <a:ln/>
-        </p:spPr>
-        <p:txBody>
-          <a:bodyPr wrap="square" lIns="381" tIns="381" rIns="381" bIns="381" rtlCol="0" anchor="t"/>
-          <a:lstStyle/>
-          <a:p>
-            <a:pPr marL="342900" indent="-342900">
-              <a:spcAft>
-                <a:spcPts val="500"/>
-              </a:spcAft>
-              <a:buSzPct val="100000"/>
-              <a:buFont typeface="+mj-lt"/>
-              <a:buAutoNum type="arabicPeriod" startAt="1"/>
-            </a:pPr>
-            <a:r>
-              <a:rPr lang="en-US" sz="1250" dirty="0">
-                <a:solidFill>
-                  <a:srgbClr val="1F2A33"/>
-                </a:solidFill>
-                <a:latin typeface="Calibri" pitchFamily="34" charset="0"/>
-                <a:ea typeface="Calibri" pitchFamily="34" charset="-122"/>
-                <a:cs typeface="Calibri" pitchFamily="34" charset="-120"/>
-              </a:rPr>
-              <a:t>When a line is missing from an acknowledgment, what do you do today, and how often was it really dropped vs. confirmed later?</a:t>
-            </a:r>
-            <a:endParaRPr lang="en-US" sz="1250" dirty="0"/>
-          </a:p>
-          <a:p>
-            <a:pPr marL="342900" indent="-342900">
-              <a:spcAft>
-                <a:spcPts val="500"/>
-              </a:spcAft>
-              <a:buSzPct val="100000"/>
-              <a:buFont typeface="+mj-lt"/>
-              <a:buAutoNum type="arabicPeriod" startAt="1"/>
-            </a:pPr>
-            <a:r>
-              <a:rPr lang="en-US" sz="1250" dirty="0">
-                <a:solidFill>
-                  <a:srgbClr val="1F2A33"/>
-                </a:solidFill>
-                <a:latin typeface="Calibri" pitchFamily="34" charset="0"/>
-                <a:ea typeface="Calibri" pitchFamily="34" charset="-122"/>
-                <a:cs typeface="Calibri" pitchFamily="34" charset="-120"/>
-              </a:rPr>
-              <a:t>Which miss cost you most last quarter: a short, a price or a date? That sets the priority order.</a:t>
-            </a:r>
-            <a:endParaRPr lang="en-US" sz="1250" dirty="0"/>
-          </a:p>
-          <a:p>
-            <a:pPr marL="342900" indent="-342900">
-              <a:spcAft>
-                <a:spcPts val="500"/>
-              </a:spcAft>
-              <a:buSzPct val="100000"/>
-              <a:buFont typeface="+mj-lt"/>
-              <a:buAutoNum type="arabicPeriod" startAt="1"/>
-            </a:pPr>
-            <a:r>
-              <a:rPr lang="en-US" sz="1250" dirty="0">
-                <a:solidFill>
-                  <a:srgbClr val="1F2A33"/>
-                </a:solidFill>
-                <a:latin typeface="Calibri" pitchFamily="34" charset="0"/>
-                <a:ea typeface="Calibri" pitchFamily="34" charset="-122"/>
-                <a:cs typeface="Calibri" pitchFamily="34" charset="-120"/>
-              </a:rPr>
-              <a:t>Apex CRES bar confirmed +1-2% since Feb while POs stayed $3.92: a negotiated alloy surcharge that never reached the PO?</a:t>
-            </a:r>
-            <a:endParaRPr lang="en-US" sz="1250" dirty="0"/>
-          </a:p>
-          <a:p>
-            <a:pPr marL="342900" indent="-342900">
-              <a:spcAft>
-                <a:spcPts val="500"/>
-              </a:spcAft>
-              <a:buSzPct val="100000"/>
-              <a:buFont typeface="+mj-lt"/>
-              <a:buAutoNum type="arabicPeriod" startAt="1"/>
-            </a:pPr>
-            <a:r>
-              <a:rPr lang="en-US" sz="1250" dirty="0">
-                <a:solidFill>
-                  <a:srgbClr val="1F2A33"/>
-                </a:solidFill>
-                <a:latin typeface="Calibri" pitchFamily="34" charset="0"/>
-                <a:ea typeface="Calibri" pitchFamily="34" charset="-122"/>
-                <a:cs typeface="Calibri" pitchFamily="34" charset="-120"/>
-              </a:rPr>
-              <a:t>What price difference do you let through without a call? Is 1% right for EUR? Is it different for services?</a:t>
-            </a:r>
-            <a:endParaRPr lang="en-US" sz="1250" dirty="0"/>
-          </a:p>
-          <a:p>
-            <a:pPr marL="342900" indent="-342900">
-              <a:spcAft>
-                <a:spcPts val="500"/>
-              </a:spcAft>
-              <a:buSzPct val="100000"/>
-              <a:buFont typeface="+mj-lt"/>
-              <a:buAutoNum type="arabicPeriod" startAt="1"/>
-            </a:pPr>
-            <a:r>
-              <a:rPr lang="en-US" sz="1250" dirty="0">
-                <a:solidFill>
-                  <a:srgbClr val="1F2A33"/>
-                </a:solidFill>
-                <a:latin typeface="Calibri" pitchFamily="34" charset="0"/>
-                <a:ea typeface="Calibri" pitchFamily="34" charset="-122"/>
-                <a:cs typeface="Calibri" pitchFamily="34" charset="-120"/>
-              </a:rPr>
-              <a:t>Who approves a new vendor part number: you or engineering? Do vendors warn you before renumbering?</a:t>
-            </a:r>
-            <a:endParaRPr lang="en-US" sz="1250" dirty="0"/>
-          </a:p>
-          <a:p>
-            <a:pPr marL="342900" indent="-342900">
-              <a:spcAft>
-                <a:spcPts val="500"/>
-              </a:spcAft>
-              <a:buSzPct val="100000"/>
-              <a:buFont typeface="+mj-lt"/>
-              <a:buAutoNum type="arabicPeriod" startAt="1"/>
-            </a:pPr>
-            <a:r>
-              <a:rPr lang="en-US" sz="1250" dirty="0">
-                <a:solidFill>
-                  <a:srgbClr val="1F2A33"/>
-                </a:solidFill>
-                <a:latin typeface="Calibri" pitchFamily="34" charset="0"/>
-                <a:ea typeface="Calibri" pitchFamily="34" charset="-122"/>
-                <a:cs typeface="Calibri" pitchFamily="34" charset="-120"/>
-              </a:rPr>
-              <a:t>Which date is authoritative when they disagree: our required date, the vendor's promise, or the MRP need date?</a:t>
-            </a:r>
-            <a:endParaRPr lang="en-US" sz="1250" dirty="0"/>
-          </a:p>
-          <a:p>
-            <a:pPr marL="342900" indent="-342900">
-              <a:spcAft>
-                <a:spcPts val="500"/>
-              </a:spcAft>
-              <a:buSzPct val="100000"/>
-              <a:buFont typeface="+mj-lt"/>
-              <a:buAutoNum type="arabicPeriod" startAt="1"/>
-            </a:pPr>
-            <a:r>
-              <a:rPr lang="en-US" sz="1250" dirty="0">
-                <a:solidFill>
-                  <a:srgbClr val="1F2A33"/>
-                </a:solidFill>
-                <a:latin typeface="Calibri" pitchFamily="34" charset="0"/>
-                <a:ea typeface="Calibri" pitchFamily="34" charset="-122"/>
-                <a:cs typeface="Calibri" pitchFamily="34" charset="-120"/>
-              </a:rPr>
-              <a:t>What would you need to see for two weeks before you stop opening every PDF yourself?</a:t>
-            </a:r>
-            <a:endParaRPr lang="en-US" sz="1250" dirty="0"/>
-          </a:p>
-        </p:txBody>
-      </p:sp>
-      <p:sp>
-        <p:nvSpPr>
-          <p:cNvPr id="8" name="Shape 6"/>
-          <p:cNvSpPr/>
-          <p:nvPr/>
-        </p:nvSpPr>
-        <p:spPr>
-          <a:xfrm>
-            <a:off x="6278728" y="1463040"/>
-            <a:ext cx="5364328" cy="4800600"/>
-          </a:xfrm>
-          <a:prstGeom prst="roundRect">
-            <a:avLst>
-              <a:gd name="adj" fmla="val 1524"/>
-            </a:avLst>
-          </a:prstGeom>
-          <a:solidFill>
-            <a:srgbClr val="EEF2F5"/>
-          </a:solidFill>
-          <a:ln w="12700">
-            <a:solidFill>
-              <a:srgbClr val="EEF2F5"/>
-            </a:solidFill>
-            <a:prstDash val="solid"/>
-          </a:ln>
-        </p:spPr>
-      </p:sp>
-      <p:sp>
-        <p:nvSpPr>
-          <p:cNvPr id="9" name="Text 7"/>
-          <p:cNvSpPr txBox="1"/>
-          <p:nvPr/>
-        </p:nvSpPr>
-        <p:spPr>
-          <a:xfrm>
-            <a:off x="6553048" y="1600200"/>
-            <a:ext cx="4815688" cy="274320"/>
-          </a:xfrm>
-          <a:prstGeom prst="rect">
-            <a:avLst/>
-          </a:prstGeom>
-          <a:noFill/>
-          <a:ln/>
-        </p:spPr>
-        <p:txBody>
-          <a:bodyPr wrap="square" lIns="0" tIns="0" rIns="0" bIns="0" rtlCol="0" anchor="ctr"/>
-          <a:lstStyle/>
-          <a:p>
-            <a:pPr indent="0" marL="0">
-              <a:buNone/>
-            </a:pPr>
-            <a:r>
-              <a:rPr lang="en-US" sz="1200" b="1" spc="200" kern="0" dirty="0">
-                <a:solidFill>
-                  <a:srgbClr val="D9622B"/>
-                </a:solidFill>
-                <a:latin typeface="Calibri" pitchFamily="34" charset="0"/>
-                <a:ea typeface="Calibri" pitchFamily="34" charset="-122"/>
-                <a:cs typeface="Calibri" pitchFamily="34" charset="-120"/>
-              </a:rPr>
-              <a:t>PLANT MANAGER</a:t>
-            </a:r>
-            <a:endParaRPr lang="en-US" sz="1200" dirty="0"/>
-          </a:p>
-        </p:txBody>
-      </p:sp>
-      <p:sp>
-        <p:nvSpPr>
-          <p:cNvPr id="10" name="Text 8"/>
-          <p:cNvSpPr txBox="1"/>
-          <p:nvPr/>
-        </p:nvSpPr>
-        <p:spPr>
-          <a:xfrm>
-            <a:off x="6553048" y="1920240"/>
-            <a:ext cx="4815688" cy="4251960"/>
-          </a:xfrm>
-          <a:prstGeom prst="rect">
-            <a:avLst/>
-          </a:prstGeom>
-          <a:noFill/>
-          <a:ln/>
-        </p:spPr>
-        <p:txBody>
-          <a:bodyPr wrap="square" lIns="381" tIns="381" rIns="381" bIns="381" rtlCol="0" anchor="t"/>
-          <a:lstStyle/>
-          <a:p>
-            <a:pPr marL="342900" indent="-342900">
-              <a:spcAft>
-                <a:spcPts val="500"/>
-              </a:spcAft>
-              <a:buSzPct val="100000"/>
-              <a:buFont typeface="+mj-lt"/>
-              <a:buAutoNum type="arabicPeriod" startAt="1"/>
-            </a:pPr>
-            <a:r>
-              <a:rPr lang="en-US" sz="1250" dirty="0">
-                <a:solidFill>
-                  <a:srgbClr val="1F2A33"/>
-                </a:solidFill>
-                <a:latin typeface="Calibri" pitchFamily="34" charset="0"/>
-                <a:ea typeface="Calibri" pitchFamily="34" charset="-122"/>
-                <a:cs typeface="Calibri" pitchFamily="34" charset="-120"/>
-              </a:rPr>
-              <a:t>What does a late heat-treat lot actually cost: downtime, overtime, a customer expedite? That turns on-time % into dollars.</a:t>
-            </a:r>
-            <a:endParaRPr lang="en-US" sz="1250" dirty="0"/>
-          </a:p>
-          <a:p>
-            <a:pPr marL="342900" indent="-342900">
-              <a:spcAft>
-                <a:spcPts val="500"/>
-              </a:spcAft>
-              <a:buSzPct val="100000"/>
-              <a:buFont typeface="+mj-lt"/>
-              <a:buAutoNum type="arabicPeriod" startAt="1"/>
-            </a:pPr>
-            <a:r>
-              <a:rPr lang="en-US" sz="1250" dirty="0">
-                <a:solidFill>
-                  <a:srgbClr val="1F2A33"/>
-                </a:solidFill>
-                <a:latin typeface="Calibri" pitchFamily="34" charset="0"/>
-                <a:ea typeface="Calibri" pitchFamily="34" charset="-122"/>
-                <a:cs typeface="Calibri" pitchFamily="34" charset="-120"/>
-              </a:rPr>
-              <a:t>Who set the 19-day heat-treat lead time in MRP? Continental quotes 28.</a:t>
-            </a:r>
-            <a:endParaRPr lang="en-US" sz="1250" dirty="0"/>
-          </a:p>
-          <a:p>
-            <a:pPr marL="342900" indent="-342900">
-              <a:spcAft>
-                <a:spcPts val="500"/>
-              </a:spcAft>
-              <a:buSzPct val="100000"/>
-              <a:buFont typeface="+mj-lt"/>
-              <a:buAutoNum type="arabicPeriod" startAt="1"/>
-            </a:pPr>
-            <a:r>
-              <a:rPr lang="en-US" sz="1250" dirty="0">
-                <a:solidFill>
-                  <a:srgbClr val="1F2A33"/>
-                </a:solidFill>
-                <a:latin typeface="Calibri" pitchFamily="34" charset="0"/>
-                <a:ea typeface="Calibri" pitchFamily="34" charset="-122"/>
-                <a:cs typeface="Calibri" pitchFamily="34" charset="-120"/>
-              </a:rPr>
-              <a:t>Is Continental the only qualified (e.g. Nadcap) heat treater for these parts, or is there a second source?</a:t>
-            </a:r>
-            <a:endParaRPr lang="en-US" sz="1250" dirty="0"/>
-          </a:p>
-          <a:p>
-            <a:pPr marL="342900" indent="-342900">
-              <a:spcAft>
-                <a:spcPts val="500"/>
-              </a:spcAft>
-              <a:buSzPct val="100000"/>
-              <a:buFont typeface="+mj-lt"/>
-              <a:buAutoNum type="arabicPeriod" startAt="1"/>
-            </a:pPr>
-            <a:r>
-              <a:rPr lang="en-US" sz="1250" dirty="0">
-                <a:solidFill>
-                  <a:srgbClr val="1F2A33"/>
-                </a:solidFill>
-                <a:latin typeface="Calibri" pitchFamily="34" charset="0"/>
-                <a:ea typeface="Calibri" pitchFamily="34" charset="-122"/>
-                <a:cs typeface="Calibri" pitchFamily="34" charset="-120"/>
-              </a:rPr>
-              <a:t>Is Apex at 85% of spend a deliberate single-source decision? Is there a contract price for CRES bar?</a:t>
-            </a:r>
-            <a:endParaRPr lang="en-US" sz="1250" dirty="0"/>
-          </a:p>
-          <a:p>
-            <a:pPr marL="342900" indent="-342900">
-              <a:spcAft>
-                <a:spcPts val="500"/>
-              </a:spcAft>
-              <a:buSzPct val="100000"/>
-              <a:buFont typeface="+mj-lt"/>
-              <a:buAutoNum type="arabicPeriod" startAt="1"/>
-            </a:pPr>
-            <a:r>
-              <a:rPr lang="en-US" sz="1250" dirty="0">
-                <a:solidFill>
-                  <a:srgbClr val="1F2A33"/>
-                </a:solidFill>
-                <a:latin typeface="Calibri" pitchFamily="34" charset="0"/>
-                <a:ea typeface="Calibri" pitchFamily="34" charset="-122"/>
-                <a:cs typeface="Calibri" pitchFamily="34" charset="-120"/>
-              </a:rPr>
-              <a:t>Should months-old short-ship balances be closed? Who can short-close a PO?</a:t>
-            </a:r>
-            <a:endParaRPr lang="en-US" sz="1250" dirty="0"/>
-          </a:p>
-          <a:p>
-            <a:pPr marL="342900" indent="-342900">
-              <a:spcAft>
-                <a:spcPts val="500"/>
-              </a:spcAft>
-              <a:buSzPct val="100000"/>
-              <a:buFont typeface="+mj-lt"/>
-              <a:buAutoNum type="arabicPeriod" startAt="1"/>
-            </a:pPr>
-            <a:r>
-              <a:rPr lang="en-US" sz="1250" dirty="0">
-                <a:solidFill>
-                  <a:srgbClr val="1F2A33"/>
-                </a:solidFill>
-                <a:latin typeface="Calibri" pitchFamily="34" charset="0"/>
-                <a:ea typeface="Calibri" pitchFamily="34" charset="-122"/>
-                <a:cs typeface="Calibri" pitchFamily="34" charset="-120"/>
-              </a:rPr>
-              <a:t>Which parts are single-sourced or on customer-critical programs? That turns lateness into risk.</a:t>
-            </a:r>
-            <a:endParaRPr lang="en-US" sz="1250" dirty="0"/>
-          </a:p>
-          <a:p>
-            <a:pPr marL="342900" indent="-342900">
-              <a:spcAft>
-                <a:spcPts val="500"/>
-              </a:spcAft>
-              <a:buSzPct val="100000"/>
-              <a:buFont typeface="+mj-lt"/>
-              <a:buAutoNum type="arabicPeriod" startAt="1"/>
-            </a:pPr>
-            <a:r>
-              <a:rPr lang="en-US" sz="1250" dirty="0">
-                <a:solidFill>
-                  <a:srgbClr val="1F2A33"/>
-                </a:solidFill>
-                <a:latin typeface="Calibri" pitchFamily="34" charset="0"/>
-                <a:ea typeface="Calibri" pitchFamily="34" charset="-122"/>
-                <a:cs typeface="Calibri" pitchFamily="34" charset="-120"/>
-              </a:rPr>
-              <a:t>Which decision should this readout drive: re-source, renegotiate or re-plan? How often: monthly?</a:t>
-            </a:r>
-            <a:endParaRPr lang="en-US" sz="1250" dirty="0"/>
-          </a:p>
-        </p:txBody>
-      </p:sp>
     </p:spTree>
   </p:cSld>
   <p:clrMapOvr>
@@ -18305,7 +17884,7 @@
                 <a:ea typeface="Calibri" pitchFamily="34" charset="-122"/>
                 <a:cs typeface="Calibri" pitchFamily="34" charset="-120"/>
               </a:rPr>
-              <a:t>DATA I WISH I'D HAD · 30 / 60 / 90</a:t>
+              <a:t>WHAT I WISH I'D ASKED</a:t>
             </a:r>
             <a:endParaRPr lang="en-US" sz="1200" dirty="0"/>
           </a:p>
@@ -18344,7 +17923,7 @@
                 <a:ea typeface="Cambria" pitchFamily="34" charset="-122"/>
                 <a:cs typeface="Cambria" pitchFamily="34" charset="-120"/>
               </a:rPr>
-              <a:t>What would sharpen the answers, and how this goes into use</a:t>
+              <a:t>Questions for Lisa and the plant manager, each tied to the data</a:t>
             </a:r>
             <a:endParaRPr lang="en-US" sz="2400" dirty="0"/>
           </a:p>
@@ -18391,450 +17970,18 @@
       </p:sp>
       <p:sp>
         <p:nvSpPr>
-          <p:cNvPr id="5" name="Text 3"/>
-          <p:cNvSpPr txBox="1"/>
+          <p:cNvPr id="5" name="Shape 3"/>
+          <p:cNvSpPr/>
           <p:nvPr/>
         </p:nvSpPr>
         <p:spPr>
           <a:xfrm>
             <a:off x="548640" y="1463040"/>
-            <a:ext cx="5669280" cy="365760"/>
-          </a:xfrm>
-          <a:prstGeom prst="rect">
-            <a:avLst/>
-          </a:prstGeom>
-          <a:noFill/>
-          <a:ln/>
-        </p:spPr>
-        <p:txBody>
-          <a:bodyPr wrap="square" lIns="0" tIns="0" rIns="0" bIns="0" rtlCol="0" anchor="ctr"/>
-          <a:lstStyle/>
-          <a:p>
-            <a:pPr indent="0" marL="0">
-              <a:buNone/>
-            </a:pPr>
-            <a:r>
-              <a:rPr lang="en-US" sz="1600" b="1" dirty="0">
-                <a:solidFill>
-                  <a:srgbClr val="1F2A33"/>
-                </a:solidFill>
-                <a:latin typeface="Cambria" pitchFamily="34" charset="0"/>
-                <a:ea typeface="Cambria" pitchFamily="34" charset="-122"/>
-                <a:cs typeface="Cambria" pitchFamily="34" charset="-120"/>
-              </a:rPr>
-              <a:t>Data I wish I'd had (absent from the extract)</a:t>
-            </a:r>
-            <a:endParaRPr lang="en-US" sz="1600" dirty="0"/>
-          </a:p>
-        </p:txBody>
-      </p:sp>
-      <p:sp>
-        <p:nvSpPr>
-          <p:cNvPr id="6" name="Text 4"/>
-          <p:cNvSpPr txBox="1"/>
-          <p:nvPr/>
-        </p:nvSpPr>
-        <p:spPr>
-          <a:xfrm>
-            <a:off x="548640" y="1874520"/>
-            <a:ext cx="5669280" cy="4297680"/>
-          </a:xfrm>
-          <a:prstGeom prst="rect">
-            <a:avLst/>
-          </a:prstGeom>
-          <a:noFill/>
-          <a:ln/>
-        </p:spPr>
-        <p:txBody>
-          <a:bodyPr wrap="square" lIns="635" tIns="635" rIns="635" bIns="635" rtlCol="0" anchor="t"/>
-          <a:lstStyle/>
-          <a:p>
-            <a:pPr marL="342900" indent="-342900">
-              <a:spcAft>
-                <a:spcPts val="600"/>
-              </a:spcAft>
-              <a:buSzPct val="100000"/>
-              <a:buChar char="•"/>
-            </a:pPr>
-            <a:r>
-              <a:rPr lang="en-US" sz="1400" b="1" dirty="0">
-                <a:solidFill>
-                  <a:srgbClr val="1F2A33"/>
-                </a:solidFill>
-                <a:latin typeface="Calibri" pitchFamily="34" charset="0"/>
-                <a:ea typeface="Calibri" pitchFamily="34" charset="-122"/>
-                <a:cs typeface="Calibri" pitchFamily="34" charset="-120"/>
-              </a:rPr>
-              <a:t>Invoice / AP lines: </a:t>
-            </a:r>
-            <a:pPr indent="0" marL="0">
-              <a:spcAft>
-                <a:spcPts val="600"/>
-              </a:spcAft>
-              <a:buNone/>
-            </a:pPr>
-            <a:r>
-              <a:rPr lang="en-US" sz="1400" dirty="0">
-                <a:solidFill>
-                  <a:srgbClr val="1F2A33"/>
-                </a:solidFill>
-                <a:latin typeface="Calibri" pitchFamily="34" charset="0"/>
-                <a:ea typeface="Calibri" pitchFamily="34" charset="-122"/>
-                <a:cs typeface="Calibri" pitchFamily="34" charset="-120"/>
-              </a:rPr>
-              <a:t>actual price paid, and therefore true price variance</a:t>
-            </a:r>
-            <a:endParaRPr lang="en-US" sz="1400" dirty="0"/>
-          </a:p>
-          <a:p>
-            <a:pPr marL="342900" indent="-342900">
-              <a:spcAft>
-                <a:spcPts val="600"/>
-              </a:spcAft>
-              <a:buSzPct val="100000"/>
-              <a:buChar char="•"/>
-            </a:pPr>
-            <a:r>
-              <a:rPr lang="en-US" sz="1400" b="1" dirty="0">
-                <a:solidFill>
-                  <a:srgbClr val="1F2A33"/>
-                </a:solidFill>
-                <a:latin typeface="Calibri" pitchFamily="34" charset="0"/>
-                <a:ea typeface="Calibri" pitchFamily="34" charset="-122"/>
-                <a:cs typeface="Calibri" pitchFamily="34" charset="-120"/>
-              </a:rPr>
-              <a:t>Production impact: </a:t>
-            </a:r>
-            <a:pPr indent="0" marL="0">
-              <a:spcAft>
-                <a:spcPts val="600"/>
-              </a:spcAft>
-              <a:buNone/>
-            </a:pPr>
-            <a:r>
-              <a:rPr lang="en-US" sz="1400" dirty="0">
-                <a:solidFill>
-                  <a:srgbClr val="1F2A33"/>
-                </a:solidFill>
-                <a:latin typeface="Calibri" pitchFamily="34" charset="0"/>
-                <a:ea typeface="Calibri" pitchFamily="34" charset="-122"/>
-                <a:cs typeface="Calibri" pitchFamily="34" charset="-120"/>
-              </a:rPr>
-              <a:t>downtime, expedites, late customer shipments</a:t>
-            </a:r>
-            <a:endParaRPr lang="en-US" sz="1400" dirty="0"/>
-          </a:p>
-          <a:p>
-            <a:pPr marL="342900" indent="-342900">
-              <a:spcAft>
-                <a:spcPts val="600"/>
-              </a:spcAft>
-              <a:buSzPct val="100000"/>
-              <a:buChar char="•"/>
-            </a:pPr>
-            <a:r>
-              <a:rPr lang="en-US" sz="1400" b="1" dirty="0">
-                <a:solidFill>
-                  <a:srgbClr val="1F2A33"/>
-                </a:solidFill>
-                <a:latin typeface="Calibri" pitchFamily="34" charset="0"/>
-                <a:ea typeface="Calibri" pitchFamily="34" charset="-122"/>
-                <a:cs typeface="Calibri" pitchFamily="34" charset="-120"/>
-              </a:rPr>
-              <a:t>Quality / NCR data </a:t>
-            </a:r>
-            <a:pPr indent="0" marL="0">
-              <a:spcAft>
-                <a:spcPts val="600"/>
-              </a:spcAft>
-              <a:buNone/>
-            </a:pPr>
-            <a:r>
-              <a:rPr lang="en-US" sz="1400" dirty="0">
-                <a:solidFill>
-                  <a:srgbClr val="1F2A33"/>
-                </a:solidFill>
-                <a:latin typeface="Calibri" pitchFamily="34" charset="0"/>
-                <a:ea typeface="Calibri" pitchFamily="34" charset="-122"/>
-                <a:cs typeface="Calibri" pitchFamily="34" charset="-120"/>
-              </a:rPr>
-              <a:t>with dates we can trust (qc_hold dates can't be)</a:t>
-            </a:r>
-            <a:endParaRPr lang="en-US" sz="1400" dirty="0"/>
-          </a:p>
-          <a:p>
-            <a:pPr marL="342900" indent="-342900">
-              <a:spcAft>
-                <a:spcPts val="600"/>
-              </a:spcAft>
-              <a:buSzPct val="100000"/>
-              <a:buChar char="•"/>
-            </a:pPr>
-            <a:r>
-              <a:rPr lang="en-US" sz="1400" b="1" dirty="0">
-                <a:solidFill>
-                  <a:srgbClr val="1F2A33"/>
-                </a:solidFill>
-                <a:latin typeface="Calibri" pitchFamily="34" charset="0"/>
-                <a:ea typeface="Calibri" pitchFamily="34" charset="-122"/>
-                <a:cs typeface="Calibri" pitchFamily="34" charset="-120"/>
-              </a:rPr>
-              <a:t>The full vendor master: </a:t>
-            </a:r>
-            <a:pPr indent="0" marL="0">
-              <a:spcAft>
-                <a:spcPts val="600"/>
-              </a:spcAft>
-              <a:buNone/>
-            </a:pPr>
-            <a:r>
-              <a:rPr lang="en-US" sz="1400" dirty="0">
-                <a:solidFill>
-                  <a:srgbClr val="1F2A33"/>
-                </a:solidFill>
-                <a:latin typeface="Calibri" pitchFamily="34" charset="0"/>
-                <a:ea typeface="Calibri" pitchFamily="34" charset="-122"/>
-                <a:cs typeface="Calibri" pitchFamily="34" charset="-120"/>
-              </a:rPr>
-              <a:t>6 vendors in the files vs ~30 active suppliers</a:t>
-            </a:r>
-            <a:endParaRPr lang="en-US" sz="1400" dirty="0"/>
-          </a:p>
-          <a:p>
-            <a:pPr marL="342900" indent="-342900">
-              <a:spcAft>
-                <a:spcPts val="600"/>
-              </a:spcAft>
-              <a:buSzPct val="100000"/>
-              <a:buChar char="•"/>
-            </a:pPr>
-            <a:r>
-              <a:rPr lang="en-US" sz="1400" b="1" dirty="0">
-                <a:solidFill>
-                  <a:srgbClr val="1F2A33"/>
-                </a:solidFill>
-                <a:latin typeface="Calibri" pitchFamily="34" charset="0"/>
-                <a:ea typeface="Calibri" pitchFamily="34" charset="-122"/>
-                <a:cs typeface="Calibri" pitchFamily="34" charset="-120"/>
-              </a:rPr>
-              <a:t>PO change and cancel history, </a:t>
-            </a:r>
-            <a:pPr indent="0" marL="0">
-              <a:spcAft>
-                <a:spcPts val="600"/>
-              </a:spcAft>
-              <a:buNone/>
-            </a:pPr>
-            <a:r>
-              <a:rPr lang="en-US" sz="1400" dirty="0">
-                <a:solidFill>
-                  <a:srgbClr val="1F2A33"/>
-                </a:solidFill>
-                <a:latin typeface="Calibri" pitchFamily="34" charset="0"/>
-                <a:ea typeface="Calibri" pitchFamily="34" charset="-122"/>
-                <a:cs typeface="Calibri" pitchFamily="34" charset="-120"/>
-              </a:rPr>
-              <a:t>and the confirmation feed after 04/03</a:t>
-            </a:r>
-            <a:endParaRPr lang="en-US" sz="1400" dirty="0"/>
-          </a:p>
-          <a:p>
-            <a:pPr marL="342900" indent="-342900">
-              <a:spcAft>
-                <a:spcPts val="600"/>
-              </a:spcAft>
-              <a:buSzPct val="100000"/>
-              <a:buChar char="•"/>
-            </a:pPr>
-            <a:r>
-              <a:rPr lang="en-US" sz="1400" b="1" dirty="0">
-                <a:solidFill>
-                  <a:srgbClr val="1F2A33"/>
-                </a:solidFill>
-                <a:latin typeface="Calibri" pitchFamily="34" charset="0"/>
-                <a:ea typeface="Calibri" pitchFamily="34" charset="-122"/>
-                <a:cs typeface="Calibri" pitchFamily="34" charset="-120"/>
-              </a:rPr>
-              <a:t>Supplier agreements: </a:t>
-            </a:r>
-            <a:pPr indent="0" marL="0">
-              <a:spcAft>
-                <a:spcPts val="600"/>
-              </a:spcAft>
-              <a:buNone/>
-            </a:pPr>
-            <a:r>
-              <a:rPr lang="en-US" sz="1400" dirty="0">
-                <a:solidFill>
-                  <a:srgbClr val="1F2A33"/>
-                </a:solidFill>
-                <a:latin typeface="Calibri" pitchFamily="34" charset="0"/>
-                <a:ea typeface="Calibri" pitchFamily="34" charset="-122"/>
-                <a:cs typeface="Calibri" pitchFamily="34" charset="-120"/>
-              </a:rPr>
-              <a:t>lead-time commitments, surcharge clauses, strategic status</a:t>
-            </a:r>
-            <a:endParaRPr lang="en-US" sz="1400" dirty="0"/>
-          </a:p>
-          <a:p>
-            <a:pPr marL="342900" indent="-342900">
-              <a:spcAft>
-                <a:spcPts val="600"/>
-              </a:spcAft>
-              <a:buSzPct val="100000"/>
-              <a:buChar char="•"/>
-            </a:pPr>
-            <a:r>
-              <a:rPr lang="en-US" sz="1400" b="1" dirty="0">
-                <a:solidFill>
-                  <a:srgbClr val="1F2A33"/>
-                </a:solidFill>
-                <a:latin typeface="Calibri" pitchFamily="34" charset="0"/>
-                <a:ea typeface="Calibri" pitchFamily="34" charset="-122"/>
-                <a:cs typeface="Calibri" pitchFamily="34" charset="-120"/>
-              </a:rPr>
-              <a:t>The MRP lead-time master </a:t>
-            </a:r>
-            <a:pPr indent="0" marL="0">
-              <a:spcAft>
-                <a:spcPts val="600"/>
-              </a:spcAft>
-              <a:buNone/>
-            </a:pPr>
-            <a:r>
-              <a:rPr lang="en-US" sz="1400" dirty="0">
-                <a:solidFill>
-                  <a:srgbClr val="1F2A33"/>
-                </a:solidFill>
-                <a:latin typeface="Calibri" pitchFamily="34" charset="0"/>
-                <a:ea typeface="Calibri" pitchFamily="34" charset="-122"/>
-                <a:cs typeface="Calibri" pitchFamily="34" charset="-120"/>
-              </a:rPr>
-              <a:t>and who changes it</a:t>
-            </a:r>
-            <a:endParaRPr lang="en-US" sz="1400" dirty="0"/>
-          </a:p>
-        </p:txBody>
-      </p:sp>
-      <p:sp>
-        <p:nvSpPr>
-          <p:cNvPr id="7" name="Shape 5"/>
-          <p:cNvSpPr/>
-          <p:nvPr/>
-        </p:nvSpPr>
-        <p:spPr>
-          <a:xfrm>
-            <a:off x="6583680" y="1463040"/>
-            <a:ext cx="5059375" cy="1051560"/>
+            <a:ext cx="5364328" cy="4800600"/>
           </a:xfrm>
           <a:prstGeom prst="roundRect">
             <a:avLst>
-              <a:gd name="adj" fmla="val 6957"/>
-            </a:avLst>
-          </a:prstGeom>
-          <a:solidFill>
-            <a:srgbClr val="FBE9DF"/>
-          </a:solidFill>
-          <a:ln w="12700">
-            <a:solidFill>
-              <a:srgbClr val="FBE9DF"/>
-            </a:solidFill>
-            <a:prstDash val="solid"/>
-          </a:ln>
-        </p:spPr>
-      </p:sp>
-      <p:sp>
-        <p:nvSpPr>
-          <p:cNvPr id="8" name="Text 6"/>
-          <p:cNvSpPr txBox="1"/>
-          <p:nvPr/>
-        </p:nvSpPr>
-        <p:spPr>
-          <a:xfrm>
-            <a:off x="6812280" y="1572768"/>
-            <a:ext cx="1188720" cy="365760"/>
-          </a:xfrm>
-          <a:prstGeom prst="rect">
-            <a:avLst/>
-          </a:prstGeom>
-          <a:noFill/>
-          <a:ln/>
-        </p:spPr>
-        <p:txBody>
-          <a:bodyPr wrap="square" lIns="0" tIns="0" rIns="0" bIns="0" rtlCol="0" anchor="ctr"/>
-          <a:lstStyle/>
-          <a:p>
-            <a:pPr indent="0" marL="0">
-              <a:buNone/>
-            </a:pPr>
-            <a:r>
-              <a:rPr lang="en-US" sz="1400" b="1" dirty="0">
-                <a:solidFill>
-                  <a:srgbClr val="D9622B"/>
-                </a:solidFill>
-                <a:latin typeface="Cambria" pitchFamily="34" charset="0"/>
-                <a:ea typeface="Cambria" pitchFamily="34" charset="-122"/>
-                <a:cs typeface="Cambria" pitchFamily="34" charset="-120"/>
-              </a:rPr>
-              <a:t>Days 1-30</a:t>
-            </a:r>
-            <a:endParaRPr lang="en-US" sz="1400" dirty="0"/>
-          </a:p>
-        </p:txBody>
-      </p:sp>
-      <p:sp>
-        <p:nvSpPr>
-          <p:cNvPr id="9" name="Text 7"/>
-          <p:cNvSpPr txBox="1"/>
-          <p:nvPr/>
-        </p:nvSpPr>
-        <p:spPr>
-          <a:xfrm>
-            <a:off x="8001000" y="1554480"/>
-            <a:ext cx="3459175" cy="868680"/>
-          </a:xfrm>
-          <a:prstGeom prst="rect">
-            <a:avLst/>
-          </a:prstGeom>
-          <a:noFill/>
-          <a:ln/>
-        </p:spPr>
-        <p:txBody>
-          <a:bodyPr wrap="square" lIns="0" tIns="0" rIns="0" bIns="0" rtlCol="0" anchor="ctr"/>
-          <a:lstStyle/>
-          <a:p>
-            <a:pPr indent="0" marL="0">
-              <a:buNone/>
-            </a:pPr>
-            <a:r>
-              <a:rPr lang="en-US" sz="1300" dirty="0">
-                <a:solidFill>
-                  <a:srgbClr val="1F2A33"/>
-                </a:solidFill>
-                <a:latin typeface="Calibri" pitchFamily="34" charset="0"/>
-                <a:ea typeface="Calibri" pitchFamily="34" charset="-122"/>
-                <a:cs typeface="Calibri" pitchFamily="34" charset="-120"/>
-              </a:rPr>
-              <a:t>Shadow week with Lisa (target: zero misses, time saved measured); schedule the 6am run; Continental call with the lead-time data.</a:t>
-            </a:r>
-            <a:endParaRPr lang="en-US" sz="1300" dirty="0"/>
-          </a:p>
-        </p:txBody>
-      </p:sp>
-      <p:sp>
-        <p:nvSpPr>
-          <p:cNvPr id="10" name="Shape 8"/>
-          <p:cNvSpPr/>
-          <p:nvPr/>
-        </p:nvSpPr>
-        <p:spPr>
-          <a:xfrm>
-            <a:off x="6583680" y="2651760"/>
-            <a:ext cx="5059375" cy="1051560"/>
-          </a:xfrm>
-          <a:prstGeom prst="roundRect">
-            <a:avLst>
-              <a:gd name="adj" fmla="val 6957"/>
+              <a:gd name="adj" fmla="val 1524"/>
             </a:avLst>
           </a:prstGeom>
           <a:solidFill>
@@ -18850,14 +17997,14 @@
       </p:sp>
       <p:sp>
         <p:nvSpPr>
-          <p:cNvPr id="11" name="Text 9"/>
+          <p:cNvPr id="6" name="Text 4"/>
           <p:cNvSpPr txBox="1"/>
           <p:nvPr/>
         </p:nvSpPr>
         <p:spPr>
           <a:xfrm>
-            <a:off x="6812280" y="2761488"/>
-            <a:ext cx="1188720" cy="365760"/>
+            <a:off x="822960" y="1600200"/>
+            <a:ext cx="4815688" cy="274320"/>
           </a:xfrm>
           <a:prstGeom prst="rect">
             <a:avLst/>
@@ -18873,73 +18020,166 @@
               <a:buNone/>
             </a:pPr>
             <a:r>
-              <a:rPr lang="en-US" sz="1400" b="1" dirty="0">
+              <a:rPr lang="en-US" sz="1200" b="1" spc="200" kern="0" dirty="0">
                 <a:solidFill>
                   <a:srgbClr val="D9622B"/>
-                </a:solidFill>
-                <a:latin typeface="Cambria" pitchFamily="34" charset="0"/>
-                <a:ea typeface="Cambria" pitchFamily="34" charset="-122"/>
-                <a:cs typeface="Cambria" pitchFamily="34" charset="-120"/>
-              </a:rPr>
-              <a:t>Days 31-60</a:t>
-            </a:r>
-            <a:endParaRPr lang="en-US" sz="1400" dirty="0"/>
-          </a:p>
-        </p:txBody>
-      </p:sp>
-      <p:sp>
-        <p:nvSpPr>
-          <p:cNvPr id="12" name="Text 10"/>
-          <p:cNvSpPr txBox="1"/>
-          <p:nvPr/>
-        </p:nvSpPr>
-        <p:spPr>
-          <a:xfrm>
-            <a:off x="8001000" y="2743200"/>
-            <a:ext cx="3459175" cy="868680"/>
-          </a:xfrm>
-          <a:prstGeom prst="rect">
-            <a:avLst/>
-          </a:prstGeom>
-          <a:noFill/>
-          <a:ln/>
-        </p:spPr>
-        <p:txBody>
-          <a:bodyPr wrap="square" lIns="0" tIns="0" rIns="0" bIns="0" rtlCol="0" anchor="ctr"/>
-          <a:lstStyle/>
-          <a:p>
-            <a:pPr indent="0" marL="0">
-              <a:buNone/>
-            </a:pPr>
-            <a:r>
-              <a:rPr lang="en-US" sz="1300" dirty="0">
-                <a:solidFill>
-                  <a:srgbClr val="1F2A33"/>
                 </a:solidFill>
                 <a:latin typeface="Calibri" pitchFamily="34" charset="0"/>
                 <a:ea typeface="Calibri" pitchFamily="34" charset="-122"/>
                 <a:cs typeface="Calibri" pitchFamily="34" charset="-120"/>
               </a:rPr>
-              <a:t>Supplier packs and acknowledgment forms to Continental, Ostmark, Heritage; planning fixes MRP lead times; clear the $128k backlog.</a:t>
-            </a:r>
-            <a:endParaRPr lang="en-US" sz="1300" dirty="0"/>
+              <a:t>LISA</a:t>
+            </a:r>
+            <a:endParaRPr lang="en-US" sz="1200" dirty="0"/>
           </a:p>
         </p:txBody>
       </p:sp>
       <p:sp>
         <p:nvSpPr>
-          <p:cNvPr id="13" name="Shape 11"/>
+          <p:cNvPr id="7" name="Text 5"/>
+          <p:cNvSpPr txBox="1"/>
+          <p:nvPr/>
+        </p:nvSpPr>
+        <p:spPr>
+          <a:xfrm>
+            <a:off x="822960" y="1920240"/>
+            <a:ext cx="4815688" cy="4251960"/>
+          </a:xfrm>
+          <a:prstGeom prst="rect">
+            <a:avLst/>
+          </a:prstGeom>
+          <a:noFill/>
+          <a:ln/>
+        </p:spPr>
+        <p:txBody>
+          <a:bodyPr wrap="square" lIns="381" tIns="381" rIns="381" bIns="381" rtlCol="0" anchor="t"/>
+          <a:lstStyle/>
+          <a:p>
+            <a:pPr marL="342900" indent="-342900">
+              <a:spcAft>
+                <a:spcPts val="1400"/>
+              </a:spcAft>
+              <a:buSzPct val="100000"/>
+              <a:buFont typeface="+mj-lt"/>
+              <a:buAutoNum type="arabicPeriod" startAt="1"/>
+            </a:pPr>
+            <a:r>
+              <a:rPr lang="en-US" sz="1600" dirty="0">
+                <a:solidFill>
+                  <a:srgbClr val="1F2A33"/>
+                </a:solidFill>
+                <a:latin typeface="Calibri" pitchFamily="34" charset="0"/>
+                <a:ea typeface="Calibri" pitchFamily="34" charset="-122"/>
+                <a:cs typeface="Calibri" pitchFamily="34" charset="-120"/>
+              </a:rPr>
+              <a:t>How often is a missing line really dropped, vs. confirmed later?</a:t>
+            </a:r>
+            <a:endParaRPr lang="en-US" sz="1600" dirty="0"/>
+          </a:p>
+          <a:p>
+            <a:pPr marL="342900" indent="-342900">
+              <a:spcAft>
+                <a:spcPts val="1400"/>
+              </a:spcAft>
+              <a:buSzPct val="100000"/>
+              <a:buFont typeface="+mj-lt"/>
+              <a:buAutoNum type="arabicPeriod" startAt="1"/>
+            </a:pPr>
+            <a:r>
+              <a:rPr lang="en-US" sz="1600" dirty="0">
+                <a:solidFill>
+                  <a:srgbClr val="1F2A33"/>
+                </a:solidFill>
+                <a:latin typeface="Calibri" pitchFamily="34" charset="0"/>
+                <a:ea typeface="Calibri" pitchFamily="34" charset="-122"/>
+                <a:cs typeface="Calibri" pitchFamily="34" charset="-120"/>
+              </a:rPr>
+              <a:t>Which miss costs most: a short, a price or a date?</a:t>
+            </a:r>
+            <a:endParaRPr lang="en-US" sz="1600" dirty="0"/>
+          </a:p>
+          <a:p>
+            <a:pPr marL="342900" indent="-342900">
+              <a:spcAft>
+                <a:spcPts val="1400"/>
+              </a:spcAft>
+              <a:buSzPct val="100000"/>
+              <a:buFont typeface="+mj-lt"/>
+              <a:buAutoNum type="arabicPeriod" startAt="1"/>
+            </a:pPr>
+            <a:r>
+              <a:rPr lang="en-US" sz="1600" dirty="0">
+                <a:solidFill>
+                  <a:srgbClr val="1F2A33"/>
+                </a:solidFill>
+                <a:latin typeface="Calibri" pitchFamily="34" charset="0"/>
+                <a:ea typeface="Calibri" pitchFamily="34" charset="-122"/>
+                <a:cs typeface="Calibri" pitchFamily="34" charset="-120"/>
+              </a:rPr>
+              <a:t>Apex CRES bar +1-2% since Feb: a surcharge that never reached the PO?</a:t>
+            </a:r>
+            <a:endParaRPr lang="en-US" sz="1600" dirty="0"/>
+          </a:p>
+          <a:p>
+            <a:pPr marL="342900" indent="-342900">
+              <a:spcAft>
+                <a:spcPts val="1400"/>
+              </a:spcAft>
+              <a:buSzPct val="100000"/>
+              <a:buFont typeface="+mj-lt"/>
+              <a:buAutoNum type="arabicPeriod" startAt="1"/>
+            </a:pPr>
+            <a:r>
+              <a:rPr lang="en-US" sz="1600" dirty="0">
+                <a:solidFill>
+                  <a:srgbClr val="1F2A33"/>
+                </a:solidFill>
+                <a:latin typeface="Calibri" pitchFamily="34" charset="0"/>
+                <a:ea typeface="Calibri" pitchFamily="34" charset="-122"/>
+                <a:cs typeface="Calibri" pitchFamily="34" charset="-120"/>
+              </a:rPr>
+              <a:t>Which date rules: our required date, the promise, or MRP need?</a:t>
+            </a:r>
+            <a:endParaRPr lang="en-US" sz="1600" dirty="0"/>
+          </a:p>
+          <a:p>
+            <a:pPr marL="342900" indent="-342900">
+              <a:spcAft>
+                <a:spcPts val="1400"/>
+              </a:spcAft>
+              <a:buSzPct val="100000"/>
+              <a:buFont typeface="+mj-lt"/>
+              <a:buAutoNum type="arabicPeriod" startAt="1"/>
+            </a:pPr>
+            <a:r>
+              <a:rPr lang="en-US" sz="1600" dirty="0">
+                <a:solidFill>
+                  <a:srgbClr val="1F2A33"/>
+                </a:solidFill>
+                <a:latin typeface="Calibri" pitchFamily="34" charset="0"/>
+                <a:ea typeface="Calibri" pitchFamily="34" charset="-122"/>
+                <a:cs typeface="Calibri" pitchFamily="34" charset="-120"/>
+              </a:rPr>
+              <a:t>What would you need to see before you stop opening every PDF?</a:t>
+            </a:r>
+            <a:endParaRPr lang="en-US" sz="1600" dirty="0"/>
+          </a:p>
+        </p:txBody>
+      </p:sp>
+      <p:sp>
+        <p:nvSpPr>
+          <p:cNvPr id="8" name="Shape 6"/>
           <p:cNvSpPr/>
           <p:nvPr/>
         </p:nvSpPr>
         <p:spPr>
           <a:xfrm>
-            <a:off x="6583680" y="3840480"/>
-            <a:ext cx="5059375" cy="1051560"/>
+            <a:off x="6278728" y="1463040"/>
+            <a:ext cx="5364328" cy="4800600"/>
           </a:xfrm>
           <a:prstGeom prst="roundRect">
             <a:avLst>
-              <a:gd name="adj" fmla="val 6957"/>
+              <a:gd name="adj" fmla="val 1524"/>
             </a:avLst>
           </a:prstGeom>
           <a:solidFill>
@@ -18955,14 +18195,14 @@
       </p:sp>
       <p:sp>
         <p:nvSpPr>
-          <p:cNvPr id="14" name="Text 12"/>
+          <p:cNvPr id="9" name="Text 7"/>
           <p:cNvSpPr txBox="1"/>
           <p:nvPr/>
         </p:nvSpPr>
         <p:spPr>
           <a:xfrm>
-            <a:off x="6812280" y="3950208"/>
-            <a:ext cx="1188720" cy="365760"/>
+            <a:off x="6553048" y="1600200"/>
+            <a:ext cx="4815688" cy="274320"/>
           </a:xfrm>
           <a:prstGeom prst="rect">
             <a:avLst/>
@@ -18978,96 +18218,30 @@
               <a:buNone/>
             </a:pPr>
             <a:r>
-              <a:rPr lang="en-US" sz="1400" b="1" dirty="0">
+              <a:rPr lang="en-US" sz="1200" b="1" spc="200" kern="0" dirty="0">
                 <a:solidFill>
                   <a:srgbClr val="D9622B"/>
-                </a:solidFill>
-                <a:latin typeface="Cambria" pitchFamily="34" charset="0"/>
-                <a:ea typeface="Cambria" pitchFamily="34" charset="-122"/>
-                <a:cs typeface="Cambria" pitchFamily="34" charset="-120"/>
-              </a:rPr>
-              <a:t>Days 61-90</a:t>
-            </a:r>
-            <a:endParaRPr lang="en-US" sz="1400" dirty="0"/>
-          </a:p>
-        </p:txBody>
-      </p:sp>
-      <p:sp>
-        <p:nvSpPr>
-          <p:cNvPr id="15" name="Text 13"/>
-          <p:cNvSpPr txBox="1"/>
-          <p:nvPr/>
-        </p:nvSpPr>
-        <p:spPr>
-          <a:xfrm>
-            <a:off x="8001000" y="3931920"/>
-            <a:ext cx="3459175" cy="868680"/>
-          </a:xfrm>
-          <a:prstGeom prst="rect">
-            <a:avLst/>
-          </a:prstGeom>
-          <a:noFill/>
-          <a:ln/>
-        </p:spPr>
-        <p:txBody>
-          <a:bodyPr wrap="square" lIns="0" tIns="0" rIns="0" bIns="0" rtlCol="0" anchor="ctr"/>
-          <a:lstStyle/>
-          <a:p>
-            <a:pPr indent="0" marL="0">
-              <a:buNone/>
-            </a:pPr>
-            <a:r>
-              <a:rPr lang="en-US" sz="1300" dirty="0">
-                <a:solidFill>
-                  <a:srgbClr val="1F2A33"/>
                 </a:solidFill>
                 <a:latin typeface="Calibri" pitchFamily="34" charset="0"/>
                 <a:ea typeface="Calibri" pitchFamily="34" charset="-122"/>
                 <a:cs typeface="Calibri" pitchFamily="34" charset="-120"/>
               </a:rPr>
-              <a:t>Approved crosswalk loaded as the ERP vendor-part cross-reference; readout refreshed monthly; decide on a portal or EDI 855.</a:t>
-            </a:r>
-            <a:endParaRPr lang="en-US" sz="1300" dirty="0"/>
+              <a:t>PLANT MANAGER</a:t>
+            </a:r>
+            <a:endParaRPr lang="en-US" sz="1200" dirty="0"/>
           </a:p>
         </p:txBody>
       </p:sp>
       <p:sp>
         <p:nvSpPr>
-          <p:cNvPr id="16" name="Shape 14"/>
-          <p:cNvSpPr/>
-          <p:nvPr/>
-        </p:nvSpPr>
-        <p:spPr>
-          <a:xfrm>
-            <a:off x="6583680" y="5029200"/>
-            <a:ext cx="5059375" cy="1051560"/>
-          </a:xfrm>
-          <a:prstGeom prst="roundRect">
-            <a:avLst>
-              <a:gd name="adj" fmla="val 6957"/>
-            </a:avLst>
-          </a:prstGeom>
-          <a:solidFill>
-            <a:srgbClr val="EEF2F5"/>
-          </a:solidFill>
-          <a:ln w="12700">
-            <a:solidFill>
-              <a:srgbClr val="EEF2F5"/>
-            </a:solidFill>
-            <a:prstDash val="solid"/>
-          </a:ln>
-        </p:spPr>
-      </p:sp>
-      <p:sp>
-        <p:nvSpPr>
-          <p:cNvPr id="17" name="Text 15"/>
+          <p:cNvPr id="10" name="Text 8"/>
           <p:cNvSpPr txBox="1"/>
           <p:nvPr/>
         </p:nvSpPr>
         <p:spPr>
           <a:xfrm>
-            <a:off x="6812280" y="5138928"/>
-            <a:ext cx="1188720" cy="365760"/>
+            <a:off x="6553048" y="1920240"/>
+            <a:ext cx="4815688" cy="4251960"/>
           </a:xfrm>
           <a:prstGeom prst="rect">
             <a:avLst/>
@@ -19076,53 +18250,19 @@
           <a:ln/>
         </p:spPr>
         <p:txBody>
-          <a:bodyPr wrap="square" lIns="0" tIns="0" rIns="0" bIns="0" rtlCol="0" anchor="ctr"/>
+          <a:bodyPr wrap="square" lIns="381" tIns="381" rIns="381" bIns="381" rtlCol="0" anchor="t"/>
           <a:lstStyle/>
           <a:p>
-            <a:pPr indent="0" marL="0">
-              <a:buNone/>
-            </a:pPr>
-            <a:r>
-              <a:rPr lang="en-US" sz="1400" b="1" dirty="0">
-                <a:solidFill>
-                  <a:srgbClr val="D9622B"/>
-                </a:solidFill>
-                <a:latin typeface="Cambria" pitchFamily="34" charset="0"/>
-                <a:ea typeface="Cambria" pitchFamily="34" charset="-122"/>
-                <a:cs typeface="Cambria" pitchFamily="34" charset="-120"/>
-              </a:rPr>
-              <a:t>Portfolio</a:t>
-            </a:r>
-            <a:endParaRPr lang="en-US" sz="1400" dirty="0"/>
-          </a:p>
-        </p:txBody>
-      </p:sp>
-      <p:sp>
-        <p:nvSpPr>
-          <p:cNvPr id="18" name="Text 16"/>
-          <p:cNvSpPr txBox="1"/>
-          <p:nvPr/>
-        </p:nvSpPr>
-        <p:spPr>
-          <a:xfrm>
-            <a:off x="8001000" y="5120640"/>
-            <a:ext cx="3459175" cy="868680"/>
-          </a:xfrm>
-          <a:prstGeom prst="rect">
-            <a:avLst/>
-          </a:prstGeom>
-          <a:noFill/>
-          <a:ln/>
-        </p:spPr>
-        <p:txBody>
-          <a:bodyPr wrap="square" lIns="0" tIns="0" rIns="0" bIns="0" rtlCol="0" anchor="ctr"/>
-          <a:lstStyle/>
-          <a:p>
-            <a:pPr indent="0" marL="0">
-              <a:buNone/>
-            </a:pPr>
-            <a:r>
-              <a:rPr lang="en-US" sz="1300" dirty="0">
+            <a:pPr marL="342900" indent="-342900">
+              <a:spcAft>
+                <a:spcPts val="1400"/>
+              </a:spcAft>
+              <a:buSzPct val="100000"/>
+              <a:buFont typeface="+mj-lt"/>
+              <a:buAutoNum type="arabicPeriod" startAt="1"/>
+            </a:pPr>
+            <a:r>
+              <a:rPr lang="en-US" sz="1600" dirty="0">
                 <a:solidFill>
                   <a:srgbClr val="1F2A33"/>
                 </a:solidFill>
@@ -19130,9 +18270,97 @@
                 <a:ea typeface="Calibri" pitchFamily="34" charset="-122"/>
                 <a:cs typeface="Calibri" pitchFamily="34" charset="-120"/>
               </a:rPr>
-              <a:t>Package the pattern (parsers + rules + workbook) for the next Tinicum company with the same supplier-paperwork problem.</a:t>
-            </a:r>
-            <a:endParaRPr lang="en-US" sz="1300" dirty="0"/>
+              <a:t>What does a late heat-treat lot cost: downtime, overtime, an expedite?</a:t>
+            </a:r>
+            <a:endParaRPr lang="en-US" sz="1600" dirty="0"/>
+          </a:p>
+          <a:p>
+            <a:pPr marL="342900" indent="-342900">
+              <a:spcAft>
+                <a:spcPts val="1400"/>
+              </a:spcAft>
+              <a:buSzPct val="100000"/>
+              <a:buFont typeface="+mj-lt"/>
+              <a:buAutoNum type="arabicPeriod" startAt="1"/>
+            </a:pPr>
+            <a:r>
+              <a:rPr lang="en-US" sz="1600" dirty="0">
+                <a:solidFill>
+                  <a:srgbClr val="1F2A33"/>
+                </a:solidFill>
+                <a:latin typeface="Calibri" pitchFamily="34" charset="0"/>
+                <a:ea typeface="Calibri" pitchFamily="34" charset="-122"/>
+                <a:cs typeface="Calibri" pitchFamily="34" charset="-120"/>
+              </a:rPr>
+              <a:t>Who set the 19-day heat-treat lead time? Continental quotes 28.</a:t>
+            </a:r>
+            <a:endParaRPr lang="en-US" sz="1600" dirty="0"/>
+          </a:p>
+          <a:p>
+            <a:pPr marL="342900" indent="-342900">
+              <a:spcAft>
+                <a:spcPts val="1400"/>
+              </a:spcAft>
+              <a:buSzPct val="100000"/>
+              <a:buFont typeface="+mj-lt"/>
+              <a:buAutoNum type="arabicPeriod" startAt="1"/>
+            </a:pPr>
+            <a:r>
+              <a:rPr lang="en-US" sz="1600" dirty="0">
+                <a:solidFill>
+                  <a:srgbClr val="1F2A33"/>
+                </a:solidFill>
+                <a:latin typeface="Calibri" pitchFamily="34" charset="0"/>
+                <a:ea typeface="Calibri" pitchFamily="34" charset="-122"/>
+                <a:cs typeface="Calibri" pitchFamily="34" charset="-120"/>
+              </a:rPr>
+              <a:t>Is there a second qualified (Nadcap) heat treater?</a:t>
+            </a:r>
+            <a:endParaRPr lang="en-US" sz="1600" dirty="0"/>
+          </a:p>
+          <a:p>
+            <a:pPr marL="342900" indent="-342900">
+              <a:spcAft>
+                <a:spcPts val="1400"/>
+              </a:spcAft>
+              <a:buSzPct val="100000"/>
+              <a:buFont typeface="+mj-lt"/>
+              <a:buAutoNum type="arabicPeriod" startAt="1"/>
+            </a:pPr>
+            <a:r>
+              <a:rPr lang="en-US" sz="1600" dirty="0">
+                <a:solidFill>
+                  <a:srgbClr val="1F2A33"/>
+                </a:solidFill>
+                <a:latin typeface="Calibri" pitchFamily="34" charset="0"/>
+                <a:ea typeface="Calibri" pitchFamily="34" charset="-122"/>
+                <a:cs typeface="Calibri" pitchFamily="34" charset="-120"/>
+              </a:rPr>
+              <a:t>Is Apex at 85% of spend a deliberate single source?</a:t>
+            </a:r>
+            <a:endParaRPr lang="en-US" sz="1600" dirty="0"/>
+          </a:p>
+          <a:p>
+            <a:pPr marL="342900" indent="-342900">
+              <a:spcAft>
+                <a:spcPts val="1400"/>
+              </a:spcAft>
+              <a:buSzPct val="100000"/>
+              <a:buFont typeface="+mj-lt"/>
+              <a:buAutoNum type="arabicPeriod" startAt="1"/>
+            </a:pPr>
+            <a:r>
+              <a:rPr lang="en-US" sz="1600" dirty="0">
+                <a:solidFill>
+                  <a:srgbClr val="1F2A33"/>
+                </a:solidFill>
+                <a:latin typeface="Calibri" pitchFamily="34" charset="0"/>
+                <a:ea typeface="Calibri" pitchFamily="34" charset="-122"/>
+                <a:cs typeface="Calibri" pitchFamily="34" charset="-120"/>
+              </a:rPr>
+              <a:t>Which decision should this drive: re-source, renegotiate or re-plan?</a:t>
+            </a:r>
+            <a:endParaRPr lang="en-US" sz="1600" dirty="0"/>
           </a:p>
         </p:txBody>
       </p:sp>
@@ -19825,6 +19053,262 @@
             </a:r>
             <a:endParaRPr lang="en-US" sz="1300" dirty="0"/>
           </a:p>
+        </p:txBody>
+      </p:sp>
+      <p:sp>
+        <p:nvSpPr>
+          <p:cNvPr id="18" name="Text 16"/>
+          <p:cNvSpPr txBox="1"/>
+          <p:nvPr/>
+        </p:nvSpPr>
+        <p:spPr>
+          <a:xfrm>
+            <a:off x="6553048" y="2560320"/>
+            <a:ext cx="1605229" cy="594360"/>
+          </a:xfrm>
+          <a:prstGeom prst="rect">
+            <a:avLst/>
+          </a:prstGeom>
+          <a:noFill/>
+          <a:ln/>
+        </p:spPr>
+        <p:txBody>
+          <a:bodyPr wrap="square" lIns="0" tIns="0" rIns="0" bIns="0" rtlCol="0" anchor="ctr"/>
+          <a:lstStyle/>
+          <a:p>
+            <a:pPr indent="0" marL="0">
+              <a:buNone/>
+            </a:pPr>
+            <a:r>
+              <a:rPr lang="en-US" sz="2600" b="1" dirty="0">
+                <a:solidFill>
+                  <a:srgbClr val="B83227"/>
+                </a:solidFill>
+                <a:latin typeface="Cambria" pitchFamily="34" charset="0"/>
+                <a:ea typeface="Cambria" pitchFamily="34" charset="-122"/>
+                <a:cs typeface="Cambria" pitchFamily="34" charset="-120"/>
+              </a:rPr>
+              <a:t>42%</a:t>
+            </a:r>
+            <a:endParaRPr lang="en-US" sz="2600" dirty="0"/>
+          </a:p>
+        </p:txBody>
+      </p:sp>
+      <p:sp>
+        <p:nvSpPr>
+          <p:cNvPr id="19" name="Text 17"/>
+          <p:cNvSpPr txBox="1"/>
+          <p:nvPr/>
+        </p:nvSpPr>
+        <p:spPr>
+          <a:xfrm>
+            <a:off x="6553048" y="3163824"/>
+            <a:ext cx="1422349" cy="502920"/>
+          </a:xfrm>
+          <a:prstGeom prst="rect">
+            <a:avLst/>
+          </a:prstGeom>
+          <a:noFill/>
+          <a:ln/>
+        </p:spPr>
+        <p:txBody>
+          <a:bodyPr wrap="square" lIns="0" tIns="0" rIns="0" bIns="0" rtlCol="0" anchor="t"/>
+          <a:lstStyle/>
+          <a:p>
+            <a:pPr indent="0" marL="0">
+              <a:buNone/>
+            </a:pPr>
+            <a:r>
+              <a:rPr lang="en-US" sz="1200" dirty="0">
+                <a:solidFill>
+                  <a:srgbClr val="4E5D6A"/>
+                </a:solidFill>
+                <a:latin typeface="Calibri" pitchFamily="34" charset="0"/>
+                <a:ea typeface="Calibri" pitchFamily="34" charset="-122"/>
+                <a:cs typeface="Calibri" pitchFamily="34" charset="-120"/>
+              </a:rPr>
+              <a:t>Continental on time; other vendors 69-99%</a:t>
+            </a:r>
+            <a:endParaRPr lang="en-US" sz="1200" dirty="0"/>
+          </a:p>
+        </p:txBody>
+      </p:sp>
+      <p:sp>
+        <p:nvSpPr>
+          <p:cNvPr id="20" name="Text 18"/>
+          <p:cNvSpPr txBox="1"/>
+          <p:nvPr/>
+        </p:nvSpPr>
+        <p:spPr>
+          <a:xfrm>
+            <a:off x="8158277" y="2560320"/>
+            <a:ext cx="1605229" cy="594360"/>
+          </a:xfrm>
+          <a:prstGeom prst="rect">
+            <a:avLst/>
+          </a:prstGeom>
+          <a:noFill/>
+          <a:ln/>
+        </p:spPr>
+        <p:txBody>
+          <a:bodyPr wrap="square" lIns="0" tIns="0" rIns="0" bIns="0" rtlCol="0" anchor="ctr"/>
+          <a:lstStyle/>
+          <a:p>
+            <a:pPr indent="0" marL="0">
+              <a:buNone/>
+            </a:pPr>
+            <a:r>
+              <a:rPr lang="en-US" sz="2600" b="1" dirty="0">
+                <a:solidFill>
+                  <a:srgbClr val="B83227"/>
+                </a:solidFill>
+                <a:latin typeface="Cambria" pitchFamily="34" charset="0"/>
+                <a:ea typeface="Cambria" pitchFamily="34" charset="-122"/>
+                <a:cs typeface="Cambria" pitchFamily="34" charset="-120"/>
+              </a:rPr>
+              <a:t>61/63</a:t>
+            </a:r>
+            <a:endParaRPr lang="en-US" sz="2600" dirty="0"/>
+          </a:p>
+        </p:txBody>
+      </p:sp>
+      <p:sp>
+        <p:nvSpPr>
+          <p:cNvPr id="21" name="Text 19"/>
+          <p:cNvSpPr txBox="1"/>
+          <p:nvPr/>
+        </p:nvSpPr>
+        <p:spPr>
+          <a:xfrm>
+            <a:off x="8158277" y="3163824"/>
+            <a:ext cx="1422349" cy="502920"/>
+          </a:xfrm>
+          <a:prstGeom prst="rect">
+            <a:avLst/>
+          </a:prstGeom>
+          <a:noFill/>
+          <a:ln/>
+        </p:spPr>
+        <p:txBody>
+          <a:bodyPr wrap="square" lIns="0" tIns="0" rIns="0" bIns="0" rtlCol="0" anchor="t"/>
+          <a:lstStyle/>
+          <a:p>
+            <a:pPr indent="0" marL="0">
+              <a:buNone/>
+            </a:pPr>
+            <a:r>
+              <a:rPr lang="en-US" sz="1200" dirty="0">
+                <a:solidFill>
+                  <a:srgbClr val="4E5D6A"/>
+                </a:solidFill>
+                <a:latin typeface="Calibri" pitchFamily="34" charset="0"/>
+                <a:ea typeface="Calibri" pitchFamily="34" charset="-122"/>
+                <a:cs typeface="Calibri" pitchFamily="34" charset="-120"/>
+              </a:rPr>
+              <a:t>of the lines &gt;7 days late are Continental's</a:t>
+            </a:r>
+            <a:endParaRPr lang="en-US" sz="1200" dirty="0"/>
+          </a:p>
+        </p:txBody>
+      </p:sp>
+      <p:sp>
+        <p:nvSpPr>
+          <p:cNvPr id="22" name="Text 20"/>
+          <p:cNvSpPr txBox="1"/>
+          <p:nvPr/>
+        </p:nvSpPr>
+        <p:spPr>
+          <a:xfrm>
+            <a:off x="9763506" y="2560320"/>
+            <a:ext cx="1605229" cy="594360"/>
+          </a:xfrm>
+          <a:prstGeom prst="rect">
+            <a:avLst/>
+          </a:prstGeom>
+          <a:noFill/>
+          <a:ln/>
+        </p:spPr>
+        <p:txBody>
+          <a:bodyPr wrap="square" lIns="0" tIns="0" rIns="0" bIns="0" rtlCol="0" anchor="ctr"/>
+          <a:lstStyle/>
+          <a:p>
+            <a:pPr indent="0" marL="0">
+              <a:buNone/>
+            </a:pPr>
+            <a:r>
+              <a:rPr lang="en-US" sz="2600" b="1" dirty="0">
+                <a:solidFill>
+                  <a:srgbClr val="C98A06"/>
+                </a:solidFill>
+                <a:latin typeface="Cambria" pitchFamily="34" charset="0"/>
+                <a:ea typeface="Cambria" pitchFamily="34" charset="-122"/>
+                <a:cs typeface="Cambria" pitchFamily="34" charset="-120"/>
+              </a:rPr>
+              <a:t>$1.84M</a:t>
+            </a:r>
+            <a:endParaRPr lang="en-US" sz="2600" dirty="0"/>
+          </a:p>
+        </p:txBody>
+      </p:sp>
+      <p:sp>
+        <p:nvSpPr>
+          <p:cNvPr id="23" name="Text 21"/>
+          <p:cNvSpPr txBox="1"/>
+          <p:nvPr/>
+        </p:nvSpPr>
+        <p:spPr>
+          <a:xfrm>
+            <a:off x="9763506" y="3163824"/>
+            <a:ext cx="1422349" cy="502920"/>
+          </a:xfrm>
+          <a:prstGeom prst="rect">
+            <a:avLst/>
+          </a:prstGeom>
+          <a:noFill/>
+          <a:ln/>
+        </p:spPr>
+        <p:txBody>
+          <a:bodyPr wrap="square" lIns="0" tIns="0" rIns="0" bIns="0" rtlCol="0" anchor="t"/>
+          <a:lstStyle/>
+          <a:p>
+            <a:pPr indent="0" marL="0">
+              <a:buNone/>
+            </a:pPr>
+            <a:r>
+              <a:rPr lang="en-US" sz="1200" dirty="0">
+                <a:solidFill>
+                  <a:srgbClr val="4E5D6A"/>
+                </a:solidFill>
+                <a:latin typeface="Calibri" pitchFamily="34" charset="0"/>
+                <a:ea typeface="Calibri" pitchFamily="34" charset="-122"/>
+                <a:cs typeface="Calibri" pitchFamily="34" charset="-120"/>
+              </a:rPr>
+              <a:t>due in 14 days, not acknowledged</a:t>
+            </a:r>
+            <a:endParaRPr lang="en-US" sz="1200" dirty="0"/>
+          </a:p>
+        </p:txBody>
+      </p:sp>
+      <p:sp>
+        <p:nvSpPr>
+          <p:cNvPr id="24" name="Text 22"/>
+          <p:cNvSpPr txBox="1"/>
+          <p:nvPr/>
+        </p:nvSpPr>
+        <p:spPr>
+          <a:xfrm>
+            <a:off x="6553048" y="3886200"/>
+            <a:ext cx="4815688" cy="2194560"/>
+          </a:xfrm>
+          <a:prstGeom prst="rect">
+            <a:avLst/>
+          </a:prstGeom>
+          <a:noFill/>
+          <a:ln/>
+        </p:spPr>
+        <p:txBody>
+          <a:bodyPr wrap="square" lIns="635" tIns="635" rIns="635" bIns="635" rtlCol="0" anchor="t"/>
+          <a:lstStyle/>
           <a:p>
             <a:pPr marL="342900" indent="-342900">
               <a:spcAft>
@@ -19842,7 +19326,7 @@
                 <a:ea typeface="Calibri" pitchFamily="34" charset="-122"/>
                 <a:cs typeface="Calibri" pitchFamily="34" charset="-120"/>
               </a:rPr>
-              <a:t>Auditable: </a:t>
+              <a:t>Call Continental first. </a:t>
             </a:r>
             <a:pPr indent="0" marL="0">
               <a:spcAft>
@@ -19859,266 +19343,10 @@
                 <a:ea typeface="Calibri" pitchFamily="34" charset="-122"/>
                 <a:cs typeface="Calibri" pitchFamily="34" charset="-120"/>
               </a:rPr>
-              <a:t>every row traces to a source file and match method; uncertain matches go to review, never auto-accepted.</a:t>
+              <a:t>Late most often, by the most, not improving; part of it is our 19-day plan vs their 28-day quote.</a:t>
             </a:r>
             <a:endParaRPr lang="en-US" sz="1300" dirty="0"/>
           </a:p>
-        </p:txBody>
-      </p:sp>
-      <p:sp>
-        <p:nvSpPr>
-          <p:cNvPr id="18" name="Text 16"/>
-          <p:cNvSpPr txBox="1"/>
-          <p:nvPr/>
-        </p:nvSpPr>
-        <p:spPr>
-          <a:xfrm>
-            <a:off x="6553048" y="2560320"/>
-            <a:ext cx="1605229" cy="594360"/>
-          </a:xfrm>
-          <a:prstGeom prst="rect">
-            <a:avLst/>
-          </a:prstGeom>
-          <a:noFill/>
-          <a:ln/>
-        </p:spPr>
-        <p:txBody>
-          <a:bodyPr wrap="square" lIns="0" tIns="0" rIns="0" bIns="0" rtlCol="0" anchor="ctr"/>
-          <a:lstStyle/>
-          <a:p>
-            <a:pPr indent="0" marL="0">
-              <a:buNone/>
-            </a:pPr>
-            <a:r>
-              <a:rPr lang="en-US" sz="2600" b="1" dirty="0">
-                <a:solidFill>
-                  <a:srgbClr val="B83227"/>
-                </a:solidFill>
-                <a:latin typeface="Cambria" pitchFamily="34" charset="0"/>
-                <a:ea typeface="Cambria" pitchFamily="34" charset="-122"/>
-                <a:cs typeface="Cambria" pitchFamily="34" charset="-120"/>
-              </a:rPr>
-              <a:t>42%</a:t>
-            </a:r>
-            <a:endParaRPr lang="en-US" sz="2600" dirty="0"/>
-          </a:p>
-        </p:txBody>
-      </p:sp>
-      <p:sp>
-        <p:nvSpPr>
-          <p:cNvPr id="19" name="Text 17"/>
-          <p:cNvSpPr txBox="1"/>
-          <p:nvPr/>
-        </p:nvSpPr>
-        <p:spPr>
-          <a:xfrm>
-            <a:off x="6553048" y="3163824"/>
-            <a:ext cx="1422349" cy="502920"/>
-          </a:xfrm>
-          <a:prstGeom prst="rect">
-            <a:avLst/>
-          </a:prstGeom>
-          <a:noFill/>
-          <a:ln/>
-        </p:spPr>
-        <p:txBody>
-          <a:bodyPr wrap="square" lIns="0" tIns="0" rIns="0" bIns="0" rtlCol="0" anchor="t"/>
-          <a:lstStyle/>
-          <a:p>
-            <a:pPr indent="0" marL="0">
-              <a:buNone/>
-            </a:pPr>
-            <a:r>
-              <a:rPr lang="en-US" sz="1200" dirty="0">
-                <a:solidFill>
-                  <a:srgbClr val="4E5D6A"/>
-                </a:solidFill>
-                <a:latin typeface="Calibri" pitchFamily="34" charset="0"/>
-                <a:ea typeface="Calibri" pitchFamily="34" charset="-122"/>
-                <a:cs typeface="Calibri" pitchFamily="34" charset="-120"/>
-              </a:rPr>
-              <a:t>Continental on time; other vendors 69-99%</a:t>
-            </a:r>
-            <a:endParaRPr lang="en-US" sz="1200" dirty="0"/>
-          </a:p>
-        </p:txBody>
-      </p:sp>
-      <p:sp>
-        <p:nvSpPr>
-          <p:cNvPr id="20" name="Text 18"/>
-          <p:cNvSpPr txBox="1"/>
-          <p:nvPr/>
-        </p:nvSpPr>
-        <p:spPr>
-          <a:xfrm>
-            <a:off x="8158277" y="2560320"/>
-            <a:ext cx="1605229" cy="594360"/>
-          </a:xfrm>
-          <a:prstGeom prst="rect">
-            <a:avLst/>
-          </a:prstGeom>
-          <a:noFill/>
-          <a:ln/>
-        </p:spPr>
-        <p:txBody>
-          <a:bodyPr wrap="square" lIns="0" tIns="0" rIns="0" bIns="0" rtlCol="0" anchor="ctr"/>
-          <a:lstStyle/>
-          <a:p>
-            <a:pPr indent="0" marL="0">
-              <a:buNone/>
-            </a:pPr>
-            <a:r>
-              <a:rPr lang="en-US" sz="2600" b="1" dirty="0">
-                <a:solidFill>
-                  <a:srgbClr val="B83227"/>
-                </a:solidFill>
-                <a:latin typeface="Cambria" pitchFamily="34" charset="0"/>
-                <a:ea typeface="Cambria" pitchFamily="34" charset="-122"/>
-                <a:cs typeface="Cambria" pitchFamily="34" charset="-120"/>
-              </a:rPr>
-              <a:t>61/63</a:t>
-            </a:r>
-            <a:endParaRPr lang="en-US" sz="2600" dirty="0"/>
-          </a:p>
-        </p:txBody>
-      </p:sp>
-      <p:sp>
-        <p:nvSpPr>
-          <p:cNvPr id="21" name="Text 19"/>
-          <p:cNvSpPr txBox="1"/>
-          <p:nvPr/>
-        </p:nvSpPr>
-        <p:spPr>
-          <a:xfrm>
-            <a:off x="8158277" y="3163824"/>
-            <a:ext cx="1422349" cy="502920"/>
-          </a:xfrm>
-          <a:prstGeom prst="rect">
-            <a:avLst/>
-          </a:prstGeom>
-          <a:noFill/>
-          <a:ln/>
-        </p:spPr>
-        <p:txBody>
-          <a:bodyPr wrap="square" lIns="0" tIns="0" rIns="0" bIns="0" rtlCol="0" anchor="t"/>
-          <a:lstStyle/>
-          <a:p>
-            <a:pPr indent="0" marL="0">
-              <a:buNone/>
-            </a:pPr>
-            <a:r>
-              <a:rPr lang="en-US" sz="1200" dirty="0">
-                <a:solidFill>
-                  <a:srgbClr val="4E5D6A"/>
-                </a:solidFill>
-                <a:latin typeface="Calibri" pitchFamily="34" charset="0"/>
-                <a:ea typeface="Calibri" pitchFamily="34" charset="-122"/>
-                <a:cs typeface="Calibri" pitchFamily="34" charset="-120"/>
-              </a:rPr>
-              <a:t>of the lines &gt;7 days late are Continental's</a:t>
-            </a:r>
-            <a:endParaRPr lang="en-US" sz="1200" dirty="0"/>
-          </a:p>
-        </p:txBody>
-      </p:sp>
-      <p:sp>
-        <p:nvSpPr>
-          <p:cNvPr id="22" name="Text 20"/>
-          <p:cNvSpPr txBox="1"/>
-          <p:nvPr/>
-        </p:nvSpPr>
-        <p:spPr>
-          <a:xfrm>
-            <a:off x="9763506" y="2560320"/>
-            <a:ext cx="1605229" cy="594360"/>
-          </a:xfrm>
-          <a:prstGeom prst="rect">
-            <a:avLst/>
-          </a:prstGeom>
-          <a:noFill/>
-          <a:ln/>
-        </p:spPr>
-        <p:txBody>
-          <a:bodyPr wrap="square" lIns="0" tIns="0" rIns="0" bIns="0" rtlCol="0" anchor="ctr"/>
-          <a:lstStyle/>
-          <a:p>
-            <a:pPr indent="0" marL="0">
-              <a:buNone/>
-            </a:pPr>
-            <a:r>
-              <a:rPr lang="en-US" sz="2600" b="1" dirty="0">
-                <a:solidFill>
-                  <a:srgbClr val="C98A06"/>
-                </a:solidFill>
-                <a:latin typeface="Cambria" pitchFamily="34" charset="0"/>
-                <a:ea typeface="Cambria" pitchFamily="34" charset="-122"/>
-                <a:cs typeface="Cambria" pitchFamily="34" charset="-120"/>
-              </a:rPr>
-              <a:t>$1.84M</a:t>
-            </a:r>
-            <a:endParaRPr lang="en-US" sz="2600" dirty="0"/>
-          </a:p>
-        </p:txBody>
-      </p:sp>
-      <p:sp>
-        <p:nvSpPr>
-          <p:cNvPr id="23" name="Text 21"/>
-          <p:cNvSpPr txBox="1"/>
-          <p:nvPr/>
-        </p:nvSpPr>
-        <p:spPr>
-          <a:xfrm>
-            <a:off x="9763506" y="3163824"/>
-            <a:ext cx="1422349" cy="502920"/>
-          </a:xfrm>
-          <a:prstGeom prst="rect">
-            <a:avLst/>
-          </a:prstGeom>
-          <a:noFill/>
-          <a:ln/>
-        </p:spPr>
-        <p:txBody>
-          <a:bodyPr wrap="square" lIns="0" tIns="0" rIns="0" bIns="0" rtlCol="0" anchor="t"/>
-          <a:lstStyle/>
-          <a:p>
-            <a:pPr indent="0" marL="0">
-              <a:buNone/>
-            </a:pPr>
-            <a:r>
-              <a:rPr lang="en-US" sz="1200" dirty="0">
-                <a:solidFill>
-                  <a:srgbClr val="4E5D6A"/>
-                </a:solidFill>
-                <a:latin typeface="Calibri" pitchFamily="34" charset="0"/>
-                <a:ea typeface="Calibri" pitchFamily="34" charset="-122"/>
-                <a:cs typeface="Calibri" pitchFamily="34" charset="-120"/>
-              </a:rPr>
-              <a:t>due in 14 days, not acknowledged</a:t>
-            </a:r>
-            <a:endParaRPr lang="en-US" sz="1200" dirty="0"/>
-          </a:p>
-        </p:txBody>
-      </p:sp>
-      <p:sp>
-        <p:nvSpPr>
-          <p:cNvPr id="24" name="Text 22"/>
-          <p:cNvSpPr txBox="1"/>
-          <p:nvPr/>
-        </p:nvSpPr>
-        <p:spPr>
-          <a:xfrm>
-            <a:off x="6553048" y="3886200"/>
-            <a:ext cx="4815688" cy="2194560"/>
-          </a:xfrm>
-          <a:prstGeom prst="rect">
-            <a:avLst/>
-          </a:prstGeom>
-          <a:noFill/>
-          <a:ln/>
-        </p:spPr>
-        <p:txBody>
-          <a:bodyPr wrap="square" lIns="635" tIns="635" rIns="635" bIns="635" rtlCol="0" anchor="t"/>
-          <a:lstStyle/>
           <a:p>
             <a:pPr marL="342900" indent="-342900">
               <a:spcAft>
@@ -20136,7 +19364,7 @@
                 <a:ea typeface="Calibri" pitchFamily="34" charset="-122"/>
                 <a:cs typeface="Calibri" pitchFamily="34" charset="-120"/>
               </a:rPr>
-              <a:t>Call Continental first. </a:t>
+              <a:t>Call Apex second, commercially. </a:t>
             </a:r>
             <a:pPr indent="0" marL="0">
               <a:spcAft>
@@ -20153,83 +19381,7 @@
                 <a:ea typeface="Calibri" pitchFamily="34" charset="-122"/>
                 <a:cs typeface="Calibri" pitchFamily="34" charset="-120"/>
               </a:rPr>
-              <a:t>Late most often, by the most, not improving; part of it is our 19-day plan vs their 28-day quote.</a:t>
-            </a:r>
-            <a:endParaRPr lang="en-US" sz="1300" dirty="0"/>
-          </a:p>
-          <a:p>
-            <a:pPr marL="342900" indent="-342900">
-              <a:spcAft>
-                <a:spcPts val="600"/>
-              </a:spcAft>
-              <a:buSzPct val="100000"/>
-              <a:buChar char="•"/>
-            </a:pPr>
-            <a:r>
-              <a:rPr lang="en-US" sz="1300" b="1" dirty="0">
-                <a:solidFill>
-                  <a:srgbClr val="1F2A33"/>
-                </a:solidFill>
-                <a:latin typeface="Calibri" pitchFamily="34" charset="0"/>
-                <a:ea typeface="Calibri" pitchFamily="34" charset="-122"/>
-                <a:cs typeface="Calibri" pitchFamily="34" charset="-120"/>
-              </a:rPr>
-              <a:t>Call Apex second, commercially. </a:t>
-            </a:r>
-            <a:pPr indent="0" marL="0">
-              <a:spcAft>
-                <a:spcPts val="600"/>
-              </a:spcAft>
-              <a:buNone/>
-            </a:pPr>
-            <a:r>
-              <a:rPr lang="en-US" sz="1300" dirty="0">
-                <a:solidFill>
-                  <a:srgbClr val="1F2A33"/>
-                </a:solidFill>
-                <a:latin typeface="Calibri" pitchFamily="34" charset="0"/>
-                <a:ea typeface="Calibri" pitchFamily="34" charset="-122"/>
-                <a:cs typeface="Calibri" pitchFamily="34" charset="-120"/>
-              </a:rPr>
               <a:t>85% of spend; CRES bar 1-2% over PO since Feb; $77k short-shipped balances open.</a:t>
-            </a:r>
-            <a:endParaRPr lang="en-US" sz="1300" dirty="0"/>
-          </a:p>
-          <a:p>
-            <a:pPr marL="342900" indent="-342900">
-              <a:spcAft>
-                <a:spcPts val="600"/>
-              </a:spcAft>
-              <a:buSzPct val="100000"/>
-              <a:buChar char="•"/>
-            </a:pPr>
-            <a:r>
-              <a:rPr lang="en-US" sz="1300" b="1" dirty="0">
-                <a:solidFill>
-                  <a:srgbClr val="1F2A33"/>
-                </a:solidFill>
-                <a:latin typeface="Calibri" pitchFamily="34" charset="0"/>
-                <a:ea typeface="Calibri" pitchFamily="34" charset="-122"/>
-                <a:cs typeface="Calibri" pitchFamily="34" charset="-120"/>
-              </a:rPr>
-              <a:t>Looking ahead: </a:t>
-            </a:r>
-            <a:pPr indent="0" marL="0">
-              <a:spcAft>
-                <a:spcPts val="600"/>
-              </a:spcAft>
-              <a:buNone/>
-            </a:pPr>
-            <a:r>
-              <a:rPr lang="en-US" sz="1300" dirty="0">
-                <a:solidFill>
-                  <a:srgbClr val="1F2A33"/>
-                </a:solidFill>
-                <a:latin typeface="Calibri" pitchFamily="34" charset="0"/>
-                <a:ea typeface="Calibri" pitchFamily="34" charset="-122"/>
-                <a:cs typeface="Calibri" pitchFamily="34" charset="-120"/>
-              </a:rPr>
-              <a:t>a backtested watch list for the next 60 days of open orders.</a:t>
             </a:r>
             <a:endParaRPr lang="en-US" sz="1300" dirty="0"/>
           </a:p>
@@ -20246,6 +19398,826 @@
 <file path=ppt/slides/slide20.xml><?xml version="1.0" encoding="utf-8"?>
 <p:sld xmlns:a="http://schemas.openxmlformats.org/drawingml/2006/main" xmlns:r="http://schemas.openxmlformats.org/officeDocument/2006/relationships" xmlns:p="http://schemas.openxmlformats.org/presentationml/2006/main">
   <p:cSld name="Slide 20">
+    <p:bg>
+      <p:bgPr>
+        <a:solidFill>
+          <a:srgbClr val="FFFFFF"/>
+        </a:solidFill>
+      </p:bgPr>
+    </p:bg>
+    <p:spTree>
+      <p:nvGrpSpPr>
+        <p:cNvPr id="1" name=""/>
+        <p:cNvGrpSpPr/>
+        <p:nvPr/>
+      </p:nvGrpSpPr>
+      <p:grpSpPr>
+        <a:xfrm>
+          <a:off x="0" y="0"/>
+          <a:ext cx="0" cy="0"/>
+          <a:chOff x="0" y="0"/>
+          <a:chExt cx="0" cy="0"/>
+        </a:xfrm>
+      </p:grpSpPr>
+      <p:sp>
+        <p:nvSpPr>
+          <p:cNvPr id="2" name="Text 0"/>
+          <p:cNvSpPr txBox="1"/>
+          <p:nvPr/>
+        </p:nvSpPr>
+        <p:spPr>
+          <a:xfrm>
+            <a:off x="548640" y="320040"/>
+            <a:ext cx="8229600" cy="274320"/>
+          </a:xfrm>
+          <a:prstGeom prst="rect">
+            <a:avLst/>
+          </a:prstGeom>
+          <a:noFill/>
+          <a:ln/>
+        </p:spPr>
+        <p:txBody>
+          <a:bodyPr wrap="square" lIns="0" tIns="0" rIns="0" bIns="0" rtlCol="0" anchor="ctr"/>
+          <a:lstStyle/>
+          <a:p>
+            <a:pPr indent="0" marL="0">
+              <a:buNone/>
+            </a:pPr>
+            <a:r>
+              <a:rPr lang="en-US" sz="1200" b="1" spc="200" kern="0" dirty="0">
+                <a:solidFill>
+                  <a:srgbClr val="D9622B"/>
+                </a:solidFill>
+                <a:latin typeface="Calibri" pitchFamily="34" charset="0"/>
+                <a:ea typeface="Calibri" pitchFamily="34" charset="-122"/>
+                <a:cs typeface="Calibri" pitchFamily="34" charset="-120"/>
+              </a:rPr>
+              <a:t>DATA I WISH I'D HAD · 30 / 60 / 90</a:t>
+            </a:r>
+            <a:endParaRPr lang="en-US" sz="1200" dirty="0"/>
+          </a:p>
+        </p:txBody>
+      </p:sp>
+      <p:sp>
+        <p:nvSpPr>
+          <p:cNvPr id="3" name="Text 1"/>
+          <p:cNvSpPr txBox="1"/>
+          <p:nvPr/>
+        </p:nvSpPr>
+        <p:spPr>
+          <a:xfrm>
+            <a:off x="548640" y="594360"/>
+            <a:ext cx="11094415" cy="685800"/>
+          </a:xfrm>
+          <a:prstGeom prst="rect">
+            <a:avLst/>
+          </a:prstGeom>
+          <a:noFill/>
+          <a:ln/>
+        </p:spPr>
+        <p:txBody>
+          <a:bodyPr wrap="square" lIns="0" tIns="0" rIns="0" bIns="0" rtlCol="0" anchor="t"/>
+          <a:lstStyle/>
+          <a:p>
+            <a:pPr indent="0" marL="0">
+              <a:buNone/>
+            </a:pPr>
+            <a:r>
+              <a:rPr lang="en-US" sz="2400" b="1" dirty="0">
+                <a:solidFill>
+                  <a:srgbClr val="1F2A33"/>
+                </a:solidFill>
+                <a:latin typeface="Cambria" pitchFamily="34" charset="0"/>
+                <a:ea typeface="Cambria" pitchFamily="34" charset="-122"/>
+                <a:cs typeface="Cambria" pitchFamily="34" charset="-120"/>
+              </a:rPr>
+              <a:t>What would sharpen the answers, and how this goes into use</a:t>
+            </a:r>
+            <a:endParaRPr lang="en-US" sz="2400" dirty="0"/>
+          </a:p>
+        </p:txBody>
+      </p:sp>
+      <p:sp>
+        <p:nvSpPr>
+          <p:cNvPr id="4" name="Text 2"/>
+          <p:cNvSpPr txBox="1"/>
+          <p:nvPr/>
+        </p:nvSpPr>
+        <p:spPr>
+          <a:xfrm>
+            <a:off x="7985455" y="6473952"/>
+            <a:ext cx="3657600" cy="228600"/>
+          </a:xfrm>
+          <a:prstGeom prst="rect">
+            <a:avLst/>
+          </a:prstGeom>
+          <a:noFill/>
+          <a:ln/>
+        </p:spPr>
+        <p:txBody>
+          <a:bodyPr wrap="square" lIns="0" tIns="0" rIns="0" bIns="0" rtlCol="0" anchor="ctr"/>
+          <a:lstStyle/>
+          <a:p>
+            <a:pPr algn="r" indent="0" marL="0">
+              <a:buNone/>
+            </a:pPr>
+            <a:r>
+              <a:rPr lang="en-US" sz="900" dirty="0">
+                <a:solidFill>
+                  <a:srgbClr val="7D8B97"/>
+                </a:solidFill>
+                <a:latin typeface="Calibri" pitchFamily="34" charset="0"/>
+                <a:ea typeface="Calibri" pitchFamily="34" charset="-122"/>
+                <a:cs typeface="Calibri" pitchFamily="34" charset="-120"/>
+              </a:rPr>
+              <a:t>Beacon Fasteners · FDE case   20</a:t>
+            </a:r>
+            <a:endParaRPr lang="en-US" sz="900" dirty="0"/>
+          </a:p>
+        </p:txBody>
+      </p:sp>
+      <p:sp>
+        <p:nvSpPr>
+          <p:cNvPr id="5" name="Text 3"/>
+          <p:cNvSpPr txBox="1"/>
+          <p:nvPr/>
+        </p:nvSpPr>
+        <p:spPr>
+          <a:xfrm>
+            <a:off x="548640" y="1463040"/>
+            <a:ext cx="5669280" cy="365760"/>
+          </a:xfrm>
+          <a:prstGeom prst="rect">
+            <a:avLst/>
+          </a:prstGeom>
+          <a:noFill/>
+          <a:ln/>
+        </p:spPr>
+        <p:txBody>
+          <a:bodyPr wrap="square" lIns="0" tIns="0" rIns="0" bIns="0" rtlCol="0" anchor="ctr"/>
+          <a:lstStyle/>
+          <a:p>
+            <a:pPr indent="0" marL="0">
+              <a:buNone/>
+            </a:pPr>
+            <a:r>
+              <a:rPr lang="en-US" sz="1600" b="1" dirty="0">
+                <a:solidFill>
+                  <a:srgbClr val="1F2A33"/>
+                </a:solidFill>
+                <a:latin typeface="Cambria" pitchFamily="34" charset="0"/>
+                <a:ea typeface="Cambria" pitchFamily="34" charset="-122"/>
+                <a:cs typeface="Cambria" pitchFamily="34" charset="-120"/>
+              </a:rPr>
+              <a:t>Data I wish I'd had (absent from the extract)</a:t>
+            </a:r>
+            <a:endParaRPr lang="en-US" sz="1600" dirty="0"/>
+          </a:p>
+        </p:txBody>
+      </p:sp>
+      <p:sp>
+        <p:nvSpPr>
+          <p:cNvPr id="6" name="Text 4"/>
+          <p:cNvSpPr txBox="1"/>
+          <p:nvPr/>
+        </p:nvSpPr>
+        <p:spPr>
+          <a:xfrm>
+            <a:off x="548640" y="1874520"/>
+            <a:ext cx="5669280" cy="4297680"/>
+          </a:xfrm>
+          <a:prstGeom prst="rect">
+            <a:avLst/>
+          </a:prstGeom>
+          <a:noFill/>
+          <a:ln/>
+        </p:spPr>
+        <p:txBody>
+          <a:bodyPr wrap="square" lIns="635" tIns="635" rIns="635" bIns="635" rtlCol="0" anchor="t"/>
+          <a:lstStyle/>
+          <a:p>
+            <a:pPr marL="342900" indent="-342900">
+              <a:spcAft>
+                <a:spcPts val="600"/>
+              </a:spcAft>
+              <a:buSzPct val="100000"/>
+              <a:buChar char="•"/>
+            </a:pPr>
+            <a:r>
+              <a:rPr lang="en-US" sz="1400" b="1" dirty="0">
+                <a:solidFill>
+                  <a:srgbClr val="1F2A33"/>
+                </a:solidFill>
+                <a:latin typeface="Calibri" pitchFamily="34" charset="0"/>
+                <a:ea typeface="Calibri" pitchFamily="34" charset="-122"/>
+                <a:cs typeface="Calibri" pitchFamily="34" charset="-120"/>
+              </a:rPr>
+              <a:t>Invoice / AP lines: </a:t>
+            </a:r>
+            <a:pPr indent="0" marL="0">
+              <a:spcAft>
+                <a:spcPts val="600"/>
+              </a:spcAft>
+              <a:buNone/>
+            </a:pPr>
+            <a:r>
+              <a:rPr lang="en-US" sz="1400" dirty="0">
+                <a:solidFill>
+                  <a:srgbClr val="1F2A33"/>
+                </a:solidFill>
+                <a:latin typeface="Calibri" pitchFamily="34" charset="0"/>
+                <a:ea typeface="Calibri" pitchFamily="34" charset="-122"/>
+                <a:cs typeface="Calibri" pitchFamily="34" charset="-120"/>
+              </a:rPr>
+              <a:t>actual price paid, and therefore true price variance</a:t>
+            </a:r>
+            <a:endParaRPr lang="en-US" sz="1400" dirty="0"/>
+          </a:p>
+          <a:p>
+            <a:pPr marL="342900" indent="-342900">
+              <a:spcAft>
+                <a:spcPts val="600"/>
+              </a:spcAft>
+              <a:buSzPct val="100000"/>
+              <a:buChar char="•"/>
+            </a:pPr>
+            <a:r>
+              <a:rPr lang="en-US" sz="1400" b="1" dirty="0">
+                <a:solidFill>
+                  <a:srgbClr val="1F2A33"/>
+                </a:solidFill>
+                <a:latin typeface="Calibri" pitchFamily="34" charset="0"/>
+                <a:ea typeface="Calibri" pitchFamily="34" charset="-122"/>
+                <a:cs typeface="Calibri" pitchFamily="34" charset="-120"/>
+              </a:rPr>
+              <a:t>Production impact: </a:t>
+            </a:r>
+            <a:pPr indent="0" marL="0">
+              <a:spcAft>
+                <a:spcPts val="600"/>
+              </a:spcAft>
+              <a:buNone/>
+            </a:pPr>
+            <a:r>
+              <a:rPr lang="en-US" sz="1400" dirty="0">
+                <a:solidFill>
+                  <a:srgbClr val="1F2A33"/>
+                </a:solidFill>
+                <a:latin typeface="Calibri" pitchFamily="34" charset="0"/>
+                <a:ea typeface="Calibri" pitchFamily="34" charset="-122"/>
+                <a:cs typeface="Calibri" pitchFamily="34" charset="-120"/>
+              </a:rPr>
+              <a:t>downtime, expedites, late customer shipments</a:t>
+            </a:r>
+            <a:endParaRPr lang="en-US" sz="1400" dirty="0"/>
+          </a:p>
+          <a:p>
+            <a:pPr marL="342900" indent="-342900">
+              <a:spcAft>
+                <a:spcPts val="600"/>
+              </a:spcAft>
+              <a:buSzPct val="100000"/>
+              <a:buChar char="•"/>
+            </a:pPr>
+            <a:r>
+              <a:rPr lang="en-US" sz="1400" b="1" dirty="0">
+                <a:solidFill>
+                  <a:srgbClr val="1F2A33"/>
+                </a:solidFill>
+                <a:latin typeface="Calibri" pitchFamily="34" charset="0"/>
+                <a:ea typeface="Calibri" pitchFamily="34" charset="-122"/>
+                <a:cs typeface="Calibri" pitchFamily="34" charset="-120"/>
+              </a:rPr>
+              <a:t>The full vendor master: </a:t>
+            </a:r>
+            <a:pPr indent="0" marL="0">
+              <a:spcAft>
+                <a:spcPts val="600"/>
+              </a:spcAft>
+              <a:buNone/>
+            </a:pPr>
+            <a:r>
+              <a:rPr lang="en-US" sz="1400" dirty="0">
+                <a:solidFill>
+                  <a:srgbClr val="1F2A33"/>
+                </a:solidFill>
+                <a:latin typeface="Calibri" pitchFamily="34" charset="0"/>
+                <a:ea typeface="Calibri" pitchFamily="34" charset="-122"/>
+                <a:cs typeface="Calibri" pitchFamily="34" charset="-120"/>
+              </a:rPr>
+              <a:t>6 vendors in the files vs ~30 active suppliers</a:t>
+            </a:r>
+            <a:endParaRPr lang="en-US" sz="1400" dirty="0"/>
+          </a:p>
+          <a:p>
+            <a:pPr marL="342900" indent="-342900">
+              <a:spcAft>
+                <a:spcPts val="600"/>
+              </a:spcAft>
+              <a:buSzPct val="100000"/>
+              <a:buChar char="•"/>
+            </a:pPr>
+            <a:r>
+              <a:rPr lang="en-US" sz="1400" b="1" dirty="0">
+                <a:solidFill>
+                  <a:srgbClr val="1F2A33"/>
+                </a:solidFill>
+                <a:latin typeface="Calibri" pitchFamily="34" charset="0"/>
+                <a:ea typeface="Calibri" pitchFamily="34" charset="-122"/>
+                <a:cs typeface="Calibri" pitchFamily="34" charset="-120"/>
+              </a:rPr>
+              <a:t>PO change and cancel history, </a:t>
+            </a:r>
+            <a:pPr indent="0" marL="0">
+              <a:spcAft>
+                <a:spcPts val="600"/>
+              </a:spcAft>
+              <a:buNone/>
+            </a:pPr>
+            <a:r>
+              <a:rPr lang="en-US" sz="1400" dirty="0">
+                <a:solidFill>
+                  <a:srgbClr val="1F2A33"/>
+                </a:solidFill>
+                <a:latin typeface="Calibri" pitchFamily="34" charset="0"/>
+                <a:ea typeface="Calibri" pitchFamily="34" charset="-122"/>
+                <a:cs typeface="Calibri" pitchFamily="34" charset="-120"/>
+              </a:rPr>
+              <a:t>and the confirmation feed after 04/03</a:t>
+            </a:r>
+            <a:endParaRPr lang="en-US" sz="1400" dirty="0"/>
+          </a:p>
+          <a:p>
+            <a:pPr marL="342900" indent="-342900">
+              <a:spcAft>
+                <a:spcPts val="600"/>
+              </a:spcAft>
+              <a:buSzPct val="100000"/>
+              <a:buChar char="•"/>
+            </a:pPr>
+            <a:r>
+              <a:rPr lang="en-US" sz="1400" b="1" dirty="0">
+                <a:solidFill>
+                  <a:srgbClr val="1F2A33"/>
+                </a:solidFill>
+                <a:latin typeface="Calibri" pitchFamily="34" charset="0"/>
+                <a:ea typeface="Calibri" pitchFamily="34" charset="-122"/>
+                <a:cs typeface="Calibri" pitchFamily="34" charset="-120"/>
+              </a:rPr>
+              <a:t>Supplier agreements: </a:t>
+            </a:r>
+            <a:pPr indent="0" marL="0">
+              <a:spcAft>
+                <a:spcPts val="600"/>
+              </a:spcAft>
+              <a:buNone/>
+            </a:pPr>
+            <a:r>
+              <a:rPr lang="en-US" sz="1400" dirty="0">
+                <a:solidFill>
+                  <a:srgbClr val="1F2A33"/>
+                </a:solidFill>
+                <a:latin typeface="Calibri" pitchFamily="34" charset="0"/>
+                <a:ea typeface="Calibri" pitchFamily="34" charset="-122"/>
+                <a:cs typeface="Calibri" pitchFamily="34" charset="-120"/>
+              </a:rPr>
+              <a:t>lead-time commitments, surcharge clauses, strategic status</a:t>
+            </a:r>
+            <a:endParaRPr lang="en-US" sz="1400" dirty="0"/>
+          </a:p>
+        </p:txBody>
+      </p:sp>
+      <p:sp>
+        <p:nvSpPr>
+          <p:cNvPr id="7" name="Shape 5"/>
+          <p:cNvSpPr/>
+          <p:nvPr/>
+        </p:nvSpPr>
+        <p:spPr>
+          <a:xfrm>
+            <a:off x="6583680" y="1463040"/>
+            <a:ext cx="5059375" cy="1051560"/>
+          </a:xfrm>
+          <a:prstGeom prst="roundRect">
+            <a:avLst>
+              <a:gd name="adj" fmla="val 6957"/>
+            </a:avLst>
+          </a:prstGeom>
+          <a:solidFill>
+            <a:srgbClr val="FBE9DF"/>
+          </a:solidFill>
+          <a:ln w="12700">
+            <a:solidFill>
+              <a:srgbClr val="FBE9DF"/>
+            </a:solidFill>
+            <a:prstDash val="solid"/>
+          </a:ln>
+        </p:spPr>
+      </p:sp>
+      <p:sp>
+        <p:nvSpPr>
+          <p:cNvPr id="8" name="Text 6"/>
+          <p:cNvSpPr txBox="1"/>
+          <p:nvPr/>
+        </p:nvSpPr>
+        <p:spPr>
+          <a:xfrm>
+            <a:off x="6812280" y="1572768"/>
+            <a:ext cx="1188720" cy="365760"/>
+          </a:xfrm>
+          <a:prstGeom prst="rect">
+            <a:avLst/>
+          </a:prstGeom>
+          <a:noFill/>
+          <a:ln/>
+        </p:spPr>
+        <p:txBody>
+          <a:bodyPr wrap="square" lIns="0" tIns="0" rIns="0" bIns="0" rtlCol="0" anchor="ctr"/>
+          <a:lstStyle/>
+          <a:p>
+            <a:pPr indent="0" marL="0">
+              <a:buNone/>
+            </a:pPr>
+            <a:r>
+              <a:rPr lang="en-US" sz="1400" b="1" dirty="0">
+                <a:solidFill>
+                  <a:srgbClr val="D9622B"/>
+                </a:solidFill>
+                <a:latin typeface="Cambria" pitchFamily="34" charset="0"/>
+                <a:ea typeface="Cambria" pitchFamily="34" charset="-122"/>
+                <a:cs typeface="Cambria" pitchFamily="34" charset="-120"/>
+              </a:rPr>
+              <a:t>Days 1-30</a:t>
+            </a:r>
+            <a:endParaRPr lang="en-US" sz="1400" dirty="0"/>
+          </a:p>
+        </p:txBody>
+      </p:sp>
+      <p:sp>
+        <p:nvSpPr>
+          <p:cNvPr id="9" name="Text 7"/>
+          <p:cNvSpPr txBox="1"/>
+          <p:nvPr/>
+        </p:nvSpPr>
+        <p:spPr>
+          <a:xfrm>
+            <a:off x="8001000" y="1554480"/>
+            <a:ext cx="3459175" cy="868680"/>
+          </a:xfrm>
+          <a:prstGeom prst="rect">
+            <a:avLst/>
+          </a:prstGeom>
+          <a:noFill/>
+          <a:ln/>
+        </p:spPr>
+        <p:txBody>
+          <a:bodyPr wrap="square" lIns="0" tIns="0" rIns="0" bIns="0" rtlCol="0" anchor="ctr"/>
+          <a:lstStyle/>
+          <a:p>
+            <a:pPr indent="0" marL="0">
+              <a:buNone/>
+            </a:pPr>
+            <a:r>
+              <a:rPr lang="en-US" sz="1300" dirty="0">
+                <a:solidFill>
+                  <a:srgbClr val="1F2A33"/>
+                </a:solidFill>
+                <a:latin typeface="Calibri" pitchFamily="34" charset="0"/>
+                <a:ea typeface="Calibri" pitchFamily="34" charset="-122"/>
+                <a:cs typeface="Calibri" pitchFamily="34" charset="-120"/>
+              </a:rPr>
+              <a:t>Shadow week with Lisa (target: zero misses, time saved measured); schedule the 6am run; Continental call with the lead-time data.</a:t>
+            </a:r>
+            <a:endParaRPr lang="en-US" sz="1300" dirty="0"/>
+          </a:p>
+        </p:txBody>
+      </p:sp>
+      <p:sp>
+        <p:nvSpPr>
+          <p:cNvPr id="10" name="Shape 8"/>
+          <p:cNvSpPr/>
+          <p:nvPr/>
+        </p:nvSpPr>
+        <p:spPr>
+          <a:xfrm>
+            <a:off x="6583680" y="2651760"/>
+            <a:ext cx="5059375" cy="1051560"/>
+          </a:xfrm>
+          <a:prstGeom prst="roundRect">
+            <a:avLst>
+              <a:gd name="adj" fmla="val 6957"/>
+            </a:avLst>
+          </a:prstGeom>
+          <a:solidFill>
+            <a:srgbClr val="EEF2F5"/>
+          </a:solidFill>
+          <a:ln w="12700">
+            <a:solidFill>
+              <a:srgbClr val="EEF2F5"/>
+            </a:solidFill>
+            <a:prstDash val="solid"/>
+          </a:ln>
+        </p:spPr>
+      </p:sp>
+      <p:sp>
+        <p:nvSpPr>
+          <p:cNvPr id="11" name="Text 9"/>
+          <p:cNvSpPr txBox="1"/>
+          <p:nvPr/>
+        </p:nvSpPr>
+        <p:spPr>
+          <a:xfrm>
+            <a:off x="6812280" y="2761488"/>
+            <a:ext cx="1188720" cy="365760"/>
+          </a:xfrm>
+          <a:prstGeom prst="rect">
+            <a:avLst/>
+          </a:prstGeom>
+          <a:noFill/>
+          <a:ln/>
+        </p:spPr>
+        <p:txBody>
+          <a:bodyPr wrap="square" lIns="0" tIns="0" rIns="0" bIns="0" rtlCol="0" anchor="ctr"/>
+          <a:lstStyle/>
+          <a:p>
+            <a:pPr indent="0" marL="0">
+              <a:buNone/>
+            </a:pPr>
+            <a:r>
+              <a:rPr lang="en-US" sz="1400" b="1" dirty="0">
+                <a:solidFill>
+                  <a:srgbClr val="D9622B"/>
+                </a:solidFill>
+                <a:latin typeface="Cambria" pitchFamily="34" charset="0"/>
+                <a:ea typeface="Cambria" pitchFamily="34" charset="-122"/>
+                <a:cs typeface="Cambria" pitchFamily="34" charset="-120"/>
+              </a:rPr>
+              <a:t>Days 31-60</a:t>
+            </a:r>
+            <a:endParaRPr lang="en-US" sz="1400" dirty="0"/>
+          </a:p>
+        </p:txBody>
+      </p:sp>
+      <p:sp>
+        <p:nvSpPr>
+          <p:cNvPr id="12" name="Text 10"/>
+          <p:cNvSpPr txBox="1"/>
+          <p:nvPr/>
+        </p:nvSpPr>
+        <p:spPr>
+          <a:xfrm>
+            <a:off x="8001000" y="2743200"/>
+            <a:ext cx="3459175" cy="868680"/>
+          </a:xfrm>
+          <a:prstGeom prst="rect">
+            <a:avLst/>
+          </a:prstGeom>
+          <a:noFill/>
+          <a:ln/>
+        </p:spPr>
+        <p:txBody>
+          <a:bodyPr wrap="square" lIns="0" tIns="0" rIns="0" bIns="0" rtlCol="0" anchor="ctr"/>
+          <a:lstStyle/>
+          <a:p>
+            <a:pPr indent="0" marL="0">
+              <a:buNone/>
+            </a:pPr>
+            <a:r>
+              <a:rPr lang="en-US" sz="1300" dirty="0">
+                <a:solidFill>
+                  <a:srgbClr val="1F2A33"/>
+                </a:solidFill>
+                <a:latin typeface="Calibri" pitchFamily="34" charset="0"/>
+                <a:ea typeface="Calibri" pitchFamily="34" charset="-122"/>
+                <a:cs typeface="Calibri" pitchFamily="34" charset="-120"/>
+              </a:rPr>
+              <a:t>Supplier packs and acknowledgment forms to Continental, Ostmark, Heritage; planning fixes MRP lead times; clear the $128k backlog.</a:t>
+            </a:r>
+            <a:endParaRPr lang="en-US" sz="1300" dirty="0"/>
+          </a:p>
+        </p:txBody>
+      </p:sp>
+      <p:sp>
+        <p:nvSpPr>
+          <p:cNvPr id="13" name="Shape 11"/>
+          <p:cNvSpPr/>
+          <p:nvPr/>
+        </p:nvSpPr>
+        <p:spPr>
+          <a:xfrm>
+            <a:off x="6583680" y="3840480"/>
+            <a:ext cx="5059375" cy="1051560"/>
+          </a:xfrm>
+          <a:prstGeom prst="roundRect">
+            <a:avLst>
+              <a:gd name="adj" fmla="val 6957"/>
+            </a:avLst>
+          </a:prstGeom>
+          <a:solidFill>
+            <a:srgbClr val="EEF2F5"/>
+          </a:solidFill>
+          <a:ln w="12700">
+            <a:solidFill>
+              <a:srgbClr val="EEF2F5"/>
+            </a:solidFill>
+            <a:prstDash val="solid"/>
+          </a:ln>
+        </p:spPr>
+      </p:sp>
+      <p:sp>
+        <p:nvSpPr>
+          <p:cNvPr id="14" name="Text 12"/>
+          <p:cNvSpPr txBox="1"/>
+          <p:nvPr/>
+        </p:nvSpPr>
+        <p:spPr>
+          <a:xfrm>
+            <a:off x="6812280" y="3950208"/>
+            <a:ext cx="1188720" cy="365760"/>
+          </a:xfrm>
+          <a:prstGeom prst="rect">
+            <a:avLst/>
+          </a:prstGeom>
+          <a:noFill/>
+          <a:ln/>
+        </p:spPr>
+        <p:txBody>
+          <a:bodyPr wrap="square" lIns="0" tIns="0" rIns="0" bIns="0" rtlCol="0" anchor="ctr"/>
+          <a:lstStyle/>
+          <a:p>
+            <a:pPr indent="0" marL="0">
+              <a:buNone/>
+            </a:pPr>
+            <a:r>
+              <a:rPr lang="en-US" sz="1400" b="1" dirty="0">
+                <a:solidFill>
+                  <a:srgbClr val="D9622B"/>
+                </a:solidFill>
+                <a:latin typeface="Cambria" pitchFamily="34" charset="0"/>
+                <a:ea typeface="Cambria" pitchFamily="34" charset="-122"/>
+                <a:cs typeface="Cambria" pitchFamily="34" charset="-120"/>
+              </a:rPr>
+              <a:t>Days 61-90</a:t>
+            </a:r>
+            <a:endParaRPr lang="en-US" sz="1400" dirty="0"/>
+          </a:p>
+        </p:txBody>
+      </p:sp>
+      <p:sp>
+        <p:nvSpPr>
+          <p:cNvPr id="15" name="Text 13"/>
+          <p:cNvSpPr txBox="1"/>
+          <p:nvPr/>
+        </p:nvSpPr>
+        <p:spPr>
+          <a:xfrm>
+            <a:off x="8001000" y="3931920"/>
+            <a:ext cx="3459175" cy="868680"/>
+          </a:xfrm>
+          <a:prstGeom prst="rect">
+            <a:avLst/>
+          </a:prstGeom>
+          <a:noFill/>
+          <a:ln/>
+        </p:spPr>
+        <p:txBody>
+          <a:bodyPr wrap="square" lIns="0" tIns="0" rIns="0" bIns="0" rtlCol="0" anchor="ctr"/>
+          <a:lstStyle/>
+          <a:p>
+            <a:pPr indent="0" marL="0">
+              <a:buNone/>
+            </a:pPr>
+            <a:r>
+              <a:rPr lang="en-US" sz="1300" dirty="0">
+                <a:solidFill>
+                  <a:srgbClr val="1F2A33"/>
+                </a:solidFill>
+                <a:latin typeface="Calibri" pitchFamily="34" charset="0"/>
+                <a:ea typeface="Calibri" pitchFamily="34" charset="-122"/>
+                <a:cs typeface="Calibri" pitchFamily="34" charset="-120"/>
+              </a:rPr>
+              <a:t>Approved crosswalk loaded as the ERP vendor-part cross-reference; readout refreshed monthly; decide on a portal or EDI 855.</a:t>
+            </a:r>
+            <a:endParaRPr lang="en-US" sz="1300" dirty="0"/>
+          </a:p>
+        </p:txBody>
+      </p:sp>
+      <p:sp>
+        <p:nvSpPr>
+          <p:cNvPr id="16" name="Shape 14"/>
+          <p:cNvSpPr/>
+          <p:nvPr/>
+        </p:nvSpPr>
+        <p:spPr>
+          <a:xfrm>
+            <a:off x="6583680" y="5029200"/>
+            <a:ext cx="5059375" cy="1051560"/>
+          </a:xfrm>
+          <a:prstGeom prst="roundRect">
+            <a:avLst>
+              <a:gd name="adj" fmla="val 6957"/>
+            </a:avLst>
+          </a:prstGeom>
+          <a:solidFill>
+            <a:srgbClr val="EEF2F5"/>
+          </a:solidFill>
+          <a:ln w="12700">
+            <a:solidFill>
+              <a:srgbClr val="EEF2F5"/>
+            </a:solidFill>
+            <a:prstDash val="solid"/>
+          </a:ln>
+        </p:spPr>
+      </p:sp>
+      <p:sp>
+        <p:nvSpPr>
+          <p:cNvPr id="17" name="Text 15"/>
+          <p:cNvSpPr txBox="1"/>
+          <p:nvPr/>
+        </p:nvSpPr>
+        <p:spPr>
+          <a:xfrm>
+            <a:off x="6812280" y="5138928"/>
+            <a:ext cx="1188720" cy="365760"/>
+          </a:xfrm>
+          <a:prstGeom prst="rect">
+            <a:avLst/>
+          </a:prstGeom>
+          <a:noFill/>
+          <a:ln/>
+        </p:spPr>
+        <p:txBody>
+          <a:bodyPr wrap="square" lIns="0" tIns="0" rIns="0" bIns="0" rtlCol="0" anchor="ctr"/>
+          <a:lstStyle/>
+          <a:p>
+            <a:pPr indent="0" marL="0">
+              <a:buNone/>
+            </a:pPr>
+            <a:r>
+              <a:rPr lang="en-US" sz="1400" b="1" dirty="0">
+                <a:solidFill>
+                  <a:srgbClr val="D9622B"/>
+                </a:solidFill>
+                <a:latin typeface="Cambria" pitchFamily="34" charset="0"/>
+                <a:ea typeface="Cambria" pitchFamily="34" charset="-122"/>
+                <a:cs typeface="Cambria" pitchFamily="34" charset="-120"/>
+              </a:rPr>
+              <a:t>Portfolio</a:t>
+            </a:r>
+            <a:endParaRPr lang="en-US" sz="1400" dirty="0"/>
+          </a:p>
+        </p:txBody>
+      </p:sp>
+      <p:sp>
+        <p:nvSpPr>
+          <p:cNvPr id="18" name="Text 16"/>
+          <p:cNvSpPr txBox="1"/>
+          <p:nvPr/>
+        </p:nvSpPr>
+        <p:spPr>
+          <a:xfrm>
+            <a:off x="8001000" y="5120640"/>
+            <a:ext cx="3459175" cy="868680"/>
+          </a:xfrm>
+          <a:prstGeom prst="rect">
+            <a:avLst/>
+          </a:prstGeom>
+          <a:noFill/>
+          <a:ln/>
+        </p:spPr>
+        <p:txBody>
+          <a:bodyPr wrap="square" lIns="0" tIns="0" rIns="0" bIns="0" rtlCol="0" anchor="ctr"/>
+          <a:lstStyle/>
+          <a:p>
+            <a:pPr indent="0" marL="0">
+              <a:buNone/>
+            </a:pPr>
+            <a:r>
+              <a:rPr lang="en-US" sz="1300" dirty="0">
+                <a:solidFill>
+                  <a:srgbClr val="1F2A33"/>
+                </a:solidFill>
+                <a:latin typeface="Calibri" pitchFamily="34" charset="0"/>
+                <a:ea typeface="Calibri" pitchFamily="34" charset="-122"/>
+                <a:cs typeface="Calibri" pitchFamily="34" charset="-120"/>
+              </a:rPr>
+              <a:t>Package the pattern (parsers + rules + workbook) for the next Tinicum company with the same supplier-paperwork problem.</a:t>
+            </a:r>
+            <a:endParaRPr lang="en-US" sz="1300" dirty="0"/>
+          </a:p>
+        </p:txBody>
+      </p:sp>
+    </p:spTree>
+  </p:cSld>
+  <p:clrMapOvr>
+    <a:masterClrMapping/>
+  </p:clrMapOvr>
+</p:sld>
+</file>
+
+<file path=ppt/slides/slide21.xml><?xml version="1.0" encoding="utf-8"?>
+<p:sld xmlns:a="http://schemas.openxmlformats.org/drawingml/2006/main" xmlns:r="http://schemas.openxmlformats.org/officeDocument/2006/relationships" xmlns:p="http://schemas.openxmlformats.org/presentationml/2006/main">
+  <p:cSld name="Slide 21">
     <p:bg>
       <p:bgPr>
         <a:solidFill>
@@ -20300,7 +20272,7 @@
                 <a:ea typeface="Calibri" pitchFamily="34" charset="-122"/>
                 <a:cs typeface="Calibri" pitchFamily="34" charset="-120"/>
               </a:rPr>
-              <a:t>Beacon Fasteners · FDE case   20</a:t>
+              <a:t>Beacon Fasteners · FDE case   21</a:t>
             </a:r>
             <a:endParaRPr lang="en-US" sz="900" dirty="0"/>
           </a:p>
@@ -20632,916 +20604,6 @@
               <a:t>Thank you  ·  questions?</a:t>
             </a:r>
             <a:endParaRPr lang="en-US" sz="1800" dirty="0"/>
-          </a:p>
-        </p:txBody>
-      </p:sp>
-    </p:spTree>
-  </p:cSld>
-  <p:clrMapOvr>
-    <a:masterClrMapping/>
-  </p:clrMapOvr>
-</p:sld>
-</file>
-
-<file path=ppt/slides/slide21.xml><?xml version="1.0" encoding="utf-8"?>
-<p:sld xmlns:a="http://schemas.openxmlformats.org/drawingml/2006/main" xmlns:r="http://schemas.openxmlformats.org/officeDocument/2006/relationships" xmlns:p="http://schemas.openxmlformats.org/presentationml/2006/main">
-  <p:cSld name="Slide 21">
-    <p:bg>
-      <p:bgPr>
-        <a:solidFill>
-          <a:srgbClr val="FFFFFF"/>
-        </a:solidFill>
-      </p:bgPr>
-    </p:bg>
-    <p:spTree>
-      <p:nvGrpSpPr>
-        <p:cNvPr id="1" name=""/>
-        <p:cNvGrpSpPr/>
-        <p:nvPr/>
-      </p:nvGrpSpPr>
-      <p:grpSpPr>
-        <a:xfrm>
-          <a:off x="0" y="0"/>
-          <a:ext cx="0" cy="0"/>
-          <a:chOff x="0" y="0"/>
-          <a:chExt cx="0" cy="0"/>
-        </a:xfrm>
-      </p:grpSpPr>
-      <p:sp>
-        <p:nvSpPr>
-          <p:cNvPr id="2" name="Text 0"/>
-          <p:cNvSpPr txBox="1"/>
-          <p:nvPr/>
-        </p:nvSpPr>
-        <p:spPr>
-          <a:xfrm>
-            <a:off x="548640" y="320040"/>
-            <a:ext cx="8229600" cy="274320"/>
-          </a:xfrm>
-          <a:prstGeom prst="rect">
-            <a:avLst/>
-          </a:prstGeom>
-          <a:noFill/>
-          <a:ln/>
-        </p:spPr>
-        <p:txBody>
-          <a:bodyPr wrap="square" lIns="0" tIns="0" rIns="0" bIns="0" rtlCol="0" anchor="ctr"/>
-          <a:lstStyle/>
-          <a:p>
-            <a:pPr indent="0" marL="0">
-              <a:buNone/>
-            </a:pPr>
-            <a:r>
-              <a:rPr lang="en-US" sz="1200" b="1" spc="200" kern="0" dirty="0">
-                <a:solidFill>
-                  <a:srgbClr val="D9622B"/>
-                </a:solidFill>
-                <a:latin typeface="Calibri" pitchFamily="34" charset="0"/>
-                <a:ea typeface="Calibri" pitchFamily="34" charset="-122"/>
-                <a:cs typeface="Calibri" pitchFamily="34" charset="-120"/>
-              </a:rPr>
-              <a:t>APPENDIX · SECOND CALL AND WATCH LIST</a:t>
-            </a:r>
-            <a:endParaRPr lang="en-US" sz="1200" dirty="0"/>
-          </a:p>
-        </p:txBody>
-      </p:sp>
-      <p:sp>
-        <p:nvSpPr>
-          <p:cNvPr id="3" name="Text 1"/>
-          <p:cNvSpPr txBox="1"/>
-          <p:nvPr/>
-        </p:nvSpPr>
-        <p:spPr>
-          <a:xfrm>
-            <a:off x="548640" y="594360"/>
-            <a:ext cx="11094415" cy="685800"/>
-          </a:xfrm>
-          <a:prstGeom prst="rect">
-            <a:avLst/>
-          </a:prstGeom>
-          <a:noFill/>
-          <a:ln/>
-        </p:spPr>
-        <p:txBody>
-          <a:bodyPr wrap="square" lIns="0" tIns="0" rIns="0" bIns="0" rtlCol="0" anchor="t"/>
-          <a:lstStyle/>
-          <a:p>
-            <a:pPr indent="0" marL="0">
-              <a:buNone/>
-            </a:pPr>
-            <a:r>
-              <a:rPr lang="en-US" sz="2400" b="1" dirty="0">
-                <a:solidFill>
-                  <a:srgbClr val="1F2A33"/>
-                </a:solidFill>
-                <a:latin typeface="Cambria" pitchFamily="34" charset="0"/>
-                <a:ea typeface="Cambria" pitchFamily="34" charset="-122"/>
-                <a:cs typeface="Cambria" pitchFamily="34" charset="-120"/>
-              </a:rPr>
-              <a:t>Call Apex second, about money not delivery; watch three others</a:t>
-            </a:r>
-            <a:endParaRPr lang="en-US" sz="2400" dirty="0"/>
-          </a:p>
-        </p:txBody>
-      </p:sp>
-      <p:sp>
-        <p:nvSpPr>
-          <p:cNvPr id="4" name="Text 2"/>
-          <p:cNvSpPr txBox="1"/>
-          <p:nvPr/>
-        </p:nvSpPr>
-        <p:spPr>
-          <a:xfrm>
-            <a:off x="7985455" y="6473952"/>
-            <a:ext cx="3657600" cy="228600"/>
-          </a:xfrm>
-          <a:prstGeom prst="rect">
-            <a:avLst/>
-          </a:prstGeom>
-          <a:noFill/>
-          <a:ln/>
-        </p:spPr>
-        <p:txBody>
-          <a:bodyPr wrap="square" lIns="0" tIns="0" rIns="0" bIns="0" rtlCol="0" anchor="ctr"/>
-          <a:lstStyle/>
-          <a:p>
-            <a:pPr algn="r" indent="0" marL="0">
-              <a:buNone/>
-            </a:pPr>
-            <a:r>
-              <a:rPr lang="en-US" sz="900" dirty="0">
-                <a:solidFill>
-                  <a:srgbClr val="7D8B97"/>
-                </a:solidFill>
-                <a:latin typeface="Calibri" pitchFamily="34" charset="0"/>
-                <a:ea typeface="Calibri" pitchFamily="34" charset="-122"/>
-                <a:cs typeface="Calibri" pitchFamily="34" charset="-120"/>
-              </a:rPr>
-              <a:t>Beacon Fasteners · FDE case   21</a:t>
-            </a:r>
-            <a:endParaRPr lang="en-US" sz="900" dirty="0"/>
-          </a:p>
-        </p:txBody>
-      </p:sp>
-      <p:sp>
-        <p:nvSpPr>
-          <p:cNvPr id="5" name="Shape 3"/>
-          <p:cNvSpPr/>
-          <p:nvPr/>
-        </p:nvSpPr>
-        <p:spPr>
-          <a:xfrm>
-            <a:off x="548640" y="1508760"/>
-            <a:ext cx="5669280" cy="4663440"/>
-          </a:xfrm>
-          <a:prstGeom prst="roundRect">
-            <a:avLst>
-              <a:gd name="adj" fmla="val 1569"/>
-            </a:avLst>
-          </a:prstGeom>
-          <a:solidFill>
-            <a:srgbClr val="FBE9DF"/>
-          </a:solidFill>
-          <a:ln w="12700">
-            <a:solidFill>
-              <a:srgbClr val="FBE9DF"/>
-            </a:solidFill>
-            <a:prstDash val="solid"/>
-          </a:ln>
-        </p:spPr>
-      </p:sp>
-      <p:sp>
-        <p:nvSpPr>
-          <p:cNvPr id="6" name="Text 4"/>
-          <p:cNvSpPr txBox="1"/>
-          <p:nvPr/>
-        </p:nvSpPr>
-        <p:spPr>
-          <a:xfrm>
-            <a:off x="822960" y="1691640"/>
-            <a:ext cx="5120640" cy="365760"/>
-          </a:xfrm>
-          <a:prstGeom prst="rect">
-            <a:avLst/>
-          </a:prstGeom>
-          <a:noFill/>
-          <a:ln/>
-        </p:spPr>
-        <p:txBody>
-          <a:bodyPr wrap="square" lIns="0" tIns="0" rIns="0" bIns="0" rtlCol="0" anchor="ctr"/>
-          <a:lstStyle/>
-          <a:p>
-            <a:pPr indent="0" marL="0">
-              <a:buNone/>
-            </a:pPr>
-            <a:r>
-              <a:rPr lang="en-US" sz="1800" b="1" dirty="0">
-                <a:solidFill>
-                  <a:srgbClr val="1F2A33"/>
-                </a:solidFill>
-                <a:latin typeface="Cambria" pitchFamily="34" charset="0"/>
-                <a:ea typeface="Cambria" pitchFamily="34" charset="-122"/>
-                <a:cs typeface="Cambria" pitchFamily="34" charset="-120"/>
-              </a:rPr>
-              <a:t>Apex Bar &amp; Tube: a commercial call</a:t>
-            </a:r>
-            <a:endParaRPr lang="en-US" sz="1800" dirty="0"/>
-          </a:p>
-        </p:txBody>
-      </p:sp>
-      <p:sp>
-        <p:nvSpPr>
-          <p:cNvPr id="7" name="Text 5"/>
-          <p:cNvSpPr txBox="1"/>
-          <p:nvPr/>
-        </p:nvSpPr>
-        <p:spPr>
-          <a:xfrm>
-            <a:off x="822960" y="2103120"/>
-            <a:ext cx="5120640" cy="548640"/>
-          </a:xfrm>
-          <a:prstGeom prst="rect">
-            <a:avLst/>
-          </a:prstGeom>
-          <a:noFill/>
-          <a:ln/>
-        </p:spPr>
-        <p:txBody>
-          <a:bodyPr wrap="square" lIns="0" tIns="0" rIns="0" bIns="0" rtlCol="0" anchor="ctr"/>
-          <a:lstStyle/>
-          <a:p>
-            <a:pPr indent="0" marL="0">
-              <a:buNone/>
-            </a:pPr>
-            <a:r>
-              <a:rPr lang="en-US" sz="1300" dirty="0">
-                <a:solidFill>
-                  <a:srgbClr val="4E5D6A"/>
-                </a:solidFill>
-                <a:latin typeface="Calibri" pitchFamily="34" charset="0"/>
-                <a:ea typeface="Calibri" pitchFamily="34" charset="-122"/>
-                <a:cs typeface="Calibri" pitchFamily="34" charset="-120"/>
-              </a:rPr>
-              <a:t>85% of received value ($23.98M). 87% on time, and when late the median is 1 day.</a:t>
-            </a:r>
-            <a:endParaRPr lang="en-US" sz="1300" dirty="0"/>
-          </a:p>
-        </p:txBody>
-      </p:sp>
-      <p:sp>
-        <p:nvSpPr>
-          <p:cNvPr id="8" name="Text 6"/>
-          <p:cNvSpPr txBox="1"/>
-          <p:nvPr/>
-        </p:nvSpPr>
-        <p:spPr>
-          <a:xfrm>
-            <a:off x="822960" y="2743200"/>
-            <a:ext cx="5120640" cy="3291840"/>
-          </a:xfrm>
-          <a:prstGeom prst="rect">
-            <a:avLst/>
-          </a:prstGeom>
-          <a:noFill/>
-          <a:ln/>
-        </p:spPr>
-        <p:txBody>
-          <a:bodyPr wrap="square" lIns="635" tIns="635" rIns="635" bIns="635" rtlCol="0" anchor="t"/>
-          <a:lstStyle/>
-          <a:p>
-            <a:pPr marL="342900" indent="-342900">
-              <a:spcAft>
-                <a:spcPts val="600"/>
-              </a:spcAft>
-              <a:buSzPct val="100000"/>
-              <a:buChar char="•"/>
-            </a:pPr>
-            <a:r>
-              <a:rPr lang="en-US" sz="1400" b="1" dirty="0">
-                <a:solidFill>
-                  <a:srgbClr val="1F2A33"/>
-                </a:solidFill>
-                <a:latin typeface="Calibri" pitchFamily="34" charset="0"/>
-                <a:ea typeface="Calibri" pitchFamily="34" charset="-122"/>
-                <a:cs typeface="Calibri" pitchFamily="34" charset="-120"/>
-              </a:rPr>
-              <a:t>Price creep: </a:t>
-            </a:r>
-            <a:pPr indent="0" marL="0">
-              <a:spcAft>
-                <a:spcPts val="600"/>
-              </a:spcAft>
-              <a:buNone/>
-            </a:pPr>
-            <a:r>
-              <a:rPr lang="en-US" sz="1400" dirty="0">
-                <a:solidFill>
-                  <a:srgbClr val="1F2A33"/>
-                </a:solidFill>
-                <a:latin typeface="Calibri" pitchFamily="34" charset="0"/>
-                <a:ea typeface="Calibri" pitchFamily="34" charset="-122"/>
-                <a:cs typeface="Calibri" pitchFamily="34" charset="-120"/>
-              </a:rPr>
-              <a:t>BAR-CRES-250 confirmed +1% from February and +2% from March, while every PO stayed at $3.92. 11 lines, $8.5k over PO, and nothing in the ERP flags it.</a:t>
-            </a:r>
-            <a:endParaRPr lang="en-US" sz="1400" dirty="0"/>
-          </a:p>
-          <a:p>
-            <a:pPr marL="342900" indent="-342900">
-              <a:spcAft>
-                <a:spcPts val="600"/>
-              </a:spcAft>
-              <a:buSzPct val="100000"/>
-              <a:buChar char="•"/>
-            </a:pPr>
-            <a:r>
-              <a:rPr lang="en-US" sz="1400" b="1" dirty="0">
-                <a:solidFill>
-                  <a:srgbClr val="1F2A33"/>
-                </a:solidFill>
-                <a:latin typeface="Calibri" pitchFamily="34" charset="0"/>
-                <a:ea typeface="Calibri" pitchFamily="34" charset="-122"/>
-                <a:cs typeface="Calibri" pitchFamily="34" charset="-120"/>
-              </a:rPr>
-              <a:t>Short-ships left open: </a:t>
-            </a:r>
-            <a:pPr indent="0" marL="0">
-              <a:spcAft>
-                <a:spcPts val="600"/>
-              </a:spcAft>
-              <a:buNone/>
-            </a:pPr>
-            <a:r>
-              <a:rPr lang="en-US" sz="1400" dirty="0">
-                <a:solidFill>
-                  <a:srgbClr val="1F2A33"/>
-                </a:solidFill>
-                <a:latin typeface="Calibri" pitchFamily="34" charset="0"/>
-                <a:ea typeface="Calibri" pitchFamily="34" charset="-122"/>
-                <a:cs typeface="Calibri" pitchFamily="34" charset="-120"/>
-              </a:rPr>
-              <a:t>8 balances, $77k, the largest past-due exposure of any vendor (oldest 215 days).</a:t>
-            </a:r>
-            <a:endParaRPr lang="en-US" sz="1400" dirty="0"/>
-          </a:p>
-          <a:p>
-            <a:pPr marL="342900" indent="-342900">
-              <a:spcAft>
-                <a:spcPts val="600"/>
-              </a:spcAft>
-              <a:buSzPct val="100000"/>
-              <a:buChar char="•"/>
-            </a:pPr>
-            <a:r>
-              <a:rPr lang="en-US" sz="1400" b="1" dirty="0">
-                <a:solidFill>
-                  <a:srgbClr val="1F2A33"/>
-                </a:solidFill>
-                <a:latin typeface="Calibri" pitchFamily="34" charset="0"/>
-                <a:ea typeface="Calibri" pitchFamily="34" charset="-122"/>
-                <a:cs typeface="Calibri" pitchFamily="34" charset="-120"/>
-              </a:rPr>
-              <a:t>Same pattern this week: </a:t>
-            </a:r>
-            <a:pPr indent="0" marL="0">
-              <a:spcAft>
-                <a:spcPts val="600"/>
-              </a:spcAft>
-              <a:buNone/>
-            </a:pPr>
-            <a:r>
-              <a:rPr lang="en-US" sz="1400" dirty="0">
-                <a:solidFill>
-                  <a:srgbClr val="1F2A33"/>
-                </a:solidFill>
-                <a:latin typeface="Calibri" pitchFamily="34" charset="0"/>
-                <a:ea typeface="Calibri" pitchFamily="34" charset="-122"/>
-                <a:cs typeface="Calibri" pitchFamily="34" charset="-120"/>
-              </a:rPr>
-              <a:t>a dropped line, a 75-pc short and a +2.3% price on its acknowledgments.</a:t>
-            </a:r>
-            <a:endParaRPr lang="en-US" sz="1400" dirty="0"/>
-          </a:p>
-        </p:txBody>
-      </p:sp>
-      <p:sp>
-        <p:nvSpPr>
-          <p:cNvPr id="9" name="Shape 7"/>
-          <p:cNvSpPr/>
-          <p:nvPr/>
-        </p:nvSpPr>
-        <p:spPr>
-          <a:xfrm>
-            <a:off x="6583680" y="1508760"/>
-            <a:ext cx="5059375" cy="1051560"/>
-          </a:xfrm>
-          <a:prstGeom prst="roundRect">
-            <a:avLst>
-              <a:gd name="adj" fmla="val 6957"/>
-            </a:avLst>
-          </a:prstGeom>
-          <a:solidFill>
-            <a:srgbClr val="EEF2F5"/>
-          </a:solidFill>
-          <a:ln w="12700">
-            <a:solidFill>
-              <a:srgbClr val="EEF2F5"/>
-            </a:solidFill>
-            <a:prstDash val="solid"/>
-          </a:ln>
-        </p:spPr>
-      </p:sp>
-      <p:sp>
-        <p:nvSpPr>
-          <p:cNvPr id="10" name="Shape 8"/>
-          <p:cNvSpPr/>
-          <p:nvPr/>
-        </p:nvSpPr>
-        <p:spPr>
-          <a:xfrm>
-            <a:off x="6784848" y="1691640"/>
-            <a:ext cx="182880" cy="182880"/>
-          </a:xfrm>
-          <a:prstGeom prst="ellipse">
-            <a:avLst/>
-          </a:prstGeom>
-          <a:solidFill>
-            <a:srgbClr val="C98A06"/>
-          </a:solidFill>
-          <a:ln w="12700">
-            <a:solidFill>
-              <a:srgbClr val="C98A06"/>
-            </a:solidFill>
-            <a:prstDash val="solid"/>
-          </a:ln>
-        </p:spPr>
-      </p:sp>
-      <p:sp>
-        <p:nvSpPr>
-          <p:cNvPr id="11" name="Text 9"/>
-          <p:cNvSpPr txBox="1"/>
-          <p:nvPr/>
-        </p:nvSpPr>
-        <p:spPr>
-          <a:xfrm>
-            <a:off x="7086600" y="1600200"/>
-            <a:ext cx="4373575" cy="347472"/>
-          </a:xfrm>
-          <a:prstGeom prst="rect">
-            <a:avLst/>
-          </a:prstGeom>
-          <a:noFill/>
-          <a:ln/>
-        </p:spPr>
-        <p:txBody>
-          <a:bodyPr wrap="square" lIns="0" tIns="0" rIns="0" bIns="0" rtlCol="0" anchor="ctr"/>
-          <a:lstStyle/>
-          <a:p>
-            <a:pPr indent="0" marL="0">
-              <a:buNone/>
-            </a:pPr>
-            <a:r>
-              <a:rPr lang="en-US" sz="1400" b="1" dirty="0">
-                <a:solidFill>
-                  <a:srgbClr val="1F2A33"/>
-                </a:solidFill>
-                <a:latin typeface="Calibri" pitchFamily="34" charset="0"/>
-                <a:ea typeface="Calibri" pitchFamily="34" charset="-122"/>
-                <a:cs typeface="Calibri" pitchFamily="34" charset="-120"/>
-              </a:rPr>
-              <a:t>Heritage Cold Heading</a:t>
-            </a:r>
-            <a:endParaRPr lang="en-US" sz="1400" dirty="0"/>
-          </a:p>
-        </p:txBody>
-      </p:sp>
-      <p:sp>
-        <p:nvSpPr>
-          <p:cNvPr id="12" name="Text 10"/>
-          <p:cNvSpPr txBox="1"/>
-          <p:nvPr/>
-        </p:nvSpPr>
-        <p:spPr>
-          <a:xfrm>
-            <a:off x="7086600" y="1929384"/>
-            <a:ext cx="4373575" cy="594360"/>
-          </a:xfrm>
-          <a:prstGeom prst="rect">
-            <a:avLst/>
-          </a:prstGeom>
-          <a:noFill/>
-          <a:ln/>
-        </p:spPr>
-        <p:txBody>
-          <a:bodyPr wrap="square" lIns="0" tIns="0" rIns="0" bIns="0" rtlCol="0" anchor="t"/>
-          <a:lstStyle/>
-          <a:p>
-            <a:pPr indent="0" marL="0">
-              <a:buNone/>
-            </a:pPr>
-            <a:r>
-              <a:rPr lang="en-US" sz="1200" dirty="0">
-                <a:solidFill>
-                  <a:srgbClr val="4E5D6A"/>
-                </a:solidFill>
-                <a:latin typeface="Calibri" pitchFamily="34" charset="0"/>
-                <a:ea typeface="Calibri" pitchFamily="34" charset="-122"/>
-                <a:cs typeface="Calibri" pitchFamily="34" charset="-120"/>
-              </a:rPr>
-              <a:t>72% on time; 60% of promises after need date. Delays short (median 3 days). 10 short-ship balances open.</a:t>
-            </a:r>
-            <a:endParaRPr lang="en-US" sz="1200" dirty="0"/>
-          </a:p>
-        </p:txBody>
-      </p:sp>
-      <p:sp>
-        <p:nvSpPr>
-          <p:cNvPr id="13" name="Shape 11"/>
-          <p:cNvSpPr/>
-          <p:nvPr/>
-        </p:nvSpPr>
-        <p:spPr>
-          <a:xfrm>
-            <a:off x="6583680" y="2697480"/>
-            <a:ext cx="5059375" cy="1051560"/>
-          </a:xfrm>
-          <a:prstGeom prst="roundRect">
-            <a:avLst>
-              <a:gd name="adj" fmla="val 6957"/>
-            </a:avLst>
-          </a:prstGeom>
-          <a:solidFill>
-            <a:srgbClr val="EEF2F5"/>
-          </a:solidFill>
-          <a:ln w="12700">
-            <a:solidFill>
-              <a:srgbClr val="EEF2F5"/>
-            </a:solidFill>
-            <a:prstDash val="solid"/>
-          </a:ln>
-        </p:spPr>
-      </p:sp>
-      <p:sp>
-        <p:nvSpPr>
-          <p:cNvPr id="14" name="Shape 12"/>
-          <p:cNvSpPr/>
-          <p:nvPr/>
-        </p:nvSpPr>
-        <p:spPr>
-          <a:xfrm>
-            <a:off x="6784848" y="2880360"/>
-            <a:ext cx="182880" cy="182880"/>
-          </a:xfrm>
-          <a:prstGeom prst="ellipse">
-            <a:avLst/>
-          </a:prstGeom>
-          <a:solidFill>
-            <a:srgbClr val="C98A06"/>
-          </a:solidFill>
-          <a:ln w="12700">
-            <a:solidFill>
-              <a:srgbClr val="C98A06"/>
-            </a:solidFill>
-            <a:prstDash val="solid"/>
-          </a:ln>
-        </p:spPr>
-      </p:sp>
-      <p:sp>
-        <p:nvSpPr>
-          <p:cNvPr id="15" name="Text 13"/>
-          <p:cNvSpPr txBox="1"/>
-          <p:nvPr/>
-        </p:nvSpPr>
-        <p:spPr>
-          <a:xfrm>
-            <a:off x="7086600" y="2788920"/>
-            <a:ext cx="4373575" cy="347472"/>
-          </a:xfrm>
-          <a:prstGeom prst="rect">
-            <a:avLst/>
-          </a:prstGeom>
-          <a:noFill/>
-          <a:ln/>
-        </p:spPr>
-        <p:txBody>
-          <a:bodyPr wrap="square" lIns="0" tIns="0" rIns="0" bIns="0" rtlCol="0" anchor="ctr"/>
-          <a:lstStyle/>
-          <a:p>
-            <a:pPr indent="0" marL="0">
-              <a:buNone/>
-            </a:pPr>
-            <a:r>
-              <a:rPr lang="en-US" sz="1400" b="1" dirty="0">
-                <a:solidFill>
-                  <a:srgbClr val="1F2A33"/>
-                </a:solidFill>
-                <a:latin typeface="Calibri" pitchFamily="34" charset="0"/>
-                <a:ea typeface="Calibri" pitchFamily="34" charset="-122"/>
-                <a:cs typeface="Calibri" pitchFamily="34" charset="-120"/>
-              </a:rPr>
-              <a:t>Liberty Surface Finishing</a:t>
-            </a:r>
-            <a:endParaRPr lang="en-US" sz="1400" dirty="0"/>
-          </a:p>
-        </p:txBody>
-      </p:sp>
-      <p:sp>
-        <p:nvSpPr>
-          <p:cNvPr id="16" name="Text 14"/>
-          <p:cNvSpPr txBox="1"/>
-          <p:nvPr/>
-        </p:nvSpPr>
-        <p:spPr>
-          <a:xfrm>
-            <a:off x="7086600" y="3118104"/>
-            <a:ext cx="4373575" cy="594360"/>
-          </a:xfrm>
-          <a:prstGeom prst="rect">
-            <a:avLst/>
-          </a:prstGeom>
-          <a:noFill/>
-          <a:ln/>
-        </p:spPr>
-        <p:txBody>
-          <a:bodyPr wrap="square" lIns="0" tIns="0" rIns="0" bIns="0" rtlCol="0" anchor="t"/>
-          <a:lstStyle/>
-          <a:p>
-            <a:pPr indent="0" marL="0">
-              <a:buNone/>
-            </a:pPr>
-            <a:r>
-              <a:rPr lang="en-US" sz="1200" dirty="0">
-                <a:solidFill>
-                  <a:srgbClr val="4E5D6A"/>
-                </a:solidFill>
-                <a:latin typeface="Calibri" pitchFamily="34" charset="0"/>
-                <a:ea typeface="Calibri" pitchFamily="34" charset="-122"/>
-                <a:cs typeface="Calibri" pitchFamily="34" charset="-120"/>
-              </a:rPr>
-              <a:t>95% → 87% on time, but not significant (p=0.13) and misses are 1-3 days. Watch, don't call.</a:t>
-            </a:r>
-            <a:endParaRPr lang="en-US" sz="1200" dirty="0"/>
-          </a:p>
-        </p:txBody>
-      </p:sp>
-      <p:sp>
-        <p:nvSpPr>
-          <p:cNvPr id="17" name="Shape 15"/>
-          <p:cNvSpPr/>
-          <p:nvPr/>
-        </p:nvSpPr>
-        <p:spPr>
-          <a:xfrm>
-            <a:off x="6583680" y="3886200"/>
-            <a:ext cx="5059375" cy="1051560"/>
-          </a:xfrm>
-          <a:prstGeom prst="roundRect">
-            <a:avLst>
-              <a:gd name="adj" fmla="val 6957"/>
-            </a:avLst>
-          </a:prstGeom>
-          <a:solidFill>
-            <a:srgbClr val="EEF2F5"/>
-          </a:solidFill>
-          <a:ln w="12700">
-            <a:solidFill>
-              <a:srgbClr val="EEF2F5"/>
-            </a:solidFill>
-            <a:prstDash val="solid"/>
-          </a:ln>
-        </p:spPr>
-      </p:sp>
-      <p:sp>
-        <p:nvSpPr>
-          <p:cNvPr id="18" name="Shape 16"/>
-          <p:cNvSpPr/>
-          <p:nvPr/>
-        </p:nvSpPr>
-        <p:spPr>
-          <a:xfrm>
-            <a:off x="6784848" y="4069080"/>
-            <a:ext cx="182880" cy="182880"/>
-          </a:xfrm>
-          <a:prstGeom prst="ellipse">
-            <a:avLst/>
-          </a:prstGeom>
-          <a:solidFill>
-            <a:srgbClr val="C98A06"/>
-          </a:solidFill>
-          <a:ln w="12700">
-            <a:solidFill>
-              <a:srgbClr val="C98A06"/>
-            </a:solidFill>
-            <a:prstDash val="solid"/>
-          </a:ln>
-        </p:spPr>
-      </p:sp>
-      <p:sp>
-        <p:nvSpPr>
-          <p:cNvPr id="19" name="Text 17"/>
-          <p:cNvSpPr txBox="1"/>
-          <p:nvPr/>
-        </p:nvSpPr>
-        <p:spPr>
-          <a:xfrm>
-            <a:off x="7086600" y="3977640"/>
-            <a:ext cx="4373575" cy="347472"/>
-          </a:xfrm>
-          <a:prstGeom prst="rect">
-            <a:avLst/>
-          </a:prstGeom>
-          <a:noFill/>
-          <a:ln/>
-        </p:spPr>
-        <p:txBody>
-          <a:bodyPr wrap="square" lIns="0" tIns="0" rIns="0" bIns="0" rtlCol="0" anchor="ctr"/>
-          <a:lstStyle/>
-          <a:p>
-            <a:pPr indent="0" marL="0">
-              <a:buNone/>
-            </a:pPr>
-            <a:r>
-              <a:rPr lang="en-US" sz="1400" b="1" dirty="0">
-                <a:solidFill>
-                  <a:srgbClr val="1F2A33"/>
-                </a:solidFill>
-                <a:latin typeface="Calibri" pitchFamily="34" charset="0"/>
-                <a:ea typeface="Calibri" pitchFamily="34" charset="-122"/>
-                <a:cs typeface="Calibri" pitchFamily="34" charset="-120"/>
-              </a:rPr>
-              <a:t>Ostmark Werkzeug (DE)</a:t>
-            </a:r>
-            <a:endParaRPr lang="en-US" sz="1400" dirty="0"/>
-          </a:p>
-        </p:txBody>
-      </p:sp>
-      <p:sp>
-        <p:nvSpPr>
-          <p:cNvPr id="20" name="Text 18"/>
-          <p:cNvSpPr txBox="1"/>
-          <p:nvPr/>
-        </p:nvSpPr>
-        <p:spPr>
-          <a:xfrm>
-            <a:off x="7086600" y="4306824"/>
-            <a:ext cx="4373575" cy="594360"/>
-          </a:xfrm>
-          <a:prstGeom prst="rect">
-            <a:avLst/>
-          </a:prstGeom>
-          <a:noFill/>
-          <a:ln/>
-        </p:spPr>
-        <p:txBody>
-          <a:bodyPr wrap="square" lIns="0" tIns="0" rIns="0" bIns="0" rtlCol="0" anchor="t"/>
-          <a:lstStyle/>
-          <a:p>
-            <a:pPr indent="0" marL="0">
-              <a:buNone/>
-            </a:pPr>
-            <a:r>
-              <a:rPr lang="en-US" sz="1200" dirty="0">
-                <a:solidFill>
-                  <a:srgbClr val="4E5D6A"/>
-                </a:solidFill>
-                <a:latin typeface="Calibri" pitchFamily="34" charset="0"/>
-                <a:ea typeface="Calibri" pitchFamily="34" charset="-122"/>
-                <a:cs typeface="Calibri" pitchFamily="34" charset="-120"/>
-              </a:rPr>
-              <a:t>69% on time, never &gt;6 days late. Open die set PO-4500050027: $31k, due 05/15, nothing received; ack says only "KW 20-22".</a:t>
-            </a:r>
-            <a:endParaRPr lang="en-US" sz="1200" dirty="0"/>
-          </a:p>
-        </p:txBody>
-      </p:sp>
-      <p:sp>
-        <p:nvSpPr>
-          <p:cNvPr id="21" name="Shape 19"/>
-          <p:cNvSpPr/>
-          <p:nvPr/>
-        </p:nvSpPr>
-        <p:spPr>
-          <a:xfrm>
-            <a:off x="6583680" y="5074920"/>
-            <a:ext cx="5059375" cy="1051560"/>
-          </a:xfrm>
-          <a:prstGeom prst="roundRect">
-            <a:avLst>
-              <a:gd name="adj" fmla="val 6957"/>
-            </a:avLst>
-          </a:prstGeom>
-          <a:solidFill>
-            <a:srgbClr val="EEF2F5"/>
-          </a:solidFill>
-          <a:ln w="12700">
-            <a:solidFill>
-              <a:srgbClr val="EEF2F5"/>
-            </a:solidFill>
-            <a:prstDash val="solid"/>
-          </a:ln>
-        </p:spPr>
-      </p:sp>
-      <p:sp>
-        <p:nvSpPr>
-          <p:cNvPr id="22" name="Shape 20"/>
-          <p:cNvSpPr/>
-          <p:nvPr/>
-        </p:nvSpPr>
-        <p:spPr>
-          <a:xfrm>
-            <a:off x="6784848" y="5257800"/>
-            <a:ext cx="182880" cy="182880"/>
-          </a:xfrm>
-          <a:prstGeom prst="ellipse">
-            <a:avLst/>
-          </a:prstGeom>
-          <a:solidFill>
-            <a:srgbClr val="2E7D4F"/>
-          </a:solidFill>
-          <a:ln w="12700">
-            <a:solidFill>
-              <a:srgbClr val="2E7D4F"/>
-            </a:solidFill>
-            <a:prstDash val="solid"/>
-          </a:ln>
-        </p:spPr>
-      </p:sp>
-      <p:sp>
-        <p:nvSpPr>
-          <p:cNvPr id="23" name="Text 21"/>
-          <p:cNvSpPr txBox="1"/>
-          <p:nvPr/>
-        </p:nvSpPr>
-        <p:spPr>
-          <a:xfrm>
-            <a:off x="7086600" y="5166360"/>
-            <a:ext cx="4373575" cy="347472"/>
-          </a:xfrm>
-          <a:prstGeom prst="rect">
-            <a:avLst/>
-          </a:prstGeom>
-          <a:noFill/>
-          <a:ln/>
-        </p:spPr>
-        <p:txBody>
-          <a:bodyPr wrap="square" lIns="0" tIns="0" rIns="0" bIns="0" rtlCol="0" anchor="ctr"/>
-          <a:lstStyle/>
-          <a:p>
-            <a:pPr indent="0" marL="0">
-              <a:buNone/>
-            </a:pPr>
-            <a:r>
-              <a:rPr lang="en-US" sz="1400" b="1" dirty="0">
-                <a:solidFill>
-                  <a:srgbClr val="1F2A33"/>
-                </a:solidFill>
-                <a:latin typeface="Calibri" pitchFamily="34" charset="0"/>
-                <a:ea typeface="Calibri" pitchFamily="34" charset="-122"/>
-                <a:cs typeface="Calibri" pitchFamily="34" charset="-120"/>
-              </a:rPr>
-              <a:t>QuickShip Industrial</a:t>
-            </a:r>
-            <a:endParaRPr lang="en-US" sz="1400" dirty="0"/>
-          </a:p>
-        </p:txBody>
-      </p:sp>
-      <p:sp>
-        <p:nvSpPr>
-          <p:cNvPr id="24" name="Text 22"/>
-          <p:cNvSpPr txBox="1"/>
-          <p:nvPr/>
-        </p:nvSpPr>
-        <p:spPr>
-          <a:xfrm>
-            <a:off x="7086600" y="5495544"/>
-            <a:ext cx="4373575" cy="594360"/>
-          </a:xfrm>
-          <a:prstGeom prst="rect">
-            <a:avLst/>
-          </a:prstGeom>
-          <a:noFill/>
-          <a:ln/>
-        </p:spPr>
-        <p:txBody>
-          <a:bodyPr wrap="square" lIns="0" tIns="0" rIns="0" bIns="0" rtlCol="0" anchor="t"/>
-          <a:lstStyle/>
-          <a:p>
-            <a:pPr indent="0" marL="0">
-              <a:buNone/>
-            </a:pPr>
-            <a:r>
-              <a:rPr lang="en-US" sz="1200" dirty="0">
-                <a:solidFill>
-                  <a:srgbClr val="4E5D6A"/>
-                </a:solidFill>
-                <a:latin typeface="Calibri" pitchFamily="34" charset="0"/>
-                <a:ea typeface="Calibri" pitchFamily="34" charset="-122"/>
-                <a:cs typeface="Calibri" pitchFamily="34" charset="-120"/>
-              </a:rPr>
-              <a:t>The benchmark: 99% on time, but only $13k of spend.</a:t>
-            </a:r>
-            <a:endParaRPr lang="en-US" sz="1200" dirty="0"/>
           </a:p>
         </p:txBody>
       </p:sp>
@@ -21610,7 +20672,7 @@
                 <a:ea typeface="Calibri" pitchFamily="34" charset="-122"/>
                 <a:cs typeface="Calibri" pitchFamily="34" charset="-120"/>
               </a:rPr>
-              <a:t>APPENDIX · THE PAST AND FUTURE PROBLEM</a:t>
+              <a:t>APPENDIX · SECOND CALL AND WATCH LIST</a:t>
             </a:r>
             <a:endParaRPr lang="en-US" sz="1200" dirty="0"/>
           </a:p>
@@ -21649,7 +20711,7 @@
                 <a:ea typeface="Cambria" pitchFamily="34" charset="-122"/>
                 <a:cs typeface="Cambria" pitchFamily="34" charset="-120"/>
               </a:rPr>
-              <a:t>A desk that remembers: tomorrow's list shows only what's new</a:t>
+              <a:t>Call Apex second, about money not delivery; watch three others</a:t>
             </a:r>
             <a:endParaRPr lang="en-US" sz="2400" dirty="0"/>
           </a:p>
@@ -21694,9 +20756,919 @@
           </a:p>
         </p:txBody>
       </p:sp>
+      <p:sp>
+        <p:nvSpPr>
+          <p:cNvPr id="5" name="Shape 3"/>
+          <p:cNvSpPr/>
+          <p:nvPr/>
+        </p:nvSpPr>
+        <p:spPr>
+          <a:xfrm>
+            <a:off x="548640" y="1508760"/>
+            <a:ext cx="5669280" cy="4663440"/>
+          </a:xfrm>
+          <a:prstGeom prst="roundRect">
+            <a:avLst>
+              <a:gd name="adj" fmla="val 1569"/>
+            </a:avLst>
+          </a:prstGeom>
+          <a:solidFill>
+            <a:srgbClr val="FBE9DF"/>
+          </a:solidFill>
+          <a:ln w="12700">
+            <a:solidFill>
+              <a:srgbClr val="FBE9DF"/>
+            </a:solidFill>
+            <a:prstDash val="solid"/>
+          </a:ln>
+        </p:spPr>
+      </p:sp>
+      <p:sp>
+        <p:nvSpPr>
+          <p:cNvPr id="6" name="Text 4"/>
+          <p:cNvSpPr txBox="1"/>
+          <p:nvPr/>
+        </p:nvSpPr>
+        <p:spPr>
+          <a:xfrm>
+            <a:off x="822960" y="1691640"/>
+            <a:ext cx="5120640" cy="365760"/>
+          </a:xfrm>
+          <a:prstGeom prst="rect">
+            <a:avLst/>
+          </a:prstGeom>
+          <a:noFill/>
+          <a:ln/>
+        </p:spPr>
+        <p:txBody>
+          <a:bodyPr wrap="square" lIns="0" tIns="0" rIns="0" bIns="0" rtlCol="0" anchor="ctr"/>
+          <a:lstStyle/>
+          <a:p>
+            <a:pPr indent="0" marL="0">
+              <a:buNone/>
+            </a:pPr>
+            <a:r>
+              <a:rPr lang="en-US" sz="1800" b="1" dirty="0">
+                <a:solidFill>
+                  <a:srgbClr val="1F2A33"/>
+                </a:solidFill>
+                <a:latin typeface="Cambria" pitchFamily="34" charset="0"/>
+                <a:ea typeface="Cambria" pitchFamily="34" charset="-122"/>
+                <a:cs typeface="Cambria" pitchFamily="34" charset="-120"/>
+              </a:rPr>
+              <a:t>Apex Bar &amp; Tube: a commercial call</a:t>
+            </a:r>
+            <a:endParaRPr lang="en-US" sz="1800" dirty="0"/>
+          </a:p>
+        </p:txBody>
+      </p:sp>
+      <p:sp>
+        <p:nvSpPr>
+          <p:cNvPr id="7" name="Text 5"/>
+          <p:cNvSpPr txBox="1"/>
+          <p:nvPr/>
+        </p:nvSpPr>
+        <p:spPr>
+          <a:xfrm>
+            <a:off x="822960" y="2103120"/>
+            <a:ext cx="5120640" cy="548640"/>
+          </a:xfrm>
+          <a:prstGeom prst="rect">
+            <a:avLst/>
+          </a:prstGeom>
+          <a:noFill/>
+          <a:ln/>
+        </p:spPr>
+        <p:txBody>
+          <a:bodyPr wrap="square" lIns="0" tIns="0" rIns="0" bIns="0" rtlCol="0" anchor="ctr"/>
+          <a:lstStyle/>
+          <a:p>
+            <a:pPr indent="0" marL="0">
+              <a:buNone/>
+            </a:pPr>
+            <a:r>
+              <a:rPr lang="en-US" sz="1300" dirty="0">
+                <a:solidFill>
+                  <a:srgbClr val="4E5D6A"/>
+                </a:solidFill>
+                <a:latin typeface="Calibri" pitchFamily="34" charset="0"/>
+                <a:ea typeface="Calibri" pitchFamily="34" charset="-122"/>
+                <a:cs typeface="Calibri" pitchFamily="34" charset="-120"/>
+              </a:rPr>
+              <a:t>85% of received value ($23.98M). 87% on time, and when late the median is 1 day.</a:t>
+            </a:r>
+            <a:endParaRPr lang="en-US" sz="1300" dirty="0"/>
+          </a:p>
+        </p:txBody>
+      </p:sp>
+      <p:sp>
+        <p:nvSpPr>
+          <p:cNvPr id="8" name="Text 6"/>
+          <p:cNvSpPr txBox="1"/>
+          <p:nvPr/>
+        </p:nvSpPr>
+        <p:spPr>
+          <a:xfrm>
+            <a:off x="822960" y="2743200"/>
+            <a:ext cx="5120640" cy="3291840"/>
+          </a:xfrm>
+          <a:prstGeom prst="rect">
+            <a:avLst/>
+          </a:prstGeom>
+          <a:noFill/>
+          <a:ln/>
+        </p:spPr>
+        <p:txBody>
+          <a:bodyPr wrap="square" lIns="635" tIns="635" rIns="635" bIns="635" rtlCol="0" anchor="t"/>
+          <a:lstStyle/>
+          <a:p>
+            <a:pPr marL="342900" indent="-342900">
+              <a:spcAft>
+                <a:spcPts val="600"/>
+              </a:spcAft>
+              <a:buSzPct val="100000"/>
+              <a:buChar char="•"/>
+            </a:pPr>
+            <a:r>
+              <a:rPr lang="en-US" sz="1400" b="1" dirty="0">
+                <a:solidFill>
+                  <a:srgbClr val="1F2A33"/>
+                </a:solidFill>
+                <a:latin typeface="Calibri" pitchFamily="34" charset="0"/>
+                <a:ea typeface="Calibri" pitchFamily="34" charset="-122"/>
+                <a:cs typeface="Calibri" pitchFamily="34" charset="-120"/>
+              </a:rPr>
+              <a:t>Price creep: </a:t>
+            </a:r>
+            <a:pPr indent="0" marL="0">
+              <a:spcAft>
+                <a:spcPts val="600"/>
+              </a:spcAft>
+              <a:buNone/>
+            </a:pPr>
+            <a:r>
+              <a:rPr lang="en-US" sz="1400" dirty="0">
+                <a:solidFill>
+                  <a:srgbClr val="1F2A33"/>
+                </a:solidFill>
+                <a:latin typeface="Calibri" pitchFamily="34" charset="0"/>
+                <a:ea typeface="Calibri" pitchFamily="34" charset="-122"/>
+                <a:cs typeface="Calibri" pitchFamily="34" charset="-120"/>
+              </a:rPr>
+              <a:t>BAR-CRES-250 confirmed +1% from February and +2% from March, while every PO stayed at $3.92. 11 lines, $8.5k over PO, and nothing in the ERP flags it.</a:t>
+            </a:r>
+            <a:endParaRPr lang="en-US" sz="1400" dirty="0"/>
+          </a:p>
+          <a:p>
+            <a:pPr marL="342900" indent="-342900">
+              <a:spcAft>
+                <a:spcPts val="600"/>
+              </a:spcAft>
+              <a:buSzPct val="100000"/>
+              <a:buChar char="•"/>
+            </a:pPr>
+            <a:r>
+              <a:rPr lang="en-US" sz="1400" b="1" dirty="0">
+                <a:solidFill>
+                  <a:srgbClr val="1F2A33"/>
+                </a:solidFill>
+                <a:latin typeface="Calibri" pitchFamily="34" charset="0"/>
+                <a:ea typeface="Calibri" pitchFamily="34" charset="-122"/>
+                <a:cs typeface="Calibri" pitchFamily="34" charset="-120"/>
+              </a:rPr>
+              <a:t>Short-ships left open: </a:t>
+            </a:r>
+            <a:pPr indent="0" marL="0">
+              <a:spcAft>
+                <a:spcPts val="600"/>
+              </a:spcAft>
+              <a:buNone/>
+            </a:pPr>
+            <a:r>
+              <a:rPr lang="en-US" sz="1400" dirty="0">
+                <a:solidFill>
+                  <a:srgbClr val="1F2A33"/>
+                </a:solidFill>
+                <a:latin typeface="Calibri" pitchFamily="34" charset="0"/>
+                <a:ea typeface="Calibri" pitchFamily="34" charset="-122"/>
+                <a:cs typeface="Calibri" pitchFamily="34" charset="-120"/>
+              </a:rPr>
+              <a:t>8 balances, $77k, the largest past-due exposure of any vendor (oldest 215 days).</a:t>
+            </a:r>
+            <a:endParaRPr lang="en-US" sz="1400" dirty="0"/>
+          </a:p>
+          <a:p>
+            <a:pPr marL="342900" indent="-342900">
+              <a:spcAft>
+                <a:spcPts val="600"/>
+              </a:spcAft>
+              <a:buSzPct val="100000"/>
+              <a:buChar char="•"/>
+            </a:pPr>
+            <a:r>
+              <a:rPr lang="en-US" sz="1400" b="1" dirty="0">
+                <a:solidFill>
+                  <a:srgbClr val="1F2A33"/>
+                </a:solidFill>
+                <a:latin typeface="Calibri" pitchFamily="34" charset="0"/>
+                <a:ea typeface="Calibri" pitchFamily="34" charset="-122"/>
+                <a:cs typeface="Calibri" pitchFamily="34" charset="-120"/>
+              </a:rPr>
+              <a:t>Same pattern this week: </a:t>
+            </a:r>
+            <a:pPr indent="0" marL="0">
+              <a:spcAft>
+                <a:spcPts val="600"/>
+              </a:spcAft>
+              <a:buNone/>
+            </a:pPr>
+            <a:r>
+              <a:rPr lang="en-US" sz="1400" dirty="0">
+                <a:solidFill>
+                  <a:srgbClr val="1F2A33"/>
+                </a:solidFill>
+                <a:latin typeface="Calibri" pitchFamily="34" charset="0"/>
+                <a:ea typeface="Calibri" pitchFamily="34" charset="-122"/>
+                <a:cs typeface="Calibri" pitchFamily="34" charset="-120"/>
+              </a:rPr>
+              <a:t>a dropped line, a 75-pc short and a +2.3% price on its acknowledgments.</a:t>
+            </a:r>
+            <a:endParaRPr lang="en-US" sz="1400" dirty="0"/>
+          </a:p>
+        </p:txBody>
+      </p:sp>
+      <p:sp>
+        <p:nvSpPr>
+          <p:cNvPr id="9" name="Shape 7"/>
+          <p:cNvSpPr/>
+          <p:nvPr/>
+        </p:nvSpPr>
+        <p:spPr>
+          <a:xfrm>
+            <a:off x="6583680" y="1508760"/>
+            <a:ext cx="5059375" cy="1051560"/>
+          </a:xfrm>
+          <a:prstGeom prst="roundRect">
+            <a:avLst>
+              <a:gd name="adj" fmla="val 6957"/>
+            </a:avLst>
+          </a:prstGeom>
+          <a:solidFill>
+            <a:srgbClr val="EEF2F5"/>
+          </a:solidFill>
+          <a:ln w="12700">
+            <a:solidFill>
+              <a:srgbClr val="EEF2F5"/>
+            </a:solidFill>
+            <a:prstDash val="solid"/>
+          </a:ln>
+        </p:spPr>
+      </p:sp>
+      <p:sp>
+        <p:nvSpPr>
+          <p:cNvPr id="10" name="Shape 8"/>
+          <p:cNvSpPr/>
+          <p:nvPr/>
+        </p:nvSpPr>
+        <p:spPr>
+          <a:xfrm>
+            <a:off x="6784848" y="1691640"/>
+            <a:ext cx="182880" cy="182880"/>
+          </a:xfrm>
+          <a:prstGeom prst="ellipse">
+            <a:avLst/>
+          </a:prstGeom>
+          <a:solidFill>
+            <a:srgbClr val="C98A06"/>
+          </a:solidFill>
+          <a:ln w="12700">
+            <a:solidFill>
+              <a:srgbClr val="C98A06"/>
+            </a:solidFill>
+            <a:prstDash val="solid"/>
+          </a:ln>
+        </p:spPr>
+      </p:sp>
+      <p:sp>
+        <p:nvSpPr>
+          <p:cNvPr id="11" name="Text 9"/>
+          <p:cNvSpPr txBox="1"/>
+          <p:nvPr/>
+        </p:nvSpPr>
+        <p:spPr>
+          <a:xfrm>
+            <a:off x="7086600" y="1600200"/>
+            <a:ext cx="4373575" cy="347472"/>
+          </a:xfrm>
+          <a:prstGeom prst="rect">
+            <a:avLst/>
+          </a:prstGeom>
+          <a:noFill/>
+          <a:ln/>
+        </p:spPr>
+        <p:txBody>
+          <a:bodyPr wrap="square" lIns="0" tIns="0" rIns="0" bIns="0" rtlCol="0" anchor="ctr"/>
+          <a:lstStyle/>
+          <a:p>
+            <a:pPr indent="0" marL="0">
+              <a:buNone/>
+            </a:pPr>
+            <a:r>
+              <a:rPr lang="en-US" sz="1400" b="1" dirty="0">
+                <a:solidFill>
+                  <a:srgbClr val="1F2A33"/>
+                </a:solidFill>
+                <a:latin typeface="Calibri" pitchFamily="34" charset="0"/>
+                <a:ea typeface="Calibri" pitchFamily="34" charset="-122"/>
+                <a:cs typeface="Calibri" pitchFamily="34" charset="-120"/>
+              </a:rPr>
+              <a:t>Heritage Cold Heading</a:t>
+            </a:r>
+            <a:endParaRPr lang="en-US" sz="1400" dirty="0"/>
+          </a:p>
+        </p:txBody>
+      </p:sp>
+      <p:sp>
+        <p:nvSpPr>
+          <p:cNvPr id="12" name="Text 10"/>
+          <p:cNvSpPr txBox="1"/>
+          <p:nvPr/>
+        </p:nvSpPr>
+        <p:spPr>
+          <a:xfrm>
+            <a:off x="7086600" y="1929384"/>
+            <a:ext cx="4373575" cy="594360"/>
+          </a:xfrm>
+          <a:prstGeom prst="rect">
+            <a:avLst/>
+          </a:prstGeom>
+          <a:noFill/>
+          <a:ln/>
+        </p:spPr>
+        <p:txBody>
+          <a:bodyPr wrap="square" lIns="0" tIns="0" rIns="0" bIns="0" rtlCol="0" anchor="t"/>
+          <a:lstStyle/>
+          <a:p>
+            <a:pPr indent="0" marL="0">
+              <a:buNone/>
+            </a:pPr>
+            <a:r>
+              <a:rPr lang="en-US" sz="1200" dirty="0">
+                <a:solidFill>
+                  <a:srgbClr val="4E5D6A"/>
+                </a:solidFill>
+                <a:latin typeface="Calibri" pitchFamily="34" charset="0"/>
+                <a:ea typeface="Calibri" pitchFamily="34" charset="-122"/>
+                <a:cs typeface="Calibri" pitchFamily="34" charset="-120"/>
+              </a:rPr>
+              <a:t>72% on time; 60% of promises after need date. Delays short (median 3 days). 10 short-ship balances open.</a:t>
+            </a:r>
+            <a:endParaRPr lang="en-US" sz="1200" dirty="0"/>
+          </a:p>
+        </p:txBody>
+      </p:sp>
+      <p:sp>
+        <p:nvSpPr>
+          <p:cNvPr id="13" name="Shape 11"/>
+          <p:cNvSpPr/>
+          <p:nvPr/>
+        </p:nvSpPr>
+        <p:spPr>
+          <a:xfrm>
+            <a:off x="6583680" y="2697480"/>
+            <a:ext cx="5059375" cy="1051560"/>
+          </a:xfrm>
+          <a:prstGeom prst="roundRect">
+            <a:avLst>
+              <a:gd name="adj" fmla="val 6957"/>
+            </a:avLst>
+          </a:prstGeom>
+          <a:solidFill>
+            <a:srgbClr val="EEF2F5"/>
+          </a:solidFill>
+          <a:ln w="12700">
+            <a:solidFill>
+              <a:srgbClr val="EEF2F5"/>
+            </a:solidFill>
+            <a:prstDash val="solid"/>
+          </a:ln>
+        </p:spPr>
+      </p:sp>
+      <p:sp>
+        <p:nvSpPr>
+          <p:cNvPr id="14" name="Shape 12"/>
+          <p:cNvSpPr/>
+          <p:nvPr/>
+        </p:nvSpPr>
+        <p:spPr>
+          <a:xfrm>
+            <a:off x="6784848" y="2880360"/>
+            <a:ext cx="182880" cy="182880"/>
+          </a:xfrm>
+          <a:prstGeom prst="ellipse">
+            <a:avLst/>
+          </a:prstGeom>
+          <a:solidFill>
+            <a:srgbClr val="C98A06"/>
+          </a:solidFill>
+          <a:ln w="12700">
+            <a:solidFill>
+              <a:srgbClr val="C98A06"/>
+            </a:solidFill>
+            <a:prstDash val="solid"/>
+          </a:ln>
+        </p:spPr>
+      </p:sp>
+      <p:sp>
+        <p:nvSpPr>
+          <p:cNvPr id="15" name="Text 13"/>
+          <p:cNvSpPr txBox="1"/>
+          <p:nvPr/>
+        </p:nvSpPr>
+        <p:spPr>
+          <a:xfrm>
+            <a:off x="7086600" y="2788920"/>
+            <a:ext cx="4373575" cy="347472"/>
+          </a:xfrm>
+          <a:prstGeom prst="rect">
+            <a:avLst/>
+          </a:prstGeom>
+          <a:noFill/>
+          <a:ln/>
+        </p:spPr>
+        <p:txBody>
+          <a:bodyPr wrap="square" lIns="0" tIns="0" rIns="0" bIns="0" rtlCol="0" anchor="ctr"/>
+          <a:lstStyle/>
+          <a:p>
+            <a:pPr indent="0" marL="0">
+              <a:buNone/>
+            </a:pPr>
+            <a:r>
+              <a:rPr lang="en-US" sz="1400" b="1" dirty="0">
+                <a:solidFill>
+                  <a:srgbClr val="1F2A33"/>
+                </a:solidFill>
+                <a:latin typeface="Calibri" pitchFamily="34" charset="0"/>
+                <a:ea typeface="Calibri" pitchFamily="34" charset="-122"/>
+                <a:cs typeface="Calibri" pitchFamily="34" charset="-120"/>
+              </a:rPr>
+              <a:t>Liberty Surface Finishing</a:t>
+            </a:r>
+            <a:endParaRPr lang="en-US" sz="1400" dirty="0"/>
+          </a:p>
+        </p:txBody>
+      </p:sp>
+      <p:sp>
+        <p:nvSpPr>
+          <p:cNvPr id="16" name="Text 14"/>
+          <p:cNvSpPr txBox="1"/>
+          <p:nvPr/>
+        </p:nvSpPr>
+        <p:spPr>
+          <a:xfrm>
+            <a:off x="7086600" y="3118104"/>
+            <a:ext cx="4373575" cy="594360"/>
+          </a:xfrm>
+          <a:prstGeom prst="rect">
+            <a:avLst/>
+          </a:prstGeom>
+          <a:noFill/>
+          <a:ln/>
+        </p:spPr>
+        <p:txBody>
+          <a:bodyPr wrap="square" lIns="0" tIns="0" rIns="0" bIns="0" rtlCol="0" anchor="t"/>
+          <a:lstStyle/>
+          <a:p>
+            <a:pPr indent="0" marL="0">
+              <a:buNone/>
+            </a:pPr>
+            <a:r>
+              <a:rPr lang="en-US" sz="1200" dirty="0">
+                <a:solidFill>
+                  <a:srgbClr val="4E5D6A"/>
+                </a:solidFill>
+                <a:latin typeface="Calibri" pitchFamily="34" charset="0"/>
+                <a:ea typeface="Calibri" pitchFamily="34" charset="-122"/>
+                <a:cs typeface="Calibri" pitchFamily="34" charset="-120"/>
+              </a:rPr>
+              <a:t>95% → 87% on time, but not significant (p=0.13) and misses are 1-3 days. Watch, don't call.</a:t>
+            </a:r>
+            <a:endParaRPr lang="en-US" sz="1200" dirty="0"/>
+          </a:p>
+        </p:txBody>
+      </p:sp>
+      <p:sp>
+        <p:nvSpPr>
+          <p:cNvPr id="17" name="Shape 15"/>
+          <p:cNvSpPr/>
+          <p:nvPr/>
+        </p:nvSpPr>
+        <p:spPr>
+          <a:xfrm>
+            <a:off x="6583680" y="3886200"/>
+            <a:ext cx="5059375" cy="1051560"/>
+          </a:xfrm>
+          <a:prstGeom prst="roundRect">
+            <a:avLst>
+              <a:gd name="adj" fmla="val 6957"/>
+            </a:avLst>
+          </a:prstGeom>
+          <a:solidFill>
+            <a:srgbClr val="EEF2F5"/>
+          </a:solidFill>
+          <a:ln w="12700">
+            <a:solidFill>
+              <a:srgbClr val="EEF2F5"/>
+            </a:solidFill>
+            <a:prstDash val="solid"/>
+          </a:ln>
+        </p:spPr>
+      </p:sp>
+      <p:sp>
+        <p:nvSpPr>
+          <p:cNvPr id="18" name="Shape 16"/>
+          <p:cNvSpPr/>
+          <p:nvPr/>
+        </p:nvSpPr>
+        <p:spPr>
+          <a:xfrm>
+            <a:off x="6784848" y="4069080"/>
+            <a:ext cx="182880" cy="182880"/>
+          </a:xfrm>
+          <a:prstGeom prst="ellipse">
+            <a:avLst/>
+          </a:prstGeom>
+          <a:solidFill>
+            <a:srgbClr val="C98A06"/>
+          </a:solidFill>
+          <a:ln w="12700">
+            <a:solidFill>
+              <a:srgbClr val="C98A06"/>
+            </a:solidFill>
+            <a:prstDash val="solid"/>
+          </a:ln>
+        </p:spPr>
+      </p:sp>
+      <p:sp>
+        <p:nvSpPr>
+          <p:cNvPr id="19" name="Text 17"/>
+          <p:cNvSpPr txBox="1"/>
+          <p:nvPr/>
+        </p:nvSpPr>
+        <p:spPr>
+          <a:xfrm>
+            <a:off x="7086600" y="3977640"/>
+            <a:ext cx="4373575" cy="347472"/>
+          </a:xfrm>
+          <a:prstGeom prst="rect">
+            <a:avLst/>
+          </a:prstGeom>
+          <a:noFill/>
+          <a:ln/>
+        </p:spPr>
+        <p:txBody>
+          <a:bodyPr wrap="square" lIns="0" tIns="0" rIns="0" bIns="0" rtlCol="0" anchor="ctr"/>
+          <a:lstStyle/>
+          <a:p>
+            <a:pPr indent="0" marL="0">
+              <a:buNone/>
+            </a:pPr>
+            <a:r>
+              <a:rPr lang="en-US" sz="1400" b="1" dirty="0">
+                <a:solidFill>
+                  <a:srgbClr val="1F2A33"/>
+                </a:solidFill>
+                <a:latin typeface="Calibri" pitchFamily="34" charset="0"/>
+                <a:ea typeface="Calibri" pitchFamily="34" charset="-122"/>
+                <a:cs typeface="Calibri" pitchFamily="34" charset="-120"/>
+              </a:rPr>
+              <a:t>Ostmark Werkzeug (DE)</a:t>
+            </a:r>
+            <a:endParaRPr lang="en-US" sz="1400" dirty="0"/>
+          </a:p>
+        </p:txBody>
+      </p:sp>
+      <p:sp>
+        <p:nvSpPr>
+          <p:cNvPr id="20" name="Text 18"/>
+          <p:cNvSpPr txBox="1"/>
+          <p:nvPr/>
+        </p:nvSpPr>
+        <p:spPr>
+          <a:xfrm>
+            <a:off x="7086600" y="4306824"/>
+            <a:ext cx="4373575" cy="594360"/>
+          </a:xfrm>
+          <a:prstGeom prst="rect">
+            <a:avLst/>
+          </a:prstGeom>
+          <a:noFill/>
+          <a:ln/>
+        </p:spPr>
+        <p:txBody>
+          <a:bodyPr wrap="square" lIns="0" tIns="0" rIns="0" bIns="0" rtlCol="0" anchor="t"/>
+          <a:lstStyle/>
+          <a:p>
+            <a:pPr indent="0" marL="0">
+              <a:buNone/>
+            </a:pPr>
+            <a:r>
+              <a:rPr lang="en-US" sz="1200" dirty="0">
+                <a:solidFill>
+                  <a:srgbClr val="4E5D6A"/>
+                </a:solidFill>
+                <a:latin typeface="Calibri" pitchFamily="34" charset="0"/>
+                <a:ea typeface="Calibri" pitchFamily="34" charset="-122"/>
+                <a:cs typeface="Calibri" pitchFamily="34" charset="-120"/>
+              </a:rPr>
+              <a:t>69% on time, never &gt;6 days late. Open die set PO-4500050027: $31k, due 05/15, nothing received; ack says only "KW 20-22".</a:t>
+            </a:r>
+            <a:endParaRPr lang="en-US" sz="1200" dirty="0"/>
+          </a:p>
+        </p:txBody>
+      </p:sp>
+      <p:sp>
+        <p:nvSpPr>
+          <p:cNvPr id="21" name="Shape 19"/>
+          <p:cNvSpPr/>
+          <p:nvPr/>
+        </p:nvSpPr>
+        <p:spPr>
+          <a:xfrm>
+            <a:off x="6583680" y="5074920"/>
+            <a:ext cx="5059375" cy="1051560"/>
+          </a:xfrm>
+          <a:prstGeom prst="roundRect">
+            <a:avLst>
+              <a:gd name="adj" fmla="val 6957"/>
+            </a:avLst>
+          </a:prstGeom>
+          <a:solidFill>
+            <a:srgbClr val="EEF2F5"/>
+          </a:solidFill>
+          <a:ln w="12700">
+            <a:solidFill>
+              <a:srgbClr val="EEF2F5"/>
+            </a:solidFill>
+            <a:prstDash val="solid"/>
+          </a:ln>
+        </p:spPr>
+      </p:sp>
+      <p:sp>
+        <p:nvSpPr>
+          <p:cNvPr id="22" name="Shape 20"/>
+          <p:cNvSpPr/>
+          <p:nvPr/>
+        </p:nvSpPr>
+        <p:spPr>
+          <a:xfrm>
+            <a:off x="6784848" y="5257800"/>
+            <a:ext cx="182880" cy="182880"/>
+          </a:xfrm>
+          <a:prstGeom prst="ellipse">
+            <a:avLst/>
+          </a:prstGeom>
+          <a:solidFill>
+            <a:srgbClr val="2E7D4F"/>
+          </a:solidFill>
+          <a:ln w="12700">
+            <a:solidFill>
+              <a:srgbClr val="2E7D4F"/>
+            </a:solidFill>
+            <a:prstDash val="solid"/>
+          </a:ln>
+        </p:spPr>
+      </p:sp>
+      <p:sp>
+        <p:nvSpPr>
+          <p:cNvPr id="23" name="Text 21"/>
+          <p:cNvSpPr txBox="1"/>
+          <p:nvPr/>
+        </p:nvSpPr>
+        <p:spPr>
+          <a:xfrm>
+            <a:off x="7086600" y="5166360"/>
+            <a:ext cx="4373575" cy="347472"/>
+          </a:xfrm>
+          <a:prstGeom prst="rect">
+            <a:avLst/>
+          </a:prstGeom>
+          <a:noFill/>
+          <a:ln/>
+        </p:spPr>
+        <p:txBody>
+          <a:bodyPr wrap="square" lIns="0" tIns="0" rIns="0" bIns="0" rtlCol="0" anchor="ctr"/>
+          <a:lstStyle/>
+          <a:p>
+            <a:pPr indent="0" marL="0">
+              <a:buNone/>
+            </a:pPr>
+            <a:r>
+              <a:rPr lang="en-US" sz="1400" b="1" dirty="0">
+                <a:solidFill>
+                  <a:srgbClr val="1F2A33"/>
+                </a:solidFill>
+                <a:latin typeface="Calibri" pitchFamily="34" charset="0"/>
+                <a:ea typeface="Calibri" pitchFamily="34" charset="-122"/>
+                <a:cs typeface="Calibri" pitchFamily="34" charset="-120"/>
+              </a:rPr>
+              <a:t>QuickShip Industrial</a:t>
+            </a:r>
+            <a:endParaRPr lang="en-US" sz="1400" dirty="0"/>
+          </a:p>
+        </p:txBody>
+      </p:sp>
+      <p:sp>
+        <p:nvSpPr>
+          <p:cNvPr id="24" name="Text 22"/>
+          <p:cNvSpPr txBox="1"/>
+          <p:nvPr/>
+        </p:nvSpPr>
+        <p:spPr>
+          <a:xfrm>
+            <a:off x="7086600" y="5495544"/>
+            <a:ext cx="4373575" cy="594360"/>
+          </a:xfrm>
+          <a:prstGeom prst="rect">
+            <a:avLst/>
+          </a:prstGeom>
+          <a:noFill/>
+          <a:ln/>
+        </p:spPr>
+        <p:txBody>
+          <a:bodyPr wrap="square" lIns="0" tIns="0" rIns="0" bIns="0" rtlCol="0" anchor="t"/>
+          <a:lstStyle/>
+          <a:p>
+            <a:pPr indent="0" marL="0">
+              <a:buNone/>
+            </a:pPr>
+            <a:r>
+              <a:rPr lang="en-US" sz="1200" dirty="0">
+                <a:solidFill>
+                  <a:srgbClr val="4E5D6A"/>
+                </a:solidFill>
+                <a:latin typeface="Calibri" pitchFamily="34" charset="0"/>
+                <a:ea typeface="Calibri" pitchFamily="34" charset="-122"/>
+                <a:cs typeface="Calibri" pitchFamily="34" charset="-120"/>
+              </a:rPr>
+              <a:t>The benchmark: 99% on time, but only $13k of spend.</a:t>
+            </a:r>
+            <a:endParaRPr lang="en-US" sz="1200" dirty="0"/>
+          </a:p>
+        </p:txBody>
+      </p:sp>
+    </p:spTree>
+  </p:cSld>
+  <p:clrMapOvr>
+    <a:masterClrMapping/>
+  </p:clrMapOvr>
+</p:sld>
+</file>
+
+<file path=ppt/slides/slide23.xml><?xml version="1.0" encoding="utf-8"?>
+<p:sld xmlns:a="http://schemas.openxmlformats.org/drawingml/2006/main" xmlns:r="http://schemas.openxmlformats.org/officeDocument/2006/relationships" xmlns:p="http://schemas.openxmlformats.org/presentationml/2006/main">
+  <p:cSld name="Slide 23">
+    <p:bg>
+      <p:bgPr>
+        <a:solidFill>
+          <a:srgbClr val="FFFFFF"/>
+        </a:solidFill>
+      </p:bgPr>
+    </p:bg>
+    <p:spTree>
+      <p:nvGrpSpPr>
+        <p:cNvPr id="1" name=""/>
+        <p:cNvGrpSpPr/>
+        <p:nvPr/>
+      </p:nvGrpSpPr>
+      <p:grpSpPr>
+        <a:xfrm>
+          <a:off x="0" y="0"/>
+          <a:ext cx="0" cy="0"/>
+          <a:chOff x="0" y="0"/>
+          <a:chExt cx="0" cy="0"/>
+        </a:xfrm>
+      </p:grpSpPr>
+      <p:sp>
+        <p:nvSpPr>
+          <p:cNvPr id="2" name="Text 0"/>
+          <p:cNvSpPr txBox="1"/>
+          <p:nvPr/>
+        </p:nvSpPr>
+        <p:spPr>
+          <a:xfrm>
+            <a:off x="548640" y="320040"/>
+            <a:ext cx="8229600" cy="274320"/>
+          </a:xfrm>
+          <a:prstGeom prst="rect">
+            <a:avLst/>
+          </a:prstGeom>
+          <a:noFill/>
+          <a:ln/>
+        </p:spPr>
+        <p:txBody>
+          <a:bodyPr wrap="square" lIns="0" tIns="0" rIns="0" bIns="0" rtlCol="0" anchor="ctr"/>
+          <a:lstStyle/>
+          <a:p>
+            <a:pPr indent="0" marL="0">
+              <a:buNone/>
+            </a:pPr>
+            <a:r>
+              <a:rPr lang="en-US" sz="1200" b="1" spc="200" kern="0" dirty="0">
+                <a:solidFill>
+                  <a:srgbClr val="D9622B"/>
+                </a:solidFill>
+                <a:latin typeface="Calibri" pitchFamily="34" charset="0"/>
+                <a:ea typeface="Calibri" pitchFamily="34" charset="-122"/>
+                <a:cs typeface="Calibri" pitchFamily="34" charset="-120"/>
+              </a:rPr>
+              <a:t>APPENDIX · THE PAST AND FUTURE PROBLEM</a:t>
+            </a:r>
+            <a:endParaRPr lang="en-US" sz="1200" dirty="0"/>
+          </a:p>
+        </p:txBody>
+      </p:sp>
+      <p:sp>
+        <p:nvSpPr>
+          <p:cNvPr id="3" name="Text 1"/>
+          <p:cNvSpPr txBox="1"/>
+          <p:nvPr/>
+        </p:nvSpPr>
+        <p:spPr>
+          <a:xfrm>
+            <a:off x="548640" y="594360"/>
+            <a:ext cx="11094415" cy="685800"/>
+          </a:xfrm>
+          <a:prstGeom prst="rect">
+            <a:avLst/>
+          </a:prstGeom>
+          <a:noFill/>
+          <a:ln/>
+        </p:spPr>
+        <p:txBody>
+          <a:bodyPr wrap="square" lIns="0" tIns="0" rIns="0" bIns="0" rtlCol="0" anchor="t"/>
+          <a:lstStyle/>
+          <a:p>
+            <a:pPr indent="0" marL="0">
+              <a:buNone/>
+            </a:pPr>
+            <a:r>
+              <a:rPr lang="en-US" sz="2400" b="1" dirty="0">
+                <a:solidFill>
+                  <a:srgbClr val="1F2A33"/>
+                </a:solidFill>
+                <a:latin typeface="Cambria" pitchFamily="34" charset="0"/>
+                <a:ea typeface="Cambria" pitchFamily="34" charset="-122"/>
+                <a:cs typeface="Cambria" pitchFamily="34" charset="-120"/>
+              </a:rPr>
+              <a:t>A desk that remembers: tomorrow's list shows only what's new</a:t>
+            </a:r>
+            <a:endParaRPr lang="en-US" sz="2400" dirty="0"/>
+          </a:p>
+        </p:txBody>
+      </p:sp>
+      <p:sp>
+        <p:nvSpPr>
+          <p:cNvPr id="4" name="Text 2"/>
+          <p:cNvSpPr txBox="1"/>
+          <p:nvPr/>
+        </p:nvSpPr>
+        <p:spPr>
+          <a:xfrm>
+            <a:off x="7985455" y="6473952"/>
+            <a:ext cx="3657600" cy="228600"/>
+          </a:xfrm>
+          <a:prstGeom prst="rect">
+            <a:avLst/>
+          </a:prstGeom>
+          <a:noFill/>
+          <a:ln/>
+        </p:spPr>
+        <p:txBody>
+          <a:bodyPr wrap="square" lIns="0" tIns="0" rIns="0" bIns="0" rtlCol="0" anchor="ctr"/>
+          <a:lstStyle/>
+          <a:p>
+            <a:pPr algn="r" indent="0" marL="0">
+              <a:buNone/>
+            </a:pPr>
+            <a:r>
+              <a:rPr lang="en-US" sz="900" dirty="0">
+                <a:solidFill>
+                  <a:srgbClr val="7D8B97"/>
+                </a:solidFill>
+                <a:latin typeface="Calibri" pitchFamily="34" charset="0"/>
+                <a:ea typeface="Calibri" pitchFamily="34" charset="-122"/>
+                <a:cs typeface="Calibri" pitchFamily="34" charset="-120"/>
+              </a:rPr>
+              <a:t>Beacon Fasteners · FDE case   23</a:t>
+            </a:r>
+            <a:endParaRPr lang="en-US" sz="900" dirty="0"/>
+          </a:p>
+        </p:txBody>
+      </p:sp>
       <p:graphicFrame>
         <p:nvGraphicFramePr>
-          <p:cNvPr id="23" name="Table 0"/>
+          <p:cNvPr id="24" name="Table 0"/>
           <p:cNvGraphicFramePr>
             <a:graphicFrameLocks noGrp="1"/>
           </p:cNvGraphicFramePr>
@@ -22867,7 +22839,7 @@
                 <a:ea typeface="Calibri" pitchFamily="34" charset="-122"/>
                 <a:cs typeface="Calibri" pitchFamily="34" charset="-120"/>
               </a:rPr>
-              <a:t>59 automated tests. TestDayTwo runs day 1 on the real PDFs, applies Lisa's Excel edits, then feeds a revised vendor PDF on day 2 and checks each row above.</a:t>
+              <a:t>70 automated tests. TestDayTwo runs day 1 on the real PDFs, applies Lisa's Excel edits, then feeds a revised vendor PDF on day 2 and checks each row above.</a:t>
             </a:r>
             <a:endParaRPr lang="en-US" sz="1300" dirty="0"/>
           </a:p>
@@ -22881,9 +22853,9 @@
 </p:sld>
 </file>
 
-<file path=ppt/slides/slide23.xml><?xml version="1.0" encoding="utf-8"?>
+<file path=ppt/slides/slide24.xml><?xml version="1.0" encoding="utf-8"?>
 <p:sld xmlns:a="http://schemas.openxmlformats.org/drawingml/2006/main" xmlns:r="http://schemas.openxmlformats.org/officeDocument/2006/relationships" xmlns:p="http://schemas.openxmlformats.org/presentationml/2006/main">
-  <p:cSld name="Slide 23">
+  <p:cSld name="Slide 24">
     <p:bg>
       <p:bgPr>
         <a:solidFill>
@@ -23016,7 +22988,7 @@
                 <a:ea typeface="Calibri" pitchFamily="34" charset="-122"/>
                 <a:cs typeface="Calibri" pitchFamily="34" charset="-120"/>
               </a:rPr>
-              <a:t>Beacon Fasteners · FDE case   23</a:t>
+              <a:t>Beacon Fasteners · FDE case   24</a:t>
             </a:r>
             <a:endParaRPr lang="en-US" sz="900" dirty="0"/>
           </a:p>
@@ -25806,7 +25778,7 @@
                 <a:ea typeface="Calibri" pitchFamily="34" charset="-122"/>
                 <a:cs typeface="Calibri" pitchFamily="34" charset="-120"/>
               </a:rPr>
-              <a:t>Action List first, worst first: what happened and what to do, in words. Lisa types Yes in Done? and adds Notes; the next run reads them back.</a:t>
+              <a:t>Worst first, in words. Lisa's Done and Notes carry over to tomorrow.</a:t>
             </a:r>
             <a:endParaRPr lang="en-US" sz="1300" dirty="0"/>
           </a:p>
@@ -25909,7 +25881,7 @@
                 <a:ea typeface="Calibri" pitchFamily="34" charset="-122"/>
                 <a:cs typeface="Calibri" pitchFamily="34" charset="-120"/>
               </a:rPr>
-              <a:t>Same engine as a small browser app</a:t>
+              <a:t>Optional browser app, same engine</a:t>
             </a:r>
             <a:endParaRPr lang="en-US" sz="1600" dirty="0"/>
           </a:p>
@@ -25948,7 +25920,7 @@
                 <a:ea typeface="Calibri" pitchFamily="34" charset="-122"/>
                 <a:cs typeface="Calibri" pitchFamily="34" charset="-120"/>
               </a:rPr>
-              <a:t>Drag in the day's PDFs; approve a new vendor part number in one click; see each scan next to what was read from it. Optional.</a:t>
+              <a:t>Drag in PDFs, approve part numbers in one click, see scans beside what was read.</a:t>
             </a:r>
             <a:endParaRPr lang="en-US" sz="1300" dirty="0"/>
           </a:p>
@@ -26090,7 +26062,7 @@
                 <a:ea typeface="Calibri" pitchFamily="34" charset="-122"/>
                 <a:cs typeface="Calibri" pitchFamily="34" charset="-120"/>
               </a:rPr>
-              <a:t>Duplicate PDFs are ignored, corrected acknowledgments close items on their own, the first promise date is kept.</a:t>
+              <a:t>Re-sent PDFs ignored; corrections close items; the first promise is kept.</a:t>
             </a:r>
             <a:endParaRPr lang="en-US" sz="1300" dirty="0"/>
           </a:p>
@@ -26193,7 +26165,7 @@
                 <a:ea typeface="Calibri" pitchFamily="34" charset="-122"/>
                 <a:cs typeface="Calibri" pitchFamily="34" charset="-120"/>
               </a:rPr>
-              <a:t>Deterministic first</a:t>
+              <a:t>Deterministic first, AI as fallback</a:t>
             </a:r>
             <a:endParaRPr lang="en-US" sz="1600" dirty="0"/>
           </a:p>
@@ -26232,7 +26204,7 @@
                 <a:ea typeface="Calibri" pitchFamily="34" charset="-122"/>
                 <a:cs typeface="Calibri" pitchFamily="34" charset="-120"/>
               </a:rPr>
-              <a:t>6 stable vendor layouts, so one small parser each. The AI reader is only a fallback for unknown layouts and is off by default.</a:t>
+              <a:t>One small parser per layout. Claude reads only what no parser can.</a:t>
             </a:r>
             <a:endParaRPr lang="en-US" sz="1300" dirty="0"/>
           </a:p>
@@ -26341,7 +26313,7 @@
                 <a:ea typeface="Calibri" pitchFamily="34" charset="-122"/>
                 <a:cs typeface="Calibri" pitchFamily="34" charset="-120"/>
               </a:rPr>
-              <a:t>Never guesses silently. </a:t>
+              <a:t>Never guesses silently: </a:t>
             </a:r>
             <a:pPr indent="0" marL="0">
               <a:spcAft>
@@ -26358,7 +26330,7 @@
                 <a:ea typeface="Calibri" pitchFamily="34" charset="-122"/>
                 <a:cs typeface="Calibri" pitchFamily="34" charset="-120"/>
               </a:rPr>
-              <a:t>Anything not matched on an identifier goes to Review Required.</a:t>
+              <a:t>uncertain matches go to review.</a:t>
             </a:r>
             <a:endParaRPr lang="en-US" sz="1400" dirty="0"/>
           </a:p>
@@ -26379,7 +26351,7 @@
                 <a:ea typeface="Calibri" pitchFamily="34" charset="-122"/>
                 <a:cs typeface="Calibri" pitchFamily="34" charset="-120"/>
               </a:rPr>
-              <a:t>Says "possible dropped line", </a:t>
+              <a:t>"Possible" dropped line, </a:t>
             </a:r>
             <a:pPr indent="0" marL="0">
               <a:spcAft>
@@ -26396,7 +26368,7 @@
                 <a:ea typeface="Calibri" pitchFamily="34" charset="-122"/>
                 <a:cs typeface="Calibri" pitchFamily="34" charset="-120"/>
               </a:rPr>
-              <a:t>not "dropped": the vendor may confirm it separately.</a:t>
+              <a:t>not "dropped".</a:t>
             </a:r>
             <a:endParaRPr lang="en-US" sz="1400" dirty="0"/>
           </a:p>
@@ -26417,7 +26389,7 @@
                 <a:ea typeface="Calibri" pitchFamily="34" charset="-122"/>
                 <a:cs typeface="Calibri" pitchFamily="34" charset="-120"/>
               </a:rPr>
-              <a:t>Never sends anything. </a:t>
+              <a:t>Never sends anything: </a:t>
             </a:r>
             <a:pPr indent="0" marL="0">
               <a:spcAft>
@@ -26434,7 +26406,7 @@
                 <a:ea typeface="Calibri" pitchFamily="34" charset="-122"/>
                 <a:cs typeface="Calibri" pitchFamily="34" charset="-120"/>
               </a:rPr>
-              <a:t>Vendor emails are drafts; Lisa owns the relationship.</a:t>
+              <a:t>emails are drafts.</a:t>
             </a:r>
             <a:endParaRPr lang="en-US" sz="1400" dirty="0"/>
           </a:p>
@@ -26455,7 +26427,7 @@
                 <a:ea typeface="Calibri" pitchFamily="34" charset="-122"/>
                 <a:cs typeface="Calibri" pitchFamily="34" charset="-120"/>
               </a:rPr>
-              <a:t>Every PDF gets a status </a:t>
+              <a:t>Every PDF and PO line </a:t>
             </a:r>
             <a:pPr indent="0" marL="0">
               <a:spcAft>
@@ -26472,7 +26444,7 @@
                 <a:ea typeface="Calibri" pitchFamily="34" charset="-122"/>
                 <a:cs typeface="Calibri" pitchFamily="34" charset="-120"/>
               </a:rPr>
-              <a:t>and every open PO line is accounted for (checked on each run).</a:t>
+              <a:t>accounted for, every run.</a:t>
             </a:r>
             <a:endParaRPr lang="en-US" sz="1400" dirty="0"/>
           </a:p>
@@ -26760,7 +26732,7 @@
                 <a:ea typeface="Calibri" pitchFamily="34" charset="-122"/>
                 <a:cs typeface="Calibri" pitchFamily="34" charset="-120"/>
               </a:rPr>
-              <a:t>AI fallback: off</a:t>
+              <a:t>Claude: optional fallback</a:t>
             </a:r>
             <a:endParaRPr lang="en-US" sz="1200" dirty="0"/>
           </a:p>
